--- a/Thesis-Defense/defense/200112_Defense_Presentation.pptx
+++ b/Thesis-Defense/defense/200112_Defense_Presentation.pptx
@@ -25188,7 +25188,7 @@
         <p:spPr>
           <a:xfrm>
             <a:off x="320040" y="2450592"/>
-            <a:ext cx="3931920" cy="2450592"/>
+            <a:ext cx="4096096" cy="2450592"/>
           </a:xfrm>
           <a:prstGeom prst="rect">
             <a:avLst/>
@@ -25227,7 +25227,7 @@
         <p:spPr>
           <a:xfrm>
             <a:off x="411480" y="2523744"/>
-            <a:ext cx="3749040" cy="2304288"/>
+            <a:ext cx="3931920" cy="2304288"/>
           </a:xfrm>
           <a:prstGeom prst="rect">
             <a:avLst/>
@@ -25242,7 +25242,7 @@
         </p:nvSpPr>
         <p:spPr>
           <a:xfrm>
-            <a:off x="320040" y="4846320"/>
+            <a:off x="320040" y="4898275"/>
             <a:ext cx="3931920" cy="228600"/>
           </a:xfrm>
           <a:prstGeom prst="rect">
@@ -25284,8 +25284,8 @@
         </p:nvSpPr>
         <p:spPr>
           <a:xfrm>
-            <a:off x="4835929" y="2456272"/>
-            <a:ext cx="3931920" cy="2450592"/>
+            <a:off x="4571584" y="2456272"/>
+            <a:ext cx="4196265" cy="2450592"/>
           </a:xfrm>
           <a:prstGeom prst="rect">
             <a:avLst/>
@@ -25323,35 +25323,35 @@
           <p:nvPr>
             <p:extLst>
               <p:ext uri="{D42A27DB-BD31-4B8C-83A1-F6EECF244321}">
-                <p14:modId xmlns:p14="http://schemas.microsoft.com/office/powerpoint/2010/main" val="3203760791"/>
+                <p14:modId xmlns:p14="http://schemas.microsoft.com/office/powerpoint/2010/main" val="1002821963"/>
               </p:ext>
             </p:extLst>
           </p:nvPr>
         </p:nvGraphicFramePr>
         <p:xfrm>
-          <a:off x="4998028" y="2615185"/>
-          <a:ext cx="3551613" cy="2252050"/>
+          <a:off x="4663024" y="2563230"/>
+          <a:ext cx="3982212" cy="2371580"/>
         </p:xfrm>
         <a:graphic>
           <a:graphicData uri="http://schemas.openxmlformats.org/drawingml/2006/table">
             <a:tbl>
               <a:tblPr/>
               <a:tblGrid>
-                <a:gridCol w="1183871">
+                <a:gridCol w="1031194">
                   <a:extLst>
                     <a:ext uri="{9D8B030D-6E8A-4147-A177-3AD203B41FA5}">
                       <a16:colId xmlns:a16="http://schemas.microsoft.com/office/drawing/2014/main" val="2678028350"/>
                     </a:ext>
                   </a:extLst>
                 </a:gridCol>
-                <a:gridCol w="1183871">
+                <a:gridCol w="1392382">
                   <a:extLst>
                     <a:ext uri="{9D8B030D-6E8A-4147-A177-3AD203B41FA5}">
                       <a16:colId xmlns:a16="http://schemas.microsoft.com/office/drawing/2014/main" val="366697314"/>
                     </a:ext>
                   </a:extLst>
                 </a:gridCol>
-                <a:gridCol w="1183871">
+                <a:gridCol w="1558636">
                   <a:extLst>
                     <a:ext uri="{9D8B030D-6E8A-4147-A177-3AD203B41FA5}">
                       <a16:colId xmlns:a16="http://schemas.microsoft.com/office/drawing/2014/main" val="2338976362"/>
@@ -25366,7 +25366,7 @@
                     <a:lstStyle/>
                     <a:p>
                       <a:r>
-                        <a:rPr lang="en-US" sz="800" b="1"/>
+                        <a:rPr lang="en-US" sz="1000" b="1" dirty="0"/>
                         <a:t>Direction</a:t>
                       </a:r>
                     </a:p>
@@ -25393,7 +25393,7 @@
                     <a:lstStyle/>
                     <a:p>
                       <a:r>
-                        <a:rPr lang="en-US" sz="800" b="1"/>
+                        <a:rPr lang="en-US" sz="1000" b="1" dirty="0"/>
                         <a:t>Route ID</a:t>
                       </a:r>
                     </a:p>
@@ -25420,7 +25420,7 @@
                     <a:lstStyle/>
                     <a:p>
                       <a:r>
-                        <a:rPr lang="en-US" sz="800" b="1" dirty="0"/>
+                        <a:rPr lang="en-US" sz="1000" b="1" dirty="0"/>
                         <a:t>Edge Sequence</a:t>
                       </a:r>
                     </a:p>
@@ -25454,7 +25454,7 @@
                     <a:lstStyle/>
                     <a:p>
                       <a:r>
-                        <a:rPr lang="en-US" sz="700"/>
+                        <a:rPr lang="en-US" sz="900" dirty="0"/>
                         <a:t>Forward</a:t>
                       </a:r>
                     </a:p>
@@ -25481,7 +25481,7 @@
                     <a:lstStyle/>
                     <a:p>
                       <a:r>
-                        <a:rPr lang="en-US" sz="700"/>
+                        <a:rPr lang="en-US" sz="900"/>
                         <a:t>route1_forward</a:t>
                       </a:r>
                     </a:p>
@@ -25508,7 +25508,7 @@
                     <a:lstStyle/>
                     <a:p>
                       <a:r>
-                        <a:rPr lang="en-US" sz="700"/>
+                        <a:rPr lang="en-US" sz="900"/>
                         <a:t>E0 → E1 → E2 → E3</a:t>
                       </a:r>
                     </a:p>
@@ -25542,7 +25542,7 @@
                     <a:lstStyle/>
                     <a:p>
                       <a:r>
-                        <a:rPr lang="en-US" sz="700" dirty="0"/>
+                        <a:rPr lang="en-US" sz="900" dirty="0"/>
                         <a:t>Forward</a:t>
                       </a:r>
                     </a:p>
@@ -25569,7 +25569,7 @@
                     <a:lstStyle/>
                     <a:p>
                       <a:r>
-                        <a:rPr lang="en-US" sz="700"/>
+                        <a:rPr lang="en-US" sz="900"/>
                         <a:t>route2_forward</a:t>
                       </a:r>
                     </a:p>
@@ -25596,7 +25596,7 @@
                     <a:lstStyle/>
                     <a:p>
                       <a:r>
-                        <a:rPr lang="en-US" sz="700"/>
+                        <a:rPr lang="en-US" sz="900"/>
                         <a:t>E0 → E1 → E9 → E8</a:t>
                       </a:r>
                     </a:p>
@@ -25630,7 +25630,7 @@
                     <a:lstStyle/>
                     <a:p>
                       <a:r>
-                        <a:rPr lang="en-US" sz="700" dirty="0"/>
+                        <a:rPr lang="en-US" sz="900" dirty="0"/>
                         <a:t>Forward</a:t>
                       </a:r>
                     </a:p>
@@ -25657,7 +25657,7 @@
                     <a:lstStyle/>
                     <a:p>
                       <a:r>
-                        <a:rPr lang="en-US" sz="700"/>
+                        <a:rPr lang="en-US" sz="900" dirty="0"/>
                         <a:t>route3_forward</a:t>
                       </a:r>
                     </a:p>
@@ -25684,7 +25684,7 @@
                     <a:lstStyle/>
                     <a:p>
                       <a:r>
-                        <a:rPr lang="en-US" sz="700"/>
+                        <a:rPr lang="en-US" sz="900"/>
                         <a:t>E4 → E5 → E6 → E7 → E8</a:t>
                       </a:r>
                     </a:p>
@@ -25718,7 +25718,7 @@
                     <a:lstStyle/>
                     <a:p>
                       <a:r>
-                        <a:rPr lang="en-US" sz="700"/>
+                        <a:rPr lang="en-US" sz="900"/>
                         <a:t>Forward</a:t>
                       </a:r>
                     </a:p>
@@ -25745,7 +25745,7 @@
                     <a:lstStyle/>
                     <a:p>
                       <a:r>
-                        <a:rPr lang="en-US" sz="700" dirty="0"/>
+                        <a:rPr lang="en-US" sz="900" dirty="0"/>
                         <a:t>route4_forward</a:t>
                       </a:r>
                     </a:p>
@@ -25772,7 +25772,7 @@
                     <a:lstStyle/>
                     <a:p>
                       <a:r>
-                        <a:rPr lang="en-US" sz="700"/>
+                        <a:rPr lang="en-US" sz="900" dirty="0"/>
                         <a:t>E0 → E10 → E7 → E8</a:t>
                       </a:r>
                     </a:p>
@@ -25806,7 +25806,7 @@
                     <a:lstStyle/>
                     <a:p>
                       <a:r>
-                        <a:rPr lang="en-US" sz="700"/>
+                        <a:rPr lang="en-US" sz="900"/>
                         <a:t>Reverse</a:t>
                       </a:r>
                     </a:p>
@@ -25833,7 +25833,7 @@
                     <a:lstStyle/>
                     <a:p>
                       <a:r>
-                        <a:rPr lang="en-US" sz="700"/>
+                        <a:rPr lang="en-US" sz="900"/>
                         <a:t>route1_reverse</a:t>
                       </a:r>
                     </a:p>
@@ -25860,7 +25860,7 @@
                     <a:lstStyle/>
                     <a:p>
                       <a:r>
-                        <a:rPr lang="en-US" sz="700" dirty="0"/>
+                        <a:rPr lang="en-US" sz="900" dirty="0"/>
                         <a:t>-E3 → -E2 → -E1 → -E0</a:t>
                       </a:r>
                     </a:p>
@@ -25894,7 +25894,7 @@
                     <a:lstStyle/>
                     <a:p>
                       <a:r>
-                        <a:rPr lang="en-US" sz="700"/>
+                        <a:rPr lang="en-US" sz="900"/>
                         <a:t>Reverse</a:t>
                       </a:r>
                     </a:p>
@@ -25921,7 +25921,7 @@
                     <a:lstStyle/>
                     <a:p>
                       <a:r>
-                        <a:rPr lang="en-US" sz="700"/>
+                        <a:rPr lang="en-US" sz="900"/>
                         <a:t>route2_reverse</a:t>
                       </a:r>
                     </a:p>
@@ -25948,7 +25948,7 @@
                     <a:lstStyle/>
                     <a:p>
                       <a:r>
-                        <a:rPr lang="en-US" sz="700" dirty="0"/>
+                        <a:rPr lang="en-US" sz="900" dirty="0"/>
                         <a:t>-E8 → -E9 → -E1 → -E0</a:t>
                       </a:r>
                     </a:p>
@@ -25982,7 +25982,7 @@
                     <a:lstStyle/>
                     <a:p>
                       <a:r>
-                        <a:rPr lang="en-US" sz="700"/>
+                        <a:rPr lang="en-US" sz="900"/>
                         <a:t>Reverse</a:t>
                       </a:r>
                     </a:p>
@@ -26009,7 +26009,7 @@
                     <a:lstStyle/>
                     <a:p>
                       <a:r>
-                        <a:rPr lang="en-US" sz="700"/>
+                        <a:rPr lang="en-US" sz="900"/>
                         <a:t>route3_reverse</a:t>
                       </a:r>
                     </a:p>
@@ -26036,7 +26036,7 @@
                     <a:lstStyle/>
                     <a:p>
                       <a:r>
-                        <a:rPr lang="en-US" sz="700"/>
+                        <a:rPr lang="en-US" sz="900"/>
                         <a:t>-E8 → -E7 → -E6 → -E5 → -E4</a:t>
                       </a:r>
                     </a:p>
@@ -26070,7 +26070,7 @@
                     <a:lstStyle/>
                     <a:p>
                       <a:r>
-                        <a:rPr lang="en-US" sz="700"/>
+                        <a:rPr lang="en-US" sz="900" dirty="0"/>
                         <a:t>Reverse</a:t>
                       </a:r>
                     </a:p>
@@ -26097,7 +26097,7 @@
                     <a:lstStyle/>
                     <a:p>
                       <a:r>
-                        <a:rPr lang="en-US" sz="700"/>
+                        <a:rPr lang="en-US" sz="900"/>
                         <a:t>route4_reverse</a:t>
                       </a:r>
                     </a:p>
@@ -26124,7 +26124,7 @@
                     <a:lstStyle/>
                     <a:p>
                       <a:r>
-                        <a:rPr lang="en-US" sz="700" dirty="0"/>
+                        <a:rPr lang="en-US" sz="900" dirty="0"/>
                         <a:t>-E8 → -E7 → -E10 → -E0</a:t>
                       </a:r>
                     </a:p>
@@ -26304,8 +26304,8 @@
         </p:nvSpPr>
         <p:spPr>
           <a:xfrm>
-            <a:off x="320040" y="960120"/>
-            <a:ext cx="8503920" cy="36576"/>
+            <a:off x="320039" y="960120"/>
+            <a:ext cx="8680561" cy="45719"/>
           </a:xfrm>
           <a:prstGeom prst="rect">
             <a:avLst/>
@@ -26323,14 +26323,14 @@
       </p:sp>
       <p:sp>
         <p:nvSpPr>
-          <p:cNvPr id="6" name="Shape 4"/>
-          <p:cNvSpPr/>
-          <p:nvPr/>
-        </p:nvSpPr>
-        <p:spPr>
-          <a:xfrm>
-            <a:off x="320040" y="1115568"/>
-            <a:ext cx="1920240" cy="1143000"/>
+          <p:cNvPr id="26" name="Shape 24"/>
+          <p:cNvSpPr/>
+          <p:nvPr/>
+        </p:nvSpPr>
+        <p:spPr>
+          <a:xfrm>
+            <a:off x="320040" y="1426464"/>
+            <a:ext cx="3931920" cy="3474720"/>
           </a:xfrm>
           <a:prstGeom prst="rect">
             <a:avLst/>
@@ -26355,711 +26355,13 @@
       </p:sp>
       <p:sp>
         <p:nvSpPr>
-          <p:cNvPr id="7" name="Shape 5"/>
-          <p:cNvSpPr/>
-          <p:nvPr/>
-        </p:nvSpPr>
-        <p:spPr>
-          <a:xfrm>
-            <a:off x="320040" y="1115568"/>
-            <a:ext cx="1920240" cy="201168"/>
-          </a:xfrm>
-          <a:prstGeom prst="rect">
-            <a:avLst/>
-          </a:prstGeom>
-          <a:solidFill>
-            <a:srgbClr val="0D7377"/>
-          </a:solidFill>
-          <a:ln w="12700">
-            <a:solidFill>
-              <a:srgbClr val="0D7377"/>
-            </a:solidFill>
-            <a:prstDash val="solid"/>
-          </a:ln>
-        </p:spPr>
-      </p:sp>
-      <p:sp>
-        <p:nvSpPr>
-          <p:cNvPr id="8" name="Text 6"/>
-          <p:cNvSpPr/>
-          <p:nvPr/>
-        </p:nvSpPr>
-        <p:spPr>
-          <a:xfrm>
-            <a:off x="365760" y="1371600"/>
-            <a:ext cx="1828800" cy="566928"/>
-          </a:xfrm>
-          <a:prstGeom prst="rect">
-            <a:avLst/>
-          </a:prstGeom>
-          <a:noFill/>
-          <a:ln/>
-        </p:spPr>
-        <p:txBody>
-          <a:bodyPr wrap="square" lIns="0" tIns="0" rIns="0" bIns="0" rtlCol="0" anchor="ctr"/>
-          <a:lstStyle/>
-          <a:p>
-            <a:pPr marL="0" indent="0" algn="ctr">
-              <a:buNone/>
-            </a:pPr>
-            <a:r>
-              <a:rPr lang="en-US" sz="3200" b="1" dirty="0">
-                <a:solidFill>
-                  <a:srgbClr val="1B3A6B"/>
-                </a:solidFill>
-                <a:latin typeface="Calibri" pitchFamily="34" charset="0"/>
-                <a:ea typeface="Calibri" pitchFamily="34" charset="-122"/>
-                <a:cs typeface="Calibri" pitchFamily="34" charset="-120"/>
-              </a:rPr>
-              <a:t>8,654 m</a:t>
-            </a:r>
-            <a:endParaRPr lang="en-US" sz="3200" dirty="0"/>
-          </a:p>
-        </p:txBody>
-      </p:sp>
-      <p:sp>
-        <p:nvSpPr>
-          <p:cNvPr id="9" name="Text 7"/>
-          <p:cNvSpPr/>
-          <p:nvPr/>
-        </p:nvSpPr>
-        <p:spPr>
-          <a:xfrm>
-            <a:off x="365760" y="1920240"/>
-            <a:ext cx="1828800" cy="292608"/>
-          </a:xfrm>
-          <a:prstGeom prst="rect">
-            <a:avLst/>
-          </a:prstGeom>
-          <a:noFill/>
-          <a:ln/>
-        </p:spPr>
-        <p:txBody>
-          <a:bodyPr wrap="square" lIns="0" tIns="0" rIns="0" bIns="0" rtlCol="0" anchor="ctr"/>
-          <a:lstStyle/>
-          <a:p>
-            <a:pPr marL="0" indent="0" algn="ctr">
-              <a:buNone/>
-            </a:pPr>
-            <a:r>
-              <a:rPr lang="en-US" sz="1000" dirty="0">
-                <a:solidFill>
-                  <a:srgbClr val="64748B"/>
-                </a:solidFill>
-                <a:latin typeface="Calibri" pitchFamily="34" charset="0"/>
-                <a:ea typeface="Calibri" pitchFamily="34" charset="-122"/>
-                <a:cs typeface="Calibri" pitchFamily="34" charset="-120"/>
-              </a:rPr>
-              <a:t>Total Road Network</a:t>
-            </a:r>
-            <a:endParaRPr lang="en-US" sz="1000" dirty="0"/>
-          </a:p>
-        </p:txBody>
-      </p:sp>
-      <p:sp>
-        <p:nvSpPr>
-          <p:cNvPr id="10" name="Shape 8"/>
-          <p:cNvSpPr/>
-          <p:nvPr/>
-        </p:nvSpPr>
-        <p:spPr>
-          <a:xfrm>
-            <a:off x="2075688" y="1115568"/>
-            <a:ext cx="1920240" cy="1143000"/>
-          </a:xfrm>
-          <a:prstGeom prst="rect">
-            <a:avLst/>
-          </a:prstGeom>
-          <a:solidFill>
-            <a:srgbClr val="FFFFFF"/>
-          </a:solidFill>
-          <a:ln w="12700">
-            <a:solidFill>
-              <a:srgbClr val="CBD5E1"/>
-            </a:solidFill>
-            <a:prstDash val="solid"/>
-          </a:ln>
-          <a:effectLst>
-            <a:outerShdw blurRad="76200" dist="25400" dir="8100000" algn="bl" rotWithShape="0">
-              <a:srgbClr val="000000">
-                <a:alpha val="8000"/>
-              </a:srgbClr>
-            </a:outerShdw>
-          </a:effectLst>
-        </p:spPr>
-      </p:sp>
-      <p:sp>
-        <p:nvSpPr>
-          <p:cNvPr id="11" name="Shape 9"/>
-          <p:cNvSpPr/>
-          <p:nvPr/>
-        </p:nvSpPr>
-        <p:spPr>
-          <a:xfrm>
-            <a:off x="2075688" y="1115568"/>
-            <a:ext cx="1920240" cy="201168"/>
-          </a:xfrm>
-          <a:prstGeom prst="rect">
-            <a:avLst/>
-          </a:prstGeom>
-          <a:solidFill>
-            <a:srgbClr val="1B3A6B"/>
-          </a:solidFill>
-          <a:ln w="12700">
-            <a:solidFill>
-              <a:srgbClr val="1B3A6B"/>
-            </a:solidFill>
-            <a:prstDash val="solid"/>
-          </a:ln>
-        </p:spPr>
-      </p:sp>
-      <p:sp>
-        <p:nvSpPr>
-          <p:cNvPr id="12" name="Text 10"/>
-          <p:cNvSpPr/>
-          <p:nvPr/>
-        </p:nvSpPr>
-        <p:spPr>
-          <a:xfrm>
-            <a:off x="2121408" y="1371600"/>
-            <a:ext cx="1828800" cy="566928"/>
-          </a:xfrm>
-          <a:prstGeom prst="rect">
-            <a:avLst/>
-          </a:prstGeom>
-          <a:noFill/>
-          <a:ln/>
-        </p:spPr>
-        <p:txBody>
-          <a:bodyPr wrap="square" lIns="0" tIns="0" rIns="0" bIns="0" rtlCol="0" anchor="ctr"/>
-          <a:lstStyle/>
-          <a:p>
-            <a:pPr marL="0" indent="0" algn="ctr">
-              <a:buNone/>
-            </a:pPr>
-            <a:r>
-              <a:rPr lang="en-US" sz="3200" b="1" dirty="0">
-                <a:solidFill>
-                  <a:srgbClr val="1B3A6B"/>
-                </a:solidFill>
-                <a:latin typeface="Calibri" pitchFamily="34" charset="0"/>
-                <a:ea typeface="Calibri" pitchFamily="34" charset="-122"/>
-                <a:cs typeface="Calibri" pitchFamily="34" charset="-120"/>
-              </a:rPr>
-              <a:t>10</a:t>
-            </a:r>
-            <a:endParaRPr lang="en-US" sz="3200" dirty="0"/>
-          </a:p>
-        </p:txBody>
-      </p:sp>
-      <p:sp>
-        <p:nvSpPr>
-          <p:cNvPr id="13" name="Text 11"/>
-          <p:cNvSpPr/>
-          <p:nvPr/>
-        </p:nvSpPr>
-        <p:spPr>
-          <a:xfrm>
-            <a:off x="2121408" y="1920240"/>
-            <a:ext cx="1828800" cy="292608"/>
-          </a:xfrm>
-          <a:prstGeom prst="rect">
-            <a:avLst/>
-          </a:prstGeom>
-          <a:noFill/>
-          <a:ln/>
-        </p:spPr>
-        <p:txBody>
-          <a:bodyPr wrap="square" lIns="0" tIns="0" rIns="0" bIns="0" rtlCol="0" anchor="ctr"/>
-          <a:lstStyle/>
-          <a:p>
-            <a:pPr marL="0" indent="0" algn="ctr">
-              <a:buNone/>
-            </a:pPr>
-            <a:r>
-              <a:rPr lang="en-US" sz="1000" dirty="0">
-                <a:solidFill>
-                  <a:srgbClr val="64748B"/>
-                </a:solidFill>
-                <a:latin typeface="Calibri" pitchFamily="34" charset="0"/>
-                <a:ea typeface="Calibri" pitchFamily="34" charset="-122"/>
-                <a:cs typeface="Calibri" pitchFamily="34" charset="-120"/>
-              </a:rPr>
-              <a:t>Charging Stations</a:t>
-            </a:r>
-            <a:endParaRPr lang="en-US" sz="1000" dirty="0"/>
-          </a:p>
-        </p:txBody>
-      </p:sp>
-      <p:sp>
-        <p:nvSpPr>
-          <p:cNvPr id="14" name="Shape 12"/>
-          <p:cNvSpPr/>
-          <p:nvPr/>
-        </p:nvSpPr>
-        <p:spPr>
-          <a:xfrm>
-            <a:off x="3831336" y="1115568"/>
-            <a:ext cx="1920240" cy="1143000"/>
-          </a:xfrm>
-          <a:prstGeom prst="rect">
-            <a:avLst/>
-          </a:prstGeom>
-          <a:solidFill>
-            <a:srgbClr val="FFFFFF"/>
-          </a:solidFill>
-          <a:ln w="12700">
-            <a:solidFill>
-              <a:srgbClr val="CBD5E1"/>
-            </a:solidFill>
-            <a:prstDash val="solid"/>
-          </a:ln>
-          <a:effectLst>
-            <a:outerShdw blurRad="76200" dist="25400" dir="8100000" algn="bl" rotWithShape="0">
-              <a:srgbClr val="000000">
-                <a:alpha val="8000"/>
-              </a:srgbClr>
-            </a:outerShdw>
-          </a:effectLst>
-        </p:spPr>
-      </p:sp>
-      <p:sp>
-        <p:nvSpPr>
-          <p:cNvPr id="15" name="Shape 13"/>
-          <p:cNvSpPr/>
-          <p:nvPr/>
-        </p:nvSpPr>
-        <p:spPr>
-          <a:xfrm>
-            <a:off x="3831336" y="1115568"/>
-            <a:ext cx="1920240" cy="201168"/>
-          </a:xfrm>
-          <a:prstGeom prst="rect">
-            <a:avLst/>
-          </a:prstGeom>
-          <a:solidFill>
-            <a:srgbClr val="0D7377"/>
-          </a:solidFill>
-          <a:ln w="12700">
-            <a:solidFill>
-              <a:srgbClr val="0D7377"/>
-            </a:solidFill>
-            <a:prstDash val="solid"/>
-          </a:ln>
-        </p:spPr>
-      </p:sp>
-      <p:sp>
-        <p:nvSpPr>
-          <p:cNvPr id="16" name="Text 14"/>
-          <p:cNvSpPr/>
-          <p:nvPr/>
-        </p:nvSpPr>
-        <p:spPr>
-          <a:xfrm>
-            <a:off x="3877056" y="1371600"/>
-            <a:ext cx="1828800" cy="566928"/>
-          </a:xfrm>
-          <a:prstGeom prst="rect">
-            <a:avLst/>
-          </a:prstGeom>
-          <a:noFill/>
-          <a:ln/>
-        </p:spPr>
-        <p:txBody>
-          <a:bodyPr wrap="square" lIns="0" tIns="0" rIns="0" bIns="0" rtlCol="0" anchor="ctr"/>
-          <a:lstStyle/>
-          <a:p>
-            <a:pPr marL="0" indent="0" algn="ctr">
-              <a:buNone/>
-            </a:pPr>
-            <a:r>
-              <a:rPr lang="en-US" sz="3200" b="1" dirty="0">
-                <a:solidFill>
-                  <a:srgbClr val="1B3A6B"/>
-                </a:solidFill>
-                <a:latin typeface="Calibri" pitchFamily="34" charset="0"/>
-                <a:ea typeface="Calibri" pitchFamily="34" charset="-122"/>
-                <a:cs typeface="Calibri" pitchFamily="34" charset="-120"/>
-              </a:rPr>
-              <a:t>49</a:t>
-            </a:r>
-            <a:endParaRPr lang="en-US" sz="3200" dirty="0"/>
-          </a:p>
-        </p:txBody>
-      </p:sp>
-      <p:sp>
-        <p:nvSpPr>
-          <p:cNvPr id="17" name="Text 15"/>
-          <p:cNvSpPr/>
-          <p:nvPr/>
-        </p:nvSpPr>
-        <p:spPr>
-          <a:xfrm>
-            <a:off x="3877056" y="1920240"/>
-            <a:ext cx="1828800" cy="292608"/>
-          </a:xfrm>
-          <a:prstGeom prst="rect">
-            <a:avLst/>
-          </a:prstGeom>
-          <a:noFill/>
-          <a:ln/>
-        </p:spPr>
-        <p:txBody>
-          <a:bodyPr wrap="square" lIns="0" tIns="0" rIns="0" bIns="0" rtlCol="0" anchor="ctr"/>
-          <a:lstStyle/>
-          <a:p>
-            <a:pPr marL="0" indent="0" algn="ctr">
-              <a:buNone/>
-            </a:pPr>
-            <a:r>
-              <a:rPr lang="en-US" sz="1000" dirty="0">
-                <a:solidFill>
-                  <a:srgbClr val="64748B"/>
-                </a:solidFill>
-                <a:latin typeface="Calibri" pitchFamily="34" charset="0"/>
-                <a:ea typeface="Calibri" pitchFamily="34" charset="-122"/>
-                <a:cs typeface="Calibri" pitchFamily="34" charset="-120"/>
-              </a:rPr>
-              <a:t>Electric Vehicles</a:t>
-            </a:r>
-            <a:endParaRPr lang="en-US" sz="1000" dirty="0"/>
-          </a:p>
-        </p:txBody>
-      </p:sp>
-      <p:sp>
-        <p:nvSpPr>
-          <p:cNvPr id="18" name="Shape 16"/>
-          <p:cNvSpPr/>
-          <p:nvPr/>
-        </p:nvSpPr>
-        <p:spPr>
-          <a:xfrm>
-            <a:off x="5586984" y="1115568"/>
-            <a:ext cx="1920240" cy="1143000"/>
-          </a:xfrm>
-          <a:prstGeom prst="rect">
-            <a:avLst/>
-          </a:prstGeom>
-          <a:solidFill>
-            <a:srgbClr val="FFFFFF"/>
-          </a:solidFill>
-          <a:ln w="12700">
-            <a:solidFill>
-              <a:srgbClr val="CBD5E1"/>
-            </a:solidFill>
-            <a:prstDash val="solid"/>
-          </a:ln>
-          <a:effectLst>
-            <a:outerShdw blurRad="76200" dist="25400" dir="8100000" algn="bl" rotWithShape="0">
-              <a:srgbClr val="000000">
-                <a:alpha val="8000"/>
-              </a:srgbClr>
-            </a:outerShdw>
-          </a:effectLst>
-        </p:spPr>
-      </p:sp>
-      <p:sp>
-        <p:nvSpPr>
-          <p:cNvPr id="19" name="Shape 17"/>
-          <p:cNvSpPr/>
-          <p:nvPr/>
-        </p:nvSpPr>
-        <p:spPr>
-          <a:xfrm>
-            <a:off x="5586984" y="1115568"/>
-            <a:ext cx="1920240" cy="201168"/>
-          </a:xfrm>
-          <a:prstGeom prst="rect">
-            <a:avLst/>
-          </a:prstGeom>
-          <a:solidFill>
-            <a:srgbClr val="1B3A6B"/>
-          </a:solidFill>
-          <a:ln w="12700">
-            <a:solidFill>
-              <a:srgbClr val="1B3A6B"/>
-            </a:solidFill>
-            <a:prstDash val="solid"/>
-          </a:ln>
-        </p:spPr>
-      </p:sp>
-      <p:sp>
-        <p:nvSpPr>
-          <p:cNvPr id="20" name="Text 18"/>
-          <p:cNvSpPr/>
-          <p:nvPr/>
-        </p:nvSpPr>
-        <p:spPr>
-          <a:xfrm>
-            <a:off x="5632704" y="1371600"/>
-            <a:ext cx="1828800" cy="566928"/>
-          </a:xfrm>
-          <a:prstGeom prst="rect">
-            <a:avLst/>
-          </a:prstGeom>
-          <a:noFill/>
-          <a:ln/>
-        </p:spPr>
-        <p:txBody>
-          <a:bodyPr wrap="square" lIns="0" tIns="0" rIns="0" bIns="0" rtlCol="0" anchor="ctr"/>
-          <a:lstStyle/>
-          <a:p>
-            <a:pPr marL="0" indent="0" algn="ctr">
-              <a:buNone/>
-            </a:pPr>
-            <a:r>
-              <a:rPr lang="en-US" sz="3200" b="1" dirty="0">
-                <a:solidFill>
-                  <a:srgbClr val="1B3A6B"/>
-                </a:solidFill>
-                <a:latin typeface="Calibri" pitchFamily="34" charset="0"/>
-                <a:ea typeface="Calibri" pitchFamily="34" charset="-122"/>
-                <a:cs typeface="Calibri" pitchFamily="34" charset="-120"/>
-              </a:rPr>
-              <a:t>600 s</a:t>
-            </a:r>
-            <a:endParaRPr lang="en-US" sz="3200" dirty="0"/>
-          </a:p>
-        </p:txBody>
-      </p:sp>
-      <p:sp>
-        <p:nvSpPr>
-          <p:cNvPr id="21" name="Text 19"/>
-          <p:cNvSpPr/>
-          <p:nvPr/>
-        </p:nvSpPr>
-        <p:spPr>
-          <a:xfrm>
-            <a:off x="5632704" y="1920240"/>
-            <a:ext cx="1828800" cy="292608"/>
-          </a:xfrm>
-          <a:prstGeom prst="rect">
-            <a:avLst/>
-          </a:prstGeom>
-          <a:noFill/>
-          <a:ln/>
-        </p:spPr>
-        <p:txBody>
-          <a:bodyPr wrap="square" lIns="0" tIns="0" rIns="0" bIns="0" rtlCol="0" anchor="ctr"/>
-          <a:lstStyle/>
-          <a:p>
-            <a:pPr marL="0" indent="0" algn="ctr">
-              <a:buNone/>
-            </a:pPr>
-            <a:r>
-              <a:rPr lang="en-US" sz="1000" dirty="0">
-                <a:solidFill>
-                  <a:srgbClr val="64748B"/>
-                </a:solidFill>
-                <a:latin typeface="Calibri" pitchFamily="34" charset="0"/>
-                <a:ea typeface="Calibri" pitchFamily="34" charset="-122"/>
-                <a:cs typeface="Calibri" pitchFamily="34" charset="-120"/>
-              </a:rPr>
-              <a:t>Simulation Duration</a:t>
-            </a:r>
-            <a:endParaRPr lang="en-US" sz="1000" dirty="0"/>
-          </a:p>
-        </p:txBody>
-      </p:sp>
-      <p:sp>
-        <p:nvSpPr>
-          <p:cNvPr id="22" name="Shape 20"/>
-          <p:cNvSpPr/>
-          <p:nvPr/>
-        </p:nvSpPr>
-        <p:spPr>
-          <a:xfrm>
-            <a:off x="7342632" y="1115568"/>
-            <a:ext cx="1481328" cy="1143000"/>
-          </a:xfrm>
-          <a:prstGeom prst="rect">
-            <a:avLst/>
-          </a:prstGeom>
-          <a:solidFill>
-            <a:srgbClr val="FFFFFF"/>
-          </a:solidFill>
-          <a:ln w="12700">
-            <a:solidFill>
-              <a:srgbClr val="CBD5E1"/>
-            </a:solidFill>
-            <a:prstDash val="solid"/>
-          </a:ln>
-          <a:effectLst>
-            <a:outerShdw blurRad="76200" dist="25400" dir="8100000" algn="bl" rotWithShape="0">
-              <a:srgbClr val="000000">
-                <a:alpha val="8000"/>
-              </a:srgbClr>
-            </a:outerShdw>
-          </a:effectLst>
-        </p:spPr>
-      </p:sp>
-      <p:sp>
-        <p:nvSpPr>
-          <p:cNvPr id="23" name="Shape 21"/>
-          <p:cNvSpPr/>
-          <p:nvPr/>
-        </p:nvSpPr>
-        <p:spPr>
-          <a:xfrm>
-            <a:off x="7342632" y="1115568"/>
-            <a:ext cx="1453896" cy="201168"/>
-          </a:xfrm>
-          <a:prstGeom prst="rect">
-            <a:avLst/>
-          </a:prstGeom>
-          <a:solidFill>
-            <a:srgbClr val="0D7377"/>
-          </a:solidFill>
-          <a:ln w="12700">
-            <a:solidFill>
-              <a:srgbClr val="0D7377"/>
-            </a:solidFill>
-            <a:prstDash val="solid"/>
-          </a:ln>
-        </p:spPr>
-      </p:sp>
-      <p:sp>
-        <p:nvSpPr>
-          <p:cNvPr id="24" name="Text 22"/>
-          <p:cNvSpPr/>
-          <p:nvPr/>
-        </p:nvSpPr>
-        <p:spPr>
-          <a:xfrm>
-            <a:off x="7388352" y="1371600"/>
-            <a:ext cx="1481328" cy="566928"/>
-          </a:xfrm>
-          <a:prstGeom prst="rect">
-            <a:avLst/>
-          </a:prstGeom>
-          <a:noFill/>
-          <a:ln/>
-        </p:spPr>
-        <p:txBody>
-          <a:bodyPr wrap="square" lIns="0" tIns="0" rIns="0" bIns="0" rtlCol="0" anchor="ctr"/>
-          <a:lstStyle/>
-          <a:p>
-            <a:pPr marL="0" indent="0" algn="ctr">
-              <a:buNone/>
-            </a:pPr>
-            <a:r>
-              <a:rPr lang="en-US" sz="3200" b="1" dirty="0">
-                <a:solidFill>
-                  <a:srgbClr val="1B3A6B"/>
-                </a:solidFill>
-                <a:latin typeface="Calibri" pitchFamily="34" charset="0"/>
-                <a:ea typeface="Calibri" pitchFamily="34" charset="-122"/>
-                <a:cs typeface="Calibri" pitchFamily="34" charset="-120"/>
-              </a:rPr>
-              <a:t>34,020</a:t>
-            </a:r>
-            <a:endParaRPr lang="en-US" sz="3200" dirty="0"/>
-          </a:p>
-        </p:txBody>
-      </p:sp>
-      <p:sp>
-        <p:nvSpPr>
-          <p:cNvPr id="25" name="Text 23"/>
-          <p:cNvSpPr/>
-          <p:nvPr/>
-        </p:nvSpPr>
-        <p:spPr>
-          <a:xfrm>
-            <a:off x="7388352" y="1920240"/>
-            <a:ext cx="1481328" cy="292608"/>
-          </a:xfrm>
-          <a:prstGeom prst="rect">
-            <a:avLst/>
-          </a:prstGeom>
-          <a:noFill/>
-          <a:ln/>
-        </p:spPr>
-        <p:txBody>
-          <a:bodyPr wrap="square" lIns="0" tIns="0" rIns="0" bIns="0" rtlCol="0" anchor="ctr"/>
-          <a:lstStyle/>
-          <a:p>
-            <a:pPr marL="0" indent="0" algn="ctr">
-              <a:buNone/>
-            </a:pPr>
-            <a:r>
-              <a:rPr lang="en-US" sz="1000" dirty="0">
-                <a:solidFill>
-                  <a:srgbClr val="64748B"/>
-                </a:solidFill>
-                <a:latin typeface="Calibri" pitchFamily="34" charset="0"/>
-                <a:ea typeface="Calibri" pitchFamily="34" charset="-122"/>
-                <a:cs typeface="Calibri" pitchFamily="34" charset="-120"/>
-              </a:rPr>
-              <a:t>Records Generated</a:t>
-            </a:r>
-            <a:endParaRPr lang="en-US" sz="1000" dirty="0"/>
-          </a:p>
-        </p:txBody>
-      </p:sp>
-      <p:sp>
-        <p:nvSpPr>
-          <p:cNvPr id="26" name="Shape 24"/>
-          <p:cNvSpPr/>
-          <p:nvPr/>
-        </p:nvSpPr>
-        <p:spPr>
-          <a:xfrm>
-            <a:off x="320040" y="2450592"/>
-            <a:ext cx="3931920" cy="2450592"/>
-          </a:xfrm>
-          <a:prstGeom prst="rect">
-            <a:avLst/>
-          </a:prstGeom>
-          <a:solidFill>
-            <a:srgbClr val="FFFFFF"/>
-          </a:solidFill>
-          <a:ln w="12700">
-            <a:solidFill>
-              <a:srgbClr val="CBD5E1"/>
-            </a:solidFill>
-            <a:prstDash val="solid"/>
-          </a:ln>
-          <a:effectLst>
-            <a:outerShdw blurRad="76200" dist="25400" dir="8100000" algn="bl" rotWithShape="0">
-              <a:srgbClr val="000000">
-                <a:alpha val="8000"/>
-              </a:srgbClr>
-            </a:outerShdw>
-          </a:effectLst>
-        </p:spPr>
-      </p:sp>
-      <p:pic>
-        <p:nvPicPr>
-          <p:cNvPr id="27" name="Image 0" descr="preencoded.png"/>
-          <p:cNvPicPr>
-            <a:picLocks noChangeAspect="1"/>
-          </p:cNvPicPr>
-          <p:nvPr/>
-        </p:nvPicPr>
-        <p:blipFill>
-          <a:blip r:embed="rId3"/>
-          <a:srcRect/>
-          <a:stretch/>
-        </p:blipFill>
-        <p:spPr>
-          <a:xfrm>
-            <a:off x="411480" y="2523744"/>
-            <a:ext cx="3749040" cy="2304288"/>
-          </a:xfrm>
-          <a:prstGeom prst="rect">
-            <a:avLst/>
-          </a:prstGeom>
-        </p:spPr>
-      </p:pic>
-      <p:sp>
-        <p:nvSpPr>
           <p:cNvPr id="28" name="Text 25"/>
           <p:cNvSpPr/>
           <p:nvPr/>
         </p:nvSpPr>
         <p:spPr>
           <a:xfrm>
-            <a:off x="320040" y="4846320"/>
+            <a:off x="320040" y="4887884"/>
             <a:ext cx="3931920" cy="228600"/>
           </a:xfrm>
           <a:prstGeom prst="rect">
@@ -27095,7 +26397,7 @@
         </p:nvSpPr>
         <p:spPr>
           <a:xfrm>
-            <a:off x="4434840" y="2450592"/>
+            <a:off x="4407408" y="1074420"/>
             <a:ext cx="4389120" cy="292608"/>
           </a:xfrm>
           <a:prstGeom prst="rect">
@@ -27128,56 +26430,64 @@
       </p:sp>
       <p:graphicFrame>
         <p:nvGraphicFramePr>
-          <p:cNvPr id="30" name="Table 0"/>
+          <p:cNvPr id="31" name="Table 30">
+            <a:extLst>
+              <a:ext uri="{FF2B5EF4-FFF2-40B4-BE49-F238E27FC236}">
+                <a16:creationId xmlns:a16="http://schemas.microsoft.com/office/drawing/2014/main" id="{41F96497-7750-3F8E-F9AB-94181039A7EF}"/>
+              </a:ext>
+            </a:extLst>
+          </p:cNvPr>
           <p:cNvGraphicFramePr>
             <a:graphicFrameLocks noGrp="1"/>
           </p:cNvGraphicFramePr>
           <p:nvPr>
             <p:extLst>
               <p:ext uri="{D42A27DB-BD31-4B8C-83A1-F6EECF244321}">
-                <p14:modId xmlns:p14="http://schemas.microsoft.com/office/powerpoint/2010/main" val="1579011935"/>
+                <p14:modId xmlns:p14="http://schemas.microsoft.com/office/powerpoint/2010/main" val="1285793762"/>
               </p:ext>
             </p:extLst>
           </p:nvPr>
         </p:nvGraphicFramePr>
         <p:xfrm>
-          <a:off x="4434840" y="2798064"/>
-          <a:ext cx="4361688" cy="2240280"/>
+          <a:off x="4343400" y="1426464"/>
+          <a:ext cx="4657201" cy="3474720"/>
         </p:xfrm>
         <a:graphic>
           <a:graphicData uri="http://schemas.openxmlformats.org/drawingml/2006/table">
             <a:tbl>
-              <a:tblPr/>
+              <a:tblPr firstRow="1" bandRow="1">
+                <a:tableStyleId>{5C22544A-7EE6-4342-B048-85BDC9FD1C3A}</a:tableStyleId>
+              </a:tblPr>
               <a:tblGrid>
-                <a:gridCol w="1051560">
+                <a:gridCol w="821859">
                   <a:extLst>
                     <a:ext uri="{9D8B030D-6E8A-4147-A177-3AD203B41FA5}">
                       <a16:colId xmlns:a16="http://schemas.microsoft.com/office/drawing/2014/main" val="20000"/>
                     </a:ext>
                   </a:extLst>
                 </a:gridCol>
-                <a:gridCol w="658368">
+                <a:gridCol w="821859">
                   <a:extLst>
                     <a:ext uri="{9D8B030D-6E8A-4147-A177-3AD203B41FA5}">
                       <a16:colId xmlns:a16="http://schemas.microsoft.com/office/drawing/2014/main" val="20001"/>
                     </a:ext>
                   </a:extLst>
                 </a:gridCol>
-                <a:gridCol w="822960">
+                <a:gridCol w="821859">
                   <a:extLst>
                     <a:ext uri="{9D8B030D-6E8A-4147-A177-3AD203B41FA5}">
                       <a16:colId xmlns:a16="http://schemas.microsoft.com/office/drawing/2014/main" val="20002"/>
                     </a:ext>
                   </a:extLst>
                 </a:gridCol>
-                <a:gridCol w="914400">
+                <a:gridCol w="1095812">
                   <a:extLst>
                     <a:ext uri="{9D8B030D-6E8A-4147-A177-3AD203B41FA5}">
                       <a16:colId xmlns:a16="http://schemas.microsoft.com/office/drawing/2014/main" val="20003"/>
                     </a:ext>
                   </a:extLst>
                 </a:gridCol>
-                <a:gridCol w="914400">
+                <a:gridCol w="1095812">
                   <a:extLst>
                     <a:ext uri="{9D8B030D-6E8A-4147-A177-3AD203B41FA5}">
                       <a16:colId xmlns:a16="http://schemas.microsoft.com/office/drawing/2014/main" val="20004"/>
@@ -27185,70 +26495,22 @@
                   </a:extLst>
                 </a:gridCol>
               </a:tblGrid>
-              <a:tr h="320040">
+              <a:tr h="378284">
                 <a:tc>
                   <a:txBody>
                     <a:bodyPr/>
                     <a:lstStyle/>
                     <a:p>
-                      <a:pPr marL="0" indent="0" algn="ctr">
-                        <a:buNone/>
+                      <a:pPr algn="ctr">
+                        <a:defRPr sz="1200" b="1"/>
                       </a:pPr>
                       <a:r>
-                        <a:rPr lang="en-US" sz="1100" b="1" dirty="0">
-                          <a:solidFill>
-                            <a:srgbClr val="FFFFFF"/>
-                          </a:solidFill>
-                          <a:latin typeface="Calibri" pitchFamily="34" charset="0"/>
-                          <a:ea typeface="Calibri" pitchFamily="34" charset="-122"/>
-                          <a:cs typeface="Calibri" pitchFamily="34" charset="-120"/>
-                        </a:rPr>
-                        <a:t>Station</a:t>
+                        <a:rPr dirty="0"/>
+                        <a:t>Station ID</a:t>
                       </a:r>
-                      <a:endParaRPr lang="en-US" sz="1100" dirty="0">
-                        <a:latin typeface="Calibri" charset="0"/>
-                        <a:ea typeface="Calibri" charset="0"/>
-                        <a:cs typeface="Calibri" charset="0"/>
-                      </a:endParaRPr>
                     </a:p>
                   </a:txBody>
                   <a:tcPr>
-                    <a:lnL w="6350" cap="flat" cmpd="sng" algn="ctr">
-                      <a:solidFill>
-                        <a:srgbClr val="CBD5E1"/>
-                      </a:solidFill>
-                      <a:prstDash val="solid"/>
-                      <a:round/>
-                      <a:headEnd type="none" w="med" len="med"/>
-                      <a:tailEnd type="none" w="med" len="med"/>
-                    </a:lnL>
-                    <a:lnR w="6350" cap="flat" cmpd="sng" algn="ctr">
-                      <a:solidFill>
-                        <a:srgbClr val="CBD5E1"/>
-                      </a:solidFill>
-                      <a:prstDash val="solid"/>
-                      <a:round/>
-                      <a:headEnd type="none" w="med" len="med"/>
-                      <a:tailEnd type="none" w="med" len="med"/>
-                    </a:lnR>
-                    <a:lnT w="6350" cap="flat" cmpd="sng" algn="ctr">
-                      <a:solidFill>
-                        <a:srgbClr val="CBD5E1"/>
-                      </a:solidFill>
-                      <a:prstDash val="solid"/>
-                      <a:round/>
-                      <a:headEnd type="none" w="med" len="med"/>
-                      <a:tailEnd type="none" w="med" len="med"/>
-                    </a:lnT>
-                    <a:lnB w="6350" cap="flat" cmpd="sng" algn="ctr">
-                      <a:solidFill>
-                        <a:srgbClr val="CBD5E1"/>
-                      </a:solidFill>
-                      <a:prstDash val="solid"/>
-                      <a:round/>
-                      <a:headEnd type="none" w="med" len="med"/>
-                      <a:tailEnd type="none" w="med" len="med"/>
-                    </a:lnB>
                     <a:solidFill>
                       <a:srgbClr val="1B3A6B"/>
                     </a:solidFill>
@@ -27259,64 +26521,15 @@
                     <a:bodyPr/>
                     <a:lstStyle/>
                     <a:p>
-                      <a:pPr marL="0" indent="0" algn="ctr">
-                        <a:buNone/>
+                      <a:pPr algn="ctr">
+                        <a:defRPr sz="1200" b="1"/>
                       </a:pPr>
                       <a:r>
-                        <a:rPr lang="en-US" sz="1100" b="1" dirty="0">
-                          <a:solidFill>
-                            <a:srgbClr val="FFFFFF"/>
-                          </a:solidFill>
-                          <a:latin typeface="Calibri" pitchFamily="34" charset="0"/>
-                          <a:ea typeface="Calibri" pitchFamily="34" charset="-122"/>
-                          <a:cs typeface="Calibri" pitchFamily="34" charset="-120"/>
-                        </a:rPr>
-                        <a:t>Edge</a:t>
+                        <a:t>Edge ID</a:t>
                       </a:r>
-                      <a:endParaRPr lang="en-US" sz="1100" dirty="0">
-                        <a:latin typeface="Calibri" charset="0"/>
-                        <a:ea typeface="Calibri" charset="0"/>
-                        <a:cs typeface="Calibri" charset="0"/>
-                      </a:endParaRPr>
                     </a:p>
                   </a:txBody>
                   <a:tcPr>
-                    <a:lnL w="6350" cap="flat" cmpd="sng" algn="ctr">
-                      <a:solidFill>
-                        <a:srgbClr val="CBD5E1"/>
-                      </a:solidFill>
-                      <a:prstDash val="solid"/>
-                      <a:round/>
-                      <a:headEnd type="none" w="med" len="med"/>
-                      <a:tailEnd type="none" w="med" len="med"/>
-                    </a:lnL>
-                    <a:lnR w="6350" cap="flat" cmpd="sng" algn="ctr">
-                      <a:solidFill>
-                        <a:srgbClr val="CBD5E1"/>
-                      </a:solidFill>
-                      <a:prstDash val="solid"/>
-                      <a:round/>
-                      <a:headEnd type="none" w="med" len="med"/>
-                      <a:tailEnd type="none" w="med" len="med"/>
-                    </a:lnR>
-                    <a:lnT w="6350" cap="flat" cmpd="sng" algn="ctr">
-                      <a:solidFill>
-                        <a:srgbClr val="CBD5E1"/>
-                      </a:solidFill>
-                      <a:prstDash val="solid"/>
-                      <a:round/>
-                      <a:headEnd type="none" w="med" len="med"/>
-                      <a:tailEnd type="none" w="med" len="med"/>
-                    </a:lnT>
-                    <a:lnB w="6350" cap="flat" cmpd="sng" algn="ctr">
-                      <a:solidFill>
-                        <a:srgbClr val="CBD5E1"/>
-                      </a:solidFill>
-                      <a:prstDash val="solid"/>
-                      <a:round/>
-                      <a:headEnd type="none" w="med" len="med"/>
-                      <a:tailEnd type="none" w="med" len="med"/>
-                    </a:lnB>
                     <a:solidFill>
                       <a:srgbClr val="1B3A6B"/>
                     </a:solidFill>
@@ -27327,64 +26540,16 @@
                     <a:bodyPr/>
                     <a:lstStyle/>
                     <a:p>
-                      <a:pPr marL="0" indent="0" algn="ctr">
-                        <a:buNone/>
+                      <a:pPr algn="ctr">
+                        <a:defRPr sz="1200" b="1"/>
                       </a:pPr>
                       <a:r>
-                        <a:rPr lang="en-US" sz="1100" b="1" dirty="0">
-                          <a:solidFill>
-                            <a:srgbClr val="FFFFFF"/>
-                          </a:solidFill>
-                          <a:latin typeface="Calibri" pitchFamily="34" charset="0"/>
-                          <a:ea typeface="Calibri" pitchFamily="34" charset="-122"/>
-                          <a:cs typeface="Calibri" pitchFamily="34" charset="-120"/>
-                        </a:rPr>
-                        <a:t>Power</a:t>
+                        <a:rPr dirty="0"/>
+                        <a:t>Power (kW)</a:t>
                       </a:r>
-                      <a:endParaRPr lang="en-US" sz="1100" dirty="0">
-                        <a:latin typeface="Calibri" charset="0"/>
-                        <a:ea typeface="Calibri" charset="0"/>
-                        <a:cs typeface="Calibri" charset="0"/>
-                      </a:endParaRPr>
                     </a:p>
                   </a:txBody>
                   <a:tcPr>
-                    <a:lnL w="6350" cap="flat" cmpd="sng" algn="ctr">
-                      <a:solidFill>
-                        <a:srgbClr val="CBD5E1"/>
-                      </a:solidFill>
-                      <a:prstDash val="solid"/>
-                      <a:round/>
-                      <a:headEnd type="none" w="med" len="med"/>
-                      <a:tailEnd type="none" w="med" len="med"/>
-                    </a:lnL>
-                    <a:lnR w="6350" cap="flat" cmpd="sng" algn="ctr">
-                      <a:solidFill>
-                        <a:srgbClr val="CBD5E1"/>
-                      </a:solidFill>
-                      <a:prstDash val="solid"/>
-                      <a:round/>
-                      <a:headEnd type="none" w="med" len="med"/>
-                      <a:tailEnd type="none" w="med" len="med"/>
-                    </a:lnR>
-                    <a:lnT w="6350" cap="flat" cmpd="sng" algn="ctr">
-                      <a:solidFill>
-                        <a:srgbClr val="CBD5E1"/>
-                      </a:solidFill>
-                      <a:prstDash val="solid"/>
-                      <a:round/>
-                      <a:headEnd type="none" w="med" len="med"/>
-                      <a:tailEnd type="none" w="med" len="med"/>
-                    </a:lnT>
-                    <a:lnB w="6350" cap="flat" cmpd="sng" algn="ctr">
-                      <a:solidFill>
-                        <a:srgbClr val="CBD5E1"/>
-                      </a:solidFill>
-                      <a:prstDash val="solid"/>
-                      <a:round/>
-                      <a:headEnd type="none" w="med" len="med"/>
-                      <a:tailEnd type="none" w="med" len="med"/>
-                    </a:lnB>
                     <a:solidFill>
                       <a:srgbClr val="1B3A6B"/>
                     </a:solidFill>
@@ -27395,64 +26560,15 @@
                     <a:bodyPr/>
                     <a:lstStyle/>
                     <a:p>
-                      <a:pPr marL="0" indent="0" algn="ctr">
-                        <a:buNone/>
+                      <a:pPr algn="ctr">
+                        <a:defRPr sz="1200" b="1"/>
                       </a:pPr>
                       <a:r>
-                        <a:rPr lang="en-US" sz="1100" b="1" dirty="0">
-                          <a:solidFill>
-                            <a:srgbClr val="FFFFFF"/>
-                          </a:solidFill>
-                          <a:latin typeface="Calibri" pitchFamily="34" charset="0"/>
-                          <a:ea typeface="Calibri" pitchFamily="34" charset="-122"/>
-                          <a:cs typeface="Calibri" pitchFamily="34" charset="-120"/>
-                        </a:rPr>
-                        <a:t>Chg Slots</a:t>
+                        <a:t>Charging Slots</a:t>
                       </a:r>
-                      <a:endParaRPr lang="en-US" sz="1100" dirty="0">
-                        <a:latin typeface="Calibri" charset="0"/>
-                        <a:ea typeface="Calibri" charset="0"/>
-                        <a:cs typeface="Calibri" charset="0"/>
-                      </a:endParaRPr>
                     </a:p>
                   </a:txBody>
                   <a:tcPr>
-                    <a:lnL w="6350" cap="flat" cmpd="sng" algn="ctr">
-                      <a:solidFill>
-                        <a:srgbClr val="CBD5E1"/>
-                      </a:solidFill>
-                      <a:prstDash val="solid"/>
-                      <a:round/>
-                      <a:headEnd type="none" w="med" len="med"/>
-                      <a:tailEnd type="none" w="med" len="med"/>
-                    </a:lnL>
-                    <a:lnR w="6350" cap="flat" cmpd="sng" algn="ctr">
-                      <a:solidFill>
-                        <a:srgbClr val="CBD5E1"/>
-                      </a:solidFill>
-                      <a:prstDash val="solid"/>
-                      <a:round/>
-                      <a:headEnd type="none" w="med" len="med"/>
-                      <a:tailEnd type="none" w="med" len="med"/>
-                    </a:lnR>
-                    <a:lnT w="6350" cap="flat" cmpd="sng" algn="ctr">
-                      <a:solidFill>
-                        <a:srgbClr val="CBD5E1"/>
-                      </a:solidFill>
-                      <a:prstDash val="solid"/>
-                      <a:round/>
-                      <a:headEnd type="none" w="med" len="med"/>
-                      <a:tailEnd type="none" w="med" len="med"/>
-                    </a:lnT>
-                    <a:lnB w="6350" cap="flat" cmpd="sng" algn="ctr">
-                      <a:solidFill>
-                        <a:srgbClr val="CBD5E1"/>
-                      </a:solidFill>
-                      <a:prstDash val="solid"/>
-                      <a:round/>
-                      <a:headEnd type="none" w="med" len="med"/>
-                      <a:tailEnd type="none" w="med" len="med"/>
-                    </a:lnB>
                     <a:solidFill>
                       <a:srgbClr val="1B3A6B"/>
                     </a:solidFill>
@@ -27463,64 +26579,16 @@
                     <a:bodyPr/>
                     <a:lstStyle/>
                     <a:p>
-                      <a:pPr marL="0" indent="0" algn="ctr">
-                        <a:buNone/>
+                      <a:pPr algn="ctr">
+                        <a:defRPr sz="1200" b="1"/>
                       </a:pPr>
                       <a:r>
-                        <a:rPr lang="en-US" sz="1100" b="1" dirty="0">
-                          <a:solidFill>
-                            <a:srgbClr val="FFFFFF"/>
-                          </a:solidFill>
-                          <a:latin typeface="Calibri" pitchFamily="34" charset="0"/>
-                          <a:ea typeface="Calibri" pitchFamily="34" charset="-122"/>
-                          <a:cs typeface="Calibri" pitchFamily="34" charset="-120"/>
-                        </a:rPr>
-                        <a:t>Wait Slots</a:t>
+                        <a:rPr dirty="0"/>
+                        <a:t>Waiting Slots</a:t>
                       </a:r>
-                      <a:endParaRPr lang="en-US" sz="1100" dirty="0">
-                        <a:latin typeface="Calibri" charset="0"/>
-                        <a:ea typeface="Calibri" charset="0"/>
-                        <a:cs typeface="Calibri" charset="0"/>
-                      </a:endParaRPr>
                     </a:p>
                   </a:txBody>
                   <a:tcPr>
-                    <a:lnL w="6350" cap="flat" cmpd="sng" algn="ctr">
-                      <a:solidFill>
-                        <a:srgbClr val="CBD5E1"/>
-                      </a:solidFill>
-                      <a:prstDash val="solid"/>
-                      <a:round/>
-                      <a:headEnd type="none" w="med" len="med"/>
-                      <a:tailEnd type="none" w="med" len="med"/>
-                    </a:lnL>
-                    <a:lnR w="6350" cap="flat" cmpd="sng" algn="ctr">
-                      <a:solidFill>
-                        <a:srgbClr val="CBD5E1"/>
-                      </a:solidFill>
-                      <a:prstDash val="solid"/>
-                      <a:round/>
-                      <a:headEnd type="none" w="med" len="med"/>
-                      <a:tailEnd type="none" w="med" len="med"/>
-                    </a:lnR>
-                    <a:lnT w="6350" cap="flat" cmpd="sng" algn="ctr">
-                      <a:solidFill>
-                        <a:srgbClr val="CBD5E1"/>
-                      </a:solidFill>
-                      <a:prstDash val="solid"/>
-                      <a:round/>
-                      <a:headEnd type="none" w="med" len="med"/>
-                      <a:tailEnd type="none" w="med" len="med"/>
-                    </a:lnT>
-                    <a:lnB w="6350" cap="flat" cmpd="sng" algn="ctr">
-                      <a:solidFill>
-                        <a:srgbClr val="CBD5E1"/>
-                      </a:solidFill>
-                      <a:prstDash val="solid"/>
-                      <a:round/>
-                      <a:headEnd type="none" w="med" len="med"/>
-                      <a:tailEnd type="none" w="med" len="med"/>
-                    </a:lnB>
                     <a:solidFill>
                       <a:srgbClr val="1B3A6B"/>
                     </a:solidFill>
@@ -27532,331 +26600,83 @@
                   </a:ext>
                 </a:extLst>
               </a:tr>
-              <a:tr h="320040">
+              <a:tr h="226970">
                 <a:tc>
                   <a:txBody>
                     <a:bodyPr/>
                     <a:lstStyle/>
                     <a:p>
-                      <a:pPr marL="0" indent="0" algn="ctr">
-                        <a:buNone/>
+                      <a:pPr algn="ctr">
+                        <a:defRPr sz="1200"/>
                       </a:pPr>
                       <a:r>
-                        <a:rPr lang="en-US" sz="1100" dirty="0">
-                          <a:solidFill>
-                            <a:srgbClr val="000000"/>
-                          </a:solidFill>
-                          <a:latin typeface="Calibri" pitchFamily="34" charset="0"/>
-                          <a:ea typeface="Calibri" pitchFamily="34" charset="-122"/>
-                          <a:cs typeface="Calibri" pitchFamily="34" charset="-120"/>
-                        </a:rPr>
                         <a:t>pa_2</a:t>
                       </a:r>
-                      <a:endParaRPr lang="en-US" sz="1100" dirty="0">
-                        <a:latin typeface="Calibri" charset="0"/>
-                        <a:ea typeface="Calibri" charset="0"/>
-                        <a:cs typeface="Calibri" charset="0"/>
-                      </a:endParaRPr>
                     </a:p>
                   </a:txBody>
-                  <a:tcPr>
-                    <a:lnL w="6350" cap="flat" cmpd="sng" algn="ctr">
-                      <a:solidFill>
-                        <a:srgbClr val="CBD5E1"/>
-                      </a:solidFill>
-                      <a:prstDash val="solid"/>
-                      <a:round/>
-                      <a:headEnd type="none" w="med" len="med"/>
-                      <a:tailEnd type="none" w="med" len="med"/>
-                    </a:lnL>
-                    <a:lnR w="6350" cap="flat" cmpd="sng" algn="ctr">
-                      <a:solidFill>
-                        <a:srgbClr val="CBD5E1"/>
-                      </a:solidFill>
-                      <a:prstDash val="solid"/>
-                      <a:round/>
-                      <a:headEnd type="none" w="med" len="med"/>
-                      <a:tailEnd type="none" w="med" len="med"/>
-                    </a:lnR>
-                    <a:lnT w="6350" cap="flat" cmpd="sng" algn="ctr">
-                      <a:solidFill>
-                        <a:srgbClr val="CBD5E1"/>
-                      </a:solidFill>
-                      <a:prstDash val="solid"/>
-                      <a:round/>
-                      <a:headEnd type="none" w="med" len="med"/>
-                      <a:tailEnd type="none" w="med" len="med"/>
-                    </a:lnT>
-                    <a:lnB w="6350" cap="flat" cmpd="sng" algn="ctr">
-                      <a:solidFill>
-                        <a:srgbClr val="CBD5E1"/>
-                      </a:solidFill>
-                      <a:prstDash val="solid"/>
-                      <a:round/>
-                      <a:headEnd type="none" w="med" len="med"/>
-                      <a:tailEnd type="none" w="med" len="med"/>
-                    </a:lnB>
-                  </a:tcPr>
+                  <a:tcPr/>
                 </a:tc>
                 <a:tc>
                   <a:txBody>
                     <a:bodyPr/>
                     <a:lstStyle/>
                     <a:p>
-                      <a:pPr marL="0" indent="0" algn="ctr">
-                        <a:buNone/>
+                      <a:pPr algn="ctr">
+                        <a:defRPr sz="1200"/>
                       </a:pPr>
                       <a:r>
-                        <a:rPr lang="en-US" sz="1100" dirty="0">
-                          <a:solidFill>
-                            <a:srgbClr val="000000"/>
-                          </a:solidFill>
-                          <a:latin typeface="Calibri" pitchFamily="34" charset="0"/>
-                          <a:ea typeface="Calibri" pitchFamily="34" charset="-122"/>
-                          <a:cs typeface="Calibri" pitchFamily="34" charset="-120"/>
-                        </a:rPr>
                         <a:t>E0</a:t>
                       </a:r>
-                      <a:endParaRPr lang="en-US" sz="1100" dirty="0">
-                        <a:latin typeface="Calibri" charset="0"/>
-                        <a:ea typeface="Calibri" charset="0"/>
-                        <a:cs typeface="Calibri" charset="0"/>
-                      </a:endParaRPr>
                     </a:p>
                   </a:txBody>
-                  <a:tcPr>
-                    <a:lnL w="6350" cap="flat" cmpd="sng" algn="ctr">
-                      <a:solidFill>
-                        <a:srgbClr val="CBD5E1"/>
-                      </a:solidFill>
-                      <a:prstDash val="solid"/>
-                      <a:round/>
-                      <a:headEnd type="none" w="med" len="med"/>
-                      <a:tailEnd type="none" w="med" len="med"/>
-                    </a:lnL>
-                    <a:lnR w="6350" cap="flat" cmpd="sng" algn="ctr">
-                      <a:solidFill>
-                        <a:srgbClr val="CBD5E1"/>
-                      </a:solidFill>
-                      <a:prstDash val="solid"/>
-                      <a:round/>
-                      <a:headEnd type="none" w="med" len="med"/>
-                      <a:tailEnd type="none" w="med" len="med"/>
-                    </a:lnR>
-                    <a:lnT w="6350" cap="flat" cmpd="sng" algn="ctr">
-                      <a:solidFill>
-                        <a:srgbClr val="CBD5E1"/>
-                      </a:solidFill>
-                      <a:prstDash val="solid"/>
-                      <a:round/>
-                      <a:headEnd type="none" w="med" len="med"/>
-                      <a:tailEnd type="none" w="med" len="med"/>
-                    </a:lnT>
-                    <a:lnB w="6350" cap="flat" cmpd="sng" algn="ctr">
-                      <a:solidFill>
-                        <a:srgbClr val="CBD5E1"/>
-                      </a:solidFill>
-                      <a:prstDash val="solid"/>
-                      <a:round/>
-                      <a:headEnd type="none" w="med" len="med"/>
-                      <a:tailEnd type="none" w="med" len="med"/>
-                    </a:lnB>
-                  </a:tcPr>
+                  <a:tcPr/>
                 </a:tc>
                 <a:tc>
                   <a:txBody>
                     <a:bodyPr/>
                     <a:lstStyle/>
                     <a:p>
-                      <a:pPr marL="0" indent="0" algn="ctr">
-                        <a:buNone/>
+                      <a:pPr algn="ctr">
+                        <a:defRPr sz="1200"/>
                       </a:pPr>
                       <a:r>
-                        <a:rPr lang="en-US" sz="1100" dirty="0">
-                          <a:solidFill>
-                            <a:srgbClr val="000000"/>
-                          </a:solidFill>
-                          <a:latin typeface="Calibri" pitchFamily="34" charset="0"/>
-                          <a:ea typeface="Calibri" pitchFamily="34" charset="-122"/>
-                          <a:cs typeface="Calibri" pitchFamily="34" charset="-120"/>
-                        </a:rPr>
-                        <a:t>30 kW</a:t>
+                        <a:t>30</a:t>
                       </a:r>
-                      <a:endParaRPr lang="en-US" sz="1100" dirty="0">
-                        <a:latin typeface="Calibri" charset="0"/>
-                        <a:ea typeface="Calibri" charset="0"/>
-                        <a:cs typeface="Calibri" charset="0"/>
-                      </a:endParaRPr>
                     </a:p>
                   </a:txBody>
-                  <a:tcPr>
-                    <a:lnL w="6350" cap="flat" cmpd="sng" algn="ctr">
-                      <a:solidFill>
-                        <a:srgbClr val="CBD5E1"/>
-                      </a:solidFill>
-                      <a:prstDash val="solid"/>
-                      <a:round/>
-                      <a:headEnd type="none" w="med" len="med"/>
-                      <a:tailEnd type="none" w="med" len="med"/>
-                    </a:lnL>
-                    <a:lnR w="6350" cap="flat" cmpd="sng" algn="ctr">
-                      <a:solidFill>
-                        <a:srgbClr val="CBD5E1"/>
-                      </a:solidFill>
-                      <a:prstDash val="solid"/>
-                      <a:round/>
-                      <a:headEnd type="none" w="med" len="med"/>
-                      <a:tailEnd type="none" w="med" len="med"/>
-                    </a:lnR>
-                    <a:lnT w="6350" cap="flat" cmpd="sng" algn="ctr">
-                      <a:solidFill>
-                        <a:srgbClr val="CBD5E1"/>
-                      </a:solidFill>
-                      <a:prstDash val="solid"/>
-                      <a:round/>
-                      <a:headEnd type="none" w="med" len="med"/>
-                      <a:tailEnd type="none" w="med" len="med"/>
-                    </a:lnT>
-                    <a:lnB w="6350" cap="flat" cmpd="sng" algn="ctr">
-                      <a:solidFill>
-                        <a:srgbClr val="CBD5E1"/>
-                      </a:solidFill>
-                      <a:prstDash val="solid"/>
-                      <a:round/>
-                      <a:headEnd type="none" w="med" len="med"/>
-                      <a:tailEnd type="none" w="med" len="med"/>
-                    </a:lnB>
-                  </a:tcPr>
+                  <a:tcPr/>
                 </a:tc>
                 <a:tc>
                   <a:txBody>
                     <a:bodyPr/>
                     <a:lstStyle/>
                     <a:p>
-                      <a:pPr marL="0" indent="0" algn="ctr">
-                        <a:buNone/>
+                      <a:pPr algn="ctr">
+                        <a:defRPr sz="1200"/>
                       </a:pPr>
                       <a:r>
-                        <a:rPr lang="en-US" sz="1100" dirty="0">
-                          <a:solidFill>
-                            <a:srgbClr val="000000"/>
-                          </a:solidFill>
-                          <a:latin typeface="Calibri" pitchFamily="34" charset="0"/>
-                          <a:ea typeface="Calibri" pitchFamily="34" charset="-122"/>
-                          <a:cs typeface="Calibri" pitchFamily="34" charset="-120"/>
-                        </a:rPr>
+                        <a:rPr dirty="0"/>
                         <a:t>6</a:t>
                       </a:r>
-                      <a:endParaRPr lang="en-US" sz="1100" dirty="0">
-                        <a:latin typeface="Calibri" charset="0"/>
-                        <a:ea typeface="Calibri" charset="0"/>
-                        <a:cs typeface="Calibri" charset="0"/>
-                      </a:endParaRPr>
                     </a:p>
                   </a:txBody>
-                  <a:tcPr>
-                    <a:lnL w="6350" cap="flat" cmpd="sng" algn="ctr">
-                      <a:solidFill>
-                        <a:srgbClr val="CBD5E1"/>
-                      </a:solidFill>
-                      <a:prstDash val="solid"/>
-                      <a:round/>
-                      <a:headEnd type="none" w="med" len="med"/>
-                      <a:tailEnd type="none" w="med" len="med"/>
-                    </a:lnL>
-                    <a:lnR w="6350" cap="flat" cmpd="sng" algn="ctr">
-                      <a:solidFill>
-                        <a:srgbClr val="CBD5E1"/>
-                      </a:solidFill>
-                      <a:prstDash val="solid"/>
-                      <a:round/>
-                      <a:headEnd type="none" w="med" len="med"/>
-                      <a:tailEnd type="none" w="med" len="med"/>
-                    </a:lnR>
-                    <a:lnT w="6350" cap="flat" cmpd="sng" algn="ctr">
-                      <a:solidFill>
-                        <a:srgbClr val="CBD5E1"/>
-                      </a:solidFill>
-                      <a:prstDash val="solid"/>
-                      <a:round/>
-                      <a:headEnd type="none" w="med" len="med"/>
-                      <a:tailEnd type="none" w="med" len="med"/>
-                    </a:lnT>
-                    <a:lnB w="6350" cap="flat" cmpd="sng" algn="ctr">
-                      <a:solidFill>
-                        <a:srgbClr val="CBD5E1"/>
-                      </a:solidFill>
-                      <a:prstDash val="solid"/>
-                      <a:round/>
-                      <a:headEnd type="none" w="med" len="med"/>
-                      <a:tailEnd type="none" w="med" len="med"/>
-                    </a:lnB>
-                  </a:tcPr>
+                  <a:tcPr/>
                 </a:tc>
                 <a:tc>
                   <a:txBody>
                     <a:bodyPr/>
                     <a:lstStyle/>
                     <a:p>
-                      <a:pPr marL="0" indent="0" algn="ctr">
-                        <a:buNone/>
+                      <a:pPr algn="ctr">
+                        <a:defRPr sz="1200"/>
                       </a:pPr>
                       <a:r>
-                        <a:rPr lang="en-US" sz="1100" dirty="0">
-                          <a:solidFill>
-                            <a:srgbClr val="000000"/>
-                          </a:solidFill>
-                          <a:latin typeface="Calibri" pitchFamily="34" charset="0"/>
-                          <a:ea typeface="Calibri" pitchFamily="34" charset="-122"/>
-                          <a:cs typeface="Calibri" pitchFamily="34" charset="-120"/>
-                        </a:rPr>
+                        <a:rPr dirty="0"/>
                         <a:t>6</a:t>
                       </a:r>
-                      <a:endParaRPr lang="en-US" sz="1100" dirty="0">
-                        <a:latin typeface="Calibri" charset="0"/>
-                        <a:ea typeface="Calibri" charset="0"/>
-                        <a:cs typeface="Calibri" charset="0"/>
-                      </a:endParaRPr>
                     </a:p>
                   </a:txBody>
-                  <a:tcPr>
-                    <a:lnL w="6350" cap="flat" cmpd="sng" algn="ctr">
-                      <a:solidFill>
-                        <a:srgbClr val="CBD5E1"/>
-                      </a:solidFill>
-                      <a:prstDash val="solid"/>
-                      <a:round/>
-                      <a:headEnd type="none" w="med" len="med"/>
-                      <a:tailEnd type="none" w="med" len="med"/>
-                    </a:lnL>
-                    <a:lnR w="6350" cap="flat" cmpd="sng" algn="ctr">
-                      <a:solidFill>
-                        <a:srgbClr val="CBD5E1"/>
-                      </a:solidFill>
-                      <a:prstDash val="solid"/>
-                      <a:round/>
-                      <a:headEnd type="none" w="med" len="med"/>
-                      <a:tailEnd type="none" w="med" len="med"/>
-                    </a:lnR>
-                    <a:lnT w="6350" cap="flat" cmpd="sng" algn="ctr">
-                      <a:solidFill>
-                        <a:srgbClr val="CBD5E1"/>
-                      </a:solidFill>
-                      <a:prstDash val="solid"/>
-                      <a:round/>
-                      <a:headEnd type="none" w="med" len="med"/>
-                      <a:tailEnd type="none" w="med" len="med"/>
-                    </a:lnT>
-                    <a:lnB w="6350" cap="flat" cmpd="sng" algn="ctr">
-                      <a:solidFill>
-                        <a:srgbClr val="CBD5E1"/>
-                      </a:solidFill>
-                      <a:prstDash val="solid"/>
-                      <a:round/>
-                      <a:headEnd type="none" w="med" len="med"/>
-                      <a:tailEnd type="none" w="med" len="med"/>
-                    </a:lnB>
-                  </a:tcPr>
+                  <a:tcPr/>
                 </a:tc>
                 <a:extLst>
                   <a:ext uri="{0D108BD9-81ED-4DB2-BD59-A6C34878D82A}">
@@ -27864,331 +26684,81 @@
                   </a:ext>
                 </a:extLst>
               </a:tr>
-              <a:tr h="320040">
+              <a:tr h="226970">
                 <a:tc>
                   <a:txBody>
                     <a:bodyPr/>
                     <a:lstStyle/>
                     <a:p>
-                      <a:pPr marL="0" indent="0" algn="ctr">
-                        <a:buNone/>
+                      <a:pPr algn="ctr">
+                        <a:defRPr sz="1200"/>
                       </a:pPr>
                       <a:r>
-                        <a:rPr lang="en-US" sz="1100" dirty="0">
-                          <a:solidFill>
-                            <a:srgbClr val="000000"/>
-                          </a:solidFill>
-                          <a:latin typeface="Calibri" pitchFamily="34" charset="0"/>
-                          <a:ea typeface="Calibri" pitchFamily="34" charset="-122"/>
-                          <a:cs typeface="Calibri" pitchFamily="34" charset="-120"/>
-                        </a:rPr>
-                        <a:t>pa_3</a:t>
+                        <a:t>pa_2_rev</a:t>
                       </a:r>
-                      <a:endParaRPr lang="en-US" sz="1100" dirty="0">
-                        <a:latin typeface="Calibri" charset="0"/>
-                        <a:ea typeface="Calibri" charset="0"/>
-                        <a:cs typeface="Calibri" charset="0"/>
-                      </a:endParaRPr>
                     </a:p>
                   </a:txBody>
-                  <a:tcPr>
-                    <a:lnL w="6350" cap="flat" cmpd="sng" algn="ctr">
-                      <a:solidFill>
-                        <a:srgbClr val="CBD5E1"/>
-                      </a:solidFill>
-                      <a:prstDash val="solid"/>
-                      <a:round/>
-                      <a:headEnd type="none" w="med" len="med"/>
-                      <a:tailEnd type="none" w="med" len="med"/>
-                    </a:lnL>
-                    <a:lnR w="6350" cap="flat" cmpd="sng" algn="ctr">
-                      <a:solidFill>
-                        <a:srgbClr val="CBD5E1"/>
-                      </a:solidFill>
-                      <a:prstDash val="solid"/>
-                      <a:round/>
-                      <a:headEnd type="none" w="med" len="med"/>
-                      <a:tailEnd type="none" w="med" len="med"/>
-                    </a:lnR>
-                    <a:lnT w="6350" cap="flat" cmpd="sng" algn="ctr">
-                      <a:solidFill>
-                        <a:srgbClr val="CBD5E1"/>
-                      </a:solidFill>
-                      <a:prstDash val="solid"/>
-                      <a:round/>
-                      <a:headEnd type="none" w="med" len="med"/>
-                      <a:tailEnd type="none" w="med" len="med"/>
-                    </a:lnT>
-                    <a:lnB w="6350" cap="flat" cmpd="sng" algn="ctr">
-                      <a:solidFill>
-                        <a:srgbClr val="CBD5E1"/>
-                      </a:solidFill>
-                      <a:prstDash val="solid"/>
-                      <a:round/>
-                      <a:headEnd type="none" w="med" len="med"/>
-                      <a:tailEnd type="none" w="med" len="med"/>
-                    </a:lnB>
-                  </a:tcPr>
+                  <a:tcPr/>
                 </a:tc>
                 <a:tc>
                   <a:txBody>
                     <a:bodyPr/>
                     <a:lstStyle/>
                     <a:p>
-                      <a:pPr marL="0" indent="0" algn="ctr">
-                        <a:buNone/>
+                      <a:pPr algn="ctr">
+                        <a:defRPr sz="1200"/>
                       </a:pPr>
                       <a:r>
-                        <a:rPr lang="en-US" sz="1100" dirty="0">
-                          <a:solidFill>
-                            <a:srgbClr val="000000"/>
-                          </a:solidFill>
-                          <a:latin typeface="Calibri" pitchFamily="34" charset="0"/>
-                          <a:ea typeface="Calibri" pitchFamily="34" charset="-122"/>
-                          <a:cs typeface="Calibri" pitchFamily="34" charset="-120"/>
-                        </a:rPr>
-                        <a:t>E1</a:t>
+                        <a:t>-E0</a:t>
                       </a:r>
-                      <a:endParaRPr lang="en-US" sz="1100" dirty="0">
-                        <a:latin typeface="Calibri" charset="0"/>
-                        <a:ea typeface="Calibri" charset="0"/>
-                        <a:cs typeface="Calibri" charset="0"/>
-                      </a:endParaRPr>
                     </a:p>
                   </a:txBody>
-                  <a:tcPr>
-                    <a:lnL w="6350" cap="flat" cmpd="sng" algn="ctr">
-                      <a:solidFill>
-                        <a:srgbClr val="CBD5E1"/>
-                      </a:solidFill>
-                      <a:prstDash val="solid"/>
-                      <a:round/>
-                      <a:headEnd type="none" w="med" len="med"/>
-                      <a:tailEnd type="none" w="med" len="med"/>
-                    </a:lnL>
-                    <a:lnR w="6350" cap="flat" cmpd="sng" algn="ctr">
-                      <a:solidFill>
-                        <a:srgbClr val="CBD5E1"/>
-                      </a:solidFill>
-                      <a:prstDash val="solid"/>
-                      <a:round/>
-                      <a:headEnd type="none" w="med" len="med"/>
-                      <a:tailEnd type="none" w="med" len="med"/>
-                    </a:lnR>
-                    <a:lnT w="6350" cap="flat" cmpd="sng" algn="ctr">
-                      <a:solidFill>
-                        <a:srgbClr val="CBD5E1"/>
-                      </a:solidFill>
-                      <a:prstDash val="solid"/>
-                      <a:round/>
-                      <a:headEnd type="none" w="med" len="med"/>
-                      <a:tailEnd type="none" w="med" len="med"/>
-                    </a:lnT>
-                    <a:lnB w="6350" cap="flat" cmpd="sng" algn="ctr">
-                      <a:solidFill>
-                        <a:srgbClr val="CBD5E1"/>
-                      </a:solidFill>
-                      <a:prstDash val="solid"/>
-                      <a:round/>
-                      <a:headEnd type="none" w="med" len="med"/>
-                      <a:tailEnd type="none" w="med" len="med"/>
-                    </a:lnB>
-                  </a:tcPr>
+                  <a:tcPr/>
                 </a:tc>
                 <a:tc>
                   <a:txBody>
                     <a:bodyPr/>
                     <a:lstStyle/>
                     <a:p>
-                      <a:pPr marL="0" indent="0" algn="ctr">
-                        <a:buNone/>
+                      <a:pPr algn="ctr">
+                        <a:defRPr sz="1200"/>
                       </a:pPr>
                       <a:r>
-                        <a:rPr lang="en-US" sz="1100" dirty="0">
-                          <a:solidFill>
-                            <a:srgbClr val="000000"/>
-                          </a:solidFill>
-                          <a:latin typeface="Calibri" pitchFamily="34" charset="0"/>
-                          <a:ea typeface="Calibri" pitchFamily="34" charset="-122"/>
-                          <a:cs typeface="Calibri" pitchFamily="34" charset="-120"/>
-                        </a:rPr>
-                        <a:t>25 kW</a:t>
+                        <a:t>30</a:t>
                       </a:r>
-                      <a:endParaRPr lang="en-US" sz="1100" dirty="0">
-                        <a:latin typeface="Calibri" charset="0"/>
-                        <a:ea typeface="Calibri" charset="0"/>
-                        <a:cs typeface="Calibri" charset="0"/>
-                      </a:endParaRPr>
                     </a:p>
                   </a:txBody>
-                  <a:tcPr>
-                    <a:lnL w="6350" cap="flat" cmpd="sng" algn="ctr">
-                      <a:solidFill>
-                        <a:srgbClr val="CBD5E1"/>
-                      </a:solidFill>
-                      <a:prstDash val="solid"/>
-                      <a:round/>
-                      <a:headEnd type="none" w="med" len="med"/>
-                      <a:tailEnd type="none" w="med" len="med"/>
-                    </a:lnL>
-                    <a:lnR w="6350" cap="flat" cmpd="sng" algn="ctr">
-                      <a:solidFill>
-                        <a:srgbClr val="CBD5E1"/>
-                      </a:solidFill>
-                      <a:prstDash val="solid"/>
-                      <a:round/>
-                      <a:headEnd type="none" w="med" len="med"/>
-                      <a:tailEnd type="none" w="med" len="med"/>
-                    </a:lnR>
-                    <a:lnT w="6350" cap="flat" cmpd="sng" algn="ctr">
-                      <a:solidFill>
-                        <a:srgbClr val="CBD5E1"/>
-                      </a:solidFill>
-                      <a:prstDash val="solid"/>
-                      <a:round/>
-                      <a:headEnd type="none" w="med" len="med"/>
-                      <a:tailEnd type="none" w="med" len="med"/>
-                    </a:lnT>
-                    <a:lnB w="6350" cap="flat" cmpd="sng" algn="ctr">
-                      <a:solidFill>
-                        <a:srgbClr val="CBD5E1"/>
-                      </a:solidFill>
-                      <a:prstDash val="solid"/>
-                      <a:round/>
-                      <a:headEnd type="none" w="med" len="med"/>
-                      <a:tailEnd type="none" w="med" len="med"/>
-                    </a:lnB>
-                  </a:tcPr>
+                  <a:tcPr/>
                 </a:tc>
                 <a:tc>
                   <a:txBody>
                     <a:bodyPr/>
                     <a:lstStyle/>
                     <a:p>
-                      <a:pPr marL="0" indent="0" algn="ctr">
-                        <a:buNone/>
+                      <a:pPr algn="ctr">
+                        <a:defRPr sz="1200"/>
                       </a:pPr>
                       <a:r>
-                        <a:rPr lang="en-US" sz="1100" dirty="0">
-                          <a:solidFill>
-                            <a:srgbClr val="000000"/>
-                          </a:solidFill>
-                          <a:latin typeface="Calibri" pitchFamily="34" charset="0"/>
-                          <a:ea typeface="Calibri" pitchFamily="34" charset="-122"/>
-                          <a:cs typeface="Calibri" pitchFamily="34" charset="-120"/>
-                        </a:rPr>
-                        <a:t>5</a:t>
+                        <a:t>6</a:t>
                       </a:r>
-                      <a:endParaRPr lang="en-US" sz="1100" dirty="0">
-                        <a:latin typeface="Calibri" charset="0"/>
-                        <a:ea typeface="Calibri" charset="0"/>
-                        <a:cs typeface="Calibri" charset="0"/>
-                      </a:endParaRPr>
                     </a:p>
                   </a:txBody>
-                  <a:tcPr>
-                    <a:lnL w="6350" cap="flat" cmpd="sng" algn="ctr">
-                      <a:solidFill>
-                        <a:srgbClr val="CBD5E1"/>
-                      </a:solidFill>
-                      <a:prstDash val="solid"/>
-                      <a:round/>
-                      <a:headEnd type="none" w="med" len="med"/>
-                      <a:tailEnd type="none" w="med" len="med"/>
-                    </a:lnL>
-                    <a:lnR w="6350" cap="flat" cmpd="sng" algn="ctr">
-                      <a:solidFill>
-                        <a:srgbClr val="CBD5E1"/>
-                      </a:solidFill>
-                      <a:prstDash val="solid"/>
-                      <a:round/>
-                      <a:headEnd type="none" w="med" len="med"/>
-                      <a:tailEnd type="none" w="med" len="med"/>
-                    </a:lnR>
-                    <a:lnT w="6350" cap="flat" cmpd="sng" algn="ctr">
-                      <a:solidFill>
-                        <a:srgbClr val="CBD5E1"/>
-                      </a:solidFill>
-                      <a:prstDash val="solid"/>
-                      <a:round/>
-                      <a:headEnd type="none" w="med" len="med"/>
-                      <a:tailEnd type="none" w="med" len="med"/>
-                    </a:lnT>
-                    <a:lnB w="6350" cap="flat" cmpd="sng" algn="ctr">
-                      <a:solidFill>
-                        <a:srgbClr val="CBD5E1"/>
-                      </a:solidFill>
-                      <a:prstDash val="solid"/>
-                      <a:round/>
-                      <a:headEnd type="none" w="med" len="med"/>
-                      <a:tailEnd type="none" w="med" len="med"/>
-                    </a:lnB>
-                  </a:tcPr>
+                  <a:tcPr/>
                 </a:tc>
                 <a:tc>
                   <a:txBody>
                     <a:bodyPr/>
                     <a:lstStyle/>
                     <a:p>
-                      <a:pPr marL="0" indent="0" algn="ctr">
-                        <a:buNone/>
+                      <a:pPr algn="ctr">
+                        <a:defRPr sz="1200"/>
                       </a:pPr>
                       <a:r>
-                        <a:rPr lang="en-US" sz="1100" dirty="0">
-                          <a:solidFill>
-                            <a:srgbClr val="000000"/>
-                          </a:solidFill>
-                          <a:latin typeface="Calibri" pitchFamily="34" charset="0"/>
-                          <a:ea typeface="Calibri" pitchFamily="34" charset="-122"/>
-                          <a:cs typeface="Calibri" pitchFamily="34" charset="-120"/>
-                        </a:rPr>
-                        <a:t>4</a:t>
+                        <a:t>3</a:t>
                       </a:r>
-                      <a:endParaRPr lang="en-US" sz="1100" dirty="0">
-                        <a:latin typeface="Calibri" charset="0"/>
-                        <a:ea typeface="Calibri" charset="0"/>
-                        <a:cs typeface="Calibri" charset="0"/>
-                      </a:endParaRPr>
                     </a:p>
                   </a:txBody>
-                  <a:tcPr>
-                    <a:lnL w="6350" cap="flat" cmpd="sng" algn="ctr">
-                      <a:solidFill>
-                        <a:srgbClr val="CBD5E1"/>
-                      </a:solidFill>
-                      <a:prstDash val="solid"/>
-                      <a:round/>
-                      <a:headEnd type="none" w="med" len="med"/>
-                      <a:tailEnd type="none" w="med" len="med"/>
-                    </a:lnL>
-                    <a:lnR w="6350" cap="flat" cmpd="sng" algn="ctr">
-                      <a:solidFill>
-                        <a:srgbClr val="CBD5E1"/>
-                      </a:solidFill>
-                      <a:prstDash val="solid"/>
-                      <a:round/>
-                      <a:headEnd type="none" w="med" len="med"/>
-                      <a:tailEnd type="none" w="med" len="med"/>
-                    </a:lnR>
-                    <a:lnT w="6350" cap="flat" cmpd="sng" algn="ctr">
-                      <a:solidFill>
-                        <a:srgbClr val="CBD5E1"/>
-                      </a:solidFill>
-                      <a:prstDash val="solid"/>
-                      <a:round/>
-                      <a:headEnd type="none" w="med" len="med"/>
-                      <a:tailEnd type="none" w="med" len="med"/>
-                    </a:lnT>
-                    <a:lnB w="6350" cap="flat" cmpd="sng" algn="ctr">
-                      <a:solidFill>
-                        <a:srgbClr val="CBD5E1"/>
-                      </a:solidFill>
-                      <a:prstDash val="solid"/>
-                      <a:round/>
-                      <a:headEnd type="none" w="med" len="med"/>
-                      <a:tailEnd type="none" w="med" len="med"/>
-                    </a:lnB>
-                  </a:tcPr>
+                  <a:tcPr/>
                 </a:tc>
                 <a:extLst>
                   <a:ext uri="{0D108BD9-81ED-4DB2-BD59-A6C34878D82A}">
@@ -28196,331 +26766,81 @@
                   </a:ext>
                 </a:extLst>
               </a:tr>
-              <a:tr h="320040">
+              <a:tr h="226970">
                 <a:tc>
                   <a:txBody>
                     <a:bodyPr/>
                     <a:lstStyle/>
                     <a:p>
-                      <a:pPr marL="0" indent="0" algn="ctr">
-                        <a:buNone/>
+                      <a:pPr algn="ctr">
+                        <a:defRPr sz="1200"/>
                       </a:pPr>
                       <a:r>
-                        <a:rPr lang="en-US" sz="1100" dirty="0">
-                          <a:solidFill>
-                            <a:srgbClr val="000000"/>
-                          </a:solidFill>
-                          <a:latin typeface="Calibri" pitchFamily="34" charset="0"/>
-                          <a:ea typeface="Calibri" pitchFamily="34" charset="-122"/>
-                          <a:cs typeface="Calibri" pitchFamily="34" charset="-120"/>
-                        </a:rPr>
-                        <a:t>pa_6</a:t>
+                        <a:t>pa_3</a:t>
                       </a:r>
-                      <a:endParaRPr lang="en-US" sz="1100" dirty="0">
-                        <a:latin typeface="Calibri" charset="0"/>
-                        <a:ea typeface="Calibri" charset="0"/>
-                        <a:cs typeface="Calibri" charset="0"/>
-                      </a:endParaRPr>
                     </a:p>
                   </a:txBody>
-                  <a:tcPr>
-                    <a:lnL w="6350" cap="flat" cmpd="sng" algn="ctr">
-                      <a:solidFill>
-                        <a:srgbClr val="CBD5E1"/>
-                      </a:solidFill>
-                      <a:prstDash val="solid"/>
-                      <a:round/>
-                      <a:headEnd type="none" w="med" len="med"/>
-                      <a:tailEnd type="none" w="med" len="med"/>
-                    </a:lnL>
-                    <a:lnR w="6350" cap="flat" cmpd="sng" algn="ctr">
-                      <a:solidFill>
-                        <a:srgbClr val="CBD5E1"/>
-                      </a:solidFill>
-                      <a:prstDash val="solid"/>
-                      <a:round/>
-                      <a:headEnd type="none" w="med" len="med"/>
-                      <a:tailEnd type="none" w="med" len="med"/>
-                    </a:lnR>
-                    <a:lnT w="6350" cap="flat" cmpd="sng" algn="ctr">
-                      <a:solidFill>
-                        <a:srgbClr val="CBD5E1"/>
-                      </a:solidFill>
-                      <a:prstDash val="solid"/>
-                      <a:round/>
-                      <a:headEnd type="none" w="med" len="med"/>
-                      <a:tailEnd type="none" w="med" len="med"/>
-                    </a:lnT>
-                    <a:lnB w="6350" cap="flat" cmpd="sng" algn="ctr">
-                      <a:solidFill>
-                        <a:srgbClr val="CBD5E1"/>
-                      </a:solidFill>
-                      <a:prstDash val="solid"/>
-                      <a:round/>
-                      <a:headEnd type="none" w="med" len="med"/>
-                      <a:tailEnd type="none" w="med" len="med"/>
-                    </a:lnB>
-                  </a:tcPr>
+                  <a:tcPr/>
                 </a:tc>
                 <a:tc>
                   <a:txBody>
                     <a:bodyPr/>
                     <a:lstStyle/>
                     <a:p>
-                      <a:pPr marL="0" indent="0" algn="ctr">
-                        <a:buNone/>
+                      <a:pPr algn="ctr">
+                        <a:defRPr sz="1200"/>
                       </a:pPr>
                       <a:r>
-                        <a:rPr lang="en-US" sz="1100" dirty="0">
-                          <a:solidFill>
-                            <a:srgbClr val="000000"/>
-                          </a:solidFill>
-                          <a:latin typeface="Calibri" pitchFamily="34" charset="0"/>
-                          <a:ea typeface="Calibri" pitchFamily="34" charset="-122"/>
-                          <a:cs typeface="Calibri" pitchFamily="34" charset="-120"/>
-                        </a:rPr>
-                        <a:t>E5</a:t>
+                        <a:t>E1</a:t>
                       </a:r>
-                      <a:endParaRPr lang="en-US" sz="1100" dirty="0">
-                        <a:latin typeface="Calibri" charset="0"/>
-                        <a:ea typeface="Calibri" charset="0"/>
-                        <a:cs typeface="Calibri" charset="0"/>
-                      </a:endParaRPr>
                     </a:p>
                   </a:txBody>
-                  <a:tcPr>
-                    <a:lnL w="6350" cap="flat" cmpd="sng" algn="ctr">
-                      <a:solidFill>
-                        <a:srgbClr val="CBD5E1"/>
-                      </a:solidFill>
-                      <a:prstDash val="solid"/>
-                      <a:round/>
-                      <a:headEnd type="none" w="med" len="med"/>
-                      <a:tailEnd type="none" w="med" len="med"/>
-                    </a:lnL>
-                    <a:lnR w="6350" cap="flat" cmpd="sng" algn="ctr">
-                      <a:solidFill>
-                        <a:srgbClr val="CBD5E1"/>
-                      </a:solidFill>
-                      <a:prstDash val="solid"/>
-                      <a:round/>
-                      <a:headEnd type="none" w="med" len="med"/>
-                      <a:tailEnd type="none" w="med" len="med"/>
-                    </a:lnR>
-                    <a:lnT w="6350" cap="flat" cmpd="sng" algn="ctr">
-                      <a:solidFill>
-                        <a:srgbClr val="CBD5E1"/>
-                      </a:solidFill>
-                      <a:prstDash val="solid"/>
-                      <a:round/>
-                      <a:headEnd type="none" w="med" len="med"/>
-                      <a:tailEnd type="none" w="med" len="med"/>
-                    </a:lnT>
-                    <a:lnB w="6350" cap="flat" cmpd="sng" algn="ctr">
-                      <a:solidFill>
-                        <a:srgbClr val="CBD5E1"/>
-                      </a:solidFill>
-                      <a:prstDash val="solid"/>
-                      <a:round/>
-                      <a:headEnd type="none" w="med" len="med"/>
-                      <a:tailEnd type="none" w="med" len="med"/>
-                    </a:lnB>
-                  </a:tcPr>
+                  <a:tcPr/>
                 </a:tc>
                 <a:tc>
                   <a:txBody>
                     <a:bodyPr/>
                     <a:lstStyle/>
                     <a:p>
-                      <a:pPr marL="0" indent="0" algn="ctr">
-                        <a:buNone/>
+                      <a:pPr algn="ctr">
+                        <a:defRPr sz="1200"/>
                       </a:pPr>
                       <a:r>
-                        <a:rPr lang="en-US" sz="1100" dirty="0">
-                          <a:solidFill>
-                            <a:srgbClr val="000000"/>
-                          </a:solidFill>
-                          <a:latin typeface="Calibri" pitchFamily="34" charset="0"/>
-                          <a:ea typeface="Calibri" pitchFamily="34" charset="-122"/>
-                          <a:cs typeface="Calibri" pitchFamily="34" charset="-120"/>
-                        </a:rPr>
-                        <a:t>30 kW</a:t>
+                        <a:t>25</a:t>
                       </a:r>
-                      <a:endParaRPr lang="en-US" sz="1100" dirty="0">
-                        <a:latin typeface="Calibri" charset="0"/>
-                        <a:ea typeface="Calibri" charset="0"/>
-                        <a:cs typeface="Calibri" charset="0"/>
-                      </a:endParaRPr>
                     </a:p>
                   </a:txBody>
-                  <a:tcPr>
-                    <a:lnL w="6350" cap="flat" cmpd="sng" algn="ctr">
-                      <a:solidFill>
-                        <a:srgbClr val="CBD5E1"/>
-                      </a:solidFill>
-                      <a:prstDash val="solid"/>
-                      <a:round/>
-                      <a:headEnd type="none" w="med" len="med"/>
-                      <a:tailEnd type="none" w="med" len="med"/>
-                    </a:lnL>
-                    <a:lnR w="6350" cap="flat" cmpd="sng" algn="ctr">
-                      <a:solidFill>
-                        <a:srgbClr val="CBD5E1"/>
-                      </a:solidFill>
-                      <a:prstDash val="solid"/>
-                      <a:round/>
-                      <a:headEnd type="none" w="med" len="med"/>
-                      <a:tailEnd type="none" w="med" len="med"/>
-                    </a:lnR>
-                    <a:lnT w="6350" cap="flat" cmpd="sng" algn="ctr">
-                      <a:solidFill>
-                        <a:srgbClr val="CBD5E1"/>
-                      </a:solidFill>
-                      <a:prstDash val="solid"/>
-                      <a:round/>
-                      <a:headEnd type="none" w="med" len="med"/>
-                      <a:tailEnd type="none" w="med" len="med"/>
-                    </a:lnT>
-                    <a:lnB w="6350" cap="flat" cmpd="sng" algn="ctr">
-                      <a:solidFill>
-                        <a:srgbClr val="CBD5E1"/>
-                      </a:solidFill>
-                      <a:prstDash val="solid"/>
-                      <a:round/>
-                      <a:headEnd type="none" w="med" len="med"/>
-                      <a:tailEnd type="none" w="med" len="med"/>
-                    </a:lnB>
-                  </a:tcPr>
+                  <a:tcPr/>
                 </a:tc>
                 <a:tc>
                   <a:txBody>
                     <a:bodyPr/>
                     <a:lstStyle/>
                     <a:p>
-                      <a:pPr marL="0" indent="0" algn="ctr">
-                        <a:buNone/>
+                      <a:pPr algn="ctr">
+                        <a:defRPr sz="1200"/>
                       </a:pPr>
                       <a:r>
-                        <a:rPr lang="en-US" sz="1100" dirty="0">
-                          <a:solidFill>
-                            <a:srgbClr val="000000"/>
-                          </a:solidFill>
-                          <a:latin typeface="Calibri" pitchFamily="34" charset="0"/>
-                          <a:ea typeface="Calibri" pitchFamily="34" charset="-122"/>
-                          <a:cs typeface="Calibri" pitchFamily="34" charset="-120"/>
-                        </a:rPr>
-                        <a:t>6</a:t>
+                        <a:t>5</a:t>
                       </a:r>
-                      <a:endParaRPr lang="en-US" sz="1100" dirty="0">
-                        <a:latin typeface="Calibri" charset="0"/>
-                        <a:ea typeface="Calibri" charset="0"/>
-                        <a:cs typeface="Calibri" charset="0"/>
-                      </a:endParaRPr>
                     </a:p>
                   </a:txBody>
-                  <a:tcPr>
-                    <a:lnL w="6350" cap="flat" cmpd="sng" algn="ctr">
-                      <a:solidFill>
-                        <a:srgbClr val="CBD5E1"/>
-                      </a:solidFill>
-                      <a:prstDash val="solid"/>
-                      <a:round/>
-                      <a:headEnd type="none" w="med" len="med"/>
-                      <a:tailEnd type="none" w="med" len="med"/>
-                    </a:lnL>
-                    <a:lnR w="6350" cap="flat" cmpd="sng" algn="ctr">
-                      <a:solidFill>
-                        <a:srgbClr val="CBD5E1"/>
-                      </a:solidFill>
-                      <a:prstDash val="solid"/>
-                      <a:round/>
-                      <a:headEnd type="none" w="med" len="med"/>
-                      <a:tailEnd type="none" w="med" len="med"/>
-                    </a:lnR>
-                    <a:lnT w="6350" cap="flat" cmpd="sng" algn="ctr">
-                      <a:solidFill>
-                        <a:srgbClr val="CBD5E1"/>
-                      </a:solidFill>
-                      <a:prstDash val="solid"/>
-                      <a:round/>
-                      <a:headEnd type="none" w="med" len="med"/>
-                      <a:tailEnd type="none" w="med" len="med"/>
-                    </a:lnT>
-                    <a:lnB w="6350" cap="flat" cmpd="sng" algn="ctr">
-                      <a:solidFill>
-                        <a:srgbClr val="CBD5E1"/>
-                      </a:solidFill>
-                      <a:prstDash val="solid"/>
-                      <a:round/>
-                      <a:headEnd type="none" w="med" len="med"/>
-                      <a:tailEnd type="none" w="med" len="med"/>
-                    </a:lnB>
-                  </a:tcPr>
+                  <a:tcPr/>
                 </a:tc>
                 <a:tc>
                   <a:txBody>
                     <a:bodyPr/>
                     <a:lstStyle/>
                     <a:p>
-                      <a:pPr marL="0" indent="0" algn="ctr">
-                        <a:buNone/>
+                      <a:pPr algn="ctr">
+                        <a:defRPr sz="1200"/>
                       </a:pPr>
                       <a:r>
-                        <a:rPr lang="en-US" sz="1100" dirty="0">
-                          <a:solidFill>
-                            <a:srgbClr val="000000"/>
-                          </a:solidFill>
-                          <a:latin typeface="Calibri" pitchFamily="34" charset="0"/>
-                          <a:ea typeface="Calibri" pitchFamily="34" charset="-122"/>
-                          <a:cs typeface="Calibri" pitchFamily="34" charset="-120"/>
-                        </a:rPr>
-                        <a:t>6</a:t>
+                        <a:t>4</a:t>
                       </a:r>
-                      <a:endParaRPr lang="en-US" sz="1100" dirty="0">
-                        <a:latin typeface="Calibri" charset="0"/>
-                        <a:ea typeface="Calibri" charset="0"/>
-                        <a:cs typeface="Calibri" charset="0"/>
-                      </a:endParaRPr>
                     </a:p>
                   </a:txBody>
-                  <a:tcPr>
-                    <a:lnL w="6350" cap="flat" cmpd="sng" algn="ctr">
-                      <a:solidFill>
-                        <a:srgbClr val="CBD5E1"/>
-                      </a:solidFill>
-                      <a:prstDash val="solid"/>
-                      <a:round/>
-                      <a:headEnd type="none" w="med" len="med"/>
-                      <a:tailEnd type="none" w="med" len="med"/>
-                    </a:lnL>
-                    <a:lnR w="6350" cap="flat" cmpd="sng" algn="ctr">
-                      <a:solidFill>
-                        <a:srgbClr val="CBD5E1"/>
-                      </a:solidFill>
-                      <a:prstDash val="solid"/>
-                      <a:round/>
-                      <a:headEnd type="none" w="med" len="med"/>
-                      <a:tailEnd type="none" w="med" len="med"/>
-                    </a:lnR>
-                    <a:lnT w="6350" cap="flat" cmpd="sng" algn="ctr">
-                      <a:solidFill>
-                        <a:srgbClr val="CBD5E1"/>
-                      </a:solidFill>
-                      <a:prstDash val="solid"/>
-                      <a:round/>
-                      <a:headEnd type="none" w="med" len="med"/>
-                      <a:tailEnd type="none" w="med" len="med"/>
-                    </a:lnT>
-                    <a:lnB w="6350" cap="flat" cmpd="sng" algn="ctr">
-                      <a:solidFill>
-                        <a:srgbClr val="CBD5E1"/>
-                      </a:solidFill>
-                      <a:prstDash val="solid"/>
-                      <a:round/>
-                      <a:headEnd type="none" w="med" len="med"/>
-                      <a:tailEnd type="none" w="med" len="med"/>
-                    </a:lnB>
-                  </a:tcPr>
+                  <a:tcPr/>
                 </a:tc>
                 <a:extLst>
                   <a:ext uri="{0D108BD9-81ED-4DB2-BD59-A6C34878D82A}">
@@ -28528,331 +26848,81 @@
                   </a:ext>
                 </a:extLst>
               </a:tr>
-              <a:tr h="320040">
+              <a:tr h="226970">
                 <a:tc>
                   <a:txBody>
                     <a:bodyPr/>
                     <a:lstStyle/>
                     <a:p>
-                      <a:pPr marL="0" indent="0" algn="ctr">
-                        <a:buNone/>
+                      <a:pPr algn="ctr">
+                        <a:defRPr sz="1200"/>
                       </a:pPr>
                       <a:r>
-                        <a:rPr lang="en-US" sz="1100" dirty="0">
-                          <a:solidFill>
-                            <a:srgbClr val="000000"/>
-                          </a:solidFill>
-                          <a:latin typeface="Calibri" pitchFamily="34" charset="0"/>
-                          <a:ea typeface="Calibri" pitchFamily="34" charset="-122"/>
-                          <a:cs typeface="Calibri" pitchFamily="34" charset="-120"/>
-                        </a:rPr>
-                        <a:t>pa_7</a:t>
+                        <a:t>pa_3_rev</a:t>
                       </a:r>
-                      <a:endParaRPr lang="en-US" sz="1100" dirty="0">
-                        <a:latin typeface="Calibri" charset="0"/>
-                        <a:ea typeface="Calibri" charset="0"/>
-                        <a:cs typeface="Calibri" charset="0"/>
-                      </a:endParaRPr>
                     </a:p>
                   </a:txBody>
-                  <a:tcPr>
-                    <a:lnL w="6350" cap="flat" cmpd="sng" algn="ctr">
-                      <a:solidFill>
-                        <a:srgbClr val="CBD5E1"/>
-                      </a:solidFill>
-                      <a:prstDash val="solid"/>
-                      <a:round/>
-                      <a:headEnd type="none" w="med" len="med"/>
-                      <a:tailEnd type="none" w="med" len="med"/>
-                    </a:lnL>
-                    <a:lnR w="6350" cap="flat" cmpd="sng" algn="ctr">
-                      <a:solidFill>
-                        <a:srgbClr val="CBD5E1"/>
-                      </a:solidFill>
-                      <a:prstDash val="solid"/>
-                      <a:round/>
-                      <a:headEnd type="none" w="med" len="med"/>
-                      <a:tailEnd type="none" w="med" len="med"/>
-                    </a:lnR>
-                    <a:lnT w="6350" cap="flat" cmpd="sng" algn="ctr">
-                      <a:solidFill>
-                        <a:srgbClr val="CBD5E1"/>
-                      </a:solidFill>
-                      <a:prstDash val="solid"/>
-                      <a:round/>
-                      <a:headEnd type="none" w="med" len="med"/>
-                      <a:tailEnd type="none" w="med" len="med"/>
-                    </a:lnT>
-                    <a:lnB w="6350" cap="flat" cmpd="sng" algn="ctr">
-                      <a:solidFill>
-                        <a:srgbClr val="CBD5E1"/>
-                      </a:solidFill>
-                      <a:prstDash val="solid"/>
-                      <a:round/>
-                      <a:headEnd type="none" w="med" len="med"/>
-                      <a:tailEnd type="none" w="med" len="med"/>
-                    </a:lnB>
-                  </a:tcPr>
+                  <a:tcPr/>
                 </a:tc>
                 <a:tc>
                   <a:txBody>
                     <a:bodyPr/>
                     <a:lstStyle/>
                     <a:p>
-                      <a:pPr marL="0" indent="0" algn="ctr">
-                        <a:buNone/>
+                      <a:pPr algn="ctr">
+                        <a:defRPr sz="1200"/>
                       </a:pPr>
                       <a:r>
-                        <a:rPr lang="en-US" sz="1100" dirty="0">
-                          <a:solidFill>
-                            <a:srgbClr val="000000"/>
-                          </a:solidFill>
-                          <a:latin typeface="Calibri" pitchFamily="34" charset="0"/>
-                          <a:ea typeface="Calibri" pitchFamily="34" charset="-122"/>
-                          <a:cs typeface="Calibri" pitchFamily="34" charset="-120"/>
-                        </a:rPr>
-                        <a:t>E6</a:t>
+                        <a:t>-E1</a:t>
                       </a:r>
-                      <a:endParaRPr lang="en-US" sz="1100" dirty="0">
-                        <a:latin typeface="Calibri" charset="0"/>
-                        <a:ea typeface="Calibri" charset="0"/>
-                        <a:cs typeface="Calibri" charset="0"/>
-                      </a:endParaRPr>
                     </a:p>
                   </a:txBody>
-                  <a:tcPr>
-                    <a:lnL w="6350" cap="flat" cmpd="sng" algn="ctr">
-                      <a:solidFill>
-                        <a:srgbClr val="CBD5E1"/>
-                      </a:solidFill>
-                      <a:prstDash val="solid"/>
-                      <a:round/>
-                      <a:headEnd type="none" w="med" len="med"/>
-                      <a:tailEnd type="none" w="med" len="med"/>
-                    </a:lnL>
-                    <a:lnR w="6350" cap="flat" cmpd="sng" algn="ctr">
-                      <a:solidFill>
-                        <a:srgbClr val="CBD5E1"/>
-                      </a:solidFill>
-                      <a:prstDash val="solid"/>
-                      <a:round/>
-                      <a:headEnd type="none" w="med" len="med"/>
-                      <a:tailEnd type="none" w="med" len="med"/>
-                    </a:lnR>
-                    <a:lnT w="6350" cap="flat" cmpd="sng" algn="ctr">
-                      <a:solidFill>
-                        <a:srgbClr val="CBD5E1"/>
-                      </a:solidFill>
-                      <a:prstDash val="solid"/>
-                      <a:round/>
-                      <a:headEnd type="none" w="med" len="med"/>
-                      <a:tailEnd type="none" w="med" len="med"/>
-                    </a:lnT>
-                    <a:lnB w="6350" cap="flat" cmpd="sng" algn="ctr">
-                      <a:solidFill>
-                        <a:srgbClr val="CBD5E1"/>
-                      </a:solidFill>
-                      <a:prstDash val="solid"/>
-                      <a:round/>
-                      <a:headEnd type="none" w="med" len="med"/>
-                      <a:tailEnd type="none" w="med" len="med"/>
-                    </a:lnB>
-                  </a:tcPr>
+                  <a:tcPr/>
                 </a:tc>
                 <a:tc>
                   <a:txBody>
                     <a:bodyPr/>
                     <a:lstStyle/>
                     <a:p>
-                      <a:pPr marL="0" indent="0" algn="ctr">
-                        <a:buNone/>
+                      <a:pPr algn="ctr">
+                        <a:defRPr sz="1200"/>
                       </a:pPr>
                       <a:r>
-                        <a:rPr lang="en-US" sz="1100" dirty="0">
-                          <a:solidFill>
-                            <a:srgbClr val="000000"/>
-                          </a:solidFill>
-                          <a:latin typeface="Calibri" pitchFamily="34" charset="0"/>
-                          <a:ea typeface="Calibri" pitchFamily="34" charset="-122"/>
-                          <a:cs typeface="Calibri" pitchFamily="34" charset="-120"/>
-                        </a:rPr>
-                        <a:t>30 kW</a:t>
+                        <a:t>30</a:t>
                       </a:r>
-                      <a:endParaRPr lang="en-US" sz="1100" dirty="0">
-                        <a:latin typeface="Calibri" charset="0"/>
-                        <a:ea typeface="Calibri" charset="0"/>
-                        <a:cs typeface="Calibri" charset="0"/>
-                      </a:endParaRPr>
                     </a:p>
                   </a:txBody>
-                  <a:tcPr>
-                    <a:lnL w="6350" cap="flat" cmpd="sng" algn="ctr">
-                      <a:solidFill>
-                        <a:srgbClr val="CBD5E1"/>
-                      </a:solidFill>
-                      <a:prstDash val="solid"/>
-                      <a:round/>
-                      <a:headEnd type="none" w="med" len="med"/>
-                      <a:tailEnd type="none" w="med" len="med"/>
-                    </a:lnL>
-                    <a:lnR w="6350" cap="flat" cmpd="sng" algn="ctr">
-                      <a:solidFill>
-                        <a:srgbClr val="CBD5E1"/>
-                      </a:solidFill>
-                      <a:prstDash val="solid"/>
-                      <a:round/>
-                      <a:headEnd type="none" w="med" len="med"/>
-                      <a:tailEnd type="none" w="med" len="med"/>
-                    </a:lnR>
-                    <a:lnT w="6350" cap="flat" cmpd="sng" algn="ctr">
-                      <a:solidFill>
-                        <a:srgbClr val="CBD5E1"/>
-                      </a:solidFill>
-                      <a:prstDash val="solid"/>
-                      <a:round/>
-                      <a:headEnd type="none" w="med" len="med"/>
-                      <a:tailEnd type="none" w="med" len="med"/>
-                    </a:lnT>
-                    <a:lnB w="6350" cap="flat" cmpd="sng" algn="ctr">
-                      <a:solidFill>
-                        <a:srgbClr val="CBD5E1"/>
-                      </a:solidFill>
-                      <a:prstDash val="solid"/>
-                      <a:round/>
-                      <a:headEnd type="none" w="med" len="med"/>
-                      <a:tailEnd type="none" w="med" len="med"/>
-                    </a:lnB>
-                  </a:tcPr>
+                  <a:tcPr/>
                 </a:tc>
                 <a:tc>
                   <a:txBody>
                     <a:bodyPr/>
                     <a:lstStyle/>
                     <a:p>
-                      <a:pPr marL="0" indent="0" algn="ctr">
-                        <a:buNone/>
+                      <a:pPr algn="ctr">
+                        <a:defRPr sz="1200"/>
                       </a:pPr>
                       <a:r>
-                        <a:rPr lang="en-US" sz="1100" dirty="0">
-                          <a:solidFill>
-                            <a:srgbClr val="000000"/>
-                          </a:solidFill>
-                          <a:latin typeface="Calibri" pitchFamily="34" charset="0"/>
-                          <a:ea typeface="Calibri" pitchFamily="34" charset="-122"/>
-                          <a:cs typeface="Calibri" pitchFamily="34" charset="-120"/>
-                        </a:rPr>
                         <a:t>6</a:t>
                       </a:r>
-                      <a:endParaRPr lang="en-US" sz="1100" dirty="0">
-                        <a:latin typeface="Calibri" charset="0"/>
-                        <a:ea typeface="Calibri" charset="0"/>
-                        <a:cs typeface="Calibri" charset="0"/>
-                      </a:endParaRPr>
                     </a:p>
                   </a:txBody>
-                  <a:tcPr>
-                    <a:lnL w="6350" cap="flat" cmpd="sng" algn="ctr">
-                      <a:solidFill>
-                        <a:srgbClr val="CBD5E1"/>
-                      </a:solidFill>
-                      <a:prstDash val="solid"/>
-                      <a:round/>
-                      <a:headEnd type="none" w="med" len="med"/>
-                      <a:tailEnd type="none" w="med" len="med"/>
-                    </a:lnL>
-                    <a:lnR w="6350" cap="flat" cmpd="sng" algn="ctr">
-                      <a:solidFill>
-                        <a:srgbClr val="CBD5E1"/>
-                      </a:solidFill>
-                      <a:prstDash val="solid"/>
-                      <a:round/>
-                      <a:headEnd type="none" w="med" len="med"/>
-                      <a:tailEnd type="none" w="med" len="med"/>
-                    </a:lnR>
-                    <a:lnT w="6350" cap="flat" cmpd="sng" algn="ctr">
-                      <a:solidFill>
-                        <a:srgbClr val="CBD5E1"/>
-                      </a:solidFill>
-                      <a:prstDash val="solid"/>
-                      <a:round/>
-                      <a:headEnd type="none" w="med" len="med"/>
-                      <a:tailEnd type="none" w="med" len="med"/>
-                    </a:lnT>
-                    <a:lnB w="6350" cap="flat" cmpd="sng" algn="ctr">
-                      <a:solidFill>
-                        <a:srgbClr val="CBD5E1"/>
-                      </a:solidFill>
-                      <a:prstDash val="solid"/>
-                      <a:round/>
-                      <a:headEnd type="none" w="med" len="med"/>
-                      <a:tailEnd type="none" w="med" len="med"/>
-                    </a:lnB>
-                  </a:tcPr>
+                  <a:tcPr/>
                 </a:tc>
                 <a:tc>
                   <a:txBody>
                     <a:bodyPr/>
                     <a:lstStyle/>
                     <a:p>
-                      <a:pPr marL="0" indent="0" algn="ctr">
-                        <a:buNone/>
+                      <a:pPr algn="ctr">
+                        <a:defRPr sz="1200"/>
                       </a:pPr>
                       <a:r>
-                        <a:rPr lang="en-US" sz="1100" dirty="0">
-                          <a:solidFill>
-                            <a:srgbClr val="000000"/>
-                          </a:solidFill>
-                          <a:latin typeface="Calibri" pitchFamily="34" charset="0"/>
-                          <a:ea typeface="Calibri" pitchFamily="34" charset="-122"/>
-                          <a:cs typeface="Calibri" pitchFamily="34" charset="-120"/>
-                        </a:rPr>
                         <a:t>6</a:t>
                       </a:r>
-                      <a:endParaRPr lang="en-US" sz="1100" dirty="0">
-                        <a:latin typeface="Calibri" charset="0"/>
-                        <a:ea typeface="Calibri" charset="0"/>
-                        <a:cs typeface="Calibri" charset="0"/>
-                      </a:endParaRPr>
                     </a:p>
                   </a:txBody>
-                  <a:tcPr>
-                    <a:lnL w="6350" cap="flat" cmpd="sng" algn="ctr">
-                      <a:solidFill>
-                        <a:srgbClr val="CBD5E1"/>
-                      </a:solidFill>
-                      <a:prstDash val="solid"/>
-                      <a:round/>
-                      <a:headEnd type="none" w="med" len="med"/>
-                      <a:tailEnd type="none" w="med" len="med"/>
-                    </a:lnL>
-                    <a:lnR w="6350" cap="flat" cmpd="sng" algn="ctr">
-                      <a:solidFill>
-                        <a:srgbClr val="CBD5E1"/>
-                      </a:solidFill>
-                      <a:prstDash val="solid"/>
-                      <a:round/>
-                      <a:headEnd type="none" w="med" len="med"/>
-                      <a:tailEnd type="none" w="med" len="med"/>
-                    </a:lnR>
-                    <a:lnT w="6350" cap="flat" cmpd="sng" algn="ctr">
-                      <a:solidFill>
-                        <a:srgbClr val="CBD5E1"/>
-                      </a:solidFill>
-                      <a:prstDash val="solid"/>
-                      <a:round/>
-                      <a:headEnd type="none" w="med" len="med"/>
-                      <a:tailEnd type="none" w="med" len="med"/>
-                    </a:lnT>
-                    <a:lnB w="6350" cap="flat" cmpd="sng" algn="ctr">
-                      <a:solidFill>
-                        <a:srgbClr val="CBD5E1"/>
-                      </a:solidFill>
-                      <a:prstDash val="solid"/>
-                      <a:round/>
-                      <a:headEnd type="none" w="med" len="med"/>
-                      <a:tailEnd type="none" w="med" len="med"/>
-                    </a:lnB>
-                  </a:tcPr>
+                  <a:tcPr/>
                 </a:tc>
                 <a:extLst>
                   <a:ext uri="{0D108BD9-81ED-4DB2-BD59-A6C34878D82A}">
@@ -28860,331 +26930,82 @@
                   </a:ext>
                 </a:extLst>
               </a:tr>
-              <a:tr h="320040">
+              <a:tr h="226970">
                 <a:tc>
                   <a:txBody>
                     <a:bodyPr/>
                     <a:lstStyle/>
                     <a:p>
-                      <a:pPr marL="0" indent="0" algn="ctr">
-                        <a:buNone/>
+                      <a:pPr algn="ctr">
+                        <a:defRPr sz="1200"/>
                       </a:pPr>
                       <a:r>
-                        <a:rPr lang="en-US" sz="1100" dirty="0">
-                          <a:solidFill>
-                            <a:srgbClr val="000000"/>
-                          </a:solidFill>
-                          <a:latin typeface="Calibri" pitchFamily="34" charset="0"/>
-                          <a:ea typeface="Calibri" pitchFamily="34" charset="-122"/>
-                          <a:cs typeface="Calibri" pitchFamily="34" charset="-120"/>
-                        </a:rPr>
-                        <a:t>pa_8_rev</a:t>
+                        <a:rPr dirty="0"/>
+                        <a:t>pa_6</a:t>
                       </a:r>
-                      <a:endParaRPr lang="en-US" sz="1100" dirty="0">
-                        <a:latin typeface="Calibri" charset="0"/>
-                        <a:ea typeface="Calibri" charset="0"/>
-                        <a:cs typeface="Calibri" charset="0"/>
-                      </a:endParaRPr>
                     </a:p>
                   </a:txBody>
-                  <a:tcPr>
-                    <a:lnL w="6350" cap="flat" cmpd="sng" algn="ctr">
-                      <a:solidFill>
-                        <a:srgbClr val="CBD5E1"/>
-                      </a:solidFill>
-                      <a:prstDash val="solid"/>
-                      <a:round/>
-                      <a:headEnd type="none" w="med" len="med"/>
-                      <a:tailEnd type="none" w="med" len="med"/>
-                    </a:lnL>
-                    <a:lnR w="6350" cap="flat" cmpd="sng" algn="ctr">
-                      <a:solidFill>
-                        <a:srgbClr val="CBD5E1"/>
-                      </a:solidFill>
-                      <a:prstDash val="solid"/>
-                      <a:round/>
-                      <a:headEnd type="none" w="med" len="med"/>
-                      <a:tailEnd type="none" w="med" len="med"/>
-                    </a:lnR>
-                    <a:lnT w="6350" cap="flat" cmpd="sng" algn="ctr">
-                      <a:solidFill>
-                        <a:srgbClr val="CBD5E1"/>
-                      </a:solidFill>
-                      <a:prstDash val="solid"/>
-                      <a:round/>
-                      <a:headEnd type="none" w="med" len="med"/>
-                      <a:tailEnd type="none" w="med" len="med"/>
-                    </a:lnT>
-                    <a:lnB w="6350" cap="flat" cmpd="sng" algn="ctr">
-                      <a:solidFill>
-                        <a:srgbClr val="CBD5E1"/>
-                      </a:solidFill>
-                      <a:prstDash val="solid"/>
-                      <a:round/>
-                      <a:headEnd type="none" w="med" len="med"/>
-                      <a:tailEnd type="none" w="med" len="med"/>
-                    </a:lnB>
-                  </a:tcPr>
+                  <a:tcPr/>
                 </a:tc>
                 <a:tc>
                   <a:txBody>
                     <a:bodyPr/>
                     <a:lstStyle/>
                     <a:p>
-                      <a:pPr marL="0" indent="0" algn="ctr">
-                        <a:buNone/>
+                      <a:pPr algn="ctr">
+                        <a:defRPr sz="1200"/>
                       </a:pPr>
                       <a:r>
-                        <a:rPr lang="en-US" sz="1100" dirty="0">
-                          <a:solidFill>
-                            <a:srgbClr val="000000"/>
-                          </a:solidFill>
-                          <a:latin typeface="Calibri" pitchFamily="34" charset="0"/>
-                          <a:ea typeface="Calibri" pitchFamily="34" charset="-122"/>
-                          <a:cs typeface="Calibri" pitchFamily="34" charset="-120"/>
-                        </a:rPr>
-                        <a:t>-E7</a:t>
+                        <a:t>E5</a:t>
                       </a:r>
-                      <a:endParaRPr lang="en-US" sz="1100" dirty="0">
-                        <a:latin typeface="Calibri" charset="0"/>
-                        <a:ea typeface="Calibri" charset="0"/>
-                        <a:cs typeface="Calibri" charset="0"/>
-                      </a:endParaRPr>
                     </a:p>
                   </a:txBody>
-                  <a:tcPr>
-                    <a:lnL w="6350" cap="flat" cmpd="sng" algn="ctr">
-                      <a:solidFill>
-                        <a:srgbClr val="CBD5E1"/>
-                      </a:solidFill>
-                      <a:prstDash val="solid"/>
-                      <a:round/>
-                      <a:headEnd type="none" w="med" len="med"/>
-                      <a:tailEnd type="none" w="med" len="med"/>
-                    </a:lnL>
-                    <a:lnR w="6350" cap="flat" cmpd="sng" algn="ctr">
-                      <a:solidFill>
-                        <a:srgbClr val="CBD5E1"/>
-                      </a:solidFill>
-                      <a:prstDash val="solid"/>
-                      <a:round/>
-                      <a:headEnd type="none" w="med" len="med"/>
-                      <a:tailEnd type="none" w="med" len="med"/>
-                    </a:lnR>
-                    <a:lnT w="6350" cap="flat" cmpd="sng" algn="ctr">
-                      <a:solidFill>
-                        <a:srgbClr val="CBD5E1"/>
-                      </a:solidFill>
-                      <a:prstDash val="solid"/>
-                      <a:round/>
-                      <a:headEnd type="none" w="med" len="med"/>
-                      <a:tailEnd type="none" w="med" len="med"/>
-                    </a:lnT>
-                    <a:lnB w="6350" cap="flat" cmpd="sng" algn="ctr">
-                      <a:solidFill>
-                        <a:srgbClr val="CBD5E1"/>
-                      </a:solidFill>
-                      <a:prstDash val="solid"/>
-                      <a:round/>
-                      <a:headEnd type="none" w="med" len="med"/>
-                      <a:tailEnd type="none" w="med" len="med"/>
-                    </a:lnB>
-                  </a:tcPr>
+                  <a:tcPr/>
                 </a:tc>
                 <a:tc>
                   <a:txBody>
                     <a:bodyPr/>
                     <a:lstStyle/>
                     <a:p>
-                      <a:pPr marL="0" indent="0" algn="ctr">
-                        <a:buNone/>
+                      <a:pPr algn="ctr">
+                        <a:defRPr sz="1200"/>
                       </a:pPr>
                       <a:r>
-                        <a:rPr lang="en-US" sz="1100" dirty="0">
-                          <a:solidFill>
-                            <a:srgbClr val="000000"/>
-                          </a:solidFill>
-                          <a:latin typeface="Calibri" pitchFamily="34" charset="0"/>
-                          <a:ea typeface="Calibri" pitchFamily="34" charset="-122"/>
-                          <a:cs typeface="Calibri" pitchFamily="34" charset="-120"/>
-                        </a:rPr>
-                        <a:t>50 kW</a:t>
+                        <a:t>30</a:t>
                       </a:r>
-                      <a:endParaRPr lang="en-US" sz="1100" dirty="0">
-                        <a:latin typeface="Calibri" charset="0"/>
-                        <a:ea typeface="Calibri" charset="0"/>
-                        <a:cs typeface="Calibri" charset="0"/>
-                      </a:endParaRPr>
                     </a:p>
                   </a:txBody>
-                  <a:tcPr>
-                    <a:lnL w="6350" cap="flat" cmpd="sng" algn="ctr">
-                      <a:solidFill>
-                        <a:srgbClr val="CBD5E1"/>
-                      </a:solidFill>
-                      <a:prstDash val="solid"/>
-                      <a:round/>
-                      <a:headEnd type="none" w="med" len="med"/>
-                      <a:tailEnd type="none" w="med" len="med"/>
-                    </a:lnL>
-                    <a:lnR w="6350" cap="flat" cmpd="sng" algn="ctr">
-                      <a:solidFill>
-                        <a:srgbClr val="CBD5E1"/>
-                      </a:solidFill>
-                      <a:prstDash val="solid"/>
-                      <a:round/>
-                      <a:headEnd type="none" w="med" len="med"/>
-                      <a:tailEnd type="none" w="med" len="med"/>
-                    </a:lnR>
-                    <a:lnT w="6350" cap="flat" cmpd="sng" algn="ctr">
-                      <a:solidFill>
-                        <a:srgbClr val="CBD5E1"/>
-                      </a:solidFill>
-                      <a:prstDash val="solid"/>
-                      <a:round/>
-                      <a:headEnd type="none" w="med" len="med"/>
-                      <a:tailEnd type="none" w="med" len="med"/>
-                    </a:lnT>
-                    <a:lnB w="6350" cap="flat" cmpd="sng" algn="ctr">
-                      <a:solidFill>
-                        <a:srgbClr val="CBD5E1"/>
-                      </a:solidFill>
-                      <a:prstDash val="solid"/>
-                      <a:round/>
-                      <a:headEnd type="none" w="med" len="med"/>
-                      <a:tailEnd type="none" w="med" len="med"/>
-                    </a:lnB>
-                  </a:tcPr>
+                  <a:tcPr/>
                 </a:tc>
                 <a:tc>
                   <a:txBody>
                     <a:bodyPr/>
                     <a:lstStyle/>
                     <a:p>
-                      <a:pPr marL="0" indent="0" algn="ctr">
-                        <a:buNone/>
+                      <a:pPr algn="ctr">
+                        <a:defRPr sz="1200"/>
                       </a:pPr>
                       <a:r>
-                        <a:rPr lang="en-US" sz="1100" dirty="0">
-                          <a:solidFill>
-                            <a:srgbClr val="000000"/>
-                          </a:solidFill>
-                          <a:latin typeface="Calibri" pitchFamily="34" charset="0"/>
-                          <a:ea typeface="Calibri" pitchFamily="34" charset="-122"/>
-                          <a:cs typeface="Calibri" pitchFamily="34" charset="-120"/>
-                        </a:rPr>
-                        <a:t>10</a:t>
+                        <a:t>6</a:t>
                       </a:r>
-                      <a:endParaRPr lang="en-US" sz="1100" dirty="0">
-                        <a:latin typeface="Calibri" charset="0"/>
-                        <a:ea typeface="Calibri" charset="0"/>
-                        <a:cs typeface="Calibri" charset="0"/>
-                      </a:endParaRPr>
                     </a:p>
                   </a:txBody>
-                  <a:tcPr>
-                    <a:lnL w="6350" cap="flat" cmpd="sng" algn="ctr">
-                      <a:solidFill>
-                        <a:srgbClr val="CBD5E1"/>
-                      </a:solidFill>
-                      <a:prstDash val="solid"/>
-                      <a:round/>
-                      <a:headEnd type="none" w="med" len="med"/>
-                      <a:tailEnd type="none" w="med" len="med"/>
-                    </a:lnL>
-                    <a:lnR w="6350" cap="flat" cmpd="sng" algn="ctr">
-                      <a:solidFill>
-                        <a:srgbClr val="CBD5E1"/>
-                      </a:solidFill>
-                      <a:prstDash val="solid"/>
-                      <a:round/>
-                      <a:headEnd type="none" w="med" len="med"/>
-                      <a:tailEnd type="none" w="med" len="med"/>
-                    </a:lnR>
-                    <a:lnT w="6350" cap="flat" cmpd="sng" algn="ctr">
-                      <a:solidFill>
-                        <a:srgbClr val="CBD5E1"/>
-                      </a:solidFill>
-                      <a:prstDash val="solid"/>
-                      <a:round/>
-                      <a:headEnd type="none" w="med" len="med"/>
-                      <a:tailEnd type="none" w="med" len="med"/>
-                    </a:lnT>
-                    <a:lnB w="6350" cap="flat" cmpd="sng" algn="ctr">
-                      <a:solidFill>
-                        <a:srgbClr val="CBD5E1"/>
-                      </a:solidFill>
-                      <a:prstDash val="solid"/>
-                      <a:round/>
-                      <a:headEnd type="none" w="med" len="med"/>
-                      <a:tailEnd type="none" w="med" len="med"/>
-                    </a:lnB>
-                  </a:tcPr>
+                  <a:tcPr/>
                 </a:tc>
                 <a:tc>
                   <a:txBody>
                     <a:bodyPr/>
                     <a:lstStyle/>
                     <a:p>
-                      <a:pPr marL="0" indent="0" algn="ctr">
-                        <a:buNone/>
+                      <a:pPr algn="ctr">
+                        <a:defRPr sz="1200"/>
                       </a:pPr>
                       <a:r>
-                        <a:rPr lang="en-US" sz="1100" dirty="0">
-                          <a:solidFill>
-                            <a:srgbClr val="000000"/>
-                          </a:solidFill>
-                          <a:latin typeface="Calibri" pitchFamily="34" charset="0"/>
-                          <a:ea typeface="Calibri" pitchFamily="34" charset="-122"/>
-                          <a:cs typeface="Calibri" pitchFamily="34" charset="-120"/>
-                        </a:rPr>
                         <a:t>6</a:t>
                       </a:r>
-                      <a:endParaRPr lang="en-US" sz="1100" dirty="0">
-                        <a:latin typeface="Calibri" charset="0"/>
-                        <a:ea typeface="Calibri" charset="0"/>
-                        <a:cs typeface="Calibri" charset="0"/>
-                      </a:endParaRPr>
                     </a:p>
                   </a:txBody>
-                  <a:tcPr>
-                    <a:lnL w="6350" cap="flat" cmpd="sng" algn="ctr">
-                      <a:solidFill>
-                        <a:srgbClr val="CBD5E1"/>
-                      </a:solidFill>
-                      <a:prstDash val="solid"/>
-                      <a:round/>
-                      <a:headEnd type="none" w="med" len="med"/>
-                      <a:tailEnd type="none" w="med" len="med"/>
-                    </a:lnL>
-                    <a:lnR w="6350" cap="flat" cmpd="sng" algn="ctr">
-                      <a:solidFill>
-                        <a:srgbClr val="CBD5E1"/>
-                      </a:solidFill>
-                      <a:prstDash val="solid"/>
-                      <a:round/>
-                      <a:headEnd type="none" w="med" len="med"/>
-                      <a:tailEnd type="none" w="med" len="med"/>
-                    </a:lnR>
-                    <a:lnT w="6350" cap="flat" cmpd="sng" algn="ctr">
-                      <a:solidFill>
-                        <a:srgbClr val="CBD5E1"/>
-                      </a:solidFill>
-                      <a:prstDash val="solid"/>
-                      <a:round/>
-                      <a:headEnd type="none" w="med" len="med"/>
-                      <a:tailEnd type="none" w="med" len="med"/>
-                    </a:lnT>
-                    <a:lnB w="6350" cap="flat" cmpd="sng" algn="ctr">
-                      <a:solidFill>
-                        <a:srgbClr val="CBD5E1"/>
-                      </a:solidFill>
-                      <a:prstDash val="solid"/>
-                      <a:round/>
-                      <a:headEnd type="none" w="med" len="med"/>
-                      <a:tailEnd type="none" w="med" len="med"/>
-                    </a:lnB>
-                  </a:tcPr>
+                  <a:tcPr/>
                 </a:tc>
                 <a:extLst>
                   <a:ext uri="{0D108BD9-81ED-4DB2-BD59-A6C34878D82A}">
@@ -29192,309 +27013,81 @@
                   </a:ext>
                 </a:extLst>
               </a:tr>
-              <a:tr h="320040">
+              <a:tr h="226970">
                 <a:tc>
                   <a:txBody>
                     <a:bodyPr/>
                     <a:lstStyle/>
                     <a:p>
-                      <a:pPr marL="0" indent="0" algn="ctr">
-                        <a:buNone/>
+                      <a:pPr algn="ctr">
+                        <a:defRPr sz="1200"/>
                       </a:pPr>
                       <a:r>
-                        <a:rPr lang="en-US" sz="1100" b="1" dirty="0">
-                          <a:solidFill>
-                            <a:srgbClr val="000000"/>
-                          </a:solidFill>
-                          <a:latin typeface="Calibri" pitchFamily="34" charset="0"/>
-                          <a:ea typeface="Calibri" pitchFamily="34" charset="-122"/>
-                          <a:cs typeface="Calibri" pitchFamily="34" charset="-120"/>
-                        </a:rPr>
-                        <a:t>TOTAL</a:t>
+                        <a:t>pa_6_rev</a:t>
                       </a:r>
-                      <a:endParaRPr lang="en-US" sz="1100" dirty="0">
-                        <a:latin typeface="Calibri" charset="0"/>
-                        <a:ea typeface="Calibri" charset="0"/>
-                        <a:cs typeface="Calibri" charset="0"/>
-                      </a:endParaRPr>
                     </a:p>
                   </a:txBody>
-                  <a:tcPr>
-                    <a:lnL w="6350" cap="flat" cmpd="sng" algn="ctr">
-                      <a:solidFill>
-                        <a:srgbClr val="CBD5E1"/>
-                      </a:solidFill>
-                      <a:prstDash val="solid"/>
-                      <a:round/>
-                      <a:headEnd type="none" w="med" len="med"/>
-                      <a:tailEnd type="none" w="med" len="med"/>
-                    </a:lnL>
-                    <a:lnR w="6350" cap="flat" cmpd="sng" algn="ctr">
-                      <a:solidFill>
-                        <a:srgbClr val="CBD5E1"/>
-                      </a:solidFill>
-                      <a:prstDash val="solid"/>
-                      <a:round/>
-                      <a:headEnd type="none" w="med" len="med"/>
-                      <a:tailEnd type="none" w="med" len="med"/>
-                    </a:lnR>
-                    <a:lnT w="6350" cap="flat" cmpd="sng" algn="ctr">
-                      <a:solidFill>
-                        <a:srgbClr val="CBD5E1"/>
-                      </a:solidFill>
-                      <a:prstDash val="solid"/>
-                      <a:round/>
-                      <a:headEnd type="none" w="med" len="med"/>
-                      <a:tailEnd type="none" w="med" len="med"/>
-                    </a:lnT>
-                    <a:lnB w="6350" cap="flat" cmpd="sng" algn="ctr">
-                      <a:solidFill>
-                        <a:srgbClr val="CBD5E1"/>
-                      </a:solidFill>
-                      <a:prstDash val="solid"/>
-                      <a:round/>
-                      <a:headEnd type="none" w="med" len="med"/>
-                      <a:tailEnd type="none" w="med" len="med"/>
-                    </a:lnB>
-                  </a:tcPr>
+                  <a:tcPr/>
                 </a:tc>
                 <a:tc>
                   <a:txBody>
                     <a:bodyPr/>
                     <a:lstStyle/>
                     <a:p>
-                      <a:pPr marL="0" indent="0" algn="ctr">
-                        <a:buNone/>
+                      <a:pPr algn="ctr">
+                        <a:defRPr sz="1200"/>
                       </a:pPr>
-                      <a:endParaRPr lang="en-US" sz="1100" dirty="0">
-                        <a:latin typeface="Calibri" charset="0"/>
-                        <a:ea typeface="Calibri" charset="0"/>
-                        <a:cs typeface="Calibri" charset="0"/>
-                      </a:endParaRPr>
+                      <a:r>
+                        <a:t>-E5</a:t>
+                      </a:r>
                     </a:p>
                   </a:txBody>
-                  <a:tcPr>
-                    <a:lnL w="6350" cap="flat" cmpd="sng" algn="ctr">
-                      <a:solidFill>
-                        <a:srgbClr val="CBD5E1"/>
-                      </a:solidFill>
-                      <a:prstDash val="solid"/>
-                      <a:round/>
-                      <a:headEnd type="none" w="med" len="med"/>
-                      <a:tailEnd type="none" w="med" len="med"/>
-                    </a:lnL>
-                    <a:lnR w="6350" cap="flat" cmpd="sng" algn="ctr">
-                      <a:solidFill>
-                        <a:srgbClr val="CBD5E1"/>
-                      </a:solidFill>
-                      <a:prstDash val="solid"/>
-                      <a:round/>
-                      <a:headEnd type="none" w="med" len="med"/>
-                      <a:tailEnd type="none" w="med" len="med"/>
-                    </a:lnR>
-                    <a:lnT w="6350" cap="flat" cmpd="sng" algn="ctr">
-                      <a:solidFill>
-                        <a:srgbClr val="CBD5E1"/>
-                      </a:solidFill>
-                      <a:prstDash val="solid"/>
-                      <a:round/>
-                      <a:headEnd type="none" w="med" len="med"/>
-                      <a:tailEnd type="none" w="med" len="med"/>
-                    </a:lnT>
-                    <a:lnB w="6350" cap="flat" cmpd="sng" algn="ctr">
-                      <a:solidFill>
-                        <a:srgbClr val="CBD5E1"/>
-                      </a:solidFill>
-                      <a:prstDash val="solid"/>
-                      <a:round/>
-                      <a:headEnd type="none" w="med" len="med"/>
-                      <a:tailEnd type="none" w="med" len="med"/>
-                    </a:lnB>
-                  </a:tcPr>
+                  <a:tcPr/>
                 </a:tc>
                 <a:tc>
                   <a:txBody>
                     <a:bodyPr/>
                     <a:lstStyle/>
                     <a:p>
-                      <a:pPr marL="0" indent="0" algn="ctr">
-                        <a:buNone/>
+                      <a:pPr algn="ctr">
+                        <a:defRPr sz="1200"/>
                       </a:pPr>
-                      <a:endParaRPr lang="en-US" sz="1100" dirty="0">
-                        <a:latin typeface="Calibri" charset="0"/>
-                        <a:ea typeface="Calibri" charset="0"/>
-                        <a:cs typeface="Calibri" charset="0"/>
-                      </a:endParaRPr>
+                      <a:r>
+                        <a:t>30</a:t>
+                      </a:r>
                     </a:p>
                   </a:txBody>
-                  <a:tcPr>
-                    <a:lnL w="6350" cap="flat" cmpd="sng" algn="ctr">
-                      <a:solidFill>
-                        <a:srgbClr val="CBD5E1"/>
-                      </a:solidFill>
-                      <a:prstDash val="solid"/>
-                      <a:round/>
-                      <a:headEnd type="none" w="med" len="med"/>
-                      <a:tailEnd type="none" w="med" len="med"/>
-                    </a:lnL>
-                    <a:lnR w="6350" cap="flat" cmpd="sng" algn="ctr">
-                      <a:solidFill>
-                        <a:srgbClr val="CBD5E1"/>
-                      </a:solidFill>
-                      <a:prstDash val="solid"/>
-                      <a:round/>
-                      <a:headEnd type="none" w="med" len="med"/>
-                      <a:tailEnd type="none" w="med" len="med"/>
-                    </a:lnR>
-                    <a:lnT w="6350" cap="flat" cmpd="sng" algn="ctr">
-                      <a:solidFill>
-                        <a:srgbClr val="CBD5E1"/>
-                      </a:solidFill>
-                      <a:prstDash val="solid"/>
-                      <a:round/>
-                      <a:headEnd type="none" w="med" len="med"/>
-                      <a:tailEnd type="none" w="med" len="med"/>
-                    </a:lnT>
-                    <a:lnB w="6350" cap="flat" cmpd="sng" algn="ctr">
-                      <a:solidFill>
-                        <a:srgbClr val="CBD5E1"/>
-                      </a:solidFill>
-                      <a:prstDash val="solid"/>
-                      <a:round/>
-                      <a:headEnd type="none" w="med" len="med"/>
-                      <a:tailEnd type="none" w="med" len="med"/>
-                    </a:lnB>
-                  </a:tcPr>
+                  <a:tcPr/>
                 </a:tc>
                 <a:tc>
                   <a:txBody>
                     <a:bodyPr/>
                     <a:lstStyle/>
                     <a:p>
-                      <a:pPr marL="0" indent="0" algn="ctr">
-                        <a:buNone/>
+                      <a:pPr algn="ctr">
+                        <a:defRPr sz="1200"/>
                       </a:pPr>
                       <a:r>
-                        <a:rPr lang="en-US" sz="1100" b="1" dirty="0">
-                          <a:solidFill>
-                            <a:srgbClr val="000000"/>
-                          </a:solidFill>
-                          <a:latin typeface="Calibri" pitchFamily="34" charset="0"/>
-                          <a:ea typeface="Calibri" pitchFamily="34" charset="-122"/>
-                          <a:cs typeface="Calibri" pitchFamily="34" charset="-120"/>
-                        </a:rPr>
-                        <a:t>62</a:t>
+                        <a:t>6</a:t>
                       </a:r>
-                      <a:endParaRPr lang="en-US" sz="1100" dirty="0">
-                        <a:latin typeface="Calibri" charset="0"/>
-                        <a:ea typeface="Calibri" charset="0"/>
-                        <a:cs typeface="Calibri" charset="0"/>
-                      </a:endParaRPr>
                     </a:p>
                   </a:txBody>
-                  <a:tcPr>
-                    <a:lnL w="6350" cap="flat" cmpd="sng" algn="ctr">
-                      <a:solidFill>
-                        <a:srgbClr val="CBD5E1"/>
-                      </a:solidFill>
-                      <a:prstDash val="solid"/>
-                      <a:round/>
-                      <a:headEnd type="none" w="med" len="med"/>
-                      <a:tailEnd type="none" w="med" len="med"/>
-                    </a:lnL>
-                    <a:lnR w="6350" cap="flat" cmpd="sng" algn="ctr">
-                      <a:solidFill>
-                        <a:srgbClr val="CBD5E1"/>
-                      </a:solidFill>
-                      <a:prstDash val="solid"/>
-                      <a:round/>
-                      <a:headEnd type="none" w="med" len="med"/>
-                      <a:tailEnd type="none" w="med" len="med"/>
-                    </a:lnR>
-                    <a:lnT w="6350" cap="flat" cmpd="sng" algn="ctr">
-                      <a:solidFill>
-                        <a:srgbClr val="CBD5E1"/>
-                      </a:solidFill>
-                      <a:prstDash val="solid"/>
-                      <a:round/>
-                      <a:headEnd type="none" w="med" len="med"/>
-                      <a:tailEnd type="none" w="med" len="med"/>
-                    </a:lnT>
-                    <a:lnB w="6350" cap="flat" cmpd="sng" algn="ctr">
-                      <a:solidFill>
-                        <a:srgbClr val="CBD5E1"/>
-                      </a:solidFill>
-                      <a:prstDash val="solid"/>
-                      <a:round/>
-                      <a:headEnd type="none" w="med" len="med"/>
-                      <a:tailEnd type="none" w="med" len="med"/>
-                    </a:lnB>
-                  </a:tcPr>
+                  <a:tcPr/>
                 </a:tc>
                 <a:tc>
                   <a:txBody>
                     <a:bodyPr/>
                     <a:lstStyle/>
                     <a:p>
-                      <a:pPr marL="0" indent="0" algn="ctr">
-                        <a:buNone/>
+                      <a:pPr algn="ctr">
+                        <a:defRPr sz="1200"/>
                       </a:pPr>
                       <a:r>
-                        <a:rPr lang="en-US" sz="1100" b="1" dirty="0">
-                          <a:solidFill>
-                            <a:srgbClr val="000000"/>
-                          </a:solidFill>
-                          <a:latin typeface="Calibri" pitchFamily="34" charset="0"/>
-                          <a:ea typeface="Calibri" pitchFamily="34" charset="-122"/>
-                          <a:cs typeface="Calibri" pitchFamily="34" charset="-120"/>
-                        </a:rPr>
-                        <a:t>49</a:t>
+                        <a:t>3</a:t>
                       </a:r>
-                      <a:endParaRPr lang="en-US" sz="1100" dirty="0">
-                        <a:latin typeface="Calibri" charset="0"/>
-                        <a:ea typeface="Calibri" charset="0"/>
-                        <a:cs typeface="Calibri" charset="0"/>
-                      </a:endParaRPr>
                     </a:p>
                   </a:txBody>
-                  <a:tcPr>
-                    <a:lnL w="6350" cap="flat" cmpd="sng" algn="ctr">
-                      <a:solidFill>
-                        <a:srgbClr val="CBD5E1"/>
-                      </a:solidFill>
-                      <a:prstDash val="solid"/>
-                      <a:round/>
-                      <a:headEnd type="none" w="med" len="med"/>
-                      <a:tailEnd type="none" w="med" len="med"/>
-                    </a:lnL>
-                    <a:lnR w="6350" cap="flat" cmpd="sng" algn="ctr">
-                      <a:solidFill>
-                        <a:srgbClr val="CBD5E1"/>
-                      </a:solidFill>
-                      <a:prstDash val="solid"/>
-                      <a:round/>
-                      <a:headEnd type="none" w="med" len="med"/>
-                      <a:tailEnd type="none" w="med" len="med"/>
-                    </a:lnR>
-                    <a:lnT w="6350" cap="flat" cmpd="sng" algn="ctr">
-                      <a:solidFill>
-                        <a:srgbClr val="CBD5E1"/>
-                      </a:solidFill>
-                      <a:prstDash val="solid"/>
-                      <a:round/>
-                      <a:headEnd type="none" w="med" len="med"/>
-                      <a:tailEnd type="none" w="med" len="med"/>
-                    </a:lnT>
-                    <a:lnB w="6350" cap="flat" cmpd="sng" algn="ctr">
-                      <a:solidFill>
-                        <a:srgbClr val="CBD5E1"/>
-                      </a:solidFill>
-                      <a:prstDash val="solid"/>
-                      <a:round/>
-                      <a:headEnd type="none" w="med" len="med"/>
-                      <a:tailEnd type="none" w="med" len="med"/>
-                    </a:lnB>
-                  </a:tcPr>
+                  <a:tcPr/>
                 </a:tc>
                 <a:extLst>
                   <a:ext uri="{0D108BD9-81ED-4DB2-BD59-A6C34878D82A}">
@@ -29502,10 +27095,498 @@
                   </a:ext>
                 </a:extLst>
               </a:tr>
+              <a:tr h="226970">
+                <a:tc>
+                  <a:txBody>
+                    <a:bodyPr/>
+                    <a:lstStyle/>
+                    <a:p>
+                      <a:pPr algn="ctr">
+                        <a:defRPr sz="1200"/>
+                      </a:pPr>
+                      <a:r>
+                        <a:t>pa_7</a:t>
+                      </a:r>
+                    </a:p>
+                  </a:txBody>
+                  <a:tcPr/>
+                </a:tc>
+                <a:tc>
+                  <a:txBody>
+                    <a:bodyPr/>
+                    <a:lstStyle/>
+                    <a:p>
+                      <a:pPr algn="ctr">
+                        <a:defRPr sz="1200"/>
+                      </a:pPr>
+                      <a:r>
+                        <a:t>E6</a:t>
+                      </a:r>
+                    </a:p>
+                  </a:txBody>
+                  <a:tcPr/>
+                </a:tc>
+                <a:tc>
+                  <a:txBody>
+                    <a:bodyPr/>
+                    <a:lstStyle/>
+                    <a:p>
+                      <a:pPr algn="ctr">
+                        <a:defRPr sz="1200"/>
+                      </a:pPr>
+                      <a:r>
+                        <a:t>30</a:t>
+                      </a:r>
+                    </a:p>
+                  </a:txBody>
+                  <a:tcPr/>
+                </a:tc>
+                <a:tc>
+                  <a:txBody>
+                    <a:bodyPr/>
+                    <a:lstStyle/>
+                    <a:p>
+                      <a:pPr algn="ctr">
+                        <a:defRPr sz="1200"/>
+                      </a:pPr>
+                      <a:r>
+                        <a:t>6</a:t>
+                      </a:r>
+                    </a:p>
+                  </a:txBody>
+                  <a:tcPr/>
+                </a:tc>
+                <a:tc>
+                  <a:txBody>
+                    <a:bodyPr/>
+                    <a:lstStyle/>
+                    <a:p>
+                      <a:pPr algn="ctr">
+                        <a:defRPr sz="1200"/>
+                      </a:pPr>
+                      <a:r>
+                        <a:t>6</a:t>
+                      </a:r>
+                    </a:p>
+                  </a:txBody>
+                  <a:tcPr/>
+                </a:tc>
+                <a:extLst>
+                  <a:ext uri="{0D108BD9-81ED-4DB2-BD59-A6C34878D82A}">
+                    <a16:rowId xmlns:a16="http://schemas.microsoft.com/office/drawing/2014/main" val="10007"/>
+                  </a:ext>
+                </a:extLst>
+              </a:tr>
+              <a:tr h="226970">
+                <a:tc>
+                  <a:txBody>
+                    <a:bodyPr/>
+                    <a:lstStyle/>
+                    <a:p>
+                      <a:pPr algn="ctr">
+                        <a:defRPr sz="1200"/>
+                      </a:pPr>
+                      <a:r>
+                        <a:t>pa_7_rev</a:t>
+                      </a:r>
+                    </a:p>
+                  </a:txBody>
+                  <a:tcPr/>
+                </a:tc>
+                <a:tc>
+                  <a:txBody>
+                    <a:bodyPr/>
+                    <a:lstStyle/>
+                    <a:p>
+                      <a:pPr algn="ctr">
+                        <a:defRPr sz="1200"/>
+                      </a:pPr>
+                      <a:r>
+                        <a:t>-E6</a:t>
+                      </a:r>
+                    </a:p>
+                  </a:txBody>
+                  <a:tcPr/>
+                </a:tc>
+                <a:tc>
+                  <a:txBody>
+                    <a:bodyPr/>
+                    <a:lstStyle/>
+                    <a:p>
+                      <a:pPr algn="ctr">
+                        <a:defRPr sz="1200"/>
+                      </a:pPr>
+                      <a:r>
+                        <a:t>30</a:t>
+                      </a:r>
+                    </a:p>
+                  </a:txBody>
+                  <a:tcPr/>
+                </a:tc>
+                <a:tc>
+                  <a:txBody>
+                    <a:bodyPr/>
+                    <a:lstStyle/>
+                    <a:p>
+                      <a:pPr algn="ctr">
+                        <a:defRPr sz="1200"/>
+                      </a:pPr>
+                      <a:r>
+                        <a:t>6</a:t>
+                      </a:r>
+                    </a:p>
+                  </a:txBody>
+                  <a:tcPr/>
+                </a:tc>
+                <a:tc>
+                  <a:txBody>
+                    <a:bodyPr/>
+                    <a:lstStyle/>
+                    <a:p>
+                      <a:pPr algn="ctr">
+                        <a:defRPr sz="1200"/>
+                      </a:pPr>
+                      <a:r>
+                        <a:t>6</a:t>
+                      </a:r>
+                    </a:p>
+                  </a:txBody>
+                  <a:tcPr/>
+                </a:tc>
+                <a:extLst>
+                  <a:ext uri="{0D108BD9-81ED-4DB2-BD59-A6C34878D82A}">
+                    <a16:rowId xmlns:a16="http://schemas.microsoft.com/office/drawing/2014/main" val="10008"/>
+                  </a:ext>
+                </a:extLst>
+              </a:tr>
+              <a:tr h="226970">
+                <a:tc>
+                  <a:txBody>
+                    <a:bodyPr/>
+                    <a:lstStyle/>
+                    <a:p>
+                      <a:pPr algn="ctr">
+                        <a:defRPr sz="1200"/>
+                      </a:pPr>
+                      <a:r>
+                        <a:t>pa_8</a:t>
+                      </a:r>
+                    </a:p>
+                  </a:txBody>
+                  <a:tcPr/>
+                </a:tc>
+                <a:tc>
+                  <a:txBody>
+                    <a:bodyPr/>
+                    <a:lstStyle/>
+                    <a:p>
+                      <a:pPr algn="ctr">
+                        <a:defRPr sz="1200"/>
+                      </a:pPr>
+                      <a:r>
+                        <a:t>E7</a:t>
+                      </a:r>
+                    </a:p>
+                  </a:txBody>
+                  <a:tcPr/>
+                </a:tc>
+                <a:tc>
+                  <a:txBody>
+                    <a:bodyPr/>
+                    <a:lstStyle/>
+                    <a:p>
+                      <a:pPr algn="ctr">
+                        <a:defRPr sz="1200"/>
+                      </a:pPr>
+                      <a:r>
+                        <a:t>25</a:t>
+                      </a:r>
+                    </a:p>
+                  </a:txBody>
+                  <a:tcPr/>
+                </a:tc>
+                <a:tc>
+                  <a:txBody>
+                    <a:bodyPr/>
+                    <a:lstStyle/>
+                    <a:p>
+                      <a:pPr algn="ctr">
+                        <a:defRPr sz="1200"/>
+                      </a:pPr>
+                      <a:r>
+                        <a:t>5</a:t>
+                      </a:r>
+                    </a:p>
+                  </a:txBody>
+                  <a:tcPr/>
+                </a:tc>
+                <a:tc>
+                  <a:txBody>
+                    <a:bodyPr/>
+                    <a:lstStyle/>
+                    <a:p>
+                      <a:pPr algn="ctr">
+                        <a:defRPr sz="1200"/>
+                      </a:pPr>
+                      <a:r>
+                        <a:t>3</a:t>
+                      </a:r>
+                    </a:p>
+                  </a:txBody>
+                  <a:tcPr/>
+                </a:tc>
+                <a:extLst>
+                  <a:ext uri="{0D108BD9-81ED-4DB2-BD59-A6C34878D82A}">
+                    <a16:rowId xmlns:a16="http://schemas.microsoft.com/office/drawing/2014/main" val="10009"/>
+                  </a:ext>
+                </a:extLst>
+              </a:tr>
+              <a:tr h="226970">
+                <a:tc>
+                  <a:txBody>
+                    <a:bodyPr/>
+                    <a:lstStyle/>
+                    <a:p>
+                      <a:pPr algn="ctr">
+                        <a:defRPr sz="1200"/>
+                      </a:pPr>
+                      <a:r>
+                        <a:t>pa_8_rev</a:t>
+                      </a:r>
+                    </a:p>
+                  </a:txBody>
+                  <a:tcPr/>
+                </a:tc>
+                <a:tc>
+                  <a:txBody>
+                    <a:bodyPr/>
+                    <a:lstStyle/>
+                    <a:p>
+                      <a:pPr algn="ctr">
+                        <a:defRPr sz="1200"/>
+                      </a:pPr>
+                      <a:r>
+                        <a:t>-E7</a:t>
+                      </a:r>
+                    </a:p>
+                  </a:txBody>
+                  <a:tcPr/>
+                </a:tc>
+                <a:tc>
+                  <a:txBody>
+                    <a:bodyPr/>
+                    <a:lstStyle/>
+                    <a:p>
+                      <a:pPr algn="ctr">
+                        <a:defRPr sz="1200"/>
+                      </a:pPr>
+                      <a:r>
+                        <a:t>50</a:t>
+                      </a:r>
+                    </a:p>
+                  </a:txBody>
+                  <a:tcPr/>
+                </a:tc>
+                <a:tc>
+                  <a:txBody>
+                    <a:bodyPr/>
+                    <a:lstStyle/>
+                    <a:p>
+                      <a:pPr algn="ctr">
+                        <a:defRPr sz="1200"/>
+                      </a:pPr>
+                      <a:r>
+                        <a:t>10</a:t>
+                      </a:r>
+                    </a:p>
+                  </a:txBody>
+                  <a:tcPr/>
+                </a:tc>
+                <a:tc>
+                  <a:txBody>
+                    <a:bodyPr/>
+                    <a:lstStyle/>
+                    <a:p>
+                      <a:pPr algn="ctr">
+                        <a:defRPr sz="1200"/>
+                      </a:pPr>
+                      <a:r>
+                        <a:t>6</a:t>
+                      </a:r>
+                    </a:p>
+                  </a:txBody>
+                  <a:tcPr/>
+                </a:tc>
+                <a:extLst>
+                  <a:ext uri="{0D108BD9-81ED-4DB2-BD59-A6C34878D82A}">
+                    <a16:rowId xmlns:a16="http://schemas.microsoft.com/office/drawing/2014/main" val="10010"/>
+                  </a:ext>
+                </a:extLst>
+              </a:tr>
+              <a:tr h="226970">
+                <a:tc>
+                  <a:txBody>
+                    <a:bodyPr/>
+                    <a:lstStyle/>
+                    <a:p>
+                      <a:pPr algn="ctr">
+                        <a:defRPr sz="1200" b="1"/>
+                      </a:pPr>
+                      <a:r>
+                        <a:t>Total</a:t>
+                      </a:r>
+                    </a:p>
+                  </a:txBody>
+                  <a:tcPr/>
+                </a:tc>
+                <a:tc>
+                  <a:txBody>
+                    <a:bodyPr/>
+                    <a:lstStyle/>
+                    <a:p>
+                      <a:pPr algn="ctr">
+                        <a:defRPr sz="1200" b="1"/>
+                      </a:pPr>
+                      <a:r>
+                        <a:rPr dirty="0"/>
+                        <a:t>–</a:t>
+                      </a:r>
+                    </a:p>
+                  </a:txBody>
+                  <a:tcPr/>
+                </a:tc>
+                <a:tc>
+                  <a:txBody>
+                    <a:bodyPr/>
+                    <a:lstStyle/>
+                    <a:p>
+                      <a:pPr algn="ctr">
+                        <a:defRPr sz="1200" b="1"/>
+                      </a:pPr>
+                      <a:r>
+                        <a:rPr dirty="0"/>
+                        <a:t>–</a:t>
+                      </a:r>
+                    </a:p>
+                  </a:txBody>
+                  <a:tcPr/>
+                </a:tc>
+                <a:tc>
+                  <a:txBody>
+                    <a:bodyPr/>
+                    <a:lstStyle/>
+                    <a:p>
+                      <a:pPr algn="ctr">
+                        <a:defRPr sz="1200" b="1"/>
+                      </a:pPr>
+                      <a:r>
+                        <a:t>62</a:t>
+                      </a:r>
+                    </a:p>
+                  </a:txBody>
+                  <a:tcPr/>
+                </a:tc>
+                <a:tc>
+                  <a:txBody>
+                    <a:bodyPr/>
+                    <a:lstStyle/>
+                    <a:p>
+                      <a:pPr algn="ctr">
+                        <a:defRPr sz="1200" b="1"/>
+                      </a:pPr>
+                      <a:r>
+                        <a:rPr dirty="0"/>
+                        <a:t>49</a:t>
+                      </a:r>
+                    </a:p>
+                  </a:txBody>
+                  <a:tcPr/>
+                </a:tc>
+                <a:extLst>
+                  <a:ext uri="{0D108BD9-81ED-4DB2-BD59-A6C34878D82A}">
+                    <a16:rowId xmlns:a16="http://schemas.microsoft.com/office/drawing/2014/main" val="10011"/>
+                  </a:ext>
+                </a:extLst>
+              </a:tr>
             </a:tbl>
           </a:graphicData>
         </a:graphic>
       </p:graphicFrame>
+      <p:pic>
+        <p:nvPicPr>
+          <p:cNvPr id="35" name="Picture 34">
+            <a:extLst>
+              <a:ext uri="{FF2B5EF4-FFF2-40B4-BE49-F238E27FC236}">
+                <a16:creationId xmlns:a16="http://schemas.microsoft.com/office/drawing/2014/main" id="{5B2B8E6E-A2F0-4855-2C86-CCE50754967B}"/>
+              </a:ext>
+            </a:extLst>
+          </p:cNvPr>
+          <p:cNvPicPr>
+            <a:picLocks noChangeAspect="1"/>
+          </p:cNvPicPr>
+          <p:nvPr/>
+        </p:nvPicPr>
+        <p:blipFill>
+          <a:blip r:embed="rId3"/>
+          <a:stretch>
+            <a:fillRect/>
+          </a:stretch>
+        </p:blipFill>
+        <p:spPr>
+          <a:xfrm>
+            <a:off x="402715" y="1537855"/>
+            <a:ext cx="3753649" cy="3261706"/>
+          </a:xfrm>
+          <a:prstGeom prst="rect">
+            <a:avLst/>
+          </a:prstGeom>
+        </p:spPr>
+      </p:pic>
+      <p:sp>
+        <p:nvSpPr>
+          <p:cNvPr id="36" name="Text 26">
+            <a:extLst>
+              <a:ext uri="{FF2B5EF4-FFF2-40B4-BE49-F238E27FC236}">
+                <a16:creationId xmlns:a16="http://schemas.microsoft.com/office/drawing/2014/main" id="{E6BEC7DC-C1F2-DBC7-B13C-66F843815E23}"/>
+              </a:ext>
+            </a:extLst>
+          </p:cNvPr>
+          <p:cNvSpPr/>
+          <p:nvPr/>
+        </p:nvSpPr>
+        <p:spPr>
+          <a:xfrm>
+            <a:off x="372268" y="1060564"/>
+            <a:ext cx="4389120" cy="292608"/>
+          </a:xfrm>
+          <a:prstGeom prst="rect">
+            <a:avLst/>
+          </a:prstGeom>
+          <a:noFill/>
+          <a:ln/>
+        </p:spPr>
+        <p:txBody>
+          <a:bodyPr wrap="square" lIns="0" tIns="0" rIns="0" bIns="0" rtlCol="0" anchor="ctr"/>
+          <a:lstStyle/>
+          <a:p>
+            <a:pPr marL="0" indent="0">
+              <a:buNone/>
+            </a:pPr>
+            <a:r>
+              <a:rPr lang="en-US" sz="1300" b="1" dirty="0">
+                <a:solidFill>
+                  <a:srgbClr val="1B3A6B"/>
+                </a:solidFill>
+                <a:latin typeface="Calibri" pitchFamily="34" charset="0"/>
+                <a:ea typeface="Calibri" pitchFamily="34" charset="-122"/>
+                <a:cs typeface="Calibri" pitchFamily="34" charset="-120"/>
+              </a:rPr>
+              <a:t>Charging Station Implementation in SUMO</a:t>
+            </a:r>
+            <a:endParaRPr lang="en-US" sz="1300" dirty="0"/>
+          </a:p>
+        </p:txBody>
+      </p:sp>
     </p:spTree>
   </p:cSld>
   <p:clrMapOvr>

--- a/Thesis-Defense/defense/200112_Defense_Presentation.pptx
+++ b/Thesis-Defense/defense/200112_Defense_Presentation.pptx
@@ -5,7 +5,7 @@
     <p:sldMasterId id="2147483648" r:id="rId1"/>
   </p:sldMasterIdLst>
   <p:notesMasterIdLst>
-    <p:notesMasterId r:id="rId22"/>
+    <p:notesMasterId r:id="rId24"/>
   </p:notesMasterIdLst>
   <p:sldIdLst>
     <p:sldId id="273" r:id="rId2"/>
@@ -18,16 +18,18 @@
     <p:sldId id="277" r:id="rId9"/>
     <p:sldId id="261" r:id="rId10"/>
     <p:sldId id="262" r:id="rId11"/>
-    <p:sldId id="263" r:id="rId12"/>
-    <p:sldId id="264" r:id="rId13"/>
-    <p:sldId id="265" r:id="rId14"/>
-    <p:sldId id="266" r:id="rId15"/>
-    <p:sldId id="267" r:id="rId16"/>
-    <p:sldId id="268" r:id="rId17"/>
-    <p:sldId id="269" r:id="rId18"/>
-    <p:sldId id="270" r:id="rId19"/>
-    <p:sldId id="271" r:id="rId20"/>
-    <p:sldId id="272" r:id="rId21"/>
+    <p:sldId id="278" r:id="rId12"/>
+    <p:sldId id="263" r:id="rId13"/>
+    <p:sldId id="279" r:id="rId14"/>
+    <p:sldId id="264" r:id="rId15"/>
+    <p:sldId id="265" r:id="rId16"/>
+    <p:sldId id="266" r:id="rId17"/>
+    <p:sldId id="267" r:id="rId18"/>
+    <p:sldId id="268" r:id="rId19"/>
+    <p:sldId id="269" r:id="rId20"/>
+    <p:sldId id="270" r:id="rId21"/>
+    <p:sldId id="280" r:id="rId22"/>
+    <p:sldId id="272" r:id="rId23"/>
   </p:sldIdLst>
   <p:sldSz cx="9144000" cy="5143500" type="screen16x9"/>
   <p:notesSz cx="5143500" cy="9144000"/>
@@ -812,7 +814,7 @@
     </p:spTree>
     <p:extLst>
       <p:ext uri="{BB962C8B-B14F-4D97-AF65-F5344CB8AC3E}">
-        <p14:creationId xmlns:p14="http://schemas.microsoft.com/office/powerpoint/2010/main" val="1024086991"/>
+        <p14:creationId xmlns:p14="http://schemas.microsoft.com/office/powerpoint/2010/main" val="317634687"/>
       </p:ext>
     </p:extLst>
   </p:cSld>
@@ -980,7 +982,7 @@
     </p:spTree>
     <p:extLst>
       <p:ext uri="{BB962C8B-B14F-4D97-AF65-F5344CB8AC3E}">
-        <p14:creationId xmlns:p14="http://schemas.microsoft.com/office/powerpoint/2010/main" val="1024086991"/>
+        <p14:creationId xmlns:p14="http://schemas.microsoft.com/office/powerpoint/2010/main" val="2024094863"/>
       </p:ext>
     </p:extLst>
   </p:cSld>
@@ -1644,6 +1646,174 @@
             <a:fld id="{F7021451-1387-4CA6-816F-3879F97B5CBC}" type="slidenum">
               <a:rPr lang="en-US"/>
               <a:t>20</a:t>
+            </a:fld>
+            <a:endParaRPr lang="en-US"/>
+          </a:p>
+        </p:txBody>
+      </p:sp>
+    </p:spTree>
+    <p:extLst>
+      <p:ext uri="{BB962C8B-B14F-4D97-AF65-F5344CB8AC3E}">
+        <p14:creationId xmlns:p14="http://schemas.microsoft.com/office/powerpoint/2010/main" val="1024086991"/>
+      </p:ext>
+    </p:extLst>
+  </p:cSld>
+  <p:clrMapOvr>
+    <a:masterClrMapping/>
+  </p:clrMapOvr>
+</p:notes>
+</file>
+
+<file path=ppt/notesSlides/notesSlide21.xml><?xml version="1.0" encoding="utf-8"?>
+<p:notes xmlns:a="http://schemas.openxmlformats.org/drawingml/2006/main" xmlns:r="http://schemas.openxmlformats.org/officeDocument/2006/relationships" xmlns:p="http://schemas.openxmlformats.org/presentationml/2006/main">
+  <p:cSld>
+    <p:spTree>
+      <p:nvGrpSpPr>
+        <p:cNvPr id="1" name=""/>
+        <p:cNvGrpSpPr/>
+        <p:nvPr/>
+      </p:nvGrpSpPr>
+      <p:grpSpPr>
+        <a:xfrm>
+          <a:off x="0" y="0"/>
+          <a:ext cx="0" cy="0"/>
+          <a:chOff x="0" y="0"/>
+          <a:chExt cx="0" cy="0"/>
+        </a:xfrm>
+      </p:grpSpPr>
+      <p:sp>
+        <p:nvSpPr>
+          <p:cNvPr id="2" name="Slide Image Placeholder 1"/>
+          <p:cNvSpPr>
+            <a:spLocks noGrp="1" noRot="1" noChangeAspect="1"/>
+          </p:cNvSpPr>
+          <p:nvPr>
+            <p:ph type="sldImg"/>
+          </p:nvPr>
+        </p:nvSpPr>
+        <p:spPr/>
+      </p:sp>
+      <p:sp>
+        <p:nvSpPr>
+          <p:cNvPr id="3" name="Notes Placeholder 2"/>
+          <p:cNvSpPr>
+            <a:spLocks noGrp="1"/>
+          </p:cNvSpPr>
+          <p:nvPr>
+            <p:ph type="body" idx="1"/>
+          </p:nvPr>
+        </p:nvSpPr>
+        <p:spPr/>
+        <p:txBody>
+          <a:bodyPr/>
+          <a:lstStyle/>
+          <a:p>
+            <a:endParaRPr lang="en-US" dirty="0"/>
+          </a:p>
+        </p:txBody>
+      </p:sp>
+      <p:sp>
+        <p:nvSpPr>
+          <p:cNvPr id="4" name="Slide Number Placeholder 3"/>
+          <p:cNvSpPr>
+            <a:spLocks noGrp="1"/>
+          </p:cNvSpPr>
+          <p:nvPr>
+            <p:ph type="sldNum" sz="quarter" idx="10"/>
+          </p:nvPr>
+        </p:nvSpPr>
+        <p:spPr/>
+        <p:txBody>
+          <a:bodyPr/>
+          <a:lstStyle/>
+          <a:p>
+            <a:fld id="{F7021451-1387-4CA6-816F-3879F97B5CBC}" type="slidenum">
+              <a:rPr lang="en-US"/>
+              <a:t>21</a:t>
+            </a:fld>
+            <a:endParaRPr lang="en-US"/>
+          </a:p>
+        </p:txBody>
+      </p:sp>
+    </p:spTree>
+    <p:extLst>
+      <p:ext uri="{BB962C8B-B14F-4D97-AF65-F5344CB8AC3E}">
+        <p14:creationId xmlns:p14="http://schemas.microsoft.com/office/powerpoint/2010/main" val="3079548033"/>
+      </p:ext>
+    </p:extLst>
+  </p:cSld>
+  <p:clrMapOvr>
+    <a:masterClrMapping/>
+  </p:clrMapOvr>
+</p:notes>
+</file>
+
+<file path=ppt/notesSlides/notesSlide22.xml><?xml version="1.0" encoding="utf-8"?>
+<p:notes xmlns:a="http://schemas.openxmlformats.org/drawingml/2006/main" xmlns:r="http://schemas.openxmlformats.org/officeDocument/2006/relationships" xmlns:p="http://schemas.openxmlformats.org/presentationml/2006/main">
+  <p:cSld>
+    <p:spTree>
+      <p:nvGrpSpPr>
+        <p:cNvPr id="1" name=""/>
+        <p:cNvGrpSpPr/>
+        <p:nvPr/>
+      </p:nvGrpSpPr>
+      <p:grpSpPr>
+        <a:xfrm>
+          <a:off x="0" y="0"/>
+          <a:ext cx="0" cy="0"/>
+          <a:chOff x="0" y="0"/>
+          <a:chExt cx="0" cy="0"/>
+        </a:xfrm>
+      </p:grpSpPr>
+      <p:sp>
+        <p:nvSpPr>
+          <p:cNvPr id="2" name="Slide Image Placeholder 1"/>
+          <p:cNvSpPr>
+            <a:spLocks noGrp="1" noRot="1" noChangeAspect="1"/>
+          </p:cNvSpPr>
+          <p:nvPr>
+            <p:ph type="sldImg"/>
+          </p:nvPr>
+        </p:nvSpPr>
+        <p:spPr/>
+      </p:sp>
+      <p:sp>
+        <p:nvSpPr>
+          <p:cNvPr id="3" name="Notes Placeholder 2"/>
+          <p:cNvSpPr>
+            <a:spLocks noGrp="1"/>
+          </p:cNvSpPr>
+          <p:nvPr>
+            <p:ph type="body" idx="1"/>
+          </p:nvPr>
+        </p:nvSpPr>
+        <p:spPr/>
+        <p:txBody>
+          <a:bodyPr/>
+          <a:lstStyle/>
+          <a:p>
+            <a:endParaRPr lang="en-US" dirty="0"/>
+          </a:p>
+        </p:txBody>
+      </p:sp>
+      <p:sp>
+        <p:nvSpPr>
+          <p:cNvPr id="4" name="Slide Number Placeholder 3"/>
+          <p:cNvSpPr>
+            <a:spLocks noGrp="1"/>
+          </p:cNvSpPr>
+          <p:nvPr>
+            <p:ph type="sldNum" sz="quarter" idx="10"/>
+          </p:nvPr>
+        </p:nvSpPr>
+        <p:spPr/>
+        <p:txBody>
+          <a:bodyPr/>
+          <a:lstStyle/>
+          <a:p>
+            <a:fld id="{F7021451-1387-4CA6-816F-3879F97B5CBC}" type="slidenum">
+              <a:rPr lang="en-US"/>
+              <a:t>22</a:t>
             </a:fld>
             <a:endParaRPr lang="en-US"/>
           </a:p>
@@ -3546,14 +3716,14 @@
           <p:nvPr>
             <p:extLst>
               <p:ext uri="{D42A27DB-BD31-4B8C-83A1-F6EECF244321}">
-                <p14:modId xmlns:p14="http://schemas.microsoft.com/office/powerpoint/2010/main" val="1579011935"/>
+                <p14:modId xmlns:p14="http://schemas.microsoft.com/office/powerpoint/2010/main" val="3628787980"/>
               </p:ext>
             </p:extLst>
           </p:nvPr>
         </p:nvGraphicFramePr>
         <p:xfrm>
-          <a:off x="320040" y="3639312"/>
-          <a:ext cx="8503920" cy="1554480"/>
+          <a:off x="330431" y="3701658"/>
+          <a:ext cx="8503920" cy="1295400"/>
         </p:xfrm>
         <a:graphic>
           <a:graphicData uri="http://schemas.openxmlformats.org/drawingml/2006/table">
@@ -4936,273 +5106,6 @@
                   </a:ext>
                 </a:extLst>
               </a:tr>
-              <a:tr h="228600">
-                <a:tc>
-                  <a:txBody>
-                    <a:bodyPr/>
-                    <a:lstStyle/>
-                    <a:p>
-                      <a:pPr marL="0" indent="0" algn="ctr">
-                        <a:buNone/>
-                      </a:pPr>
-                      <a:r>
-                        <a:rPr lang="en-US" sz="1100" dirty="0">
-                          <a:solidFill>
-                            <a:srgbClr val="000000"/>
-                          </a:solidFill>
-                          <a:latin typeface="Calibri" pitchFamily="34" charset="0"/>
-                          <a:ea typeface="Calibri" pitchFamily="34" charset="-122"/>
-                          <a:cs typeface="Calibri" pitchFamily="34" charset="-120"/>
-                        </a:rPr>
-                        <a:t>Prop. Efficiency</a:t>
-                      </a:r>
-                      <a:endParaRPr lang="en-US" sz="1100" dirty="0">
-                        <a:latin typeface="Calibri" charset="0"/>
-                        <a:ea typeface="Calibri" charset="0"/>
-                        <a:cs typeface="Calibri" charset="0"/>
-                      </a:endParaRPr>
-                    </a:p>
-                  </a:txBody>
-                  <a:tcPr>
-                    <a:lnL w="6350" cap="flat" cmpd="sng" algn="ctr">
-                      <a:solidFill>
-                        <a:srgbClr val="CBD5E1"/>
-                      </a:solidFill>
-                      <a:prstDash val="solid"/>
-                      <a:round/>
-                      <a:headEnd type="none" w="med" len="med"/>
-                      <a:tailEnd type="none" w="med" len="med"/>
-                    </a:lnL>
-                    <a:lnR w="6350" cap="flat" cmpd="sng" algn="ctr">
-                      <a:solidFill>
-                        <a:srgbClr val="CBD5E1"/>
-                      </a:solidFill>
-                      <a:prstDash val="solid"/>
-                      <a:round/>
-                      <a:headEnd type="none" w="med" len="med"/>
-                      <a:tailEnd type="none" w="med" len="med"/>
-                    </a:lnR>
-                    <a:lnT w="6350" cap="flat" cmpd="sng" algn="ctr">
-                      <a:solidFill>
-                        <a:srgbClr val="CBD5E1"/>
-                      </a:solidFill>
-                      <a:prstDash val="solid"/>
-                      <a:round/>
-                      <a:headEnd type="none" w="med" len="med"/>
-                      <a:tailEnd type="none" w="med" len="med"/>
-                    </a:lnT>
-                    <a:lnB w="6350" cap="flat" cmpd="sng" algn="ctr">
-                      <a:solidFill>
-                        <a:srgbClr val="CBD5E1"/>
-                      </a:solidFill>
-                      <a:prstDash val="solid"/>
-                      <a:round/>
-                      <a:headEnd type="none" w="med" len="med"/>
-                      <a:tailEnd type="none" w="med" len="med"/>
-                    </a:lnB>
-                  </a:tcPr>
-                </a:tc>
-                <a:tc>
-                  <a:txBody>
-                    <a:bodyPr/>
-                    <a:lstStyle/>
-                    <a:p>
-                      <a:pPr marL="0" indent="0" algn="ctr">
-                        <a:buNone/>
-                      </a:pPr>
-                      <a:r>
-                        <a:rPr lang="en-US" sz="1100" dirty="0">
-                          <a:solidFill>
-                            <a:srgbClr val="000000"/>
-                          </a:solidFill>
-                          <a:latin typeface="Calibri" pitchFamily="34" charset="0"/>
-                          <a:ea typeface="Calibri" pitchFamily="34" charset="-122"/>
-                          <a:cs typeface="Calibri" pitchFamily="34" charset="-120"/>
-                        </a:rPr>
-                        <a:t>~0.893</a:t>
-                      </a:r>
-                      <a:endParaRPr lang="en-US" sz="1100" dirty="0">
-                        <a:latin typeface="Calibri" charset="0"/>
-                        <a:ea typeface="Calibri" charset="0"/>
-                        <a:cs typeface="Calibri" charset="0"/>
-                      </a:endParaRPr>
-                    </a:p>
-                  </a:txBody>
-                  <a:tcPr>
-                    <a:lnL w="6350" cap="flat" cmpd="sng" algn="ctr">
-                      <a:solidFill>
-                        <a:srgbClr val="CBD5E1"/>
-                      </a:solidFill>
-                      <a:prstDash val="solid"/>
-                      <a:round/>
-                      <a:headEnd type="none" w="med" len="med"/>
-                      <a:tailEnd type="none" w="med" len="med"/>
-                    </a:lnL>
-                    <a:lnR w="6350" cap="flat" cmpd="sng" algn="ctr">
-                      <a:solidFill>
-                        <a:srgbClr val="CBD5E1"/>
-                      </a:solidFill>
-                      <a:prstDash val="solid"/>
-                      <a:round/>
-                      <a:headEnd type="none" w="med" len="med"/>
-                      <a:tailEnd type="none" w="med" len="med"/>
-                    </a:lnR>
-                    <a:lnT w="6350" cap="flat" cmpd="sng" algn="ctr">
-                      <a:solidFill>
-                        <a:srgbClr val="CBD5E1"/>
-                      </a:solidFill>
-                      <a:prstDash val="solid"/>
-                      <a:round/>
-                      <a:headEnd type="none" w="med" len="med"/>
-                      <a:tailEnd type="none" w="med" len="med"/>
-                    </a:lnT>
-                    <a:lnB w="6350" cap="flat" cmpd="sng" algn="ctr">
-                      <a:solidFill>
-                        <a:srgbClr val="CBD5E1"/>
-                      </a:solidFill>
-                      <a:prstDash val="solid"/>
-                      <a:round/>
-                      <a:headEnd type="none" w="med" len="med"/>
-                      <a:tailEnd type="none" w="med" len="med"/>
-                    </a:lnB>
-                  </a:tcPr>
-                </a:tc>
-                <a:tc>
-                  <a:txBody>
-                    <a:bodyPr/>
-                    <a:lstStyle/>
-                    <a:p>
-                      <a:pPr marL="0" indent="0" algn="ctr">
-                        <a:buNone/>
-                      </a:pPr>
-                      <a:r>
-                        <a:rPr lang="en-US" sz="1100" dirty="0">
-                          <a:solidFill>
-                            <a:srgbClr val="000000"/>
-                          </a:solidFill>
-                          <a:latin typeface="Calibri" pitchFamily="34" charset="0"/>
-                          <a:ea typeface="Calibri" pitchFamily="34" charset="-122"/>
-                          <a:cs typeface="Calibri" pitchFamily="34" charset="-120"/>
-                        </a:rPr>
-                        <a:t>~0.832</a:t>
-                      </a:r>
-                      <a:endParaRPr lang="en-US" sz="1100" dirty="0">
-                        <a:latin typeface="Calibri" charset="0"/>
-                        <a:ea typeface="Calibri" charset="0"/>
-                        <a:cs typeface="Calibri" charset="0"/>
-                      </a:endParaRPr>
-                    </a:p>
-                  </a:txBody>
-                  <a:tcPr>
-                    <a:lnL w="6350" cap="flat" cmpd="sng" algn="ctr">
-                      <a:solidFill>
-                        <a:srgbClr val="CBD5E1"/>
-                      </a:solidFill>
-                      <a:prstDash val="solid"/>
-                      <a:round/>
-                      <a:headEnd type="none" w="med" len="med"/>
-                      <a:tailEnd type="none" w="med" len="med"/>
-                    </a:lnL>
-                    <a:lnR w="6350" cap="flat" cmpd="sng" algn="ctr">
-                      <a:solidFill>
-                        <a:srgbClr val="CBD5E1"/>
-                      </a:solidFill>
-                      <a:prstDash val="solid"/>
-                      <a:round/>
-                      <a:headEnd type="none" w="med" len="med"/>
-                      <a:tailEnd type="none" w="med" len="med"/>
-                    </a:lnR>
-                    <a:lnT w="6350" cap="flat" cmpd="sng" algn="ctr">
-                      <a:solidFill>
-                        <a:srgbClr val="CBD5E1"/>
-                      </a:solidFill>
-                      <a:prstDash val="solid"/>
-                      <a:round/>
-                      <a:headEnd type="none" w="med" len="med"/>
-                      <a:tailEnd type="none" w="med" len="med"/>
-                    </a:lnT>
-                    <a:lnB w="6350" cap="flat" cmpd="sng" algn="ctr">
-                      <a:solidFill>
-                        <a:srgbClr val="CBD5E1"/>
-                      </a:solidFill>
-                      <a:prstDash val="solid"/>
-                      <a:round/>
-                      <a:headEnd type="none" w="med" len="med"/>
-                      <a:tailEnd type="none" w="med" len="med"/>
-                    </a:lnB>
-                  </a:tcPr>
-                </a:tc>
-                <a:tc>
-                  <a:txBody>
-                    <a:bodyPr/>
-                    <a:lstStyle/>
-                    <a:p>
-                      <a:pPr marL="0" indent="0" algn="ctr">
-                        <a:buNone/>
-                      </a:pPr>
-                      <a:r>
-                        <a:rPr lang="en-US" sz="1100" dirty="0">
-                          <a:solidFill>
-                            <a:srgbClr val="000000"/>
-                          </a:solidFill>
-                          <a:latin typeface="Calibri" pitchFamily="34" charset="0"/>
-                          <a:ea typeface="Calibri" pitchFamily="34" charset="-122"/>
-                          <a:cs typeface="Calibri" pitchFamily="34" charset="-120"/>
-                        </a:rPr>
-                        <a:t>~0.823</a:t>
-                      </a:r>
-                      <a:endParaRPr lang="en-US" sz="1100" dirty="0">
-                        <a:latin typeface="Calibri" charset="0"/>
-                        <a:ea typeface="Calibri" charset="0"/>
-                        <a:cs typeface="Calibri" charset="0"/>
-                      </a:endParaRPr>
-                    </a:p>
-                  </a:txBody>
-                  <a:tcPr>
-                    <a:lnL w="6350" cap="flat" cmpd="sng" algn="ctr">
-                      <a:solidFill>
-                        <a:srgbClr val="CBD5E1"/>
-                      </a:solidFill>
-                      <a:prstDash val="solid"/>
-                      <a:round/>
-                      <a:headEnd type="none" w="med" len="med"/>
-                      <a:tailEnd type="none" w="med" len="med"/>
-                    </a:lnL>
-                    <a:lnR w="6350" cap="flat" cmpd="sng" algn="ctr">
-                      <a:solidFill>
-                        <a:srgbClr val="CBD5E1"/>
-                      </a:solidFill>
-                      <a:prstDash val="solid"/>
-                      <a:round/>
-                      <a:headEnd type="none" w="med" len="med"/>
-                      <a:tailEnd type="none" w="med" len="med"/>
-                    </a:lnR>
-                    <a:lnT w="6350" cap="flat" cmpd="sng" algn="ctr">
-                      <a:solidFill>
-                        <a:srgbClr val="CBD5E1"/>
-                      </a:solidFill>
-                      <a:prstDash val="solid"/>
-                      <a:round/>
-                      <a:headEnd type="none" w="med" len="med"/>
-                      <a:tailEnd type="none" w="med" len="med"/>
-                    </a:lnT>
-                    <a:lnB w="6350" cap="flat" cmpd="sng" algn="ctr">
-                      <a:solidFill>
-                        <a:srgbClr val="CBD5E1"/>
-                      </a:solidFill>
-                      <a:prstDash val="solid"/>
-                      <a:round/>
-                      <a:headEnd type="none" w="med" len="med"/>
-                      <a:tailEnd type="none" w="med" len="med"/>
-                    </a:lnB>
-                  </a:tcPr>
-                </a:tc>
-                <a:extLst>
-                  <a:ext uri="{0D108BD9-81ED-4DB2-BD59-A6C34878D82A}">
-                    <a16:rowId xmlns:a16="http://schemas.microsoft.com/office/drawing/2014/main" val="10005"/>
-                  </a:ext>
-                </a:extLst>
-              </a:tr>
             </a:tbl>
           </a:graphicData>
         </a:graphic>
@@ -5976,6 +5879,1148 @@
 </file>
 
 <file path=ppt/slides/slide11.xml><?xml version="1.0" encoding="utf-8"?>
+<p:sld xmlns:a="http://schemas.openxmlformats.org/drawingml/2006/main" xmlns:r="http://schemas.openxmlformats.org/officeDocument/2006/relationships" xmlns:p="http://schemas.openxmlformats.org/presentationml/2006/main">
+  <p:cSld>
+    <p:spTree>
+      <p:nvGrpSpPr>
+        <p:cNvPr id="1" name=""/>
+        <p:cNvGrpSpPr/>
+        <p:nvPr/>
+      </p:nvGrpSpPr>
+      <p:grpSpPr>
+        <a:xfrm>
+          <a:off x="0" y="0"/>
+          <a:ext cx="0" cy="0"/>
+          <a:chOff x="0" y="0"/>
+          <a:chExt cx="0" cy="0"/>
+        </a:xfrm>
+      </p:grpSpPr>
+      <p:sp>
+        <p:nvSpPr>
+          <p:cNvPr id="2" name="Shape 0"/>
+          <p:cNvSpPr/>
+          <p:nvPr/>
+        </p:nvSpPr>
+        <p:spPr>
+          <a:xfrm>
+            <a:off x="0" y="0"/>
+            <a:ext cx="164592" cy="5143500"/>
+          </a:xfrm>
+          <a:prstGeom prst="rect">
+            <a:avLst/>
+          </a:prstGeom>
+          <a:solidFill>
+            <a:srgbClr val="1B3A6B"/>
+          </a:solidFill>
+          <a:ln w="12700">
+            <a:solidFill>
+              <a:srgbClr val="1B3A6B"/>
+            </a:solidFill>
+            <a:prstDash val="solid"/>
+          </a:ln>
+        </p:spPr>
+      </p:sp>
+      <p:sp>
+        <p:nvSpPr>
+          <p:cNvPr id="3" name="Text 1"/>
+          <p:cNvSpPr/>
+          <p:nvPr/>
+        </p:nvSpPr>
+        <p:spPr>
+          <a:xfrm>
+            <a:off x="320040" y="201168"/>
+            <a:ext cx="8503920" cy="493776"/>
+          </a:xfrm>
+          <a:prstGeom prst="rect">
+            <a:avLst/>
+          </a:prstGeom>
+          <a:noFill/>
+          <a:ln/>
+        </p:spPr>
+        <p:txBody>
+          <a:bodyPr wrap="square" lIns="0" tIns="0" rIns="0" bIns="0" rtlCol="0" anchor="ctr"/>
+          <a:lstStyle/>
+          <a:p>
+            <a:pPr marL="0" indent="0">
+              <a:buNone/>
+            </a:pPr>
+            <a:r>
+              <a:rPr lang="en-US" sz="2600" b="1" dirty="0">
+                <a:solidFill>
+                  <a:srgbClr val="1B3A6B"/>
+                </a:solidFill>
+                <a:latin typeface="Calibri" pitchFamily="34" charset="0"/>
+                <a:ea typeface="Calibri" pitchFamily="34" charset="-122"/>
+                <a:cs typeface="Calibri" pitchFamily="34" charset="-120"/>
+              </a:rPr>
+              <a:t>Vehicle Fleet &amp; Smart Charging Logic</a:t>
+            </a:r>
+            <a:endParaRPr lang="en-US" sz="2600" dirty="0"/>
+          </a:p>
+        </p:txBody>
+      </p:sp>
+      <p:sp>
+        <p:nvSpPr>
+          <p:cNvPr id="4" name="Shape 2"/>
+          <p:cNvSpPr/>
+          <p:nvPr/>
+        </p:nvSpPr>
+        <p:spPr>
+          <a:xfrm>
+            <a:off x="320040" y="960120"/>
+            <a:ext cx="8503920" cy="36576"/>
+          </a:xfrm>
+          <a:prstGeom prst="rect">
+            <a:avLst/>
+          </a:prstGeom>
+          <a:solidFill>
+            <a:srgbClr val="0D7377"/>
+          </a:solidFill>
+          <a:ln w="12700">
+            <a:solidFill>
+              <a:srgbClr val="0D7377"/>
+            </a:solidFill>
+            <a:prstDash val="solid"/>
+          </a:ln>
+        </p:spPr>
+      </p:sp>
+      <p:graphicFrame>
+        <p:nvGraphicFramePr>
+          <p:cNvPr id="29" name="Table 28">
+            <a:extLst>
+              <a:ext uri="{FF2B5EF4-FFF2-40B4-BE49-F238E27FC236}">
+                <a16:creationId xmlns:a16="http://schemas.microsoft.com/office/drawing/2014/main" id="{9F9E6A33-102F-094C-7C1F-377EC7E5D1B1}"/>
+              </a:ext>
+            </a:extLst>
+          </p:cNvPr>
+          <p:cNvGraphicFramePr>
+            <a:graphicFrameLocks noGrp="1"/>
+          </p:cNvGraphicFramePr>
+          <p:nvPr>
+            <p:extLst>
+              <p:ext uri="{D42A27DB-BD31-4B8C-83A1-F6EECF244321}">
+                <p14:modId xmlns:p14="http://schemas.microsoft.com/office/powerpoint/2010/main" val="3124535627"/>
+              </p:ext>
+            </p:extLst>
+          </p:nvPr>
+        </p:nvGraphicFramePr>
+        <p:xfrm>
+          <a:off x="457200" y="1371600"/>
+          <a:ext cx="8321040" cy="3520440"/>
+        </p:xfrm>
+        <a:graphic>
+          <a:graphicData uri="http://schemas.openxmlformats.org/drawingml/2006/table">
+            <a:tbl>
+              <a:tblPr firstRow="1" bandRow="1">
+                <a:tableStyleId>{5C22544A-7EE6-4342-B048-85BDC9FD1C3A}</a:tableStyleId>
+              </a:tblPr>
+              <a:tblGrid>
+                <a:gridCol w="2286000">
+                  <a:extLst>
+                    <a:ext uri="{9D8B030D-6E8A-4147-A177-3AD203B41FA5}">
+                      <a16:colId xmlns:a16="http://schemas.microsoft.com/office/drawing/2014/main" val="20000"/>
+                    </a:ext>
+                  </a:extLst>
+                </a:gridCol>
+                <a:gridCol w="2011680">
+                  <a:extLst>
+                    <a:ext uri="{9D8B030D-6E8A-4147-A177-3AD203B41FA5}">
+                      <a16:colId xmlns:a16="http://schemas.microsoft.com/office/drawing/2014/main" val="20001"/>
+                    </a:ext>
+                  </a:extLst>
+                </a:gridCol>
+                <a:gridCol w="2011680">
+                  <a:extLst>
+                    <a:ext uri="{9D8B030D-6E8A-4147-A177-3AD203B41FA5}">
+                      <a16:colId xmlns:a16="http://schemas.microsoft.com/office/drawing/2014/main" val="20002"/>
+                    </a:ext>
+                  </a:extLst>
+                </a:gridCol>
+                <a:gridCol w="2011680">
+                  <a:extLst>
+                    <a:ext uri="{9D8B030D-6E8A-4147-A177-3AD203B41FA5}">
+                      <a16:colId xmlns:a16="http://schemas.microsoft.com/office/drawing/2014/main" val="20003"/>
+                    </a:ext>
+                  </a:extLst>
+                </a:gridCol>
+              </a:tblGrid>
+              <a:tr h="0">
+                <a:tc>
+                  <a:txBody>
+                    <a:bodyPr/>
+                    <a:lstStyle/>
+                    <a:p>
+                      <a:pPr algn="ctr">
+                        <a:defRPr b="1"/>
+                      </a:pPr>
+                      <a:r>
+                        <a:rPr sz="1050" dirty="0"/>
+                        <a:t>Parameter</a:t>
+                      </a:r>
+                    </a:p>
+                  </a:txBody>
+                  <a:tcPr>
+                    <a:solidFill>
+                      <a:srgbClr val="1B3A6B"/>
+                    </a:solidFill>
+                  </a:tcPr>
+                </a:tc>
+                <a:tc>
+                  <a:txBody>
+                    <a:bodyPr/>
+                    <a:lstStyle/>
+                    <a:p>
+                      <a:pPr algn="ctr">
+                        <a:defRPr b="1"/>
+                      </a:pPr>
+                      <a:r>
+                        <a:rPr sz="1050" dirty="0"/>
+                        <a:t>Easy Bike</a:t>
+                      </a:r>
+                    </a:p>
+                  </a:txBody>
+                  <a:tcPr>
+                    <a:solidFill>
+                      <a:srgbClr val="0D7377"/>
+                    </a:solidFill>
+                  </a:tcPr>
+                </a:tc>
+                <a:tc>
+                  <a:txBody>
+                    <a:bodyPr/>
+                    <a:lstStyle/>
+                    <a:p>
+                      <a:pPr algn="ctr">
+                        <a:defRPr b="1"/>
+                      </a:pPr>
+                      <a:r>
+                        <a:rPr sz="1050" dirty="0"/>
+                        <a:t>E-Rickshaw</a:t>
+                      </a:r>
+                    </a:p>
+                  </a:txBody>
+                  <a:tcPr>
+                    <a:solidFill>
+                      <a:srgbClr val="0D7377"/>
+                    </a:solidFill>
+                  </a:tcPr>
+                </a:tc>
+                <a:tc>
+                  <a:txBody>
+                    <a:bodyPr/>
+                    <a:lstStyle/>
+                    <a:p>
+                      <a:pPr algn="ctr">
+                        <a:defRPr b="1"/>
+                      </a:pPr>
+                      <a:r>
+                        <a:rPr sz="1050" dirty="0"/>
+                        <a:t>E-Van</a:t>
+                      </a:r>
+                    </a:p>
+                  </a:txBody>
+                  <a:tcPr>
+                    <a:solidFill>
+                      <a:srgbClr val="0D7377"/>
+                    </a:solidFill>
+                  </a:tcPr>
+                </a:tc>
+                <a:extLst>
+                  <a:ext uri="{0D108BD9-81ED-4DB2-BD59-A6C34878D82A}">
+                    <a16:rowId xmlns:a16="http://schemas.microsoft.com/office/drawing/2014/main" val="10000"/>
+                  </a:ext>
+                </a:extLst>
+              </a:tr>
+              <a:tr h="0">
+                <a:tc>
+                  <a:txBody>
+                    <a:bodyPr/>
+                    <a:lstStyle/>
+                    <a:p>
+                      <a:pPr algn="ctr"/>
+                      <a:r>
+                        <a:rPr sz="1050"/>
+                        <a:t>Body Dimensions (L×W×H)</a:t>
+                      </a:r>
+                    </a:p>
+                  </a:txBody>
+                  <a:tcPr/>
+                </a:tc>
+                <a:tc>
+                  <a:txBody>
+                    <a:bodyPr/>
+                    <a:lstStyle/>
+                    <a:p>
+                      <a:pPr algn="ctr"/>
+                      <a:r>
+                        <a:rPr sz="1050"/>
+                        <a:t>2.5×1.5×1.4 m</a:t>
+                      </a:r>
+                    </a:p>
+                  </a:txBody>
+                  <a:tcPr/>
+                </a:tc>
+                <a:tc>
+                  <a:txBody>
+                    <a:bodyPr/>
+                    <a:lstStyle/>
+                    <a:p>
+                      <a:pPr algn="ctr"/>
+                      <a:r>
+                        <a:rPr sz="1050"/>
+                        <a:t>2.3×1.0×1.8 m</a:t>
+                      </a:r>
+                    </a:p>
+                  </a:txBody>
+                  <a:tcPr/>
+                </a:tc>
+                <a:tc>
+                  <a:txBody>
+                    <a:bodyPr/>
+                    <a:lstStyle/>
+                    <a:p>
+                      <a:pPr algn="ctr"/>
+                      <a:r>
+                        <a:rPr sz="1050"/>
+                        <a:t>2.4×1.3×0.8 m</a:t>
+                      </a:r>
+                    </a:p>
+                  </a:txBody>
+                  <a:tcPr/>
+                </a:tc>
+                <a:extLst>
+                  <a:ext uri="{0D108BD9-81ED-4DB2-BD59-A6C34878D82A}">
+                    <a16:rowId xmlns:a16="http://schemas.microsoft.com/office/drawing/2014/main" val="10001"/>
+                  </a:ext>
+                </a:extLst>
+              </a:tr>
+              <a:tr h="0">
+                <a:tc>
+                  <a:txBody>
+                    <a:bodyPr/>
+                    <a:lstStyle/>
+                    <a:p>
+                      <a:pPr algn="ctr"/>
+                      <a:r>
+                        <a:rPr sz="1050"/>
+                        <a:t>Vehicle Mass (kg)</a:t>
+                      </a:r>
+                    </a:p>
+                  </a:txBody>
+                  <a:tcPr/>
+                </a:tc>
+                <a:tc>
+                  <a:txBody>
+                    <a:bodyPr/>
+                    <a:lstStyle/>
+                    <a:p>
+                      <a:pPr algn="ctr"/>
+                      <a:r>
+                        <a:rPr sz="1050"/>
+                        <a:t>345 – 354</a:t>
+                      </a:r>
+                    </a:p>
+                  </a:txBody>
+                  <a:tcPr/>
+                </a:tc>
+                <a:tc>
+                  <a:txBody>
+                    <a:bodyPr/>
+                    <a:lstStyle/>
+                    <a:p>
+                      <a:pPr algn="ctr"/>
+                      <a:r>
+                        <a:rPr sz="1050"/>
+                        <a:t>198 – 218</a:t>
+                      </a:r>
+                    </a:p>
+                  </a:txBody>
+                  <a:tcPr/>
+                </a:tc>
+                <a:tc>
+                  <a:txBody>
+                    <a:bodyPr/>
+                    <a:lstStyle/>
+                    <a:p>
+                      <a:pPr algn="ctr"/>
+                      <a:r>
+                        <a:rPr sz="1050"/>
+                        <a:t>198 – 219</a:t>
+                      </a:r>
+                    </a:p>
+                  </a:txBody>
+                  <a:tcPr/>
+                </a:tc>
+                <a:extLst>
+                  <a:ext uri="{0D108BD9-81ED-4DB2-BD59-A6C34878D82A}">
+                    <a16:rowId xmlns:a16="http://schemas.microsoft.com/office/drawing/2014/main" val="10002"/>
+                  </a:ext>
+                </a:extLst>
+              </a:tr>
+              <a:tr h="0">
+                <a:tc>
+                  <a:txBody>
+                    <a:bodyPr/>
+                    <a:lstStyle/>
+                    <a:p>
+                      <a:pPr algn="ctr"/>
+                      <a:r>
+                        <a:rPr sz="1050" dirty="0"/>
+                        <a:t>Battery Capacity (</a:t>
+                      </a:r>
+                      <a:r>
+                        <a:rPr sz="1050" dirty="0" err="1"/>
+                        <a:t>Wh</a:t>
+                      </a:r>
+                      <a:r>
+                        <a:rPr sz="1050" dirty="0"/>
+                        <a:t>)</a:t>
+                      </a:r>
+                    </a:p>
+                  </a:txBody>
+                  <a:tcPr/>
+                </a:tc>
+                <a:tc>
+                  <a:txBody>
+                    <a:bodyPr/>
+                    <a:lstStyle/>
+                    <a:p>
+                      <a:pPr algn="ctr"/>
+                      <a:r>
+                        <a:rPr sz="1050"/>
+                        <a:t>12,000</a:t>
+                      </a:r>
+                    </a:p>
+                  </a:txBody>
+                  <a:tcPr/>
+                </a:tc>
+                <a:tc>
+                  <a:txBody>
+                    <a:bodyPr/>
+                    <a:lstStyle/>
+                    <a:p>
+                      <a:pPr algn="ctr"/>
+                      <a:r>
+                        <a:rPr sz="1050"/>
+                        <a:t>5,760 – 7,200</a:t>
+                      </a:r>
+                    </a:p>
+                  </a:txBody>
+                  <a:tcPr/>
+                </a:tc>
+                <a:tc>
+                  <a:txBody>
+                    <a:bodyPr/>
+                    <a:lstStyle/>
+                    <a:p>
+                      <a:pPr algn="ctr"/>
+                      <a:r>
+                        <a:rPr sz="1050"/>
+                        <a:t>5,760</a:t>
+                      </a:r>
+                    </a:p>
+                  </a:txBody>
+                  <a:tcPr/>
+                </a:tc>
+                <a:extLst>
+                  <a:ext uri="{0D108BD9-81ED-4DB2-BD59-A6C34878D82A}">
+                    <a16:rowId xmlns:a16="http://schemas.microsoft.com/office/drawing/2014/main" val="10003"/>
+                  </a:ext>
+                </a:extLst>
+              </a:tr>
+              <a:tr h="0">
+                <a:tc>
+                  <a:txBody>
+                    <a:bodyPr/>
+                    <a:lstStyle/>
+                    <a:p>
+                      <a:pPr algn="ctr"/>
+                      <a:r>
+                        <a:rPr sz="1050"/>
+                        <a:t>Max Power (W)</a:t>
+                      </a:r>
+                    </a:p>
+                  </a:txBody>
+                  <a:tcPr/>
+                </a:tc>
+                <a:tc>
+                  <a:txBody>
+                    <a:bodyPr/>
+                    <a:lstStyle/>
+                    <a:p>
+                      <a:pPr algn="ctr"/>
+                      <a:r>
+                        <a:rPr sz="1050"/>
+                        <a:t>1,000 – 1,200</a:t>
+                      </a:r>
+                    </a:p>
+                  </a:txBody>
+                  <a:tcPr/>
+                </a:tc>
+                <a:tc>
+                  <a:txBody>
+                    <a:bodyPr/>
+                    <a:lstStyle/>
+                    <a:p>
+                      <a:pPr algn="ctr"/>
+                      <a:r>
+                        <a:rPr sz="1050"/>
+                        <a:t>900 – 1,000</a:t>
+                      </a:r>
+                    </a:p>
+                  </a:txBody>
+                  <a:tcPr/>
+                </a:tc>
+                <a:tc>
+                  <a:txBody>
+                    <a:bodyPr/>
+                    <a:lstStyle/>
+                    <a:p>
+                      <a:pPr algn="ctr"/>
+                      <a:r>
+                        <a:rPr sz="1050"/>
+                        <a:t>800 – 900</a:t>
+                      </a:r>
+                    </a:p>
+                  </a:txBody>
+                  <a:tcPr/>
+                </a:tc>
+                <a:extLst>
+                  <a:ext uri="{0D108BD9-81ED-4DB2-BD59-A6C34878D82A}">
+                    <a16:rowId xmlns:a16="http://schemas.microsoft.com/office/drawing/2014/main" val="10004"/>
+                  </a:ext>
+                </a:extLst>
+              </a:tr>
+              <a:tr h="0">
+                <a:tc>
+                  <a:txBody>
+                    <a:bodyPr/>
+                    <a:lstStyle/>
+                    <a:p>
+                      <a:pPr algn="ctr"/>
+                      <a:r>
+                        <a:rPr sz="1050"/>
+                        <a:t>Acceleration (m/s²)</a:t>
+                      </a:r>
+                    </a:p>
+                  </a:txBody>
+                  <a:tcPr/>
+                </a:tc>
+                <a:tc>
+                  <a:txBody>
+                    <a:bodyPr/>
+                    <a:lstStyle/>
+                    <a:p>
+                      <a:pPr algn="ctr"/>
+                      <a:r>
+                        <a:rPr sz="1050"/>
+                        <a:t>1.15 – 1.31</a:t>
+                      </a:r>
+                    </a:p>
+                  </a:txBody>
+                  <a:tcPr/>
+                </a:tc>
+                <a:tc>
+                  <a:txBody>
+                    <a:bodyPr/>
+                    <a:lstStyle/>
+                    <a:p>
+                      <a:pPr algn="ctr"/>
+                      <a:r>
+                        <a:rPr sz="1050"/>
+                        <a:t>0.58 – 0.71</a:t>
+                      </a:r>
+                    </a:p>
+                  </a:txBody>
+                  <a:tcPr/>
+                </a:tc>
+                <a:tc>
+                  <a:txBody>
+                    <a:bodyPr/>
+                    <a:lstStyle/>
+                    <a:p>
+                      <a:pPr algn="ctr"/>
+                      <a:r>
+                        <a:rPr sz="1050"/>
+                        <a:t>0.68 – 0.81</a:t>
+                      </a:r>
+                    </a:p>
+                  </a:txBody>
+                  <a:tcPr/>
+                </a:tc>
+                <a:extLst>
+                  <a:ext uri="{0D108BD9-81ED-4DB2-BD59-A6C34878D82A}">
+                    <a16:rowId xmlns:a16="http://schemas.microsoft.com/office/drawing/2014/main" val="10005"/>
+                  </a:ext>
+                </a:extLst>
+              </a:tr>
+              <a:tr h="0">
+                <a:tc>
+                  <a:txBody>
+                    <a:bodyPr/>
+                    <a:lstStyle/>
+                    <a:p>
+                      <a:pPr algn="ctr"/>
+                      <a:r>
+                        <a:rPr sz="1050"/>
+                        <a:t>Deceleration (m/s²)</a:t>
+                      </a:r>
+                    </a:p>
+                  </a:txBody>
+                  <a:tcPr/>
+                </a:tc>
+                <a:tc>
+                  <a:txBody>
+                    <a:bodyPr/>
+                    <a:lstStyle/>
+                    <a:p>
+                      <a:pPr algn="ctr"/>
+                      <a:r>
+                        <a:rPr sz="1050"/>
+                        <a:t>2.45 – 2.58</a:t>
+                      </a:r>
+                    </a:p>
+                  </a:txBody>
+                  <a:tcPr/>
+                </a:tc>
+                <a:tc>
+                  <a:txBody>
+                    <a:bodyPr/>
+                    <a:lstStyle/>
+                    <a:p>
+                      <a:pPr algn="ctr"/>
+                      <a:r>
+                        <a:rPr sz="1050"/>
+                        <a:t>2.48 – 2.67</a:t>
+                      </a:r>
+                    </a:p>
+                  </a:txBody>
+                  <a:tcPr/>
+                </a:tc>
+                <a:tc>
+                  <a:txBody>
+                    <a:bodyPr/>
+                    <a:lstStyle/>
+                    <a:p>
+                      <a:pPr algn="ctr"/>
+                      <a:r>
+                        <a:rPr sz="1050"/>
+                        <a:t>2.58 – 2.77</a:t>
+                      </a:r>
+                    </a:p>
+                  </a:txBody>
+                  <a:tcPr/>
+                </a:tc>
+                <a:extLst>
+                  <a:ext uri="{0D108BD9-81ED-4DB2-BD59-A6C34878D82A}">
+                    <a16:rowId xmlns:a16="http://schemas.microsoft.com/office/drawing/2014/main" val="10006"/>
+                  </a:ext>
+                </a:extLst>
+              </a:tr>
+              <a:tr h="0">
+                <a:tc>
+                  <a:txBody>
+                    <a:bodyPr/>
+                    <a:lstStyle/>
+                    <a:p>
+                      <a:pPr algn="ctr"/>
+                      <a:r>
+                        <a:rPr sz="1050"/>
+                        <a:t>Air Drag Coeff. (Cd)</a:t>
+                      </a:r>
+                    </a:p>
+                  </a:txBody>
+                  <a:tcPr/>
+                </a:tc>
+                <a:tc>
+                  <a:txBody>
+                    <a:bodyPr/>
+                    <a:lstStyle/>
+                    <a:p>
+                      <a:pPr algn="ctr"/>
+                      <a:r>
+                        <a:rPr sz="1050"/>
+                        <a:t>0.727 – 0.760</a:t>
+                      </a:r>
+                    </a:p>
+                  </a:txBody>
+                  <a:tcPr/>
+                </a:tc>
+                <a:tc>
+                  <a:txBody>
+                    <a:bodyPr/>
+                    <a:lstStyle/>
+                    <a:p>
+                      <a:pPr algn="ctr"/>
+                      <a:r>
+                        <a:rPr sz="1050"/>
+                        <a:t>0.804 – 0.910</a:t>
+                      </a:r>
+                    </a:p>
+                  </a:txBody>
+                  <a:tcPr/>
+                </a:tc>
+                <a:tc>
+                  <a:txBody>
+                    <a:bodyPr/>
+                    <a:lstStyle/>
+                    <a:p>
+                      <a:pPr algn="ctr"/>
+                      <a:r>
+                        <a:rPr sz="1050"/>
+                        <a:t>0.754 – 0.860</a:t>
+                      </a:r>
+                    </a:p>
+                  </a:txBody>
+                  <a:tcPr/>
+                </a:tc>
+                <a:extLst>
+                  <a:ext uri="{0D108BD9-81ED-4DB2-BD59-A6C34878D82A}">
+                    <a16:rowId xmlns:a16="http://schemas.microsoft.com/office/drawing/2014/main" val="10007"/>
+                  </a:ext>
+                </a:extLst>
+              </a:tr>
+              <a:tr h="0">
+                <a:tc>
+                  <a:txBody>
+                    <a:bodyPr/>
+                    <a:lstStyle/>
+                    <a:p>
+                      <a:pPr algn="ctr"/>
+                      <a:r>
+                        <a:rPr sz="1050"/>
+                        <a:t>Avg. Propulsion Eff.</a:t>
+                      </a:r>
+                    </a:p>
+                  </a:txBody>
+                  <a:tcPr/>
+                </a:tc>
+                <a:tc>
+                  <a:txBody>
+                    <a:bodyPr/>
+                    <a:lstStyle/>
+                    <a:p>
+                      <a:pPr algn="ctr"/>
+                      <a:r>
+                        <a:rPr sz="1050"/>
+                        <a:t>0.890 – 0.896</a:t>
+                      </a:r>
+                    </a:p>
+                  </a:txBody>
+                  <a:tcPr/>
+                </a:tc>
+                <a:tc>
+                  <a:txBody>
+                    <a:bodyPr/>
+                    <a:lstStyle/>
+                    <a:p>
+                      <a:pPr algn="ctr"/>
+                      <a:r>
+                        <a:rPr sz="1050"/>
+                        <a:t>0.830 – 0.834</a:t>
+                      </a:r>
+                    </a:p>
+                  </a:txBody>
+                  <a:tcPr/>
+                </a:tc>
+                <a:tc>
+                  <a:txBody>
+                    <a:bodyPr/>
+                    <a:lstStyle/>
+                    <a:p>
+                      <a:pPr algn="ctr"/>
+                      <a:r>
+                        <a:rPr sz="1050"/>
+                        <a:t>0.820 – 0.826</a:t>
+                      </a:r>
+                    </a:p>
+                  </a:txBody>
+                  <a:tcPr/>
+                </a:tc>
+                <a:extLst>
+                  <a:ext uri="{0D108BD9-81ED-4DB2-BD59-A6C34878D82A}">
+                    <a16:rowId xmlns:a16="http://schemas.microsoft.com/office/drawing/2014/main" val="10008"/>
+                  </a:ext>
+                </a:extLst>
+              </a:tr>
+              <a:tr h="0">
+                <a:tc>
+                  <a:txBody>
+                    <a:bodyPr/>
+                    <a:lstStyle/>
+                    <a:p>
+                      <a:pPr algn="ctr"/>
+                      <a:r>
+                        <a:rPr sz="1050"/>
+                        <a:t>Avg. Recup. Eff.</a:t>
+                      </a:r>
+                    </a:p>
+                  </a:txBody>
+                  <a:tcPr/>
+                </a:tc>
+                <a:tc>
+                  <a:txBody>
+                    <a:bodyPr/>
+                    <a:lstStyle/>
+                    <a:p>
+                      <a:pPr algn="ctr"/>
+                      <a:r>
+                        <a:rPr sz="1050"/>
+                        <a:t>0.745 – 0.751</a:t>
+                      </a:r>
+                    </a:p>
+                  </a:txBody>
+                  <a:tcPr/>
+                </a:tc>
+                <a:tc>
+                  <a:txBody>
+                    <a:bodyPr/>
+                    <a:lstStyle/>
+                    <a:p>
+                      <a:pPr algn="ctr"/>
+                      <a:r>
+                        <a:rPr sz="1050"/>
+                        <a:t>0.650 – 0.656</a:t>
+                      </a:r>
+                    </a:p>
+                  </a:txBody>
+                  <a:tcPr/>
+                </a:tc>
+                <a:tc>
+                  <a:txBody>
+                    <a:bodyPr/>
+                    <a:lstStyle/>
+                    <a:p>
+                      <a:pPr algn="ctr"/>
+                      <a:r>
+                        <a:rPr sz="1050"/>
+                        <a:t>0.550 – 0.556</a:t>
+                      </a:r>
+                    </a:p>
+                  </a:txBody>
+                  <a:tcPr/>
+                </a:tc>
+                <a:extLst>
+                  <a:ext uri="{0D108BD9-81ED-4DB2-BD59-A6C34878D82A}">
+                    <a16:rowId xmlns:a16="http://schemas.microsoft.com/office/drawing/2014/main" val="10009"/>
+                  </a:ext>
+                </a:extLst>
+              </a:tr>
+              <a:tr h="0">
+                <a:tc>
+                  <a:txBody>
+                    <a:bodyPr/>
+                    <a:lstStyle/>
+                    <a:p>
+                      <a:pPr algn="ctr"/>
+                      <a:r>
+                        <a:rPr sz="1050"/>
+                        <a:t>Const. Power Intake (W)</a:t>
+                      </a:r>
+                    </a:p>
+                  </a:txBody>
+                  <a:tcPr/>
+                </a:tc>
+                <a:tc>
+                  <a:txBody>
+                    <a:bodyPr/>
+                    <a:lstStyle/>
+                    <a:p>
+                      <a:pPr algn="ctr"/>
+                      <a:r>
+                        <a:rPr sz="1050"/>
+                        <a:t>80 – 96</a:t>
+                      </a:r>
+                    </a:p>
+                  </a:txBody>
+                  <a:tcPr/>
+                </a:tc>
+                <a:tc>
+                  <a:txBody>
+                    <a:bodyPr/>
+                    <a:lstStyle/>
+                    <a:p>
+                      <a:pPr algn="ctr"/>
+                      <a:r>
+                        <a:rPr sz="1050"/>
+                        <a:t>29 – 33</a:t>
+                      </a:r>
+                    </a:p>
+                  </a:txBody>
+                  <a:tcPr/>
+                </a:tc>
+                <a:tc>
+                  <a:txBody>
+                    <a:bodyPr/>
+                    <a:lstStyle/>
+                    <a:p>
+                      <a:pPr algn="ctr"/>
+                      <a:r>
+                        <a:rPr sz="1050"/>
+                        <a:t>24 – 30</a:t>
+                      </a:r>
+                    </a:p>
+                  </a:txBody>
+                  <a:tcPr/>
+                </a:tc>
+                <a:extLst>
+                  <a:ext uri="{0D108BD9-81ED-4DB2-BD59-A6C34878D82A}">
+                    <a16:rowId xmlns:a16="http://schemas.microsoft.com/office/drawing/2014/main" val="10010"/>
+                  </a:ext>
+                </a:extLst>
+              </a:tr>
+              <a:tr h="0">
+                <a:tc>
+                  <a:txBody>
+                    <a:bodyPr/>
+                    <a:lstStyle/>
+                    <a:p>
+                      <a:pPr algn="ctr"/>
+                      <a:r>
+                        <a:rPr sz="1050"/>
+                        <a:t>Front Surface Area (m²)</a:t>
+                      </a:r>
+                    </a:p>
+                  </a:txBody>
+                  <a:tcPr/>
+                </a:tc>
+                <a:tc>
+                  <a:txBody>
+                    <a:bodyPr/>
+                    <a:lstStyle/>
+                    <a:p>
+                      <a:pPr algn="ctr"/>
+                      <a:r>
+                        <a:rPr sz="1050"/>
+                        <a:t>2.41</a:t>
+                      </a:r>
+                    </a:p>
+                  </a:txBody>
+                  <a:tcPr/>
+                </a:tc>
+                <a:tc>
+                  <a:txBody>
+                    <a:bodyPr/>
+                    <a:lstStyle/>
+                    <a:p>
+                      <a:pPr algn="ctr"/>
+                      <a:r>
+                        <a:rPr sz="1050"/>
+                        <a:t>1.51</a:t>
+                      </a:r>
+                    </a:p>
+                  </a:txBody>
+                  <a:tcPr/>
+                </a:tc>
+                <a:tc>
+                  <a:txBody>
+                    <a:bodyPr/>
+                    <a:lstStyle/>
+                    <a:p>
+                      <a:pPr algn="ctr"/>
+                      <a:r>
+                        <a:rPr sz="1050"/>
+                        <a:t>1.01</a:t>
+                      </a:r>
+                    </a:p>
+                  </a:txBody>
+                  <a:tcPr/>
+                </a:tc>
+                <a:extLst>
+                  <a:ext uri="{0D108BD9-81ED-4DB2-BD59-A6C34878D82A}">
+                    <a16:rowId xmlns:a16="http://schemas.microsoft.com/office/drawing/2014/main" val="10011"/>
+                  </a:ext>
+                </a:extLst>
+              </a:tr>
+              <a:tr h="0">
+                <a:tc>
+                  <a:txBody>
+                    <a:bodyPr/>
+                    <a:lstStyle/>
+                    <a:p>
+                      <a:pPr algn="ctr"/>
+                      <a:r>
+                        <a:rPr sz="1050"/>
+                        <a:t>Reaction Time (τ)</a:t>
+                      </a:r>
+                    </a:p>
+                  </a:txBody>
+                  <a:tcPr/>
+                </a:tc>
+                <a:tc>
+                  <a:txBody>
+                    <a:bodyPr/>
+                    <a:lstStyle/>
+                    <a:p>
+                      <a:pPr algn="ctr"/>
+                      <a:r>
+                        <a:rPr sz="1050"/>
+                        <a:t>1.88 – 1.94 s</a:t>
+                      </a:r>
+                    </a:p>
+                  </a:txBody>
+                  <a:tcPr/>
+                </a:tc>
+                <a:tc>
+                  <a:txBody>
+                    <a:bodyPr/>
+                    <a:lstStyle/>
+                    <a:p>
+                      <a:pPr algn="ctr"/>
+                      <a:r>
+                        <a:rPr sz="1050"/>
+                        <a:t>1.72 – 1.76 s</a:t>
+                      </a:r>
+                    </a:p>
+                  </a:txBody>
+                  <a:tcPr/>
+                </a:tc>
+                <a:tc>
+                  <a:txBody>
+                    <a:bodyPr/>
+                    <a:lstStyle/>
+                    <a:p>
+                      <a:pPr algn="ctr"/>
+                      <a:r>
+                        <a:rPr sz="1050"/>
+                        <a:t>0.87 – 0.92 s</a:t>
+                      </a:r>
+                    </a:p>
+                  </a:txBody>
+                  <a:tcPr/>
+                </a:tc>
+                <a:extLst>
+                  <a:ext uri="{0D108BD9-81ED-4DB2-BD59-A6C34878D82A}">
+                    <a16:rowId xmlns:a16="http://schemas.microsoft.com/office/drawing/2014/main" val="10012"/>
+                  </a:ext>
+                </a:extLst>
+              </a:tr>
+              <a:tr h="0">
+                <a:tc>
+                  <a:txBody>
+                    <a:bodyPr/>
+                    <a:lstStyle/>
+                    <a:p>
+                      <a:pPr algn="ctr"/>
+                      <a:r>
+                        <a:rPr sz="1050"/>
+                        <a:t>Visual Color (SUMO-GUI)</a:t>
+                      </a:r>
+                    </a:p>
+                  </a:txBody>
+                  <a:tcPr/>
+                </a:tc>
+                <a:tc>
+                  <a:txBody>
+                    <a:bodyPr/>
+                    <a:lstStyle/>
+                    <a:p>
+                      <a:pPr algn="ctr"/>
+                      <a:r>
+                        <a:rPr sz="1050"/>
+                        <a:t>Magenta</a:t>
+                      </a:r>
+                    </a:p>
+                  </a:txBody>
+                  <a:tcPr/>
+                </a:tc>
+                <a:tc>
+                  <a:txBody>
+                    <a:bodyPr/>
+                    <a:lstStyle/>
+                    <a:p>
+                      <a:pPr algn="ctr"/>
+                      <a:r>
+                        <a:rPr sz="1050"/>
+                        <a:t>Green</a:t>
+                      </a:r>
+                    </a:p>
+                  </a:txBody>
+                  <a:tcPr/>
+                </a:tc>
+                <a:tc>
+                  <a:txBody>
+                    <a:bodyPr/>
+                    <a:lstStyle/>
+                    <a:p>
+                      <a:pPr algn="ctr"/>
+                      <a:r>
+                        <a:rPr sz="1050" dirty="0"/>
+                        <a:t>Blue</a:t>
+                      </a:r>
+                    </a:p>
+                  </a:txBody>
+                  <a:tcPr/>
+                </a:tc>
+                <a:extLst>
+                  <a:ext uri="{0D108BD9-81ED-4DB2-BD59-A6C34878D82A}">
+                    <a16:rowId xmlns:a16="http://schemas.microsoft.com/office/drawing/2014/main" val="10013"/>
+                  </a:ext>
+                </a:extLst>
+              </a:tr>
+            </a:tbl>
+          </a:graphicData>
+        </a:graphic>
+      </p:graphicFrame>
+      <p:sp>
+        <p:nvSpPr>
+          <p:cNvPr id="30" name="Text 3">
+            <a:extLst>
+              <a:ext uri="{FF2B5EF4-FFF2-40B4-BE49-F238E27FC236}">
+                <a16:creationId xmlns:a16="http://schemas.microsoft.com/office/drawing/2014/main" id="{5BEE8C00-AFD0-D2C9-4134-FCCBB1310127}"/>
+              </a:ext>
+            </a:extLst>
+          </p:cNvPr>
+          <p:cNvSpPr/>
+          <p:nvPr/>
+        </p:nvSpPr>
+        <p:spPr>
+          <a:xfrm>
+            <a:off x="2478232" y="980485"/>
+            <a:ext cx="4187536" cy="320040"/>
+          </a:xfrm>
+          <a:prstGeom prst="rect">
+            <a:avLst/>
+          </a:prstGeom>
+          <a:noFill/>
+          <a:ln/>
+        </p:spPr>
+        <p:txBody>
+          <a:bodyPr wrap="square" lIns="0" tIns="0" rIns="0" bIns="0" rtlCol="0" anchor="ctr"/>
+          <a:lstStyle/>
+          <a:p>
+            <a:pPr marL="0" indent="0" algn="ctr">
+              <a:buNone/>
+            </a:pPr>
+            <a:r>
+              <a:rPr lang="en-US" sz="1300" b="1" dirty="0">
+                <a:solidFill>
+                  <a:srgbClr val="1B3A6B"/>
+                </a:solidFill>
+                <a:latin typeface="Calibri" pitchFamily="34" charset="0"/>
+                <a:ea typeface="Calibri" pitchFamily="34" charset="-122"/>
+                <a:cs typeface="Calibri" pitchFamily="34" charset="-120"/>
+              </a:rPr>
+              <a:t>Vehicle Parameter Configuration in SUMO (Averaged Values)</a:t>
+            </a:r>
+            <a:endParaRPr lang="en-US" sz="1300" dirty="0"/>
+          </a:p>
+        </p:txBody>
+      </p:sp>
+    </p:spTree>
+    <p:extLst>
+      <p:ext uri="{BB962C8B-B14F-4D97-AF65-F5344CB8AC3E}">
+        <p14:creationId xmlns:p14="http://schemas.microsoft.com/office/powerpoint/2010/main" val="378219903"/>
+      </p:ext>
+    </p:extLst>
+  </p:cSld>
+  <p:clrMapOvr>
+    <a:masterClrMapping/>
+  </p:clrMapOvr>
+</p:sld>
+</file>
+
+<file path=ppt/slides/slide12.xml><?xml version="1.0" encoding="utf-8"?>
 <p:sld xmlns:a="http://schemas.openxmlformats.org/drawingml/2006/main" xmlns:r="http://schemas.openxmlformats.org/officeDocument/2006/relationships" xmlns:p="http://schemas.openxmlformats.org/presentationml/2006/main">
   <p:cSld name="Slide 8">
     <p:bg>
@@ -6851,7 +7896,7 @@
         </p:nvSpPr>
         <p:spPr>
           <a:xfrm>
-            <a:off x="320040" y="4873752"/>
+            <a:off x="320040" y="4904925"/>
             <a:ext cx="8503920" cy="201168"/>
           </a:xfrm>
           <a:prstGeom prst="rect">
@@ -6882,7 +7927,767 @@
 </p:sld>
 </file>
 
-<file path=ppt/slides/slide12.xml><?xml version="1.0" encoding="utf-8"?>
+<file path=ppt/slides/slide13.xml><?xml version="1.0" encoding="utf-8"?>
+<p:sld xmlns:a="http://schemas.openxmlformats.org/drawingml/2006/main" xmlns:r="http://schemas.openxmlformats.org/officeDocument/2006/relationships" xmlns:p="http://schemas.openxmlformats.org/presentationml/2006/main">
+  <p:cSld>
+    <p:spTree>
+      <p:nvGrpSpPr>
+        <p:cNvPr id="1" name=""/>
+        <p:cNvGrpSpPr/>
+        <p:nvPr/>
+      </p:nvGrpSpPr>
+      <p:grpSpPr>
+        <a:xfrm>
+          <a:off x="0" y="0"/>
+          <a:ext cx="0" cy="0"/>
+          <a:chOff x="0" y="0"/>
+          <a:chExt cx="0" cy="0"/>
+        </a:xfrm>
+      </p:grpSpPr>
+      <p:sp>
+        <p:nvSpPr>
+          <p:cNvPr id="2" name="Shape 0"/>
+          <p:cNvSpPr/>
+          <p:nvPr/>
+        </p:nvSpPr>
+        <p:spPr>
+          <a:xfrm>
+            <a:off x="0" y="0"/>
+            <a:ext cx="164592" cy="5143500"/>
+          </a:xfrm>
+          <a:prstGeom prst="rect">
+            <a:avLst/>
+          </a:prstGeom>
+          <a:solidFill>
+            <a:srgbClr val="1B3A6B"/>
+          </a:solidFill>
+          <a:ln w="12700">
+            <a:solidFill>
+              <a:srgbClr val="1B3A6B"/>
+            </a:solidFill>
+            <a:prstDash val="solid"/>
+          </a:ln>
+        </p:spPr>
+      </p:sp>
+      <p:sp>
+        <p:nvSpPr>
+          <p:cNvPr id="3" name="Text 1"/>
+          <p:cNvSpPr/>
+          <p:nvPr/>
+        </p:nvSpPr>
+        <p:spPr>
+          <a:xfrm>
+            <a:off x="320040" y="201168"/>
+            <a:ext cx="8503920" cy="493776"/>
+          </a:xfrm>
+          <a:prstGeom prst="rect">
+            <a:avLst/>
+          </a:prstGeom>
+          <a:noFill/>
+          <a:ln/>
+        </p:spPr>
+        <p:txBody>
+          <a:bodyPr wrap="square" lIns="0" tIns="0" rIns="0" bIns="0" rtlCol="0" anchor="ctr"/>
+          <a:lstStyle/>
+          <a:p>
+            <a:pPr marL="0" indent="0">
+              <a:buNone/>
+            </a:pPr>
+            <a:r>
+              <a:rPr lang="en-US" sz="2600" b="1" dirty="0">
+                <a:solidFill>
+                  <a:srgbClr val="1B3A6B"/>
+                </a:solidFill>
+                <a:latin typeface="Calibri" pitchFamily="34" charset="0"/>
+                <a:ea typeface="Calibri" pitchFamily="34" charset="-122"/>
+                <a:cs typeface="Calibri" pitchFamily="34" charset="-120"/>
+              </a:rPr>
+              <a:t>Dataset &amp; System Load Profile</a:t>
+            </a:r>
+            <a:endParaRPr lang="en-US" sz="2600" dirty="0"/>
+          </a:p>
+        </p:txBody>
+      </p:sp>
+      <p:sp>
+        <p:nvSpPr>
+          <p:cNvPr id="4" name="Text 2"/>
+          <p:cNvSpPr/>
+          <p:nvPr/>
+        </p:nvSpPr>
+        <p:spPr>
+          <a:xfrm>
+            <a:off x="320040" y="694944"/>
+            <a:ext cx="8229600" cy="274320"/>
+          </a:xfrm>
+          <a:prstGeom prst="rect">
+            <a:avLst/>
+          </a:prstGeom>
+          <a:noFill/>
+          <a:ln/>
+        </p:spPr>
+        <p:txBody>
+          <a:bodyPr wrap="square" lIns="0" tIns="0" rIns="0" bIns="0" rtlCol="0" anchor="ctr"/>
+          <a:lstStyle/>
+          <a:p>
+            <a:pPr marL="0" indent="0">
+              <a:buNone/>
+            </a:pPr>
+            <a:r>
+              <a:rPr lang="en-US" sz="1300" i="1" dirty="0">
+                <a:solidFill>
+                  <a:srgbClr val="64748B"/>
+                </a:solidFill>
+                <a:latin typeface="Calibri" pitchFamily="34" charset="0"/>
+                <a:ea typeface="Calibri" pitchFamily="34" charset="-122"/>
+                <a:cs typeface="Calibri" pitchFamily="34" charset="-120"/>
+              </a:rPr>
+              <a:t>34,020 records from a 600-second SUMO simulation</a:t>
+            </a:r>
+            <a:endParaRPr lang="en-US" sz="1300" dirty="0"/>
+          </a:p>
+        </p:txBody>
+      </p:sp>
+      <p:sp>
+        <p:nvSpPr>
+          <p:cNvPr id="5" name="Shape 3"/>
+          <p:cNvSpPr/>
+          <p:nvPr/>
+        </p:nvSpPr>
+        <p:spPr>
+          <a:xfrm>
+            <a:off x="320040" y="960120"/>
+            <a:ext cx="8503920" cy="36576"/>
+          </a:xfrm>
+          <a:prstGeom prst="rect">
+            <a:avLst/>
+          </a:prstGeom>
+          <a:solidFill>
+            <a:srgbClr val="0D7377"/>
+          </a:solidFill>
+          <a:ln w="12700">
+            <a:solidFill>
+              <a:srgbClr val="0D7377"/>
+            </a:solidFill>
+            <a:prstDash val="solid"/>
+          </a:ln>
+        </p:spPr>
+      </p:sp>
+      <p:sp>
+        <p:nvSpPr>
+          <p:cNvPr id="26" name="Shape 24"/>
+          <p:cNvSpPr/>
+          <p:nvPr/>
+        </p:nvSpPr>
+        <p:spPr>
+          <a:xfrm>
+            <a:off x="320040" y="1346660"/>
+            <a:ext cx="8503920" cy="3666746"/>
+          </a:xfrm>
+          <a:prstGeom prst="rect">
+            <a:avLst/>
+          </a:prstGeom>
+          <a:solidFill>
+            <a:srgbClr val="FFFFFF"/>
+          </a:solidFill>
+          <a:ln w="12700">
+            <a:solidFill>
+              <a:srgbClr val="CBD5E1"/>
+            </a:solidFill>
+            <a:prstDash val="solid"/>
+          </a:ln>
+          <a:effectLst>
+            <a:outerShdw blurRad="76200" dist="25400" dir="8100000" algn="bl" rotWithShape="0">
+              <a:srgbClr val="000000">
+                <a:alpha val="8000"/>
+              </a:srgbClr>
+            </a:outerShdw>
+          </a:effectLst>
+        </p:spPr>
+      </p:sp>
+      <p:graphicFrame>
+        <p:nvGraphicFramePr>
+          <p:cNvPr id="29" name="Table 28">
+            <a:extLst>
+              <a:ext uri="{FF2B5EF4-FFF2-40B4-BE49-F238E27FC236}">
+                <a16:creationId xmlns:a16="http://schemas.microsoft.com/office/drawing/2014/main" id="{D53FCFC3-CE62-A21C-7469-2E846B87B3C4}"/>
+              </a:ext>
+            </a:extLst>
+          </p:cNvPr>
+          <p:cNvGraphicFramePr>
+            <a:graphicFrameLocks noGrp="1"/>
+          </p:cNvGraphicFramePr>
+          <p:nvPr>
+            <p:extLst>
+              <p:ext uri="{D42A27DB-BD31-4B8C-83A1-F6EECF244321}">
+                <p14:modId xmlns:p14="http://schemas.microsoft.com/office/powerpoint/2010/main" val="2574529377"/>
+              </p:ext>
+            </p:extLst>
+          </p:nvPr>
+        </p:nvGraphicFramePr>
+        <p:xfrm>
+          <a:off x="457200" y="1463040"/>
+          <a:ext cx="8229600" cy="3438144"/>
+        </p:xfrm>
+        <a:graphic>
+          <a:graphicData uri="http://schemas.openxmlformats.org/drawingml/2006/table">
+            <a:tbl>
+              <a:tblPr firstRow="1" bandRow="1">
+                <a:tableStyleId>{5C22544A-7EE6-4342-B048-85BDC9FD1C3A}</a:tableStyleId>
+              </a:tblPr>
+              <a:tblGrid>
+                <a:gridCol w="3657600">
+                  <a:extLst>
+                    <a:ext uri="{9D8B030D-6E8A-4147-A177-3AD203B41FA5}">
+                      <a16:colId xmlns:a16="http://schemas.microsoft.com/office/drawing/2014/main" val="20000"/>
+                    </a:ext>
+                  </a:extLst>
+                </a:gridCol>
+                <a:gridCol w="4572000">
+                  <a:extLst>
+                    <a:ext uri="{9D8B030D-6E8A-4147-A177-3AD203B41FA5}">
+                      <a16:colId xmlns:a16="http://schemas.microsoft.com/office/drawing/2014/main" val="20001"/>
+                    </a:ext>
+                  </a:extLst>
+                </a:gridCol>
+              </a:tblGrid>
+              <a:tr h="286512">
+                <a:tc>
+                  <a:txBody>
+                    <a:bodyPr/>
+                    <a:lstStyle/>
+                    <a:p>
+                      <a:pPr algn="l">
+                        <a:defRPr sz="1400" b="1"/>
+                      </a:pPr>
+                      <a:r>
+                        <a:rPr sz="1200" dirty="0"/>
+                        <a:t>Property</a:t>
+                      </a:r>
+                    </a:p>
+                  </a:txBody>
+                  <a:tcPr>
+                    <a:solidFill>
+                      <a:srgbClr val="1B3A6B"/>
+                    </a:solidFill>
+                  </a:tcPr>
+                </a:tc>
+                <a:tc>
+                  <a:txBody>
+                    <a:bodyPr/>
+                    <a:lstStyle/>
+                    <a:p>
+                      <a:pPr algn="l">
+                        <a:defRPr sz="1400" b="1"/>
+                      </a:pPr>
+                      <a:r>
+                        <a:rPr sz="1200" dirty="0"/>
+                        <a:t>Value</a:t>
+                      </a:r>
+                    </a:p>
+                  </a:txBody>
+                  <a:tcPr>
+                    <a:solidFill>
+                      <a:srgbClr val="0D7377"/>
+                    </a:solidFill>
+                  </a:tcPr>
+                </a:tc>
+                <a:extLst>
+                  <a:ext uri="{0D108BD9-81ED-4DB2-BD59-A6C34878D82A}">
+                    <a16:rowId xmlns:a16="http://schemas.microsoft.com/office/drawing/2014/main" val="10000"/>
+                  </a:ext>
+                </a:extLst>
+              </a:tr>
+              <a:tr h="286512">
+                <a:tc>
+                  <a:txBody>
+                    <a:bodyPr/>
+                    <a:lstStyle/>
+                    <a:p>
+                      <a:pPr algn="l">
+                        <a:defRPr sz="1400"/>
+                      </a:pPr>
+                      <a:r>
+                        <a:rPr sz="1200"/>
+                        <a:t>Total records</a:t>
+                      </a:r>
+                    </a:p>
+                  </a:txBody>
+                  <a:tcPr/>
+                </a:tc>
+                <a:tc>
+                  <a:txBody>
+                    <a:bodyPr/>
+                    <a:lstStyle/>
+                    <a:p>
+                      <a:pPr algn="l">
+                        <a:defRPr sz="1400"/>
+                      </a:pPr>
+                      <a:r>
+                        <a:rPr sz="1200"/>
+                        <a:t>34,020</a:t>
+                      </a:r>
+                    </a:p>
+                  </a:txBody>
+                  <a:tcPr/>
+                </a:tc>
+                <a:extLst>
+                  <a:ext uri="{0D108BD9-81ED-4DB2-BD59-A6C34878D82A}">
+                    <a16:rowId xmlns:a16="http://schemas.microsoft.com/office/drawing/2014/main" val="10001"/>
+                  </a:ext>
+                </a:extLst>
+              </a:tr>
+              <a:tr h="286512">
+                <a:tc>
+                  <a:txBody>
+                    <a:bodyPr/>
+                    <a:lstStyle/>
+                    <a:p>
+                      <a:pPr algn="l">
+                        <a:defRPr sz="1400"/>
+                      </a:pPr>
+                      <a:r>
+                        <a:rPr sz="1200"/>
+                        <a:t>Number of features</a:t>
+                      </a:r>
+                    </a:p>
+                  </a:txBody>
+                  <a:tcPr/>
+                </a:tc>
+                <a:tc>
+                  <a:txBody>
+                    <a:bodyPr/>
+                    <a:lstStyle/>
+                    <a:p>
+                      <a:pPr algn="l">
+                        <a:defRPr sz="1400"/>
+                      </a:pPr>
+                      <a:r>
+                        <a:rPr sz="1200" dirty="0"/>
+                        <a:t>25</a:t>
+                      </a:r>
+                    </a:p>
+                  </a:txBody>
+                  <a:tcPr/>
+                </a:tc>
+                <a:extLst>
+                  <a:ext uri="{0D108BD9-81ED-4DB2-BD59-A6C34878D82A}">
+                    <a16:rowId xmlns:a16="http://schemas.microsoft.com/office/drawing/2014/main" val="10002"/>
+                  </a:ext>
+                </a:extLst>
+              </a:tr>
+              <a:tr h="286512">
+                <a:tc>
+                  <a:txBody>
+                    <a:bodyPr/>
+                    <a:lstStyle/>
+                    <a:p>
+                      <a:pPr algn="l">
+                        <a:defRPr sz="1400"/>
+                      </a:pPr>
+                      <a:r>
+                        <a:rPr sz="1200"/>
+                        <a:t>Unique vehicles</a:t>
+                      </a:r>
+                    </a:p>
+                  </a:txBody>
+                  <a:tcPr/>
+                </a:tc>
+                <a:tc>
+                  <a:txBody>
+                    <a:bodyPr/>
+                    <a:lstStyle/>
+                    <a:p>
+                      <a:pPr algn="l">
+                        <a:defRPr sz="1400"/>
+                      </a:pPr>
+                      <a:r>
+                        <a:rPr sz="1200"/>
+                        <a:t>49</a:t>
+                      </a:r>
+                    </a:p>
+                  </a:txBody>
+                  <a:tcPr/>
+                </a:tc>
+                <a:extLst>
+                  <a:ext uri="{0D108BD9-81ED-4DB2-BD59-A6C34878D82A}">
+                    <a16:rowId xmlns:a16="http://schemas.microsoft.com/office/drawing/2014/main" val="10003"/>
+                  </a:ext>
+                </a:extLst>
+              </a:tr>
+              <a:tr h="286512">
+                <a:tc>
+                  <a:txBody>
+                    <a:bodyPr/>
+                    <a:lstStyle/>
+                    <a:p>
+                      <a:pPr algn="l">
+                        <a:defRPr sz="1400"/>
+                      </a:pPr>
+                      <a:r>
+                        <a:rPr sz="1200"/>
+                        <a:t>Simulation duration (s)</a:t>
+                      </a:r>
+                    </a:p>
+                  </a:txBody>
+                  <a:tcPr/>
+                </a:tc>
+                <a:tc>
+                  <a:txBody>
+                    <a:bodyPr/>
+                    <a:lstStyle/>
+                    <a:p>
+                      <a:pPr algn="l">
+                        <a:defRPr sz="1400"/>
+                      </a:pPr>
+                      <a:r>
+                        <a:rPr sz="1200"/>
+                        <a:t>1 – 600</a:t>
+                      </a:r>
+                    </a:p>
+                  </a:txBody>
+                  <a:tcPr/>
+                </a:tc>
+                <a:extLst>
+                  <a:ext uri="{0D108BD9-81ED-4DB2-BD59-A6C34878D82A}">
+                    <a16:rowId xmlns:a16="http://schemas.microsoft.com/office/drawing/2014/main" val="10004"/>
+                  </a:ext>
+                </a:extLst>
+              </a:tr>
+              <a:tr h="286512">
+                <a:tc>
+                  <a:txBody>
+                    <a:bodyPr/>
+                    <a:lstStyle/>
+                    <a:p>
+                      <a:pPr algn="l">
+                        <a:defRPr sz="1400"/>
+                      </a:pPr>
+                      <a:r>
+                        <a:rPr sz="1200"/>
+                        <a:t>Status: Driving</a:t>
+                      </a:r>
+                    </a:p>
+                  </a:txBody>
+                  <a:tcPr/>
+                </a:tc>
+                <a:tc>
+                  <a:txBody>
+                    <a:bodyPr/>
+                    <a:lstStyle/>
+                    <a:p>
+                      <a:pPr algn="l">
+                        <a:defRPr sz="1400"/>
+                      </a:pPr>
+                      <a:r>
+                        <a:rPr sz="1200"/>
+                        <a:t>19,710 (57.9%)</a:t>
+                      </a:r>
+                    </a:p>
+                  </a:txBody>
+                  <a:tcPr/>
+                </a:tc>
+                <a:extLst>
+                  <a:ext uri="{0D108BD9-81ED-4DB2-BD59-A6C34878D82A}">
+                    <a16:rowId xmlns:a16="http://schemas.microsoft.com/office/drawing/2014/main" val="10005"/>
+                  </a:ext>
+                </a:extLst>
+              </a:tr>
+              <a:tr h="286512">
+                <a:tc>
+                  <a:txBody>
+                    <a:bodyPr/>
+                    <a:lstStyle/>
+                    <a:p>
+                      <a:pPr algn="l">
+                        <a:defRPr sz="1400"/>
+                      </a:pPr>
+                      <a:r>
+                        <a:rPr sz="1200"/>
+                        <a:t>Status: Charging</a:t>
+                      </a:r>
+                    </a:p>
+                  </a:txBody>
+                  <a:tcPr/>
+                </a:tc>
+                <a:tc>
+                  <a:txBody>
+                    <a:bodyPr/>
+                    <a:lstStyle/>
+                    <a:p>
+                      <a:pPr algn="l">
+                        <a:defRPr sz="1400"/>
+                      </a:pPr>
+                      <a:r>
+                        <a:rPr sz="1200"/>
+                        <a:t>11,980 (35.2%)</a:t>
+                      </a:r>
+                    </a:p>
+                  </a:txBody>
+                  <a:tcPr/>
+                </a:tc>
+                <a:extLst>
+                  <a:ext uri="{0D108BD9-81ED-4DB2-BD59-A6C34878D82A}">
+                    <a16:rowId xmlns:a16="http://schemas.microsoft.com/office/drawing/2014/main" val="10006"/>
+                  </a:ext>
+                </a:extLst>
+              </a:tr>
+              <a:tr h="286512">
+                <a:tc>
+                  <a:txBody>
+                    <a:bodyPr/>
+                    <a:lstStyle/>
+                    <a:p>
+                      <a:pPr algn="l">
+                        <a:defRPr sz="1400"/>
+                      </a:pPr>
+                      <a:r>
+                        <a:rPr sz="1200"/>
+                        <a:t>Status: Waiting</a:t>
+                      </a:r>
+                    </a:p>
+                  </a:txBody>
+                  <a:tcPr/>
+                </a:tc>
+                <a:tc>
+                  <a:txBody>
+                    <a:bodyPr/>
+                    <a:lstStyle/>
+                    <a:p>
+                      <a:pPr algn="l">
+                        <a:defRPr sz="1400"/>
+                      </a:pPr>
+                      <a:r>
+                        <a:rPr sz="1200"/>
+                        <a:t>1,720 (5.1%)</a:t>
+                      </a:r>
+                    </a:p>
+                  </a:txBody>
+                  <a:tcPr/>
+                </a:tc>
+                <a:extLst>
+                  <a:ext uri="{0D108BD9-81ED-4DB2-BD59-A6C34878D82A}">
+                    <a16:rowId xmlns:a16="http://schemas.microsoft.com/office/drawing/2014/main" val="10007"/>
+                  </a:ext>
+                </a:extLst>
+              </a:tr>
+              <a:tr h="286512">
+                <a:tc>
+                  <a:txBody>
+                    <a:bodyPr/>
+                    <a:lstStyle/>
+                    <a:p>
+                      <a:pPr algn="l">
+                        <a:defRPr sz="1400"/>
+                      </a:pPr>
+                      <a:r>
+                        <a:rPr sz="1200"/>
+                        <a:t>Status: Idle</a:t>
+                      </a:r>
+                    </a:p>
+                  </a:txBody>
+                  <a:tcPr/>
+                </a:tc>
+                <a:tc>
+                  <a:txBody>
+                    <a:bodyPr/>
+                    <a:lstStyle/>
+                    <a:p>
+                      <a:pPr algn="l">
+                        <a:defRPr sz="1400"/>
+                      </a:pPr>
+                      <a:r>
+                        <a:rPr sz="1200"/>
+                        <a:t>610 (1.8%)</a:t>
+                      </a:r>
+                    </a:p>
+                  </a:txBody>
+                  <a:tcPr/>
+                </a:tc>
+                <a:extLst>
+                  <a:ext uri="{0D108BD9-81ED-4DB2-BD59-A6C34878D82A}">
+                    <a16:rowId xmlns:a16="http://schemas.microsoft.com/office/drawing/2014/main" val="10008"/>
+                  </a:ext>
+                </a:extLst>
+              </a:tr>
+              <a:tr h="286512">
+                <a:tc>
+                  <a:txBody>
+                    <a:bodyPr/>
+                    <a:lstStyle/>
+                    <a:p>
+                      <a:pPr algn="l">
+                        <a:defRPr sz="1400"/>
+                      </a:pPr>
+                      <a:r>
+                        <a:rPr sz="1200"/>
+                        <a:t>System load: Minimum (kW)</a:t>
+                      </a:r>
+                    </a:p>
+                  </a:txBody>
+                  <a:tcPr/>
+                </a:tc>
+                <a:tc>
+                  <a:txBody>
+                    <a:bodyPr/>
+                    <a:lstStyle/>
+                    <a:p>
+                      <a:pPr algn="l">
+                        <a:defRPr sz="1400"/>
+                      </a:pPr>
+                      <a:r>
+                        <a:rPr sz="1200"/>
+                        <a:t>0.00</a:t>
+                      </a:r>
+                    </a:p>
+                  </a:txBody>
+                  <a:tcPr/>
+                </a:tc>
+                <a:extLst>
+                  <a:ext uri="{0D108BD9-81ED-4DB2-BD59-A6C34878D82A}">
+                    <a16:rowId xmlns:a16="http://schemas.microsoft.com/office/drawing/2014/main" val="10009"/>
+                  </a:ext>
+                </a:extLst>
+              </a:tr>
+              <a:tr h="286512">
+                <a:tc>
+                  <a:txBody>
+                    <a:bodyPr/>
+                    <a:lstStyle/>
+                    <a:p>
+                      <a:pPr algn="l">
+                        <a:defRPr sz="1400"/>
+                      </a:pPr>
+                      <a:r>
+                        <a:rPr sz="1200"/>
+                        <a:t>System load: Mean (kW)</a:t>
+                      </a:r>
+                    </a:p>
+                  </a:txBody>
+                  <a:tcPr/>
+                </a:tc>
+                <a:tc>
+                  <a:txBody>
+                    <a:bodyPr/>
+                    <a:lstStyle/>
+                    <a:p>
+                      <a:pPr algn="l">
+                        <a:defRPr sz="1400"/>
+                      </a:pPr>
+                      <a:r>
+                        <a:rPr sz="1200"/>
+                        <a:t>723.82</a:t>
+                      </a:r>
+                    </a:p>
+                  </a:txBody>
+                  <a:tcPr/>
+                </a:tc>
+                <a:extLst>
+                  <a:ext uri="{0D108BD9-81ED-4DB2-BD59-A6C34878D82A}">
+                    <a16:rowId xmlns:a16="http://schemas.microsoft.com/office/drawing/2014/main" val="10010"/>
+                  </a:ext>
+                </a:extLst>
+              </a:tr>
+              <a:tr h="286512">
+                <a:tc>
+                  <a:txBody>
+                    <a:bodyPr/>
+                    <a:lstStyle/>
+                    <a:p>
+                      <a:pPr algn="l">
+                        <a:defRPr sz="1400"/>
+                      </a:pPr>
+                      <a:r>
+                        <a:rPr sz="1200"/>
+                        <a:t>System load: Maximum (kW)</a:t>
+                      </a:r>
+                    </a:p>
+                  </a:txBody>
+                  <a:tcPr/>
+                </a:tc>
+                <a:tc>
+                  <a:txBody>
+                    <a:bodyPr/>
+                    <a:lstStyle/>
+                    <a:p>
+                      <a:pPr algn="l">
+                        <a:defRPr sz="1400"/>
+                      </a:pPr>
+                      <a:r>
+                        <a:rPr sz="1200" dirty="0"/>
+                        <a:t>1,340.00</a:t>
+                      </a:r>
+                    </a:p>
+                  </a:txBody>
+                  <a:tcPr/>
+                </a:tc>
+                <a:extLst>
+                  <a:ext uri="{0D108BD9-81ED-4DB2-BD59-A6C34878D82A}">
+                    <a16:rowId xmlns:a16="http://schemas.microsoft.com/office/drawing/2014/main" val="10011"/>
+                  </a:ext>
+                </a:extLst>
+              </a:tr>
+            </a:tbl>
+          </a:graphicData>
+        </a:graphic>
+      </p:graphicFrame>
+      <p:sp>
+        <p:nvSpPr>
+          <p:cNvPr id="30" name="Text 3">
+            <a:extLst>
+              <a:ext uri="{FF2B5EF4-FFF2-40B4-BE49-F238E27FC236}">
+                <a16:creationId xmlns:a16="http://schemas.microsoft.com/office/drawing/2014/main" id="{86FAA006-E26B-B758-37E2-44C53E0ACA17}"/>
+              </a:ext>
+            </a:extLst>
+          </p:cNvPr>
+          <p:cNvSpPr/>
+          <p:nvPr/>
+        </p:nvSpPr>
+        <p:spPr>
+          <a:xfrm>
+            <a:off x="2478232" y="1011658"/>
+            <a:ext cx="4187536" cy="320040"/>
+          </a:xfrm>
+          <a:prstGeom prst="rect">
+            <a:avLst/>
+          </a:prstGeom>
+          <a:noFill/>
+          <a:ln/>
+        </p:spPr>
+        <p:txBody>
+          <a:bodyPr wrap="square" lIns="0" tIns="0" rIns="0" bIns="0" rtlCol="0" anchor="ctr"/>
+          <a:lstStyle/>
+          <a:p>
+            <a:pPr marL="0" indent="0" algn="ctr">
+              <a:buNone/>
+            </a:pPr>
+            <a:r>
+              <a:rPr lang="en-US" sz="1300" b="1" dirty="0">
+                <a:solidFill>
+                  <a:srgbClr val="1B3A6B"/>
+                </a:solidFill>
+                <a:latin typeface="Calibri" pitchFamily="34" charset="0"/>
+                <a:ea typeface="Calibri" pitchFamily="34" charset="-122"/>
+                <a:cs typeface="Calibri" pitchFamily="34" charset="-120"/>
+              </a:rPr>
+              <a:t>EV Charging Load Demand Dataset Summary</a:t>
+            </a:r>
+          </a:p>
+        </p:txBody>
+      </p:sp>
+    </p:spTree>
+    <p:extLst>
+      <p:ext uri="{BB962C8B-B14F-4D97-AF65-F5344CB8AC3E}">
+        <p14:creationId xmlns:p14="http://schemas.microsoft.com/office/powerpoint/2010/main" val="1084397363"/>
+      </p:ext>
+    </p:extLst>
+  </p:cSld>
+  <p:clrMapOvr>
+    <a:masterClrMapping/>
+  </p:clrMapOvr>
+</p:sld>
+</file>
+
+<file path=ppt/slides/slide14.xml><?xml version="1.0" encoding="utf-8"?>
 <p:sld xmlns:a="http://schemas.openxmlformats.org/drawingml/2006/main" xmlns:r="http://schemas.openxmlformats.org/officeDocument/2006/relationships" xmlns:p="http://schemas.openxmlformats.org/presentationml/2006/main">
   <p:cSld name="Slide 9">
     <p:bg>
@@ -7144,42 +8949,6 @@
       </p:pic>
       <p:sp>
         <p:nvSpPr>
-          <p:cNvPr id="10" name="Text 6"/>
-          <p:cNvSpPr/>
-          <p:nvPr/>
-        </p:nvSpPr>
-        <p:spPr>
-          <a:xfrm>
-            <a:off x="4709160" y="4800600"/>
-            <a:ext cx="4114800" cy="228600"/>
-          </a:xfrm>
-          <a:prstGeom prst="rect">
-            <a:avLst/>
-          </a:prstGeom>
-          <a:noFill/>
-          <a:ln/>
-        </p:spPr>
-        <p:txBody>
-          <a:bodyPr wrap="square" lIns="0" tIns="0" rIns="0" bIns="0" rtlCol="0" anchor="ctr"/>
-          <a:lstStyle/>
-          <a:p>
-            <a:pPr marL="0" indent="0" algn="ctr">
-              <a:buNone/>
-            </a:pPr>
-            <a:r>
-              <a:rPr lang="en-US" sz="950" dirty="0">
-                <a:solidFill>
-                  <a:srgbClr val="64748B"/>
-                </a:solidFill>
-              </a:rPr>
-              <a:t>Top 15 Feature Importance (XGBoost)</a:t>
-            </a:r>
-            <a:endParaRPr lang="en-US" sz="950" dirty="0"/>
-          </a:p>
-        </p:txBody>
-      </p:sp>
-      <p:sp>
-        <p:nvSpPr>
           <p:cNvPr id="11" name="Shape 7"/>
           <p:cNvSpPr/>
           <p:nvPr/>
@@ -7212,52 +8981,13 @@
       </p:sp>
       <p:sp>
         <p:nvSpPr>
-          <p:cNvPr id="12" name="Text 8"/>
-          <p:cNvSpPr/>
-          <p:nvPr/>
-        </p:nvSpPr>
-        <p:spPr>
-          <a:xfrm>
-            <a:off x="4709160" y="4754880"/>
-            <a:ext cx="4114800" cy="146304"/>
-          </a:xfrm>
-          <a:prstGeom prst="rect">
-            <a:avLst/>
-          </a:prstGeom>
-          <a:noFill/>
-          <a:ln/>
-        </p:spPr>
-        <p:txBody>
-          <a:bodyPr wrap="square" lIns="0" tIns="0" rIns="0" bIns="0" rtlCol="0" anchor="ctr"/>
-          <a:lstStyle/>
-          <a:p>
-            <a:pPr marL="0" indent="0">
-              <a:buNone/>
-            </a:pPr>
-            <a:r>
-              <a:rPr lang="en-US" sz="950" dirty="0">
-                <a:solidFill>
-                  <a:srgbClr val="1E293B"/>
-                </a:solidFill>
-                <a:latin typeface="Calibri" pitchFamily="34" charset="0"/>
-                <a:ea typeface="Calibri" pitchFamily="34" charset="-122"/>
-                <a:cs typeface="Calibri" pitchFamily="34" charset="-120"/>
-              </a:rPr>
-              <a:t>● system_charging_vehicles  →  r ≈ 0.996 (strongest driver)</a:t>
-            </a:r>
-            <a:endParaRPr lang="en-US" sz="950" dirty="0"/>
-          </a:p>
-        </p:txBody>
-      </p:sp>
-      <p:sp>
-        <p:nvSpPr>
           <p:cNvPr id="13" name="Text 9"/>
           <p:cNvSpPr/>
           <p:nvPr/>
         </p:nvSpPr>
         <p:spPr>
           <a:xfrm>
-            <a:off x="4709160" y="4864608"/>
+            <a:off x="4709160" y="4816602"/>
             <a:ext cx="4114800" cy="146304"/>
           </a:xfrm>
           <a:prstGeom prst="rect">
@@ -7296,7 +9026,7 @@
         </p:nvSpPr>
         <p:spPr>
           <a:xfrm>
-            <a:off x="4709160" y="4974336"/>
+            <a:off x="4709160" y="4961636"/>
             <a:ext cx="4114800" cy="146304"/>
           </a:xfrm>
           <a:prstGeom prst="rect">
@@ -7335,7 +9065,7 @@
 </p:sld>
 </file>
 
-<file path=ppt/slides/slide13.xml><?xml version="1.0" encoding="utf-8"?>
+<file path=ppt/slides/slide15.xml><?xml version="1.0" encoding="utf-8"?>
 <p:sld xmlns:a="http://schemas.openxmlformats.org/drawingml/2006/main" xmlns:r="http://schemas.openxmlformats.org/officeDocument/2006/relationships" xmlns:p="http://schemas.openxmlformats.org/presentationml/2006/main">
   <p:cSld name="Slide 10">
     <p:bg>
@@ -8765,7 +10495,7 @@
 </p:sld>
 </file>
 
-<file path=ppt/slides/slide14.xml><?xml version="1.0" encoding="utf-8"?>
+<file path=ppt/slides/slide16.xml><?xml version="1.0" encoding="utf-8"?>
 <p:sld xmlns:a="http://schemas.openxmlformats.org/drawingml/2006/main" xmlns:r="http://schemas.openxmlformats.org/officeDocument/2006/relationships" xmlns:p="http://schemas.openxmlformats.org/presentationml/2006/main">
   <p:cSld name="Slide 11">
     <p:bg>
@@ -9776,7 +11506,7 @@
 </p:sld>
 </file>
 
-<file path=ppt/slides/slide15.xml><?xml version="1.0" encoding="utf-8"?>
+<file path=ppt/slides/slide17.xml><?xml version="1.0" encoding="utf-8"?>
 <p:sld xmlns:a="http://schemas.openxmlformats.org/drawingml/2006/main" xmlns:r="http://schemas.openxmlformats.org/officeDocument/2006/relationships" xmlns:p="http://schemas.openxmlformats.org/presentationml/2006/main">
   <p:cSld name="Slide 12">
     <p:bg>
@@ -10301,7 +12031,7 @@
 </p:sld>
 </file>
 
-<file path=ppt/slides/slide16.xml><?xml version="1.0" encoding="utf-8"?>
+<file path=ppt/slides/slide18.xml><?xml version="1.0" encoding="utf-8"?>
 <p:sld xmlns:a="http://schemas.openxmlformats.org/drawingml/2006/main" xmlns:r="http://schemas.openxmlformats.org/officeDocument/2006/relationships" xmlns:p="http://schemas.openxmlformats.org/presentationml/2006/main">
   <p:cSld name="Slide 13">
     <p:bg>
@@ -14990,7 +16720,7 @@
 </p:sld>
 </file>
 
-<file path=ppt/slides/slide17.xml><?xml version="1.0" encoding="utf-8"?>
+<file path=ppt/slides/slide19.xml><?xml version="1.0" encoding="utf-8"?>
 <p:sld xmlns:a="http://schemas.openxmlformats.org/drawingml/2006/main" xmlns:r="http://schemas.openxmlformats.org/officeDocument/2006/relationships" xmlns:p="http://schemas.openxmlformats.org/presentationml/2006/main">
   <p:cSld name="Slide 14">
     <p:bg>
@@ -15911,1852 +17641,6 @@
               <a:t>SUMO-based synthetic dataset generation is effective for developing countries where real EV charging data is scarce or unavailable.</a:t>
             </a:r>
             <a:endParaRPr lang="en-US" sz="1050" dirty="0"/>
-          </a:p>
-        </p:txBody>
-      </p:sp>
-    </p:spTree>
-  </p:cSld>
-  <p:clrMapOvr>
-    <a:masterClrMapping/>
-  </p:clrMapOvr>
-</p:sld>
-</file>
-
-<file path=ppt/slides/slide18.xml><?xml version="1.0" encoding="utf-8"?>
-<p:sld xmlns:a="http://schemas.openxmlformats.org/drawingml/2006/main" xmlns:r="http://schemas.openxmlformats.org/officeDocument/2006/relationships" xmlns:p="http://schemas.openxmlformats.org/presentationml/2006/main">
-  <p:cSld name="Slide 15">
-    <p:bg>
-      <p:bgPr>
-        <a:solidFill>
-          <a:srgbClr val="F7F9FC"/>
-        </a:solidFill>
-        <a:effectLst/>
-      </p:bgPr>
-    </p:bg>
-    <p:spTree>
-      <p:nvGrpSpPr>
-        <p:cNvPr id="1" name=""/>
-        <p:cNvGrpSpPr/>
-        <p:nvPr/>
-      </p:nvGrpSpPr>
-      <p:grpSpPr>
-        <a:xfrm>
-          <a:off x="0" y="0"/>
-          <a:ext cx="0" cy="0"/>
-          <a:chOff x="0" y="0"/>
-          <a:chExt cx="0" cy="0"/>
-        </a:xfrm>
-      </p:grpSpPr>
-      <p:sp>
-        <p:nvSpPr>
-          <p:cNvPr id="2" name="Shape 0"/>
-          <p:cNvSpPr/>
-          <p:nvPr/>
-        </p:nvSpPr>
-        <p:spPr>
-          <a:xfrm>
-            <a:off x="0" y="0"/>
-            <a:ext cx="164592" cy="5143500"/>
-          </a:xfrm>
-          <a:prstGeom prst="rect">
-            <a:avLst/>
-          </a:prstGeom>
-          <a:solidFill>
-            <a:srgbClr val="1B3A6B"/>
-          </a:solidFill>
-          <a:ln w="12700">
-            <a:solidFill>
-              <a:srgbClr val="1B3A6B"/>
-            </a:solidFill>
-            <a:prstDash val="solid"/>
-          </a:ln>
-        </p:spPr>
-      </p:sp>
-      <p:sp>
-        <p:nvSpPr>
-          <p:cNvPr id="3" name="Text 1"/>
-          <p:cNvSpPr/>
-          <p:nvPr/>
-        </p:nvSpPr>
-        <p:spPr>
-          <a:xfrm>
-            <a:off x="320040" y="201168"/>
-            <a:ext cx="8503920" cy="493776"/>
-          </a:xfrm>
-          <a:prstGeom prst="rect">
-            <a:avLst/>
-          </a:prstGeom>
-          <a:noFill/>
-          <a:ln/>
-        </p:spPr>
-        <p:txBody>
-          <a:bodyPr wrap="square" lIns="0" tIns="0" rIns="0" bIns="0" rtlCol="0" anchor="ctr"/>
-          <a:lstStyle/>
-          <a:p>
-            <a:pPr marL="0" indent="0">
-              <a:buNone/>
-            </a:pPr>
-            <a:r>
-              <a:rPr lang="en-US" sz="2600" b="1" dirty="0">
-                <a:solidFill>
-                  <a:srgbClr val="1B3A6B"/>
-                </a:solidFill>
-                <a:latin typeface="Calibri" pitchFamily="34" charset="0"/>
-                <a:ea typeface="Calibri" pitchFamily="34" charset="-122"/>
-                <a:cs typeface="Calibri" pitchFamily="34" charset="-120"/>
-              </a:rPr>
-              <a:t>Limitations &amp; Recommendations for Future Work</a:t>
-            </a:r>
-            <a:endParaRPr lang="en-US" sz="2600" dirty="0"/>
-          </a:p>
-        </p:txBody>
-      </p:sp>
-      <p:sp>
-        <p:nvSpPr>
-          <p:cNvPr id="4" name="Shape 2"/>
-          <p:cNvSpPr/>
-          <p:nvPr/>
-        </p:nvSpPr>
-        <p:spPr>
-          <a:xfrm>
-            <a:off x="320040" y="960120"/>
-            <a:ext cx="8503920" cy="36576"/>
-          </a:xfrm>
-          <a:prstGeom prst="rect">
-            <a:avLst/>
-          </a:prstGeom>
-          <a:solidFill>
-            <a:srgbClr val="0D7377"/>
-          </a:solidFill>
-          <a:ln w="12700">
-            <a:solidFill>
-              <a:srgbClr val="0D7377"/>
-            </a:solidFill>
-            <a:prstDash val="solid"/>
-          </a:ln>
-        </p:spPr>
-      </p:sp>
-      <p:sp>
-        <p:nvSpPr>
-          <p:cNvPr id="5" name="Text 3"/>
-          <p:cNvSpPr/>
-          <p:nvPr/>
-        </p:nvSpPr>
-        <p:spPr>
-          <a:xfrm>
-            <a:off x="320040" y="1115568"/>
-            <a:ext cx="4114800" cy="320040"/>
-          </a:xfrm>
-          <a:prstGeom prst="rect">
-            <a:avLst/>
-          </a:prstGeom>
-          <a:noFill/>
-          <a:ln/>
-        </p:spPr>
-        <p:txBody>
-          <a:bodyPr wrap="square" lIns="0" tIns="0" rIns="0" bIns="0" rtlCol="0" anchor="ctr"/>
-          <a:lstStyle/>
-          <a:p>
-            <a:pPr marL="0" indent="0">
-              <a:buNone/>
-            </a:pPr>
-            <a:r>
-              <a:rPr lang="en-US" sz="1400" b="1" dirty="0">
-                <a:solidFill>
-                  <a:srgbClr val="C0392B"/>
-                </a:solidFill>
-                <a:latin typeface="Calibri" pitchFamily="34" charset="0"/>
-                <a:ea typeface="Calibri" pitchFamily="34" charset="-122"/>
-                <a:cs typeface="Calibri" pitchFamily="34" charset="-120"/>
-              </a:rPr>
-              <a:t>Current Limitations</a:t>
-            </a:r>
-            <a:endParaRPr lang="en-US" sz="1400" dirty="0"/>
-          </a:p>
-        </p:txBody>
-      </p:sp>
-      <p:sp>
-        <p:nvSpPr>
-          <p:cNvPr id="6" name="Shape 4"/>
-          <p:cNvSpPr/>
-          <p:nvPr/>
-        </p:nvSpPr>
-        <p:spPr>
-          <a:xfrm>
-            <a:off x="320040" y="1508760"/>
-            <a:ext cx="4114800" cy="621792"/>
-          </a:xfrm>
-          <a:prstGeom prst="rect">
-            <a:avLst/>
-          </a:prstGeom>
-          <a:solidFill>
-            <a:srgbClr val="FFFFFF"/>
-          </a:solidFill>
-          <a:ln w="12700">
-            <a:solidFill>
-              <a:srgbClr val="CBD5E1"/>
-            </a:solidFill>
-            <a:prstDash val="solid"/>
-          </a:ln>
-          <a:effectLst>
-            <a:outerShdw blurRad="76200" dist="25400" dir="8100000" algn="bl" rotWithShape="0">
-              <a:srgbClr val="000000">
-                <a:alpha val="8000"/>
-              </a:srgbClr>
-            </a:outerShdw>
-          </a:effectLst>
-        </p:spPr>
-      </p:sp>
-      <p:sp>
-        <p:nvSpPr>
-          <p:cNvPr id="7" name="Shape 5"/>
-          <p:cNvSpPr/>
-          <p:nvPr/>
-        </p:nvSpPr>
-        <p:spPr>
-          <a:xfrm>
-            <a:off x="320040" y="1508760"/>
-            <a:ext cx="54864" cy="621792"/>
-          </a:xfrm>
-          <a:prstGeom prst="rect">
-            <a:avLst/>
-          </a:prstGeom>
-          <a:solidFill>
-            <a:srgbClr val="C0392B"/>
-          </a:solidFill>
-          <a:ln w="12700">
-            <a:solidFill>
-              <a:srgbClr val="C0392B"/>
-            </a:solidFill>
-            <a:prstDash val="solid"/>
-          </a:ln>
-        </p:spPr>
-      </p:sp>
-      <p:sp>
-        <p:nvSpPr>
-          <p:cNvPr id="8" name="Text 6"/>
-          <p:cNvSpPr/>
-          <p:nvPr/>
-        </p:nvSpPr>
-        <p:spPr>
-          <a:xfrm>
-            <a:off x="457200" y="1572768"/>
-            <a:ext cx="3840480" cy="457200"/>
-          </a:xfrm>
-          <a:prstGeom prst="rect">
-            <a:avLst/>
-          </a:prstGeom>
-          <a:noFill/>
-          <a:ln/>
-        </p:spPr>
-        <p:txBody>
-          <a:bodyPr wrap="square" lIns="0" tIns="0" rIns="0" bIns="0" rtlCol="0" anchor="ctr"/>
-          <a:lstStyle/>
-          <a:p>
-            <a:pPr marL="0" indent="0">
-              <a:buNone/>
-            </a:pPr>
-            <a:r>
-              <a:rPr lang="en-US" sz="1100" dirty="0">
-                <a:solidFill>
-                  <a:srgbClr val="1E293B"/>
-                </a:solidFill>
-                <a:latin typeface="Calibri" pitchFamily="34" charset="0"/>
-                <a:ea typeface="Calibri" pitchFamily="34" charset="-122"/>
-                <a:cs typeface="Calibri" pitchFamily="34" charset="-120"/>
-              </a:rPr>
-              <a:t>Simulation-only dataset — real-world stochastic behavior not fully captured</a:t>
-            </a:r>
-            <a:endParaRPr lang="en-US" sz="1100" dirty="0"/>
-          </a:p>
-        </p:txBody>
-      </p:sp>
-      <p:sp>
-        <p:nvSpPr>
-          <p:cNvPr id="9" name="Shape 7"/>
-          <p:cNvSpPr/>
-          <p:nvPr/>
-        </p:nvSpPr>
-        <p:spPr>
-          <a:xfrm>
-            <a:off x="320040" y="2258568"/>
-            <a:ext cx="4114800" cy="621792"/>
-          </a:xfrm>
-          <a:prstGeom prst="rect">
-            <a:avLst/>
-          </a:prstGeom>
-          <a:solidFill>
-            <a:srgbClr val="FFFFFF"/>
-          </a:solidFill>
-          <a:ln w="12700">
-            <a:solidFill>
-              <a:srgbClr val="CBD5E1"/>
-            </a:solidFill>
-            <a:prstDash val="solid"/>
-          </a:ln>
-          <a:effectLst>
-            <a:outerShdw blurRad="76200" dist="25400" dir="8100000" algn="bl" rotWithShape="0">
-              <a:srgbClr val="000000">
-                <a:alpha val="8000"/>
-              </a:srgbClr>
-            </a:outerShdw>
-          </a:effectLst>
-        </p:spPr>
-      </p:sp>
-      <p:sp>
-        <p:nvSpPr>
-          <p:cNvPr id="10" name="Shape 8"/>
-          <p:cNvSpPr/>
-          <p:nvPr/>
-        </p:nvSpPr>
-        <p:spPr>
-          <a:xfrm>
-            <a:off x="320040" y="2258568"/>
-            <a:ext cx="54864" cy="621792"/>
-          </a:xfrm>
-          <a:prstGeom prst="rect">
-            <a:avLst/>
-          </a:prstGeom>
-          <a:solidFill>
-            <a:srgbClr val="C0392B"/>
-          </a:solidFill>
-          <a:ln w="12700">
-            <a:solidFill>
-              <a:srgbClr val="C0392B"/>
-            </a:solidFill>
-            <a:prstDash val="solid"/>
-          </a:ln>
-        </p:spPr>
-      </p:sp>
-      <p:sp>
-        <p:nvSpPr>
-          <p:cNvPr id="11" name="Text 9"/>
-          <p:cNvSpPr/>
-          <p:nvPr/>
-        </p:nvSpPr>
-        <p:spPr>
-          <a:xfrm>
-            <a:off x="457200" y="2322576"/>
-            <a:ext cx="3840480" cy="457200"/>
-          </a:xfrm>
-          <a:prstGeom prst="rect">
-            <a:avLst/>
-          </a:prstGeom>
-          <a:noFill/>
-          <a:ln/>
-        </p:spPr>
-        <p:txBody>
-          <a:bodyPr wrap="square" lIns="0" tIns="0" rIns="0" bIns="0" rtlCol="0" anchor="ctr"/>
-          <a:lstStyle/>
-          <a:p>
-            <a:pPr marL="0" indent="0">
-              <a:buNone/>
-            </a:pPr>
-            <a:r>
-              <a:rPr lang="en-US" sz="1100" dirty="0">
-                <a:solidFill>
-                  <a:srgbClr val="1E293B"/>
-                </a:solidFill>
-                <a:latin typeface="Calibri" pitchFamily="34" charset="0"/>
-                <a:ea typeface="Calibri" pitchFamily="34" charset="-122"/>
-                <a:cs typeface="Calibri" pitchFamily="34" charset="-120"/>
-              </a:rPr>
-              <a:t>Weather, electricity tariff &amp; driver behavior not modeled</a:t>
-            </a:r>
-            <a:endParaRPr lang="en-US" sz="1100" dirty="0"/>
-          </a:p>
-        </p:txBody>
-      </p:sp>
-      <p:sp>
-        <p:nvSpPr>
-          <p:cNvPr id="12" name="Shape 10"/>
-          <p:cNvSpPr/>
-          <p:nvPr/>
-        </p:nvSpPr>
-        <p:spPr>
-          <a:xfrm>
-            <a:off x="320040" y="3008376"/>
-            <a:ext cx="4114800" cy="621792"/>
-          </a:xfrm>
-          <a:prstGeom prst="rect">
-            <a:avLst/>
-          </a:prstGeom>
-          <a:solidFill>
-            <a:srgbClr val="FFFFFF"/>
-          </a:solidFill>
-          <a:ln w="12700">
-            <a:solidFill>
-              <a:srgbClr val="CBD5E1"/>
-            </a:solidFill>
-            <a:prstDash val="solid"/>
-          </a:ln>
-          <a:effectLst>
-            <a:outerShdw blurRad="76200" dist="25400" dir="8100000" algn="bl" rotWithShape="0">
-              <a:srgbClr val="000000">
-                <a:alpha val="8000"/>
-              </a:srgbClr>
-            </a:outerShdw>
-          </a:effectLst>
-        </p:spPr>
-      </p:sp>
-      <p:sp>
-        <p:nvSpPr>
-          <p:cNvPr id="13" name="Shape 11"/>
-          <p:cNvSpPr/>
-          <p:nvPr/>
-        </p:nvSpPr>
-        <p:spPr>
-          <a:xfrm>
-            <a:off x="320040" y="3008376"/>
-            <a:ext cx="54864" cy="621792"/>
-          </a:xfrm>
-          <a:prstGeom prst="rect">
-            <a:avLst/>
-          </a:prstGeom>
-          <a:solidFill>
-            <a:srgbClr val="C0392B"/>
-          </a:solidFill>
-          <a:ln w="12700">
-            <a:solidFill>
-              <a:srgbClr val="C0392B"/>
-            </a:solidFill>
-            <a:prstDash val="solid"/>
-          </a:ln>
-        </p:spPr>
-      </p:sp>
-      <p:sp>
-        <p:nvSpPr>
-          <p:cNvPr id="14" name="Text 12"/>
-          <p:cNvSpPr/>
-          <p:nvPr/>
-        </p:nvSpPr>
-        <p:spPr>
-          <a:xfrm>
-            <a:off x="457200" y="3072384"/>
-            <a:ext cx="3840480" cy="457200"/>
-          </a:xfrm>
-          <a:prstGeom prst="rect">
-            <a:avLst/>
-          </a:prstGeom>
-          <a:noFill/>
-          <a:ln/>
-        </p:spPr>
-        <p:txBody>
-          <a:bodyPr wrap="square" lIns="0" tIns="0" rIns="0" bIns="0" rtlCol="0" anchor="ctr"/>
-          <a:lstStyle/>
-          <a:p>
-            <a:pPr marL="0" indent="0">
-              <a:buNone/>
-            </a:pPr>
-            <a:r>
-              <a:rPr lang="en-US" sz="1100" dirty="0">
-                <a:solidFill>
-                  <a:srgbClr val="1E293B"/>
-                </a:solidFill>
-                <a:latin typeface="Calibri" pitchFamily="34" charset="0"/>
-                <a:ea typeface="Calibri" pitchFamily="34" charset="-122"/>
-                <a:cs typeface="Calibri" pitchFamily="34" charset="-120"/>
-              </a:rPr>
-              <a:t>Static infrastructure (no station failures or capacity changes)</a:t>
-            </a:r>
-            <a:endParaRPr lang="en-US" sz="1100" dirty="0"/>
-          </a:p>
-        </p:txBody>
-      </p:sp>
-      <p:sp>
-        <p:nvSpPr>
-          <p:cNvPr id="15" name="Shape 13"/>
-          <p:cNvSpPr/>
-          <p:nvPr/>
-        </p:nvSpPr>
-        <p:spPr>
-          <a:xfrm>
-            <a:off x="320040" y="3758184"/>
-            <a:ext cx="4114800" cy="621792"/>
-          </a:xfrm>
-          <a:prstGeom prst="rect">
-            <a:avLst/>
-          </a:prstGeom>
-          <a:solidFill>
-            <a:srgbClr val="FFFFFF"/>
-          </a:solidFill>
-          <a:ln w="12700">
-            <a:solidFill>
-              <a:srgbClr val="CBD5E1"/>
-            </a:solidFill>
-            <a:prstDash val="solid"/>
-          </a:ln>
-          <a:effectLst>
-            <a:outerShdw blurRad="76200" dist="25400" dir="8100000" algn="bl" rotWithShape="0">
-              <a:srgbClr val="000000">
-                <a:alpha val="8000"/>
-              </a:srgbClr>
-            </a:outerShdw>
-          </a:effectLst>
-        </p:spPr>
-      </p:sp>
-      <p:sp>
-        <p:nvSpPr>
-          <p:cNvPr id="16" name="Shape 14"/>
-          <p:cNvSpPr/>
-          <p:nvPr/>
-        </p:nvSpPr>
-        <p:spPr>
-          <a:xfrm>
-            <a:off x="320040" y="3758184"/>
-            <a:ext cx="54864" cy="621792"/>
-          </a:xfrm>
-          <a:prstGeom prst="rect">
-            <a:avLst/>
-          </a:prstGeom>
-          <a:solidFill>
-            <a:srgbClr val="C0392B"/>
-          </a:solidFill>
-          <a:ln w="12700">
-            <a:solidFill>
-              <a:srgbClr val="C0392B"/>
-            </a:solidFill>
-            <a:prstDash val="solid"/>
-          </a:ln>
-        </p:spPr>
-      </p:sp>
-      <p:sp>
-        <p:nvSpPr>
-          <p:cNvPr id="17" name="Text 15"/>
-          <p:cNvSpPr/>
-          <p:nvPr/>
-        </p:nvSpPr>
-        <p:spPr>
-          <a:xfrm>
-            <a:off x="457200" y="3822192"/>
-            <a:ext cx="3840480" cy="457200"/>
-          </a:xfrm>
-          <a:prstGeom prst="rect">
-            <a:avLst/>
-          </a:prstGeom>
-          <a:noFill/>
-          <a:ln/>
-        </p:spPr>
-        <p:txBody>
-          <a:bodyPr wrap="square" lIns="0" tIns="0" rIns="0" bIns="0" rtlCol="0" anchor="ctr"/>
-          <a:lstStyle/>
-          <a:p>
-            <a:pPr marL="0" indent="0">
-              <a:buNone/>
-            </a:pPr>
-            <a:r>
-              <a:rPr lang="en-US" sz="1100" dirty="0">
-                <a:solidFill>
-                  <a:srgbClr val="1E293B"/>
-                </a:solidFill>
-                <a:latin typeface="Calibri" pitchFamily="34" charset="0"/>
-                <a:ea typeface="Calibri" pitchFamily="34" charset="-122"/>
-                <a:cs typeface="Calibri" pitchFamily="34" charset="-120"/>
-              </a:rPr>
-              <a:t>Short 600-second window limits temporal generalization</a:t>
-            </a:r>
-            <a:endParaRPr lang="en-US" sz="1100" dirty="0"/>
-          </a:p>
-        </p:txBody>
-      </p:sp>
-      <p:sp>
-        <p:nvSpPr>
-          <p:cNvPr id="18" name="Text 16"/>
-          <p:cNvSpPr/>
-          <p:nvPr/>
-        </p:nvSpPr>
-        <p:spPr>
-          <a:xfrm>
-            <a:off x="4754880" y="1115568"/>
-            <a:ext cx="4023360" cy="320040"/>
-          </a:xfrm>
-          <a:prstGeom prst="rect">
-            <a:avLst/>
-          </a:prstGeom>
-          <a:noFill/>
-          <a:ln/>
-        </p:spPr>
-        <p:txBody>
-          <a:bodyPr wrap="square" lIns="0" tIns="0" rIns="0" bIns="0" rtlCol="0" anchor="ctr"/>
-          <a:lstStyle/>
-          <a:p>
-            <a:pPr marL="0" indent="0">
-              <a:buNone/>
-            </a:pPr>
-            <a:r>
-              <a:rPr lang="en-US" sz="1400" b="1" dirty="0">
-                <a:solidFill>
-                  <a:srgbClr val="0D7377"/>
-                </a:solidFill>
-                <a:latin typeface="Calibri" pitchFamily="34" charset="0"/>
-                <a:ea typeface="Calibri" pitchFamily="34" charset="-122"/>
-                <a:cs typeface="Calibri" pitchFamily="34" charset="-120"/>
-              </a:rPr>
-              <a:t>Future Research Directions</a:t>
-            </a:r>
-            <a:endParaRPr lang="en-US" sz="1400" dirty="0"/>
-          </a:p>
-        </p:txBody>
-      </p:sp>
-      <p:sp>
-        <p:nvSpPr>
-          <p:cNvPr id="19" name="Shape 17"/>
-          <p:cNvSpPr/>
-          <p:nvPr/>
-        </p:nvSpPr>
-        <p:spPr>
-          <a:xfrm>
-            <a:off x="4754880" y="1636776"/>
-            <a:ext cx="274320" cy="274320"/>
-          </a:xfrm>
-          <a:prstGeom prst="ellipse">
-            <a:avLst/>
-          </a:prstGeom>
-          <a:solidFill>
-            <a:srgbClr val="0D7377"/>
-          </a:solidFill>
-          <a:ln w="12700">
-            <a:solidFill>
-              <a:srgbClr val="0D7377"/>
-            </a:solidFill>
-            <a:prstDash val="solid"/>
-          </a:ln>
-        </p:spPr>
-      </p:sp>
-      <p:sp>
-        <p:nvSpPr>
-          <p:cNvPr id="20" name="Text 18"/>
-          <p:cNvSpPr/>
-          <p:nvPr/>
-        </p:nvSpPr>
-        <p:spPr>
-          <a:xfrm>
-            <a:off x="4754880" y="1636776"/>
-            <a:ext cx="274320" cy="274320"/>
-          </a:xfrm>
-          <a:prstGeom prst="rect">
-            <a:avLst/>
-          </a:prstGeom>
-          <a:noFill/>
-          <a:ln/>
-        </p:spPr>
-        <p:txBody>
-          <a:bodyPr wrap="square" lIns="0" tIns="0" rIns="0" bIns="0" rtlCol="0" anchor="ctr"/>
-          <a:lstStyle/>
-          <a:p>
-            <a:pPr marL="0" indent="0" algn="ctr">
-              <a:buNone/>
-            </a:pPr>
-            <a:r>
-              <a:rPr lang="en-US" sz="1000" b="1" dirty="0">
-                <a:solidFill>
-                  <a:srgbClr val="FFFFFF"/>
-                </a:solidFill>
-              </a:rPr>
-              <a:t>1</a:t>
-            </a:r>
-            <a:endParaRPr lang="en-US" sz="1000" dirty="0"/>
-          </a:p>
-        </p:txBody>
-      </p:sp>
-      <p:sp>
-        <p:nvSpPr>
-          <p:cNvPr id="21" name="Text 19"/>
-          <p:cNvSpPr/>
-          <p:nvPr/>
-        </p:nvSpPr>
-        <p:spPr>
-          <a:xfrm>
-            <a:off x="5093208" y="1581912"/>
-            <a:ext cx="3657600" cy="256032"/>
-          </a:xfrm>
-          <a:prstGeom prst="rect">
-            <a:avLst/>
-          </a:prstGeom>
-          <a:noFill/>
-          <a:ln/>
-        </p:spPr>
-        <p:txBody>
-          <a:bodyPr wrap="square" lIns="0" tIns="0" rIns="0" bIns="0" rtlCol="0" anchor="ctr"/>
-          <a:lstStyle/>
-          <a:p>
-            <a:pPr marL="0" indent="0">
-              <a:buNone/>
-            </a:pPr>
-            <a:r>
-              <a:rPr lang="en-US" sz="1200" b="1" dirty="0">
-                <a:solidFill>
-                  <a:srgbClr val="1E293B"/>
-                </a:solidFill>
-                <a:latin typeface="Calibri" pitchFamily="34" charset="0"/>
-                <a:ea typeface="Calibri" pitchFamily="34" charset="-122"/>
-                <a:cs typeface="Calibri" pitchFamily="34" charset="-120"/>
-              </a:rPr>
-              <a:t>Real-World Data Integration</a:t>
-            </a:r>
-            <a:endParaRPr lang="en-US" sz="1200" dirty="0"/>
-          </a:p>
-        </p:txBody>
-      </p:sp>
-      <p:sp>
-        <p:nvSpPr>
-          <p:cNvPr id="22" name="Text 20"/>
-          <p:cNvSpPr/>
-          <p:nvPr/>
-        </p:nvSpPr>
-        <p:spPr>
-          <a:xfrm>
-            <a:off x="5093208" y="1837944"/>
-            <a:ext cx="3657600" cy="256032"/>
-          </a:xfrm>
-          <a:prstGeom prst="rect">
-            <a:avLst/>
-          </a:prstGeom>
-          <a:noFill/>
-          <a:ln/>
-        </p:spPr>
-        <p:txBody>
-          <a:bodyPr wrap="square" lIns="0" tIns="0" rIns="0" bIns="0" rtlCol="0" anchor="ctr"/>
-          <a:lstStyle/>
-          <a:p>
-            <a:pPr marL="0" indent="0">
-              <a:buNone/>
-            </a:pPr>
-            <a:r>
-              <a:rPr lang="en-US" sz="1000" dirty="0">
-                <a:solidFill>
-                  <a:srgbClr val="64748B"/>
-                </a:solidFill>
-                <a:latin typeface="Calibri" pitchFamily="34" charset="0"/>
-                <a:ea typeface="Calibri" pitchFamily="34" charset="-122"/>
-                <a:cs typeface="Calibri" pitchFamily="34" charset="-120"/>
-              </a:rPr>
-              <a:t>Deploy IoT sensors at actual charging stations in Khulna/Jashore</a:t>
-            </a:r>
-            <a:endParaRPr lang="en-US" sz="1000" dirty="0"/>
-          </a:p>
-        </p:txBody>
-      </p:sp>
-      <p:sp>
-        <p:nvSpPr>
-          <p:cNvPr id="23" name="Shape 21"/>
-          <p:cNvSpPr/>
-          <p:nvPr/>
-        </p:nvSpPr>
-        <p:spPr>
-          <a:xfrm>
-            <a:off x="4754880" y="2350008"/>
-            <a:ext cx="274320" cy="274320"/>
-          </a:xfrm>
-          <a:prstGeom prst="ellipse">
-            <a:avLst/>
-          </a:prstGeom>
-          <a:solidFill>
-            <a:srgbClr val="0D7377"/>
-          </a:solidFill>
-          <a:ln w="12700">
-            <a:solidFill>
-              <a:srgbClr val="0D7377"/>
-            </a:solidFill>
-            <a:prstDash val="solid"/>
-          </a:ln>
-        </p:spPr>
-      </p:sp>
-      <p:sp>
-        <p:nvSpPr>
-          <p:cNvPr id="24" name="Text 22"/>
-          <p:cNvSpPr/>
-          <p:nvPr/>
-        </p:nvSpPr>
-        <p:spPr>
-          <a:xfrm>
-            <a:off x="4754880" y="2350008"/>
-            <a:ext cx="274320" cy="274320"/>
-          </a:xfrm>
-          <a:prstGeom prst="rect">
-            <a:avLst/>
-          </a:prstGeom>
-          <a:noFill/>
-          <a:ln/>
-        </p:spPr>
-        <p:txBody>
-          <a:bodyPr wrap="square" lIns="0" tIns="0" rIns="0" bIns="0" rtlCol="0" anchor="ctr"/>
-          <a:lstStyle/>
-          <a:p>
-            <a:pPr marL="0" indent="0" algn="ctr">
-              <a:buNone/>
-            </a:pPr>
-            <a:r>
-              <a:rPr lang="en-US" sz="1000" b="1" dirty="0">
-                <a:solidFill>
-                  <a:srgbClr val="FFFFFF"/>
-                </a:solidFill>
-              </a:rPr>
-              <a:t>2</a:t>
-            </a:r>
-            <a:endParaRPr lang="en-US" sz="1000" dirty="0"/>
-          </a:p>
-        </p:txBody>
-      </p:sp>
-      <p:sp>
-        <p:nvSpPr>
-          <p:cNvPr id="25" name="Text 23"/>
-          <p:cNvSpPr/>
-          <p:nvPr/>
-        </p:nvSpPr>
-        <p:spPr>
-          <a:xfrm>
-            <a:off x="5093208" y="2295144"/>
-            <a:ext cx="3657600" cy="256032"/>
-          </a:xfrm>
-          <a:prstGeom prst="rect">
-            <a:avLst/>
-          </a:prstGeom>
-          <a:noFill/>
-          <a:ln/>
-        </p:spPr>
-        <p:txBody>
-          <a:bodyPr wrap="square" lIns="0" tIns="0" rIns="0" bIns="0" rtlCol="0" anchor="ctr"/>
-          <a:lstStyle/>
-          <a:p>
-            <a:pPr marL="0" indent="0">
-              <a:buNone/>
-            </a:pPr>
-            <a:r>
-              <a:rPr lang="en-US" sz="1200" b="1" dirty="0">
-                <a:solidFill>
-                  <a:srgbClr val="1E293B"/>
-                </a:solidFill>
-                <a:latin typeface="Calibri" pitchFamily="34" charset="0"/>
-                <a:ea typeface="Calibri" pitchFamily="34" charset="-122"/>
-                <a:cs typeface="Calibri" pitchFamily="34" charset="-120"/>
-              </a:rPr>
-              <a:t>Hybrid Deep Learning (CNN-LSTM)</a:t>
-            </a:r>
-            <a:endParaRPr lang="en-US" sz="1200" dirty="0"/>
-          </a:p>
-        </p:txBody>
-      </p:sp>
-      <p:sp>
-        <p:nvSpPr>
-          <p:cNvPr id="26" name="Text 24"/>
-          <p:cNvSpPr/>
-          <p:nvPr/>
-        </p:nvSpPr>
-        <p:spPr>
-          <a:xfrm>
-            <a:off x="5093208" y="2551176"/>
-            <a:ext cx="3657600" cy="256032"/>
-          </a:xfrm>
-          <a:prstGeom prst="rect">
-            <a:avLst/>
-          </a:prstGeom>
-          <a:noFill/>
-          <a:ln/>
-        </p:spPr>
-        <p:txBody>
-          <a:bodyPr wrap="square" lIns="0" tIns="0" rIns="0" bIns="0" rtlCol="0" anchor="ctr"/>
-          <a:lstStyle/>
-          <a:p>
-            <a:pPr marL="0" indent="0">
-              <a:buNone/>
-            </a:pPr>
-            <a:r>
-              <a:rPr lang="en-US" sz="1000" dirty="0">
-                <a:solidFill>
-                  <a:srgbClr val="64748B"/>
-                </a:solidFill>
-                <a:latin typeface="Calibri" pitchFamily="34" charset="0"/>
-                <a:ea typeface="Calibri" pitchFamily="34" charset="-122"/>
-                <a:cs typeface="Calibri" pitchFamily="34" charset="-120"/>
-              </a:rPr>
-              <a:t>Capture spatial + multi-scale temporal dependencies</a:t>
-            </a:r>
-            <a:endParaRPr lang="en-US" sz="1000" dirty="0"/>
-          </a:p>
-        </p:txBody>
-      </p:sp>
-      <p:sp>
-        <p:nvSpPr>
-          <p:cNvPr id="27" name="Shape 25"/>
-          <p:cNvSpPr/>
-          <p:nvPr/>
-        </p:nvSpPr>
-        <p:spPr>
-          <a:xfrm>
-            <a:off x="4754880" y="3063240"/>
-            <a:ext cx="274320" cy="274320"/>
-          </a:xfrm>
-          <a:prstGeom prst="ellipse">
-            <a:avLst/>
-          </a:prstGeom>
-          <a:solidFill>
-            <a:srgbClr val="0D7377"/>
-          </a:solidFill>
-          <a:ln w="12700">
-            <a:solidFill>
-              <a:srgbClr val="0D7377"/>
-            </a:solidFill>
-            <a:prstDash val="solid"/>
-          </a:ln>
-        </p:spPr>
-      </p:sp>
-      <p:sp>
-        <p:nvSpPr>
-          <p:cNvPr id="28" name="Text 26"/>
-          <p:cNvSpPr/>
-          <p:nvPr/>
-        </p:nvSpPr>
-        <p:spPr>
-          <a:xfrm>
-            <a:off x="4754880" y="3063240"/>
-            <a:ext cx="274320" cy="274320"/>
-          </a:xfrm>
-          <a:prstGeom prst="rect">
-            <a:avLst/>
-          </a:prstGeom>
-          <a:noFill/>
-          <a:ln/>
-        </p:spPr>
-        <p:txBody>
-          <a:bodyPr wrap="square" lIns="0" tIns="0" rIns="0" bIns="0" rtlCol="0" anchor="ctr"/>
-          <a:lstStyle/>
-          <a:p>
-            <a:pPr marL="0" indent="0" algn="ctr">
-              <a:buNone/>
-            </a:pPr>
-            <a:r>
-              <a:rPr lang="en-US" sz="1000" b="1" dirty="0">
-                <a:solidFill>
-                  <a:srgbClr val="FFFFFF"/>
-                </a:solidFill>
-              </a:rPr>
-              <a:t>3</a:t>
-            </a:r>
-            <a:endParaRPr lang="en-US" sz="1000" dirty="0"/>
-          </a:p>
-        </p:txBody>
-      </p:sp>
-      <p:sp>
-        <p:nvSpPr>
-          <p:cNvPr id="29" name="Text 27"/>
-          <p:cNvSpPr/>
-          <p:nvPr/>
-        </p:nvSpPr>
-        <p:spPr>
-          <a:xfrm>
-            <a:off x="5093208" y="3008376"/>
-            <a:ext cx="3657600" cy="256032"/>
-          </a:xfrm>
-          <a:prstGeom prst="rect">
-            <a:avLst/>
-          </a:prstGeom>
-          <a:noFill/>
-          <a:ln/>
-        </p:spPr>
-        <p:txBody>
-          <a:bodyPr wrap="square" lIns="0" tIns="0" rIns="0" bIns="0" rtlCol="0" anchor="ctr"/>
-          <a:lstStyle/>
-          <a:p>
-            <a:pPr marL="0" indent="0">
-              <a:buNone/>
-            </a:pPr>
-            <a:r>
-              <a:rPr lang="en-US" sz="1200" b="1" dirty="0">
-                <a:solidFill>
-                  <a:srgbClr val="1E293B"/>
-                </a:solidFill>
-                <a:latin typeface="Calibri" pitchFamily="34" charset="0"/>
-                <a:ea typeface="Calibri" pitchFamily="34" charset="-122"/>
-                <a:cs typeface="Calibri" pitchFamily="34" charset="-120"/>
-              </a:rPr>
-              <a:t>Reinforcement Learning</a:t>
-            </a:r>
-            <a:endParaRPr lang="en-US" sz="1200" dirty="0"/>
-          </a:p>
-        </p:txBody>
-      </p:sp>
-      <p:sp>
-        <p:nvSpPr>
-          <p:cNvPr id="30" name="Text 28"/>
-          <p:cNvSpPr/>
-          <p:nvPr/>
-        </p:nvSpPr>
-        <p:spPr>
-          <a:xfrm>
-            <a:off x="5093208" y="3264408"/>
-            <a:ext cx="3657600" cy="256032"/>
-          </a:xfrm>
-          <a:prstGeom prst="rect">
-            <a:avLst/>
-          </a:prstGeom>
-          <a:noFill/>
-          <a:ln/>
-        </p:spPr>
-        <p:txBody>
-          <a:bodyPr wrap="square" lIns="0" tIns="0" rIns="0" bIns="0" rtlCol="0" anchor="ctr"/>
-          <a:lstStyle/>
-          <a:p>
-            <a:pPr marL="0" indent="0">
-              <a:buNone/>
-            </a:pPr>
-            <a:r>
-              <a:rPr lang="en-US" sz="1000" dirty="0">
-                <a:solidFill>
-                  <a:srgbClr val="64748B"/>
-                </a:solidFill>
-                <a:latin typeface="Calibri" pitchFamily="34" charset="0"/>
-                <a:ea typeface="Calibri" pitchFamily="34" charset="-122"/>
-                <a:cs typeface="Calibri" pitchFamily="34" charset="-120"/>
-              </a:rPr>
-              <a:t>Adaptive station assignment &amp; autonomous load balancing</a:t>
-            </a:r>
-            <a:endParaRPr lang="en-US" sz="1000" dirty="0"/>
-          </a:p>
-        </p:txBody>
-      </p:sp>
-      <p:sp>
-        <p:nvSpPr>
-          <p:cNvPr id="31" name="Shape 29"/>
-          <p:cNvSpPr/>
-          <p:nvPr/>
-        </p:nvSpPr>
-        <p:spPr>
-          <a:xfrm>
-            <a:off x="4754880" y="3776472"/>
-            <a:ext cx="274320" cy="274320"/>
-          </a:xfrm>
-          <a:prstGeom prst="ellipse">
-            <a:avLst/>
-          </a:prstGeom>
-          <a:solidFill>
-            <a:srgbClr val="0D7377"/>
-          </a:solidFill>
-          <a:ln w="12700">
-            <a:solidFill>
-              <a:srgbClr val="0D7377"/>
-            </a:solidFill>
-            <a:prstDash val="solid"/>
-          </a:ln>
-        </p:spPr>
-      </p:sp>
-      <p:sp>
-        <p:nvSpPr>
-          <p:cNvPr id="32" name="Text 30"/>
-          <p:cNvSpPr/>
-          <p:nvPr/>
-        </p:nvSpPr>
-        <p:spPr>
-          <a:xfrm>
-            <a:off x="4754880" y="3776472"/>
-            <a:ext cx="274320" cy="274320"/>
-          </a:xfrm>
-          <a:prstGeom prst="rect">
-            <a:avLst/>
-          </a:prstGeom>
-          <a:noFill/>
-          <a:ln/>
-        </p:spPr>
-        <p:txBody>
-          <a:bodyPr wrap="square" lIns="0" tIns="0" rIns="0" bIns="0" rtlCol="0" anchor="ctr"/>
-          <a:lstStyle/>
-          <a:p>
-            <a:pPr marL="0" indent="0" algn="ctr">
-              <a:buNone/>
-            </a:pPr>
-            <a:r>
-              <a:rPr lang="en-US" sz="1000" b="1" dirty="0">
-                <a:solidFill>
-                  <a:srgbClr val="FFFFFF"/>
-                </a:solidFill>
-              </a:rPr>
-              <a:t>4</a:t>
-            </a:r>
-            <a:endParaRPr lang="en-US" sz="1000" dirty="0"/>
-          </a:p>
-        </p:txBody>
-      </p:sp>
-      <p:sp>
-        <p:nvSpPr>
-          <p:cNvPr id="33" name="Text 31"/>
-          <p:cNvSpPr/>
-          <p:nvPr/>
-        </p:nvSpPr>
-        <p:spPr>
-          <a:xfrm>
-            <a:off x="5093208" y="3721608"/>
-            <a:ext cx="3657600" cy="256032"/>
-          </a:xfrm>
-          <a:prstGeom prst="rect">
-            <a:avLst/>
-          </a:prstGeom>
-          <a:noFill/>
-          <a:ln/>
-        </p:spPr>
-        <p:txBody>
-          <a:bodyPr wrap="square" lIns="0" tIns="0" rIns="0" bIns="0" rtlCol="0" anchor="ctr"/>
-          <a:lstStyle/>
-          <a:p>
-            <a:pPr marL="0" indent="0">
-              <a:buNone/>
-            </a:pPr>
-            <a:r>
-              <a:rPr lang="en-US" sz="1200" b="1" dirty="0">
-                <a:solidFill>
-                  <a:srgbClr val="1E293B"/>
-                </a:solidFill>
-                <a:latin typeface="Calibri" pitchFamily="34" charset="0"/>
-                <a:ea typeface="Calibri" pitchFamily="34" charset="-122"/>
-                <a:cs typeface="Calibri" pitchFamily="34" charset="-120"/>
-              </a:rPr>
-              <a:t>Renewable Energy Integration</a:t>
-            </a:r>
-            <a:endParaRPr lang="en-US" sz="1200" dirty="0"/>
-          </a:p>
-        </p:txBody>
-      </p:sp>
-      <p:sp>
-        <p:nvSpPr>
-          <p:cNvPr id="34" name="Text 32"/>
-          <p:cNvSpPr/>
-          <p:nvPr/>
-        </p:nvSpPr>
-        <p:spPr>
-          <a:xfrm>
-            <a:off x="5093208" y="3977640"/>
-            <a:ext cx="3657600" cy="256032"/>
-          </a:xfrm>
-          <a:prstGeom prst="rect">
-            <a:avLst/>
-          </a:prstGeom>
-          <a:noFill/>
-          <a:ln/>
-        </p:spPr>
-        <p:txBody>
-          <a:bodyPr wrap="square" lIns="0" tIns="0" rIns="0" bIns="0" rtlCol="0" anchor="ctr"/>
-          <a:lstStyle/>
-          <a:p>
-            <a:pPr marL="0" indent="0">
-              <a:buNone/>
-            </a:pPr>
-            <a:r>
-              <a:rPr lang="en-US" sz="1000" dirty="0">
-                <a:solidFill>
-                  <a:srgbClr val="64748B"/>
-                </a:solidFill>
-                <a:latin typeface="Calibri" pitchFamily="34" charset="0"/>
-                <a:ea typeface="Calibri" pitchFamily="34" charset="-122"/>
-                <a:cs typeface="Calibri" pitchFamily="34" charset="-120"/>
-              </a:rPr>
-              <a:t>Model solar-powered stations with energy storage</a:t>
-            </a:r>
-            <a:endParaRPr lang="en-US" sz="1000" dirty="0"/>
-          </a:p>
-        </p:txBody>
-      </p:sp>
-      <p:sp>
-        <p:nvSpPr>
-          <p:cNvPr id="35" name="Shape 33"/>
-          <p:cNvSpPr/>
-          <p:nvPr/>
-        </p:nvSpPr>
-        <p:spPr>
-          <a:xfrm>
-            <a:off x="4754880" y="4489704"/>
-            <a:ext cx="274320" cy="274320"/>
-          </a:xfrm>
-          <a:prstGeom prst="ellipse">
-            <a:avLst/>
-          </a:prstGeom>
-          <a:solidFill>
-            <a:srgbClr val="0D7377"/>
-          </a:solidFill>
-          <a:ln w="12700">
-            <a:solidFill>
-              <a:srgbClr val="0D7377"/>
-            </a:solidFill>
-            <a:prstDash val="solid"/>
-          </a:ln>
-        </p:spPr>
-      </p:sp>
-      <p:sp>
-        <p:nvSpPr>
-          <p:cNvPr id="36" name="Text 34"/>
-          <p:cNvSpPr/>
-          <p:nvPr/>
-        </p:nvSpPr>
-        <p:spPr>
-          <a:xfrm>
-            <a:off x="4754880" y="4489704"/>
-            <a:ext cx="274320" cy="274320"/>
-          </a:xfrm>
-          <a:prstGeom prst="rect">
-            <a:avLst/>
-          </a:prstGeom>
-          <a:noFill/>
-          <a:ln/>
-        </p:spPr>
-        <p:txBody>
-          <a:bodyPr wrap="square" lIns="0" tIns="0" rIns="0" bIns="0" rtlCol="0" anchor="ctr"/>
-          <a:lstStyle/>
-          <a:p>
-            <a:pPr marL="0" indent="0" algn="ctr">
-              <a:buNone/>
-            </a:pPr>
-            <a:r>
-              <a:rPr lang="en-US" sz="1000" b="1" dirty="0">
-                <a:solidFill>
-                  <a:srgbClr val="FFFFFF"/>
-                </a:solidFill>
-              </a:rPr>
-              <a:t>5</a:t>
-            </a:r>
-            <a:endParaRPr lang="en-US" sz="1000" dirty="0"/>
-          </a:p>
-        </p:txBody>
-      </p:sp>
-      <p:sp>
-        <p:nvSpPr>
-          <p:cNvPr id="37" name="Text 35"/>
-          <p:cNvSpPr/>
-          <p:nvPr/>
-        </p:nvSpPr>
-        <p:spPr>
-          <a:xfrm>
-            <a:off x="5093208" y="4434840"/>
-            <a:ext cx="3657600" cy="256032"/>
-          </a:xfrm>
-          <a:prstGeom prst="rect">
-            <a:avLst/>
-          </a:prstGeom>
-          <a:noFill/>
-          <a:ln/>
-        </p:spPr>
-        <p:txBody>
-          <a:bodyPr wrap="square" lIns="0" tIns="0" rIns="0" bIns="0" rtlCol="0" anchor="ctr"/>
-          <a:lstStyle/>
-          <a:p>
-            <a:pPr marL="0" indent="0">
-              <a:buNone/>
-            </a:pPr>
-            <a:r>
-              <a:rPr lang="en-US" sz="1200" b="1" dirty="0">
-                <a:solidFill>
-                  <a:srgbClr val="1E293B"/>
-                </a:solidFill>
-                <a:latin typeface="Calibri" pitchFamily="34" charset="0"/>
-                <a:ea typeface="Calibri" pitchFamily="34" charset="-122"/>
-                <a:cs typeface="Calibri" pitchFamily="34" charset="-120"/>
-              </a:rPr>
-              <a:t>Larger Simulation Environment</a:t>
-            </a:r>
-            <a:endParaRPr lang="en-US" sz="1200" dirty="0"/>
-          </a:p>
-        </p:txBody>
-      </p:sp>
-      <p:sp>
-        <p:nvSpPr>
-          <p:cNvPr id="38" name="Text 36"/>
-          <p:cNvSpPr/>
-          <p:nvPr/>
-        </p:nvSpPr>
-        <p:spPr>
-          <a:xfrm>
-            <a:off x="5093208" y="4690872"/>
-            <a:ext cx="3657600" cy="256032"/>
-          </a:xfrm>
-          <a:prstGeom prst="rect">
-            <a:avLst/>
-          </a:prstGeom>
-          <a:noFill/>
-          <a:ln/>
-        </p:spPr>
-        <p:txBody>
-          <a:bodyPr wrap="square" lIns="0" tIns="0" rIns="0" bIns="0" rtlCol="0" anchor="ctr"/>
-          <a:lstStyle/>
-          <a:p>
-            <a:pPr marL="0" indent="0">
-              <a:buNone/>
-            </a:pPr>
-            <a:r>
-              <a:rPr lang="en-US" sz="1000" dirty="0">
-                <a:solidFill>
-                  <a:srgbClr val="64748B"/>
-                </a:solidFill>
-                <a:latin typeface="Calibri" pitchFamily="34" charset="0"/>
-                <a:ea typeface="Calibri" pitchFamily="34" charset="-122"/>
-                <a:cs typeface="Calibri" pitchFamily="34" charset="-120"/>
-              </a:rPr>
-              <a:t>Expand to full-city scale with diverse vehicle types</a:t>
-            </a:r>
-            <a:endParaRPr lang="en-US" sz="1000" dirty="0"/>
-          </a:p>
-        </p:txBody>
-      </p:sp>
-    </p:spTree>
-  </p:cSld>
-  <p:clrMapOvr>
-    <a:masterClrMapping/>
-  </p:clrMapOvr>
-</p:sld>
-</file>
-
-<file path=ppt/slides/slide19.xml><?xml version="1.0" encoding="utf-8"?>
-<p:sld xmlns:a="http://schemas.openxmlformats.org/drawingml/2006/main" xmlns:r="http://schemas.openxmlformats.org/officeDocument/2006/relationships" xmlns:p="http://schemas.openxmlformats.org/presentationml/2006/main">
-  <p:cSld name="Slide 16">
-    <p:bg>
-      <p:bgPr>
-        <a:solidFill>
-          <a:srgbClr val="1B3A6B"/>
-        </a:solidFill>
-        <a:effectLst/>
-      </p:bgPr>
-    </p:bg>
-    <p:spTree>
-      <p:nvGrpSpPr>
-        <p:cNvPr id="1" name=""/>
-        <p:cNvGrpSpPr/>
-        <p:nvPr/>
-      </p:nvGrpSpPr>
-      <p:grpSpPr>
-        <a:xfrm>
-          <a:off x="0" y="0"/>
-          <a:ext cx="0" cy="0"/>
-          <a:chOff x="0" y="0"/>
-          <a:chExt cx="0" cy="0"/>
-        </a:xfrm>
-      </p:grpSpPr>
-      <p:sp>
-        <p:nvSpPr>
-          <p:cNvPr id="2" name="Shape 0"/>
-          <p:cNvSpPr/>
-          <p:nvPr/>
-        </p:nvSpPr>
-        <p:spPr>
-          <a:xfrm>
-            <a:off x="0" y="0"/>
-            <a:ext cx="9144000" cy="73152"/>
-          </a:xfrm>
-          <a:prstGeom prst="rect">
-            <a:avLst/>
-          </a:prstGeom>
-          <a:solidFill>
-            <a:srgbClr val="0D7377"/>
-          </a:solidFill>
-          <a:ln w="12700">
-            <a:solidFill>
-              <a:srgbClr val="0D7377"/>
-            </a:solidFill>
-            <a:prstDash val="solid"/>
-          </a:ln>
-        </p:spPr>
-      </p:sp>
-      <p:sp>
-        <p:nvSpPr>
-          <p:cNvPr id="3" name="Text 1"/>
-          <p:cNvSpPr/>
-          <p:nvPr/>
-        </p:nvSpPr>
-        <p:spPr>
-          <a:xfrm>
-            <a:off x="457200" y="256032"/>
-            <a:ext cx="8229600" cy="475488"/>
-          </a:xfrm>
-          <a:prstGeom prst="rect">
-            <a:avLst/>
-          </a:prstGeom>
-          <a:noFill/>
-          <a:ln/>
-        </p:spPr>
-        <p:txBody>
-          <a:bodyPr wrap="square" lIns="0" tIns="0" rIns="0" bIns="0" rtlCol="0" anchor="ctr"/>
-          <a:lstStyle/>
-          <a:p>
-            <a:pPr marL="0" indent="0" algn="ctr">
-              <a:buNone/>
-            </a:pPr>
-            <a:r>
-              <a:rPr lang="en-US" sz="3000" b="1" dirty="0">
-                <a:solidFill>
-                  <a:srgbClr val="FFFFFF"/>
-                </a:solidFill>
-                <a:latin typeface="Calibri" pitchFamily="34" charset="0"/>
-                <a:ea typeface="Calibri" pitchFamily="34" charset="-122"/>
-                <a:cs typeface="Calibri" pitchFamily="34" charset="-120"/>
-              </a:rPr>
-              <a:t>Conclusion</a:t>
-            </a:r>
-            <a:endParaRPr lang="en-US" sz="3000" dirty="0"/>
-          </a:p>
-        </p:txBody>
-      </p:sp>
-      <p:sp>
-        <p:nvSpPr>
-          <p:cNvPr id="4" name="Shape 2"/>
-          <p:cNvSpPr/>
-          <p:nvPr/>
-        </p:nvSpPr>
-        <p:spPr>
-          <a:xfrm>
-            <a:off x="2286000" y="777240"/>
-            <a:ext cx="4572000" cy="36576"/>
-          </a:xfrm>
-          <a:prstGeom prst="rect">
-            <a:avLst/>
-          </a:prstGeom>
-          <a:solidFill>
-            <a:srgbClr val="0D7377"/>
-          </a:solidFill>
-          <a:ln w="12700">
-            <a:solidFill>
-              <a:srgbClr val="0D7377"/>
-            </a:solidFill>
-            <a:prstDash val="solid"/>
-          </a:ln>
-        </p:spPr>
-      </p:sp>
-      <p:sp>
-        <p:nvSpPr>
-          <p:cNvPr id="5" name="Shape 3"/>
-          <p:cNvSpPr/>
-          <p:nvPr/>
-        </p:nvSpPr>
-        <p:spPr>
-          <a:xfrm>
-            <a:off x="457200" y="987552"/>
-            <a:ext cx="201168" cy="201168"/>
-          </a:xfrm>
-          <a:prstGeom prst="rect">
-            <a:avLst/>
-          </a:prstGeom>
-          <a:solidFill>
-            <a:srgbClr val="0D7377"/>
-          </a:solidFill>
-          <a:ln w="12700">
-            <a:solidFill>
-              <a:srgbClr val="0D7377"/>
-            </a:solidFill>
-            <a:prstDash val="solid"/>
-          </a:ln>
-        </p:spPr>
-      </p:sp>
-      <p:sp>
-        <p:nvSpPr>
-          <p:cNvPr id="6" name="Text 4"/>
-          <p:cNvSpPr/>
-          <p:nvPr/>
-        </p:nvSpPr>
-        <p:spPr>
-          <a:xfrm>
-            <a:off x="749808" y="969264"/>
-            <a:ext cx="7955280" cy="512064"/>
-          </a:xfrm>
-          <a:prstGeom prst="rect">
-            <a:avLst/>
-          </a:prstGeom>
-          <a:noFill/>
-          <a:ln/>
-        </p:spPr>
-        <p:txBody>
-          <a:bodyPr wrap="square" lIns="0" tIns="0" rIns="0" bIns="0" rtlCol="0" anchor="ctr"/>
-          <a:lstStyle/>
-          <a:p>
-            <a:pPr marL="0" indent="0">
-              <a:buNone/>
-            </a:pPr>
-            <a:r>
-              <a:rPr lang="en-US" sz="1200" dirty="0">
-                <a:solidFill>
-                  <a:srgbClr val="D1E8F8"/>
-                </a:solidFill>
-                <a:latin typeface="Calibri" pitchFamily="34" charset="0"/>
-                <a:ea typeface="Calibri" pitchFamily="34" charset="-122"/>
-                <a:cs typeface="Calibri" pitchFamily="34" charset="-120"/>
-              </a:rPr>
-              <a:t>A comprehensive SUMO-based EV simulation modeled Bangladesh's urban mobility (Easy Bikes, E-Rickshaws, E-Vans) with realistic charging infrastructure.</a:t>
-            </a:r>
-            <a:endParaRPr lang="en-US" sz="1200" dirty="0"/>
-          </a:p>
-        </p:txBody>
-      </p:sp>
-      <p:sp>
-        <p:nvSpPr>
-          <p:cNvPr id="7" name="Shape 5"/>
-          <p:cNvSpPr/>
-          <p:nvPr/>
-        </p:nvSpPr>
-        <p:spPr>
-          <a:xfrm>
-            <a:off x="457200" y="1609344"/>
-            <a:ext cx="201168" cy="201168"/>
-          </a:xfrm>
-          <a:prstGeom prst="rect">
-            <a:avLst/>
-          </a:prstGeom>
-          <a:solidFill>
-            <a:srgbClr val="0D7377"/>
-          </a:solidFill>
-          <a:ln w="12700">
-            <a:solidFill>
-              <a:srgbClr val="0D7377"/>
-            </a:solidFill>
-            <a:prstDash val="solid"/>
-          </a:ln>
-        </p:spPr>
-      </p:sp>
-      <p:sp>
-        <p:nvSpPr>
-          <p:cNvPr id="8" name="Text 6"/>
-          <p:cNvSpPr/>
-          <p:nvPr/>
-        </p:nvSpPr>
-        <p:spPr>
-          <a:xfrm>
-            <a:off x="749808" y="1591056"/>
-            <a:ext cx="7955280" cy="512064"/>
-          </a:xfrm>
-          <a:prstGeom prst="rect">
-            <a:avLst/>
-          </a:prstGeom>
-          <a:noFill/>
-          <a:ln/>
-        </p:spPr>
-        <p:txBody>
-          <a:bodyPr wrap="square" lIns="0" tIns="0" rIns="0" bIns="0" rtlCol="0" anchor="ctr"/>
-          <a:lstStyle/>
-          <a:p>
-            <a:pPr marL="0" indent="0">
-              <a:buNone/>
-            </a:pPr>
-            <a:r>
-              <a:rPr lang="en-US" sz="1200" dirty="0">
-                <a:solidFill>
-                  <a:srgbClr val="D1E8F8"/>
-                </a:solidFill>
-                <a:latin typeface="Calibri" pitchFamily="34" charset="0"/>
-                <a:ea typeface="Calibri" pitchFamily="34" charset="-122"/>
-                <a:cs typeface="Calibri" pitchFamily="34" charset="-120"/>
-              </a:rPr>
-              <a:t>34,020 records across 25 features generated — ready for ML-based system-level load prediction.</a:t>
-            </a:r>
-            <a:endParaRPr lang="en-US" sz="1200" dirty="0"/>
-          </a:p>
-        </p:txBody>
-      </p:sp>
-      <p:sp>
-        <p:nvSpPr>
-          <p:cNvPr id="9" name="Shape 7"/>
-          <p:cNvSpPr/>
-          <p:nvPr/>
-        </p:nvSpPr>
-        <p:spPr>
-          <a:xfrm>
-            <a:off x="457200" y="2231136"/>
-            <a:ext cx="201168" cy="201168"/>
-          </a:xfrm>
-          <a:prstGeom prst="rect">
-            <a:avLst/>
-          </a:prstGeom>
-          <a:solidFill>
-            <a:srgbClr val="0D7377"/>
-          </a:solidFill>
-          <a:ln w="12700">
-            <a:solidFill>
-              <a:srgbClr val="0D7377"/>
-            </a:solidFill>
-            <a:prstDash val="solid"/>
-          </a:ln>
-        </p:spPr>
-      </p:sp>
-      <p:sp>
-        <p:nvSpPr>
-          <p:cNvPr id="10" name="Text 8"/>
-          <p:cNvSpPr/>
-          <p:nvPr/>
-        </p:nvSpPr>
-        <p:spPr>
-          <a:xfrm>
-            <a:off x="749808" y="2212848"/>
-            <a:ext cx="7955280" cy="512064"/>
-          </a:xfrm>
-          <a:prstGeom prst="rect">
-            <a:avLst/>
-          </a:prstGeom>
-          <a:noFill/>
-          <a:ln/>
-        </p:spPr>
-        <p:txBody>
-          <a:bodyPr wrap="square" lIns="0" tIns="0" rIns="0" bIns="0" rtlCol="0" anchor="ctr"/>
-          <a:lstStyle/>
-          <a:p>
-            <a:pPr marL="0" indent="0">
-              <a:buNone/>
-            </a:pPr>
-            <a:r>
-              <a:rPr lang="en-US" sz="1200" dirty="0">
-                <a:solidFill>
-                  <a:srgbClr val="D1E8F8"/>
-                </a:solidFill>
-                <a:latin typeface="Calibri" pitchFamily="34" charset="0"/>
-                <a:ea typeface="Calibri" pitchFamily="34" charset="-122"/>
-                <a:cs typeface="Calibri" pitchFamily="34" charset="-120"/>
-              </a:rPr>
-              <a:t>ANN (MLP) achieved the highest precision: R²=0.9967, MAE=19.2 kW, Accuracy=95.28%, F1=0.9234.</a:t>
-            </a:r>
-            <a:endParaRPr lang="en-US" sz="1200" dirty="0"/>
-          </a:p>
-        </p:txBody>
-      </p:sp>
-      <p:sp>
-        <p:nvSpPr>
-          <p:cNvPr id="11" name="Shape 9"/>
-          <p:cNvSpPr/>
-          <p:nvPr/>
-        </p:nvSpPr>
-        <p:spPr>
-          <a:xfrm>
-            <a:off x="457200" y="2852928"/>
-            <a:ext cx="201168" cy="201168"/>
-          </a:xfrm>
-          <a:prstGeom prst="rect">
-            <a:avLst/>
-          </a:prstGeom>
-          <a:solidFill>
-            <a:srgbClr val="0D7377"/>
-          </a:solidFill>
-          <a:ln w="12700">
-            <a:solidFill>
-              <a:srgbClr val="0D7377"/>
-            </a:solidFill>
-            <a:prstDash val="solid"/>
-          </a:ln>
-        </p:spPr>
-      </p:sp>
-      <p:sp>
-        <p:nvSpPr>
-          <p:cNvPr id="12" name="Text 10"/>
-          <p:cNvSpPr/>
-          <p:nvPr/>
-        </p:nvSpPr>
-        <p:spPr>
-          <a:xfrm>
-            <a:off x="749808" y="2834640"/>
-            <a:ext cx="7955280" cy="512064"/>
-          </a:xfrm>
-          <a:prstGeom prst="rect">
-            <a:avLst/>
-          </a:prstGeom>
-          <a:noFill/>
-          <a:ln/>
-        </p:spPr>
-        <p:txBody>
-          <a:bodyPr wrap="square" lIns="0" tIns="0" rIns="0" bIns="0" rtlCol="0" anchor="ctr"/>
-          <a:lstStyle/>
-          <a:p>
-            <a:pPr marL="0" indent="0">
-              <a:buNone/>
-            </a:pPr>
-            <a:r>
-              <a:rPr lang="en-US" sz="1200" dirty="0">
-                <a:solidFill>
-                  <a:srgbClr val="D1E8F8"/>
-                </a:solidFill>
-                <a:latin typeface="Calibri" pitchFamily="34" charset="0"/>
-                <a:ea typeface="Calibri" pitchFamily="34" charset="-122"/>
-                <a:cs typeface="Calibri" pitchFamily="34" charset="-120"/>
-              </a:rPr>
-              <a:t>Linear Regression also excelled (R²=0.9946), confirming linear structure in EV charging load demand.</a:t>
-            </a:r>
-            <a:endParaRPr lang="en-US" sz="1200" dirty="0"/>
-          </a:p>
-        </p:txBody>
-      </p:sp>
-      <p:sp>
-        <p:nvSpPr>
-          <p:cNvPr id="13" name="Shape 11"/>
-          <p:cNvSpPr/>
-          <p:nvPr/>
-        </p:nvSpPr>
-        <p:spPr>
-          <a:xfrm>
-            <a:off x="457200" y="3474720"/>
-            <a:ext cx="201168" cy="201168"/>
-          </a:xfrm>
-          <a:prstGeom prst="rect">
-            <a:avLst/>
-          </a:prstGeom>
-          <a:solidFill>
-            <a:srgbClr val="0D7377"/>
-          </a:solidFill>
-          <a:ln w="12700">
-            <a:solidFill>
-              <a:srgbClr val="0D7377"/>
-            </a:solidFill>
-            <a:prstDash val="solid"/>
-          </a:ln>
-        </p:spPr>
-      </p:sp>
-      <p:sp>
-        <p:nvSpPr>
-          <p:cNvPr id="14" name="Text 12"/>
-          <p:cNvSpPr/>
-          <p:nvPr/>
-        </p:nvSpPr>
-        <p:spPr>
-          <a:xfrm>
-            <a:off x="749808" y="3456432"/>
-            <a:ext cx="7955280" cy="512064"/>
-          </a:xfrm>
-          <a:prstGeom prst="rect">
-            <a:avLst/>
-          </a:prstGeom>
-          <a:noFill/>
-          <a:ln/>
-        </p:spPr>
-        <p:txBody>
-          <a:bodyPr wrap="square" lIns="0" tIns="0" rIns="0" bIns="0" rtlCol="0" anchor="ctr"/>
-          <a:lstStyle/>
-          <a:p>
-            <a:pPr marL="0" indent="0">
-              <a:buNone/>
-            </a:pPr>
-            <a:r>
-              <a:rPr lang="en-US" sz="1200" dirty="0">
-                <a:solidFill>
-                  <a:srgbClr val="D1E8F8"/>
-                </a:solidFill>
-                <a:latin typeface="Calibri" pitchFamily="34" charset="0"/>
-                <a:ea typeface="Calibri" pitchFamily="34" charset="-122"/>
-                <a:cs typeface="Calibri" pitchFamily="34" charset="-120"/>
-              </a:rPr>
-              <a:t>SUMO simulation serves as an effective digital twin for generating EV datasets in data-scarce developing regions.</a:t>
-            </a:r>
-            <a:endParaRPr lang="en-US" sz="1200" dirty="0"/>
-          </a:p>
-        </p:txBody>
-      </p:sp>
-      <p:sp>
-        <p:nvSpPr>
-          <p:cNvPr id="15" name="Shape 13"/>
-          <p:cNvSpPr/>
-          <p:nvPr/>
-        </p:nvSpPr>
-        <p:spPr>
-          <a:xfrm>
-            <a:off x="457200" y="4096512"/>
-            <a:ext cx="201168" cy="201168"/>
-          </a:xfrm>
-          <a:prstGeom prst="rect">
-            <a:avLst/>
-          </a:prstGeom>
-          <a:solidFill>
-            <a:srgbClr val="0D7377"/>
-          </a:solidFill>
-          <a:ln w="12700">
-            <a:solidFill>
-              <a:srgbClr val="0D7377"/>
-            </a:solidFill>
-            <a:prstDash val="solid"/>
-          </a:ln>
-        </p:spPr>
-      </p:sp>
-      <p:sp>
-        <p:nvSpPr>
-          <p:cNvPr id="16" name="Text 14"/>
-          <p:cNvSpPr/>
-          <p:nvPr/>
-        </p:nvSpPr>
-        <p:spPr>
-          <a:xfrm>
-            <a:off x="749808" y="4078224"/>
-            <a:ext cx="7955280" cy="512064"/>
-          </a:xfrm>
-          <a:prstGeom prst="rect">
-            <a:avLst/>
-          </a:prstGeom>
-          <a:noFill/>
-          <a:ln/>
-        </p:spPr>
-        <p:txBody>
-          <a:bodyPr wrap="square" lIns="0" tIns="0" rIns="0" bIns="0" rtlCol="0" anchor="ctr"/>
-          <a:lstStyle/>
-          <a:p>
-            <a:pPr marL="0" indent="0">
-              <a:buNone/>
-            </a:pPr>
-            <a:r>
-              <a:rPr lang="en-US" sz="1200" dirty="0">
-                <a:solidFill>
-                  <a:srgbClr val="D1E8F8"/>
-                </a:solidFill>
-                <a:latin typeface="Calibri" pitchFamily="34" charset="0"/>
-                <a:ea typeface="Calibri" pitchFamily="34" charset="-122"/>
-                <a:cs typeface="Calibri" pitchFamily="34" charset="-120"/>
-              </a:rPr>
-              <a:t>The "Monitor–Predict–Control" framework provides a practical path to smart grid integration in cities like Khulna.</a:t>
-            </a:r>
-            <a:endParaRPr lang="en-US" sz="1200" dirty="0"/>
-          </a:p>
-        </p:txBody>
-      </p:sp>
-      <p:sp>
-        <p:nvSpPr>
-          <p:cNvPr id="17" name="Shape 15"/>
-          <p:cNvSpPr/>
-          <p:nvPr/>
-        </p:nvSpPr>
-        <p:spPr>
-          <a:xfrm>
-            <a:off x="0" y="4773168"/>
-            <a:ext cx="9144000" cy="370332"/>
-          </a:xfrm>
-          <a:prstGeom prst="rect">
-            <a:avLst/>
-          </a:prstGeom>
-          <a:solidFill>
-            <a:srgbClr val="0F2447"/>
-          </a:solidFill>
-          <a:ln w="12700">
-            <a:solidFill>
-              <a:srgbClr val="0F2447"/>
-            </a:solidFill>
-            <a:prstDash val="solid"/>
-          </a:ln>
-        </p:spPr>
-      </p:sp>
-      <p:sp>
-        <p:nvSpPr>
-          <p:cNvPr id="18" name="Text 16"/>
-          <p:cNvSpPr/>
-          <p:nvPr/>
-        </p:nvSpPr>
-        <p:spPr>
-          <a:xfrm>
-            <a:off x="457200" y="4846320"/>
-            <a:ext cx="8229600" cy="228600"/>
-          </a:xfrm>
-          <a:prstGeom prst="rect">
-            <a:avLst/>
-          </a:prstGeom>
-          <a:noFill/>
-          <a:ln/>
-        </p:spPr>
-        <p:txBody>
-          <a:bodyPr wrap="square" lIns="0" tIns="0" rIns="0" bIns="0" rtlCol="0" anchor="ctr"/>
-          <a:lstStyle/>
-          <a:p>
-            <a:pPr marL="0" indent="0" algn="ctr">
-              <a:buNone/>
-            </a:pPr>
-            <a:r>
-              <a:rPr lang="en-US" sz="1000" dirty="0">
-                <a:solidFill>
-                  <a:srgbClr val="7BAFD4"/>
-                </a:solidFill>
-              </a:rPr>
-              <a:t>Rakesh Biswas  ·  Department of CSE  ·  JUST  ·  Thesis Defense 27 April 2026</a:t>
-            </a:r>
-            <a:endParaRPr lang="en-US" sz="1000" dirty="0"/>
           </a:p>
         </p:txBody>
       </p:sp>
@@ -19067,6 +18951,1792 @@
 </file>
 
 <file path=ppt/slides/slide20.xml><?xml version="1.0" encoding="utf-8"?>
+<p:sld xmlns:a="http://schemas.openxmlformats.org/drawingml/2006/main" xmlns:r="http://schemas.openxmlformats.org/officeDocument/2006/relationships" xmlns:p="http://schemas.openxmlformats.org/presentationml/2006/main">
+  <p:cSld name="Slide 15">
+    <p:bg>
+      <p:bgPr>
+        <a:solidFill>
+          <a:srgbClr val="F7F9FC"/>
+        </a:solidFill>
+        <a:effectLst/>
+      </p:bgPr>
+    </p:bg>
+    <p:spTree>
+      <p:nvGrpSpPr>
+        <p:cNvPr id="1" name=""/>
+        <p:cNvGrpSpPr/>
+        <p:nvPr/>
+      </p:nvGrpSpPr>
+      <p:grpSpPr>
+        <a:xfrm>
+          <a:off x="0" y="0"/>
+          <a:ext cx="0" cy="0"/>
+          <a:chOff x="0" y="0"/>
+          <a:chExt cx="0" cy="0"/>
+        </a:xfrm>
+      </p:grpSpPr>
+      <p:sp>
+        <p:nvSpPr>
+          <p:cNvPr id="2" name="Shape 0"/>
+          <p:cNvSpPr/>
+          <p:nvPr/>
+        </p:nvSpPr>
+        <p:spPr>
+          <a:xfrm>
+            <a:off x="0" y="0"/>
+            <a:ext cx="164592" cy="5143500"/>
+          </a:xfrm>
+          <a:prstGeom prst="rect">
+            <a:avLst/>
+          </a:prstGeom>
+          <a:solidFill>
+            <a:srgbClr val="1B3A6B"/>
+          </a:solidFill>
+          <a:ln w="12700">
+            <a:solidFill>
+              <a:srgbClr val="1B3A6B"/>
+            </a:solidFill>
+            <a:prstDash val="solid"/>
+          </a:ln>
+        </p:spPr>
+      </p:sp>
+      <p:sp>
+        <p:nvSpPr>
+          <p:cNvPr id="3" name="Text 1"/>
+          <p:cNvSpPr/>
+          <p:nvPr/>
+        </p:nvSpPr>
+        <p:spPr>
+          <a:xfrm>
+            <a:off x="320040" y="201168"/>
+            <a:ext cx="8503920" cy="493776"/>
+          </a:xfrm>
+          <a:prstGeom prst="rect">
+            <a:avLst/>
+          </a:prstGeom>
+          <a:noFill/>
+          <a:ln/>
+        </p:spPr>
+        <p:txBody>
+          <a:bodyPr wrap="square" lIns="0" tIns="0" rIns="0" bIns="0" rtlCol="0" anchor="ctr"/>
+          <a:lstStyle/>
+          <a:p>
+            <a:pPr marL="0" indent="0">
+              <a:buNone/>
+            </a:pPr>
+            <a:r>
+              <a:rPr lang="en-US" sz="2600" b="1" dirty="0">
+                <a:solidFill>
+                  <a:srgbClr val="1B3A6B"/>
+                </a:solidFill>
+                <a:latin typeface="Calibri" pitchFamily="34" charset="0"/>
+                <a:ea typeface="Calibri" pitchFamily="34" charset="-122"/>
+                <a:cs typeface="Calibri" pitchFamily="34" charset="-120"/>
+              </a:rPr>
+              <a:t>Limitations &amp; Recommendations for Future Work</a:t>
+            </a:r>
+            <a:endParaRPr lang="en-US" sz="2600" dirty="0"/>
+          </a:p>
+        </p:txBody>
+      </p:sp>
+      <p:sp>
+        <p:nvSpPr>
+          <p:cNvPr id="4" name="Shape 2"/>
+          <p:cNvSpPr/>
+          <p:nvPr/>
+        </p:nvSpPr>
+        <p:spPr>
+          <a:xfrm>
+            <a:off x="320040" y="960120"/>
+            <a:ext cx="8503920" cy="36576"/>
+          </a:xfrm>
+          <a:prstGeom prst="rect">
+            <a:avLst/>
+          </a:prstGeom>
+          <a:solidFill>
+            <a:srgbClr val="0D7377"/>
+          </a:solidFill>
+          <a:ln w="12700">
+            <a:solidFill>
+              <a:srgbClr val="0D7377"/>
+            </a:solidFill>
+            <a:prstDash val="solid"/>
+          </a:ln>
+        </p:spPr>
+      </p:sp>
+      <p:sp>
+        <p:nvSpPr>
+          <p:cNvPr id="5" name="Text 3"/>
+          <p:cNvSpPr/>
+          <p:nvPr/>
+        </p:nvSpPr>
+        <p:spPr>
+          <a:xfrm>
+            <a:off x="320040" y="1115568"/>
+            <a:ext cx="4114800" cy="320040"/>
+          </a:xfrm>
+          <a:prstGeom prst="rect">
+            <a:avLst/>
+          </a:prstGeom>
+          <a:noFill/>
+          <a:ln/>
+        </p:spPr>
+        <p:txBody>
+          <a:bodyPr wrap="square" lIns="0" tIns="0" rIns="0" bIns="0" rtlCol="0" anchor="ctr"/>
+          <a:lstStyle/>
+          <a:p>
+            <a:pPr marL="0" indent="0">
+              <a:buNone/>
+            </a:pPr>
+            <a:r>
+              <a:rPr lang="en-US" sz="1400" b="1" dirty="0">
+                <a:solidFill>
+                  <a:srgbClr val="C0392B"/>
+                </a:solidFill>
+                <a:latin typeface="Calibri" pitchFamily="34" charset="0"/>
+                <a:ea typeface="Calibri" pitchFamily="34" charset="-122"/>
+                <a:cs typeface="Calibri" pitchFamily="34" charset="-120"/>
+              </a:rPr>
+              <a:t>Current Limitations</a:t>
+            </a:r>
+            <a:endParaRPr lang="en-US" sz="1400" dirty="0"/>
+          </a:p>
+        </p:txBody>
+      </p:sp>
+      <p:sp>
+        <p:nvSpPr>
+          <p:cNvPr id="6" name="Shape 4"/>
+          <p:cNvSpPr/>
+          <p:nvPr/>
+        </p:nvSpPr>
+        <p:spPr>
+          <a:xfrm>
+            <a:off x="320040" y="1508760"/>
+            <a:ext cx="4114800" cy="621792"/>
+          </a:xfrm>
+          <a:prstGeom prst="rect">
+            <a:avLst/>
+          </a:prstGeom>
+          <a:solidFill>
+            <a:srgbClr val="FFFFFF"/>
+          </a:solidFill>
+          <a:ln w="12700">
+            <a:solidFill>
+              <a:srgbClr val="CBD5E1"/>
+            </a:solidFill>
+            <a:prstDash val="solid"/>
+          </a:ln>
+          <a:effectLst>
+            <a:outerShdw blurRad="76200" dist="25400" dir="8100000" algn="bl" rotWithShape="0">
+              <a:srgbClr val="000000">
+                <a:alpha val="8000"/>
+              </a:srgbClr>
+            </a:outerShdw>
+          </a:effectLst>
+        </p:spPr>
+      </p:sp>
+      <p:sp>
+        <p:nvSpPr>
+          <p:cNvPr id="7" name="Shape 5"/>
+          <p:cNvSpPr/>
+          <p:nvPr/>
+        </p:nvSpPr>
+        <p:spPr>
+          <a:xfrm>
+            <a:off x="320040" y="1508760"/>
+            <a:ext cx="54864" cy="621792"/>
+          </a:xfrm>
+          <a:prstGeom prst="rect">
+            <a:avLst/>
+          </a:prstGeom>
+          <a:solidFill>
+            <a:srgbClr val="C0392B"/>
+          </a:solidFill>
+          <a:ln w="12700">
+            <a:solidFill>
+              <a:srgbClr val="C0392B"/>
+            </a:solidFill>
+            <a:prstDash val="solid"/>
+          </a:ln>
+        </p:spPr>
+      </p:sp>
+      <p:sp>
+        <p:nvSpPr>
+          <p:cNvPr id="8" name="Text 6"/>
+          <p:cNvSpPr/>
+          <p:nvPr/>
+        </p:nvSpPr>
+        <p:spPr>
+          <a:xfrm>
+            <a:off x="457200" y="1572768"/>
+            <a:ext cx="3840480" cy="457200"/>
+          </a:xfrm>
+          <a:prstGeom prst="rect">
+            <a:avLst/>
+          </a:prstGeom>
+          <a:noFill/>
+          <a:ln/>
+        </p:spPr>
+        <p:txBody>
+          <a:bodyPr wrap="square" lIns="0" tIns="0" rIns="0" bIns="0" rtlCol="0" anchor="ctr"/>
+          <a:lstStyle/>
+          <a:p>
+            <a:pPr marL="0" indent="0">
+              <a:buNone/>
+            </a:pPr>
+            <a:r>
+              <a:rPr lang="en-US" sz="1100" dirty="0">
+                <a:solidFill>
+                  <a:srgbClr val="1E293B"/>
+                </a:solidFill>
+                <a:latin typeface="Calibri" pitchFamily="34" charset="0"/>
+                <a:ea typeface="Calibri" pitchFamily="34" charset="-122"/>
+                <a:cs typeface="Calibri" pitchFamily="34" charset="-120"/>
+              </a:rPr>
+              <a:t>Simulation-only dataset — real-world stochastic behavior not fully captured</a:t>
+            </a:r>
+            <a:endParaRPr lang="en-US" sz="1100" dirty="0"/>
+          </a:p>
+        </p:txBody>
+      </p:sp>
+      <p:sp>
+        <p:nvSpPr>
+          <p:cNvPr id="9" name="Shape 7"/>
+          <p:cNvSpPr/>
+          <p:nvPr/>
+        </p:nvSpPr>
+        <p:spPr>
+          <a:xfrm>
+            <a:off x="320040" y="2258568"/>
+            <a:ext cx="4114800" cy="621792"/>
+          </a:xfrm>
+          <a:prstGeom prst="rect">
+            <a:avLst/>
+          </a:prstGeom>
+          <a:solidFill>
+            <a:srgbClr val="FFFFFF"/>
+          </a:solidFill>
+          <a:ln w="12700">
+            <a:solidFill>
+              <a:srgbClr val="CBD5E1"/>
+            </a:solidFill>
+            <a:prstDash val="solid"/>
+          </a:ln>
+          <a:effectLst>
+            <a:outerShdw blurRad="76200" dist="25400" dir="8100000" algn="bl" rotWithShape="0">
+              <a:srgbClr val="000000">
+                <a:alpha val="8000"/>
+              </a:srgbClr>
+            </a:outerShdw>
+          </a:effectLst>
+        </p:spPr>
+      </p:sp>
+      <p:sp>
+        <p:nvSpPr>
+          <p:cNvPr id="10" name="Shape 8"/>
+          <p:cNvSpPr/>
+          <p:nvPr/>
+        </p:nvSpPr>
+        <p:spPr>
+          <a:xfrm>
+            <a:off x="320040" y="2258568"/>
+            <a:ext cx="54864" cy="621792"/>
+          </a:xfrm>
+          <a:prstGeom prst="rect">
+            <a:avLst/>
+          </a:prstGeom>
+          <a:solidFill>
+            <a:srgbClr val="C0392B"/>
+          </a:solidFill>
+          <a:ln w="12700">
+            <a:solidFill>
+              <a:srgbClr val="C0392B"/>
+            </a:solidFill>
+            <a:prstDash val="solid"/>
+          </a:ln>
+        </p:spPr>
+      </p:sp>
+      <p:sp>
+        <p:nvSpPr>
+          <p:cNvPr id="11" name="Text 9"/>
+          <p:cNvSpPr/>
+          <p:nvPr/>
+        </p:nvSpPr>
+        <p:spPr>
+          <a:xfrm>
+            <a:off x="457200" y="2322576"/>
+            <a:ext cx="3840480" cy="457200"/>
+          </a:xfrm>
+          <a:prstGeom prst="rect">
+            <a:avLst/>
+          </a:prstGeom>
+          <a:noFill/>
+          <a:ln/>
+        </p:spPr>
+        <p:txBody>
+          <a:bodyPr wrap="square" lIns="0" tIns="0" rIns="0" bIns="0" rtlCol="0" anchor="ctr"/>
+          <a:lstStyle/>
+          <a:p>
+            <a:pPr marL="0" indent="0">
+              <a:buNone/>
+            </a:pPr>
+            <a:r>
+              <a:rPr lang="en-US" sz="1100" dirty="0">
+                <a:solidFill>
+                  <a:srgbClr val="1E293B"/>
+                </a:solidFill>
+                <a:latin typeface="Calibri" pitchFamily="34" charset="0"/>
+                <a:ea typeface="Calibri" pitchFamily="34" charset="-122"/>
+                <a:cs typeface="Calibri" pitchFamily="34" charset="-120"/>
+              </a:rPr>
+              <a:t>Weather, electricity tariff &amp; driver behavior not modeled</a:t>
+            </a:r>
+            <a:endParaRPr lang="en-US" sz="1100" dirty="0"/>
+          </a:p>
+        </p:txBody>
+      </p:sp>
+      <p:sp>
+        <p:nvSpPr>
+          <p:cNvPr id="12" name="Shape 10"/>
+          <p:cNvSpPr/>
+          <p:nvPr/>
+        </p:nvSpPr>
+        <p:spPr>
+          <a:xfrm>
+            <a:off x="320040" y="3008376"/>
+            <a:ext cx="4114800" cy="621792"/>
+          </a:xfrm>
+          <a:prstGeom prst="rect">
+            <a:avLst/>
+          </a:prstGeom>
+          <a:solidFill>
+            <a:srgbClr val="FFFFFF"/>
+          </a:solidFill>
+          <a:ln w="12700">
+            <a:solidFill>
+              <a:srgbClr val="CBD5E1"/>
+            </a:solidFill>
+            <a:prstDash val="solid"/>
+          </a:ln>
+          <a:effectLst>
+            <a:outerShdw blurRad="76200" dist="25400" dir="8100000" algn="bl" rotWithShape="0">
+              <a:srgbClr val="000000">
+                <a:alpha val="8000"/>
+              </a:srgbClr>
+            </a:outerShdw>
+          </a:effectLst>
+        </p:spPr>
+      </p:sp>
+      <p:sp>
+        <p:nvSpPr>
+          <p:cNvPr id="13" name="Shape 11"/>
+          <p:cNvSpPr/>
+          <p:nvPr/>
+        </p:nvSpPr>
+        <p:spPr>
+          <a:xfrm>
+            <a:off x="320040" y="3008376"/>
+            <a:ext cx="54864" cy="621792"/>
+          </a:xfrm>
+          <a:prstGeom prst="rect">
+            <a:avLst/>
+          </a:prstGeom>
+          <a:solidFill>
+            <a:srgbClr val="C0392B"/>
+          </a:solidFill>
+          <a:ln w="12700">
+            <a:solidFill>
+              <a:srgbClr val="C0392B"/>
+            </a:solidFill>
+            <a:prstDash val="solid"/>
+          </a:ln>
+        </p:spPr>
+      </p:sp>
+      <p:sp>
+        <p:nvSpPr>
+          <p:cNvPr id="14" name="Text 12"/>
+          <p:cNvSpPr/>
+          <p:nvPr/>
+        </p:nvSpPr>
+        <p:spPr>
+          <a:xfrm>
+            <a:off x="457200" y="3072384"/>
+            <a:ext cx="3840480" cy="457200"/>
+          </a:xfrm>
+          <a:prstGeom prst="rect">
+            <a:avLst/>
+          </a:prstGeom>
+          <a:noFill/>
+          <a:ln/>
+        </p:spPr>
+        <p:txBody>
+          <a:bodyPr wrap="square" lIns="0" tIns="0" rIns="0" bIns="0" rtlCol="0" anchor="ctr"/>
+          <a:lstStyle/>
+          <a:p>
+            <a:pPr marL="0" indent="0">
+              <a:buNone/>
+            </a:pPr>
+            <a:r>
+              <a:rPr lang="en-US" sz="1100" dirty="0">
+                <a:solidFill>
+                  <a:srgbClr val="1E293B"/>
+                </a:solidFill>
+                <a:latin typeface="Calibri" pitchFamily="34" charset="0"/>
+                <a:ea typeface="Calibri" pitchFamily="34" charset="-122"/>
+                <a:cs typeface="Calibri" pitchFamily="34" charset="-120"/>
+              </a:rPr>
+              <a:t>Static infrastructure (no station failures or capacity changes)</a:t>
+            </a:r>
+            <a:endParaRPr lang="en-US" sz="1100" dirty="0"/>
+          </a:p>
+        </p:txBody>
+      </p:sp>
+      <p:sp>
+        <p:nvSpPr>
+          <p:cNvPr id="15" name="Shape 13"/>
+          <p:cNvSpPr/>
+          <p:nvPr/>
+        </p:nvSpPr>
+        <p:spPr>
+          <a:xfrm>
+            <a:off x="320040" y="3758184"/>
+            <a:ext cx="4114800" cy="621792"/>
+          </a:xfrm>
+          <a:prstGeom prst="rect">
+            <a:avLst/>
+          </a:prstGeom>
+          <a:solidFill>
+            <a:srgbClr val="FFFFFF"/>
+          </a:solidFill>
+          <a:ln w="12700">
+            <a:solidFill>
+              <a:srgbClr val="CBD5E1"/>
+            </a:solidFill>
+            <a:prstDash val="solid"/>
+          </a:ln>
+          <a:effectLst>
+            <a:outerShdw blurRad="76200" dist="25400" dir="8100000" algn="bl" rotWithShape="0">
+              <a:srgbClr val="000000">
+                <a:alpha val="8000"/>
+              </a:srgbClr>
+            </a:outerShdw>
+          </a:effectLst>
+        </p:spPr>
+      </p:sp>
+      <p:sp>
+        <p:nvSpPr>
+          <p:cNvPr id="16" name="Shape 14"/>
+          <p:cNvSpPr/>
+          <p:nvPr/>
+        </p:nvSpPr>
+        <p:spPr>
+          <a:xfrm>
+            <a:off x="320040" y="3758184"/>
+            <a:ext cx="54864" cy="621792"/>
+          </a:xfrm>
+          <a:prstGeom prst="rect">
+            <a:avLst/>
+          </a:prstGeom>
+          <a:solidFill>
+            <a:srgbClr val="C0392B"/>
+          </a:solidFill>
+          <a:ln w="12700">
+            <a:solidFill>
+              <a:srgbClr val="C0392B"/>
+            </a:solidFill>
+            <a:prstDash val="solid"/>
+          </a:ln>
+        </p:spPr>
+      </p:sp>
+      <p:sp>
+        <p:nvSpPr>
+          <p:cNvPr id="17" name="Text 15"/>
+          <p:cNvSpPr/>
+          <p:nvPr/>
+        </p:nvSpPr>
+        <p:spPr>
+          <a:xfrm>
+            <a:off x="457200" y="3822192"/>
+            <a:ext cx="3840480" cy="457200"/>
+          </a:xfrm>
+          <a:prstGeom prst="rect">
+            <a:avLst/>
+          </a:prstGeom>
+          <a:noFill/>
+          <a:ln/>
+        </p:spPr>
+        <p:txBody>
+          <a:bodyPr wrap="square" lIns="0" tIns="0" rIns="0" bIns="0" rtlCol="0" anchor="ctr"/>
+          <a:lstStyle/>
+          <a:p>
+            <a:pPr marL="0" indent="0">
+              <a:buNone/>
+            </a:pPr>
+            <a:r>
+              <a:rPr lang="en-US" sz="1100" dirty="0">
+                <a:solidFill>
+                  <a:srgbClr val="1E293B"/>
+                </a:solidFill>
+                <a:latin typeface="Calibri" pitchFamily="34" charset="0"/>
+                <a:ea typeface="Calibri" pitchFamily="34" charset="-122"/>
+                <a:cs typeface="Calibri" pitchFamily="34" charset="-120"/>
+              </a:rPr>
+              <a:t>Short 600-second window limits temporal generalization</a:t>
+            </a:r>
+            <a:endParaRPr lang="en-US" sz="1100" dirty="0"/>
+          </a:p>
+        </p:txBody>
+      </p:sp>
+      <p:sp>
+        <p:nvSpPr>
+          <p:cNvPr id="18" name="Text 16"/>
+          <p:cNvSpPr/>
+          <p:nvPr/>
+        </p:nvSpPr>
+        <p:spPr>
+          <a:xfrm>
+            <a:off x="4754880" y="1115568"/>
+            <a:ext cx="4023360" cy="320040"/>
+          </a:xfrm>
+          <a:prstGeom prst="rect">
+            <a:avLst/>
+          </a:prstGeom>
+          <a:noFill/>
+          <a:ln/>
+        </p:spPr>
+        <p:txBody>
+          <a:bodyPr wrap="square" lIns="0" tIns="0" rIns="0" bIns="0" rtlCol="0" anchor="ctr"/>
+          <a:lstStyle/>
+          <a:p>
+            <a:pPr marL="0" indent="0">
+              <a:buNone/>
+            </a:pPr>
+            <a:r>
+              <a:rPr lang="en-US" sz="1400" b="1" dirty="0">
+                <a:solidFill>
+                  <a:srgbClr val="0D7377"/>
+                </a:solidFill>
+                <a:latin typeface="Calibri" pitchFamily="34" charset="0"/>
+                <a:ea typeface="Calibri" pitchFamily="34" charset="-122"/>
+                <a:cs typeface="Calibri" pitchFamily="34" charset="-120"/>
+              </a:rPr>
+              <a:t>Future Research Directions</a:t>
+            </a:r>
+            <a:endParaRPr lang="en-US" sz="1400" dirty="0"/>
+          </a:p>
+        </p:txBody>
+      </p:sp>
+      <p:sp>
+        <p:nvSpPr>
+          <p:cNvPr id="19" name="Shape 17"/>
+          <p:cNvSpPr/>
+          <p:nvPr/>
+        </p:nvSpPr>
+        <p:spPr>
+          <a:xfrm>
+            <a:off x="4754880" y="1636776"/>
+            <a:ext cx="274320" cy="274320"/>
+          </a:xfrm>
+          <a:prstGeom prst="ellipse">
+            <a:avLst/>
+          </a:prstGeom>
+          <a:solidFill>
+            <a:srgbClr val="0D7377"/>
+          </a:solidFill>
+          <a:ln w="12700">
+            <a:solidFill>
+              <a:srgbClr val="0D7377"/>
+            </a:solidFill>
+            <a:prstDash val="solid"/>
+          </a:ln>
+        </p:spPr>
+      </p:sp>
+      <p:sp>
+        <p:nvSpPr>
+          <p:cNvPr id="20" name="Text 18"/>
+          <p:cNvSpPr/>
+          <p:nvPr/>
+        </p:nvSpPr>
+        <p:spPr>
+          <a:xfrm>
+            <a:off x="4754880" y="1636776"/>
+            <a:ext cx="274320" cy="274320"/>
+          </a:xfrm>
+          <a:prstGeom prst="rect">
+            <a:avLst/>
+          </a:prstGeom>
+          <a:noFill/>
+          <a:ln/>
+        </p:spPr>
+        <p:txBody>
+          <a:bodyPr wrap="square" lIns="0" tIns="0" rIns="0" bIns="0" rtlCol="0" anchor="ctr"/>
+          <a:lstStyle/>
+          <a:p>
+            <a:pPr marL="0" indent="0" algn="ctr">
+              <a:buNone/>
+            </a:pPr>
+            <a:r>
+              <a:rPr lang="en-US" sz="1000" b="1" dirty="0">
+                <a:solidFill>
+                  <a:srgbClr val="FFFFFF"/>
+                </a:solidFill>
+              </a:rPr>
+              <a:t>1</a:t>
+            </a:r>
+            <a:endParaRPr lang="en-US" sz="1000" dirty="0"/>
+          </a:p>
+        </p:txBody>
+      </p:sp>
+      <p:sp>
+        <p:nvSpPr>
+          <p:cNvPr id="21" name="Text 19"/>
+          <p:cNvSpPr/>
+          <p:nvPr/>
+        </p:nvSpPr>
+        <p:spPr>
+          <a:xfrm>
+            <a:off x="5093208" y="1581912"/>
+            <a:ext cx="3657600" cy="256032"/>
+          </a:xfrm>
+          <a:prstGeom prst="rect">
+            <a:avLst/>
+          </a:prstGeom>
+          <a:noFill/>
+          <a:ln/>
+        </p:spPr>
+        <p:txBody>
+          <a:bodyPr wrap="square" lIns="0" tIns="0" rIns="0" bIns="0" rtlCol="0" anchor="ctr"/>
+          <a:lstStyle/>
+          <a:p>
+            <a:pPr marL="0" indent="0">
+              <a:buNone/>
+            </a:pPr>
+            <a:r>
+              <a:rPr lang="en-US" sz="1200" b="1" dirty="0">
+                <a:solidFill>
+                  <a:srgbClr val="1E293B"/>
+                </a:solidFill>
+                <a:latin typeface="Calibri" pitchFamily="34" charset="0"/>
+                <a:ea typeface="Calibri" pitchFamily="34" charset="-122"/>
+                <a:cs typeface="Calibri" pitchFamily="34" charset="-120"/>
+              </a:rPr>
+              <a:t>Real-World Data Integration</a:t>
+            </a:r>
+            <a:endParaRPr lang="en-US" sz="1200" dirty="0"/>
+          </a:p>
+        </p:txBody>
+      </p:sp>
+      <p:sp>
+        <p:nvSpPr>
+          <p:cNvPr id="22" name="Text 20"/>
+          <p:cNvSpPr/>
+          <p:nvPr/>
+        </p:nvSpPr>
+        <p:spPr>
+          <a:xfrm>
+            <a:off x="5093208" y="1837944"/>
+            <a:ext cx="3657600" cy="256032"/>
+          </a:xfrm>
+          <a:prstGeom prst="rect">
+            <a:avLst/>
+          </a:prstGeom>
+          <a:noFill/>
+          <a:ln/>
+        </p:spPr>
+        <p:txBody>
+          <a:bodyPr wrap="square" lIns="0" tIns="0" rIns="0" bIns="0" rtlCol="0" anchor="ctr"/>
+          <a:lstStyle/>
+          <a:p>
+            <a:pPr marL="0" indent="0">
+              <a:buNone/>
+            </a:pPr>
+            <a:r>
+              <a:rPr lang="en-US" sz="1000" dirty="0">
+                <a:solidFill>
+                  <a:srgbClr val="64748B"/>
+                </a:solidFill>
+                <a:latin typeface="Calibri" pitchFamily="34" charset="0"/>
+                <a:ea typeface="Calibri" pitchFamily="34" charset="-122"/>
+                <a:cs typeface="Calibri" pitchFamily="34" charset="-120"/>
+              </a:rPr>
+              <a:t>Deploy IoT sensors at actual charging stations in Khulna/Jashore</a:t>
+            </a:r>
+            <a:endParaRPr lang="en-US" sz="1000" dirty="0"/>
+          </a:p>
+        </p:txBody>
+      </p:sp>
+      <p:sp>
+        <p:nvSpPr>
+          <p:cNvPr id="23" name="Shape 21"/>
+          <p:cNvSpPr/>
+          <p:nvPr/>
+        </p:nvSpPr>
+        <p:spPr>
+          <a:xfrm>
+            <a:off x="4754880" y="2350008"/>
+            <a:ext cx="274320" cy="274320"/>
+          </a:xfrm>
+          <a:prstGeom prst="ellipse">
+            <a:avLst/>
+          </a:prstGeom>
+          <a:solidFill>
+            <a:srgbClr val="0D7377"/>
+          </a:solidFill>
+          <a:ln w="12700">
+            <a:solidFill>
+              <a:srgbClr val="0D7377"/>
+            </a:solidFill>
+            <a:prstDash val="solid"/>
+          </a:ln>
+        </p:spPr>
+      </p:sp>
+      <p:sp>
+        <p:nvSpPr>
+          <p:cNvPr id="24" name="Text 22"/>
+          <p:cNvSpPr/>
+          <p:nvPr/>
+        </p:nvSpPr>
+        <p:spPr>
+          <a:xfrm>
+            <a:off x="4754880" y="2350008"/>
+            <a:ext cx="274320" cy="274320"/>
+          </a:xfrm>
+          <a:prstGeom prst="rect">
+            <a:avLst/>
+          </a:prstGeom>
+          <a:noFill/>
+          <a:ln/>
+        </p:spPr>
+        <p:txBody>
+          <a:bodyPr wrap="square" lIns="0" tIns="0" rIns="0" bIns="0" rtlCol="0" anchor="ctr"/>
+          <a:lstStyle/>
+          <a:p>
+            <a:pPr marL="0" indent="0" algn="ctr">
+              <a:buNone/>
+            </a:pPr>
+            <a:r>
+              <a:rPr lang="en-US" sz="1000" b="1" dirty="0">
+                <a:solidFill>
+                  <a:srgbClr val="FFFFFF"/>
+                </a:solidFill>
+              </a:rPr>
+              <a:t>2</a:t>
+            </a:r>
+            <a:endParaRPr lang="en-US" sz="1000" dirty="0"/>
+          </a:p>
+        </p:txBody>
+      </p:sp>
+      <p:sp>
+        <p:nvSpPr>
+          <p:cNvPr id="25" name="Text 23"/>
+          <p:cNvSpPr/>
+          <p:nvPr/>
+        </p:nvSpPr>
+        <p:spPr>
+          <a:xfrm>
+            <a:off x="5093208" y="2295144"/>
+            <a:ext cx="3657600" cy="256032"/>
+          </a:xfrm>
+          <a:prstGeom prst="rect">
+            <a:avLst/>
+          </a:prstGeom>
+          <a:noFill/>
+          <a:ln/>
+        </p:spPr>
+        <p:txBody>
+          <a:bodyPr wrap="square" lIns="0" tIns="0" rIns="0" bIns="0" rtlCol="0" anchor="ctr"/>
+          <a:lstStyle/>
+          <a:p>
+            <a:pPr marL="0" indent="0">
+              <a:buNone/>
+            </a:pPr>
+            <a:r>
+              <a:rPr lang="en-US" sz="1200" b="1" dirty="0">
+                <a:solidFill>
+                  <a:srgbClr val="1E293B"/>
+                </a:solidFill>
+                <a:latin typeface="Calibri" pitchFamily="34" charset="0"/>
+                <a:ea typeface="Calibri" pitchFamily="34" charset="-122"/>
+                <a:cs typeface="Calibri" pitchFamily="34" charset="-120"/>
+              </a:rPr>
+              <a:t>Hybrid Deep Learning (CNN-LSTM)</a:t>
+            </a:r>
+            <a:endParaRPr lang="en-US" sz="1200" dirty="0"/>
+          </a:p>
+        </p:txBody>
+      </p:sp>
+      <p:sp>
+        <p:nvSpPr>
+          <p:cNvPr id="26" name="Text 24"/>
+          <p:cNvSpPr/>
+          <p:nvPr/>
+        </p:nvSpPr>
+        <p:spPr>
+          <a:xfrm>
+            <a:off x="5093208" y="2551176"/>
+            <a:ext cx="3657600" cy="256032"/>
+          </a:xfrm>
+          <a:prstGeom prst="rect">
+            <a:avLst/>
+          </a:prstGeom>
+          <a:noFill/>
+          <a:ln/>
+        </p:spPr>
+        <p:txBody>
+          <a:bodyPr wrap="square" lIns="0" tIns="0" rIns="0" bIns="0" rtlCol="0" anchor="ctr"/>
+          <a:lstStyle/>
+          <a:p>
+            <a:pPr marL="0" indent="0">
+              <a:buNone/>
+            </a:pPr>
+            <a:r>
+              <a:rPr lang="en-US" sz="1000" dirty="0">
+                <a:solidFill>
+                  <a:srgbClr val="64748B"/>
+                </a:solidFill>
+                <a:latin typeface="Calibri" pitchFamily="34" charset="0"/>
+                <a:ea typeface="Calibri" pitchFamily="34" charset="-122"/>
+                <a:cs typeface="Calibri" pitchFamily="34" charset="-120"/>
+              </a:rPr>
+              <a:t>Capture spatial + multi-scale temporal dependencies</a:t>
+            </a:r>
+            <a:endParaRPr lang="en-US" sz="1000" dirty="0"/>
+          </a:p>
+        </p:txBody>
+      </p:sp>
+      <p:sp>
+        <p:nvSpPr>
+          <p:cNvPr id="27" name="Shape 25"/>
+          <p:cNvSpPr/>
+          <p:nvPr/>
+        </p:nvSpPr>
+        <p:spPr>
+          <a:xfrm>
+            <a:off x="4754880" y="3063240"/>
+            <a:ext cx="274320" cy="274320"/>
+          </a:xfrm>
+          <a:prstGeom prst="ellipse">
+            <a:avLst/>
+          </a:prstGeom>
+          <a:solidFill>
+            <a:srgbClr val="0D7377"/>
+          </a:solidFill>
+          <a:ln w="12700">
+            <a:solidFill>
+              <a:srgbClr val="0D7377"/>
+            </a:solidFill>
+            <a:prstDash val="solid"/>
+          </a:ln>
+        </p:spPr>
+      </p:sp>
+      <p:sp>
+        <p:nvSpPr>
+          <p:cNvPr id="28" name="Text 26"/>
+          <p:cNvSpPr/>
+          <p:nvPr/>
+        </p:nvSpPr>
+        <p:spPr>
+          <a:xfrm>
+            <a:off x="4754880" y="3063240"/>
+            <a:ext cx="274320" cy="274320"/>
+          </a:xfrm>
+          <a:prstGeom prst="rect">
+            <a:avLst/>
+          </a:prstGeom>
+          <a:noFill/>
+          <a:ln/>
+        </p:spPr>
+        <p:txBody>
+          <a:bodyPr wrap="square" lIns="0" tIns="0" rIns="0" bIns="0" rtlCol="0" anchor="ctr"/>
+          <a:lstStyle/>
+          <a:p>
+            <a:pPr marL="0" indent="0" algn="ctr">
+              <a:buNone/>
+            </a:pPr>
+            <a:r>
+              <a:rPr lang="en-US" sz="1000" b="1" dirty="0">
+                <a:solidFill>
+                  <a:srgbClr val="FFFFFF"/>
+                </a:solidFill>
+              </a:rPr>
+              <a:t>3</a:t>
+            </a:r>
+            <a:endParaRPr lang="en-US" sz="1000" dirty="0"/>
+          </a:p>
+        </p:txBody>
+      </p:sp>
+      <p:sp>
+        <p:nvSpPr>
+          <p:cNvPr id="29" name="Text 27"/>
+          <p:cNvSpPr/>
+          <p:nvPr/>
+        </p:nvSpPr>
+        <p:spPr>
+          <a:xfrm>
+            <a:off x="5093208" y="3008376"/>
+            <a:ext cx="3657600" cy="256032"/>
+          </a:xfrm>
+          <a:prstGeom prst="rect">
+            <a:avLst/>
+          </a:prstGeom>
+          <a:noFill/>
+          <a:ln/>
+        </p:spPr>
+        <p:txBody>
+          <a:bodyPr wrap="square" lIns="0" tIns="0" rIns="0" bIns="0" rtlCol="0" anchor="ctr"/>
+          <a:lstStyle/>
+          <a:p>
+            <a:pPr marL="0" indent="0">
+              <a:buNone/>
+            </a:pPr>
+            <a:r>
+              <a:rPr lang="en-US" sz="1200" b="1" dirty="0">
+                <a:solidFill>
+                  <a:srgbClr val="1E293B"/>
+                </a:solidFill>
+                <a:latin typeface="Calibri" pitchFamily="34" charset="0"/>
+                <a:ea typeface="Calibri" pitchFamily="34" charset="-122"/>
+                <a:cs typeface="Calibri" pitchFamily="34" charset="-120"/>
+              </a:rPr>
+              <a:t>Reinforcement Learning</a:t>
+            </a:r>
+            <a:endParaRPr lang="en-US" sz="1200" dirty="0"/>
+          </a:p>
+        </p:txBody>
+      </p:sp>
+      <p:sp>
+        <p:nvSpPr>
+          <p:cNvPr id="30" name="Text 28"/>
+          <p:cNvSpPr/>
+          <p:nvPr/>
+        </p:nvSpPr>
+        <p:spPr>
+          <a:xfrm>
+            <a:off x="5093208" y="3264408"/>
+            <a:ext cx="3657600" cy="256032"/>
+          </a:xfrm>
+          <a:prstGeom prst="rect">
+            <a:avLst/>
+          </a:prstGeom>
+          <a:noFill/>
+          <a:ln/>
+        </p:spPr>
+        <p:txBody>
+          <a:bodyPr wrap="square" lIns="0" tIns="0" rIns="0" bIns="0" rtlCol="0" anchor="ctr"/>
+          <a:lstStyle/>
+          <a:p>
+            <a:pPr marL="0" indent="0">
+              <a:buNone/>
+            </a:pPr>
+            <a:r>
+              <a:rPr lang="en-US" sz="1000" dirty="0">
+                <a:solidFill>
+                  <a:srgbClr val="64748B"/>
+                </a:solidFill>
+                <a:latin typeface="Calibri" pitchFamily="34" charset="0"/>
+                <a:ea typeface="Calibri" pitchFamily="34" charset="-122"/>
+                <a:cs typeface="Calibri" pitchFamily="34" charset="-120"/>
+              </a:rPr>
+              <a:t>Adaptive station assignment &amp; autonomous load balancing</a:t>
+            </a:r>
+            <a:endParaRPr lang="en-US" sz="1000" dirty="0"/>
+          </a:p>
+        </p:txBody>
+      </p:sp>
+      <p:sp>
+        <p:nvSpPr>
+          <p:cNvPr id="31" name="Shape 29"/>
+          <p:cNvSpPr/>
+          <p:nvPr/>
+        </p:nvSpPr>
+        <p:spPr>
+          <a:xfrm>
+            <a:off x="4754880" y="3776472"/>
+            <a:ext cx="274320" cy="274320"/>
+          </a:xfrm>
+          <a:prstGeom prst="ellipse">
+            <a:avLst/>
+          </a:prstGeom>
+          <a:solidFill>
+            <a:srgbClr val="0D7377"/>
+          </a:solidFill>
+          <a:ln w="12700">
+            <a:solidFill>
+              <a:srgbClr val="0D7377"/>
+            </a:solidFill>
+            <a:prstDash val="solid"/>
+          </a:ln>
+        </p:spPr>
+      </p:sp>
+      <p:sp>
+        <p:nvSpPr>
+          <p:cNvPr id="32" name="Text 30"/>
+          <p:cNvSpPr/>
+          <p:nvPr/>
+        </p:nvSpPr>
+        <p:spPr>
+          <a:xfrm>
+            <a:off x="4754880" y="3776472"/>
+            <a:ext cx="274320" cy="274320"/>
+          </a:xfrm>
+          <a:prstGeom prst="rect">
+            <a:avLst/>
+          </a:prstGeom>
+          <a:noFill/>
+          <a:ln/>
+        </p:spPr>
+        <p:txBody>
+          <a:bodyPr wrap="square" lIns="0" tIns="0" rIns="0" bIns="0" rtlCol="0" anchor="ctr"/>
+          <a:lstStyle/>
+          <a:p>
+            <a:pPr marL="0" indent="0" algn="ctr">
+              <a:buNone/>
+            </a:pPr>
+            <a:r>
+              <a:rPr lang="en-US" sz="1000" b="1" dirty="0">
+                <a:solidFill>
+                  <a:srgbClr val="FFFFFF"/>
+                </a:solidFill>
+              </a:rPr>
+              <a:t>4</a:t>
+            </a:r>
+            <a:endParaRPr lang="en-US" sz="1000" dirty="0"/>
+          </a:p>
+        </p:txBody>
+      </p:sp>
+      <p:sp>
+        <p:nvSpPr>
+          <p:cNvPr id="33" name="Text 31"/>
+          <p:cNvSpPr/>
+          <p:nvPr/>
+        </p:nvSpPr>
+        <p:spPr>
+          <a:xfrm>
+            <a:off x="5093208" y="3721608"/>
+            <a:ext cx="3657600" cy="256032"/>
+          </a:xfrm>
+          <a:prstGeom prst="rect">
+            <a:avLst/>
+          </a:prstGeom>
+          <a:noFill/>
+          <a:ln/>
+        </p:spPr>
+        <p:txBody>
+          <a:bodyPr wrap="square" lIns="0" tIns="0" rIns="0" bIns="0" rtlCol="0" anchor="ctr"/>
+          <a:lstStyle/>
+          <a:p>
+            <a:pPr marL="0" indent="0">
+              <a:buNone/>
+            </a:pPr>
+            <a:r>
+              <a:rPr lang="en-US" sz="1200" b="1" dirty="0">
+                <a:solidFill>
+                  <a:srgbClr val="1E293B"/>
+                </a:solidFill>
+                <a:latin typeface="Calibri" pitchFamily="34" charset="0"/>
+                <a:ea typeface="Calibri" pitchFamily="34" charset="-122"/>
+                <a:cs typeface="Calibri" pitchFamily="34" charset="-120"/>
+              </a:rPr>
+              <a:t>Renewable Energy Integration</a:t>
+            </a:r>
+            <a:endParaRPr lang="en-US" sz="1200" dirty="0"/>
+          </a:p>
+        </p:txBody>
+      </p:sp>
+      <p:sp>
+        <p:nvSpPr>
+          <p:cNvPr id="34" name="Text 32"/>
+          <p:cNvSpPr/>
+          <p:nvPr/>
+        </p:nvSpPr>
+        <p:spPr>
+          <a:xfrm>
+            <a:off x="5093208" y="3977640"/>
+            <a:ext cx="3657600" cy="256032"/>
+          </a:xfrm>
+          <a:prstGeom prst="rect">
+            <a:avLst/>
+          </a:prstGeom>
+          <a:noFill/>
+          <a:ln/>
+        </p:spPr>
+        <p:txBody>
+          <a:bodyPr wrap="square" lIns="0" tIns="0" rIns="0" bIns="0" rtlCol="0" anchor="ctr"/>
+          <a:lstStyle/>
+          <a:p>
+            <a:pPr marL="0" indent="0">
+              <a:buNone/>
+            </a:pPr>
+            <a:r>
+              <a:rPr lang="en-US" sz="1000" dirty="0">
+                <a:solidFill>
+                  <a:srgbClr val="64748B"/>
+                </a:solidFill>
+                <a:latin typeface="Calibri" pitchFamily="34" charset="0"/>
+                <a:ea typeface="Calibri" pitchFamily="34" charset="-122"/>
+                <a:cs typeface="Calibri" pitchFamily="34" charset="-120"/>
+              </a:rPr>
+              <a:t>Model solar-powered stations with energy storage</a:t>
+            </a:r>
+            <a:endParaRPr lang="en-US" sz="1000" dirty="0"/>
+          </a:p>
+        </p:txBody>
+      </p:sp>
+      <p:sp>
+        <p:nvSpPr>
+          <p:cNvPr id="35" name="Shape 33"/>
+          <p:cNvSpPr/>
+          <p:nvPr/>
+        </p:nvSpPr>
+        <p:spPr>
+          <a:xfrm>
+            <a:off x="4754880" y="4489704"/>
+            <a:ext cx="274320" cy="274320"/>
+          </a:xfrm>
+          <a:prstGeom prst="ellipse">
+            <a:avLst/>
+          </a:prstGeom>
+          <a:solidFill>
+            <a:srgbClr val="0D7377"/>
+          </a:solidFill>
+          <a:ln w="12700">
+            <a:solidFill>
+              <a:srgbClr val="0D7377"/>
+            </a:solidFill>
+            <a:prstDash val="solid"/>
+          </a:ln>
+        </p:spPr>
+      </p:sp>
+      <p:sp>
+        <p:nvSpPr>
+          <p:cNvPr id="36" name="Text 34"/>
+          <p:cNvSpPr/>
+          <p:nvPr/>
+        </p:nvSpPr>
+        <p:spPr>
+          <a:xfrm>
+            <a:off x="4754880" y="4489704"/>
+            <a:ext cx="274320" cy="274320"/>
+          </a:xfrm>
+          <a:prstGeom prst="rect">
+            <a:avLst/>
+          </a:prstGeom>
+          <a:noFill/>
+          <a:ln/>
+        </p:spPr>
+        <p:txBody>
+          <a:bodyPr wrap="square" lIns="0" tIns="0" rIns="0" bIns="0" rtlCol="0" anchor="ctr"/>
+          <a:lstStyle/>
+          <a:p>
+            <a:pPr marL="0" indent="0" algn="ctr">
+              <a:buNone/>
+            </a:pPr>
+            <a:r>
+              <a:rPr lang="en-US" sz="1000" b="1" dirty="0">
+                <a:solidFill>
+                  <a:srgbClr val="FFFFFF"/>
+                </a:solidFill>
+              </a:rPr>
+              <a:t>5</a:t>
+            </a:r>
+            <a:endParaRPr lang="en-US" sz="1000" dirty="0"/>
+          </a:p>
+        </p:txBody>
+      </p:sp>
+      <p:sp>
+        <p:nvSpPr>
+          <p:cNvPr id="37" name="Text 35"/>
+          <p:cNvSpPr/>
+          <p:nvPr/>
+        </p:nvSpPr>
+        <p:spPr>
+          <a:xfrm>
+            <a:off x="5093208" y="4434840"/>
+            <a:ext cx="3657600" cy="256032"/>
+          </a:xfrm>
+          <a:prstGeom prst="rect">
+            <a:avLst/>
+          </a:prstGeom>
+          <a:noFill/>
+          <a:ln/>
+        </p:spPr>
+        <p:txBody>
+          <a:bodyPr wrap="square" lIns="0" tIns="0" rIns="0" bIns="0" rtlCol="0" anchor="ctr"/>
+          <a:lstStyle/>
+          <a:p>
+            <a:pPr marL="0" indent="0">
+              <a:buNone/>
+            </a:pPr>
+            <a:r>
+              <a:rPr lang="en-US" sz="1200" b="1" dirty="0">
+                <a:solidFill>
+                  <a:srgbClr val="1E293B"/>
+                </a:solidFill>
+                <a:latin typeface="Calibri" pitchFamily="34" charset="0"/>
+                <a:ea typeface="Calibri" pitchFamily="34" charset="-122"/>
+                <a:cs typeface="Calibri" pitchFamily="34" charset="-120"/>
+              </a:rPr>
+              <a:t>Larger Simulation Environment</a:t>
+            </a:r>
+            <a:endParaRPr lang="en-US" sz="1200" dirty="0"/>
+          </a:p>
+        </p:txBody>
+      </p:sp>
+      <p:sp>
+        <p:nvSpPr>
+          <p:cNvPr id="38" name="Text 36"/>
+          <p:cNvSpPr/>
+          <p:nvPr/>
+        </p:nvSpPr>
+        <p:spPr>
+          <a:xfrm>
+            <a:off x="5093208" y="4690872"/>
+            <a:ext cx="3657600" cy="256032"/>
+          </a:xfrm>
+          <a:prstGeom prst="rect">
+            <a:avLst/>
+          </a:prstGeom>
+          <a:noFill/>
+          <a:ln/>
+        </p:spPr>
+        <p:txBody>
+          <a:bodyPr wrap="square" lIns="0" tIns="0" rIns="0" bIns="0" rtlCol="0" anchor="ctr"/>
+          <a:lstStyle/>
+          <a:p>
+            <a:pPr marL="0" indent="0">
+              <a:buNone/>
+            </a:pPr>
+            <a:r>
+              <a:rPr lang="en-US" sz="1000" dirty="0">
+                <a:solidFill>
+                  <a:srgbClr val="64748B"/>
+                </a:solidFill>
+                <a:latin typeface="Calibri" pitchFamily="34" charset="0"/>
+                <a:ea typeface="Calibri" pitchFamily="34" charset="-122"/>
+                <a:cs typeface="Calibri" pitchFamily="34" charset="-120"/>
+              </a:rPr>
+              <a:t>Expand to full-city scale with diverse vehicle types</a:t>
+            </a:r>
+            <a:endParaRPr lang="en-US" sz="1000" dirty="0"/>
+          </a:p>
+        </p:txBody>
+      </p:sp>
+    </p:spTree>
+  </p:cSld>
+  <p:clrMapOvr>
+    <a:masterClrMapping/>
+  </p:clrMapOvr>
+</p:sld>
+</file>
+
+<file path=ppt/slides/slide21.xml><?xml version="1.0" encoding="utf-8"?>
+<p:sld xmlns:a="http://schemas.openxmlformats.org/drawingml/2006/main" xmlns:r="http://schemas.openxmlformats.org/officeDocument/2006/relationships" xmlns:p="http://schemas.openxmlformats.org/presentationml/2006/main">
+  <p:cSld>
+    <p:spTree>
+      <p:nvGrpSpPr>
+        <p:cNvPr id="1" name=""/>
+        <p:cNvGrpSpPr/>
+        <p:nvPr/>
+      </p:nvGrpSpPr>
+      <p:grpSpPr>
+        <a:xfrm>
+          <a:off x="0" y="0"/>
+          <a:ext cx="0" cy="0"/>
+          <a:chOff x="0" y="0"/>
+          <a:chExt cx="0" cy="0"/>
+        </a:xfrm>
+      </p:grpSpPr>
+      <p:sp>
+        <p:nvSpPr>
+          <p:cNvPr id="2" name="Shape 0"/>
+          <p:cNvSpPr/>
+          <p:nvPr/>
+        </p:nvSpPr>
+        <p:spPr>
+          <a:xfrm>
+            <a:off x="0" y="0"/>
+            <a:ext cx="9144000" cy="73152"/>
+          </a:xfrm>
+          <a:prstGeom prst="rect">
+            <a:avLst/>
+          </a:prstGeom>
+          <a:solidFill>
+            <a:srgbClr val="0D7377"/>
+          </a:solidFill>
+          <a:ln w="12700">
+            <a:solidFill>
+              <a:srgbClr val="0D7377"/>
+            </a:solidFill>
+            <a:prstDash val="solid"/>
+          </a:ln>
+        </p:spPr>
+      </p:sp>
+      <p:sp>
+        <p:nvSpPr>
+          <p:cNvPr id="3" name="Text 1"/>
+          <p:cNvSpPr/>
+          <p:nvPr/>
+        </p:nvSpPr>
+        <p:spPr>
+          <a:xfrm>
+            <a:off x="457200" y="256032"/>
+            <a:ext cx="8229600" cy="475488"/>
+          </a:xfrm>
+          <a:prstGeom prst="rect">
+            <a:avLst/>
+          </a:prstGeom>
+          <a:noFill/>
+          <a:ln/>
+        </p:spPr>
+        <p:txBody>
+          <a:bodyPr wrap="square" lIns="0" tIns="0" rIns="0" bIns="0" rtlCol="0" anchor="ctr"/>
+          <a:lstStyle/>
+          <a:p>
+            <a:pPr marL="0" indent="0" algn="ctr">
+              <a:buNone/>
+            </a:pPr>
+            <a:r>
+              <a:rPr lang="en-US" sz="3000" b="1" dirty="0">
+                <a:latin typeface="Calibri" pitchFamily="34" charset="0"/>
+                <a:ea typeface="Calibri" pitchFamily="34" charset="-122"/>
+                <a:cs typeface="Calibri" pitchFamily="34" charset="-120"/>
+              </a:rPr>
+              <a:t>Conclusion</a:t>
+            </a:r>
+            <a:endParaRPr lang="en-US" sz="3000" dirty="0"/>
+          </a:p>
+        </p:txBody>
+      </p:sp>
+      <p:sp>
+        <p:nvSpPr>
+          <p:cNvPr id="4" name="Shape 2"/>
+          <p:cNvSpPr/>
+          <p:nvPr/>
+        </p:nvSpPr>
+        <p:spPr>
+          <a:xfrm>
+            <a:off x="2286000" y="777240"/>
+            <a:ext cx="4572000" cy="36576"/>
+          </a:xfrm>
+          <a:prstGeom prst="rect">
+            <a:avLst/>
+          </a:prstGeom>
+          <a:solidFill>
+            <a:srgbClr val="0D7377"/>
+          </a:solidFill>
+          <a:ln w="12700">
+            <a:solidFill>
+              <a:srgbClr val="0D7377"/>
+            </a:solidFill>
+            <a:prstDash val="solid"/>
+          </a:ln>
+        </p:spPr>
+      </p:sp>
+      <p:sp>
+        <p:nvSpPr>
+          <p:cNvPr id="5" name="Shape 3"/>
+          <p:cNvSpPr/>
+          <p:nvPr/>
+        </p:nvSpPr>
+        <p:spPr>
+          <a:xfrm>
+            <a:off x="457200" y="1091462"/>
+            <a:ext cx="201168" cy="201168"/>
+          </a:xfrm>
+          <a:prstGeom prst="rect">
+            <a:avLst/>
+          </a:prstGeom>
+          <a:solidFill>
+            <a:srgbClr val="0D7377"/>
+          </a:solidFill>
+          <a:ln w="12700">
+            <a:solidFill>
+              <a:srgbClr val="0D7377"/>
+            </a:solidFill>
+            <a:prstDash val="solid"/>
+          </a:ln>
+        </p:spPr>
+      </p:sp>
+      <p:sp>
+        <p:nvSpPr>
+          <p:cNvPr id="6" name="Text 4"/>
+          <p:cNvSpPr/>
+          <p:nvPr/>
+        </p:nvSpPr>
+        <p:spPr>
+          <a:xfrm>
+            <a:off x="749808" y="969264"/>
+            <a:ext cx="7955280" cy="512064"/>
+          </a:xfrm>
+          <a:prstGeom prst="rect">
+            <a:avLst/>
+          </a:prstGeom>
+          <a:noFill/>
+          <a:ln/>
+        </p:spPr>
+        <p:txBody>
+          <a:bodyPr wrap="square" lIns="0" tIns="0" rIns="0" bIns="0" rtlCol="0" anchor="ctr"/>
+          <a:lstStyle/>
+          <a:p>
+            <a:pPr marL="0" indent="0">
+              <a:buNone/>
+            </a:pPr>
+            <a:r>
+              <a:rPr lang="en-US" sz="1400" dirty="0">
+                <a:latin typeface="Calibri" pitchFamily="34" charset="0"/>
+                <a:ea typeface="Calibri" pitchFamily="34" charset="-122"/>
+                <a:cs typeface="Calibri" pitchFamily="34" charset="-120"/>
+              </a:rPr>
+              <a:t>A comprehensive SUMO-based EV simulation modeled Bangladesh's urban mobility (Easy Bikes, E-Rickshaws, E-Vans) with realistic charging infrastructure.</a:t>
+            </a:r>
+            <a:endParaRPr lang="en-US" sz="1400" dirty="0"/>
+          </a:p>
+        </p:txBody>
+      </p:sp>
+      <p:sp>
+        <p:nvSpPr>
+          <p:cNvPr id="7" name="Shape 5"/>
+          <p:cNvSpPr/>
+          <p:nvPr/>
+        </p:nvSpPr>
+        <p:spPr>
+          <a:xfrm>
+            <a:off x="457200" y="1713254"/>
+            <a:ext cx="201168" cy="201168"/>
+          </a:xfrm>
+          <a:prstGeom prst="rect">
+            <a:avLst/>
+          </a:prstGeom>
+          <a:solidFill>
+            <a:srgbClr val="0D7377"/>
+          </a:solidFill>
+          <a:ln w="12700">
+            <a:solidFill>
+              <a:srgbClr val="0D7377"/>
+            </a:solidFill>
+            <a:prstDash val="solid"/>
+          </a:ln>
+        </p:spPr>
+      </p:sp>
+      <p:sp>
+        <p:nvSpPr>
+          <p:cNvPr id="8" name="Text 6"/>
+          <p:cNvSpPr/>
+          <p:nvPr/>
+        </p:nvSpPr>
+        <p:spPr>
+          <a:xfrm>
+            <a:off x="749808" y="1591056"/>
+            <a:ext cx="7955280" cy="512064"/>
+          </a:xfrm>
+          <a:prstGeom prst="rect">
+            <a:avLst/>
+          </a:prstGeom>
+          <a:noFill/>
+          <a:ln/>
+        </p:spPr>
+        <p:txBody>
+          <a:bodyPr wrap="square" lIns="0" tIns="0" rIns="0" bIns="0" rtlCol="0" anchor="ctr"/>
+          <a:lstStyle/>
+          <a:p>
+            <a:pPr marL="0" indent="0">
+              <a:buNone/>
+            </a:pPr>
+            <a:r>
+              <a:rPr lang="en-US" sz="1400" dirty="0">
+                <a:latin typeface="Calibri" pitchFamily="34" charset="0"/>
+                <a:ea typeface="Calibri" pitchFamily="34" charset="-122"/>
+                <a:cs typeface="Calibri" pitchFamily="34" charset="-120"/>
+              </a:rPr>
+              <a:t>34,020 records across 25 features generated — ready for ML-based system-level load prediction.</a:t>
+            </a:r>
+            <a:endParaRPr lang="en-US" sz="1400" dirty="0"/>
+          </a:p>
+        </p:txBody>
+      </p:sp>
+      <p:sp>
+        <p:nvSpPr>
+          <p:cNvPr id="9" name="Shape 7"/>
+          <p:cNvSpPr/>
+          <p:nvPr/>
+        </p:nvSpPr>
+        <p:spPr>
+          <a:xfrm>
+            <a:off x="457200" y="2335046"/>
+            <a:ext cx="201168" cy="201168"/>
+          </a:xfrm>
+          <a:prstGeom prst="rect">
+            <a:avLst/>
+          </a:prstGeom>
+          <a:solidFill>
+            <a:srgbClr val="0D7377"/>
+          </a:solidFill>
+          <a:ln w="12700">
+            <a:solidFill>
+              <a:srgbClr val="0D7377"/>
+            </a:solidFill>
+            <a:prstDash val="solid"/>
+          </a:ln>
+        </p:spPr>
+      </p:sp>
+      <p:sp>
+        <p:nvSpPr>
+          <p:cNvPr id="10" name="Text 8"/>
+          <p:cNvSpPr/>
+          <p:nvPr/>
+        </p:nvSpPr>
+        <p:spPr>
+          <a:xfrm>
+            <a:off x="749808" y="2212848"/>
+            <a:ext cx="7955280" cy="512064"/>
+          </a:xfrm>
+          <a:prstGeom prst="rect">
+            <a:avLst/>
+          </a:prstGeom>
+          <a:noFill/>
+          <a:ln/>
+        </p:spPr>
+        <p:txBody>
+          <a:bodyPr wrap="square" lIns="0" tIns="0" rIns="0" bIns="0" rtlCol="0" anchor="ctr"/>
+          <a:lstStyle/>
+          <a:p>
+            <a:pPr marL="0" indent="0">
+              <a:buNone/>
+            </a:pPr>
+            <a:r>
+              <a:rPr lang="en-US" sz="1400" dirty="0">
+                <a:latin typeface="Calibri" pitchFamily="34" charset="0"/>
+                <a:ea typeface="Calibri" pitchFamily="34" charset="-122"/>
+                <a:cs typeface="Calibri" pitchFamily="34" charset="-120"/>
+              </a:rPr>
+              <a:t>ANN (MLP) achieved the highest precision: R²=0.9967, MAE=19.2 kW, Accuracy=95.28%, F1=0.9234.</a:t>
+            </a:r>
+            <a:endParaRPr lang="en-US" sz="1400" dirty="0"/>
+          </a:p>
+        </p:txBody>
+      </p:sp>
+      <p:sp>
+        <p:nvSpPr>
+          <p:cNvPr id="11" name="Shape 9"/>
+          <p:cNvSpPr/>
+          <p:nvPr/>
+        </p:nvSpPr>
+        <p:spPr>
+          <a:xfrm>
+            <a:off x="457200" y="2956838"/>
+            <a:ext cx="201168" cy="201168"/>
+          </a:xfrm>
+          <a:prstGeom prst="rect">
+            <a:avLst/>
+          </a:prstGeom>
+          <a:solidFill>
+            <a:srgbClr val="0D7377"/>
+          </a:solidFill>
+          <a:ln w="12700">
+            <a:solidFill>
+              <a:srgbClr val="0D7377"/>
+            </a:solidFill>
+            <a:prstDash val="solid"/>
+          </a:ln>
+        </p:spPr>
+      </p:sp>
+      <p:sp>
+        <p:nvSpPr>
+          <p:cNvPr id="12" name="Text 10"/>
+          <p:cNvSpPr/>
+          <p:nvPr/>
+        </p:nvSpPr>
+        <p:spPr>
+          <a:xfrm>
+            <a:off x="749808" y="2834640"/>
+            <a:ext cx="7955280" cy="512064"/>
+          </a:xfrm>
+          <a:prstGeom prst="rect">
+            <a:avLst/>
+          </a:prstGeom>
+          <a:noFill/>
+          <a:ln/>
+        </p:spPr>
+        <p:txBody>
+          <a:bodyPr wrap="square" lIns="0" tIns="0" rIns="0" bIns="0" rtlCol="0" anchor="ctr"/>
+          <a:lstStyle/>
+          <a:p>
+            <a:pPr marL="0" indent="0">
+              <a:buNone/>
+            </a:pPr>
+            <a:r>
+              <a:rPr lang="en-US" sz="1400" dirty="0">
+                <a:latin typeface="Calibri" pitchFamily="34" charset="0"/>
+                <a:ea typeface="Calibri" pitchFamily="34" charset="-122"/>
+                <a:cs typeface="Calibri" pitchFamily="34" charset="-120"/>
+              </a:rPr>
+              <a:t>Linear Regression also excelled (R²=0.9946), confirming linear structure in EV charging load demand.</a:t>
+            </a:r>
+            <a:endParaRPr lang="en-US" sz="1400" dirty="0"/>
+          </a:p>
+        </p:txBody>
+      </p:sp>
+      <p:sp>
+        <p:nvSpPr>
+          <p:cNvPr id="13" name="Shape 11"/>
+          <p:cNvSpPr/>
+          <p:nvPr/>
+        </p:nvSpPr>
+        <p:spPr>
+          <a:xfrm>
+            <a:off x="457200" y="3578630"/>
+            <a:ext cx="201168" cy="201168"/>
+          </a:xfrm>
+          <a:prstGeom prst="rect">
+            <a:avLst/>
+          </a:prstGeom>
+          <a:solidFill>
+            <a:srgbClr val="0D7377"/>
+          </a:solidFill>
+          <a:ln w="12700">
+            <a:solidFill>
+              <a:srgbClr val="0D7377"/>
+            </a:solidFill>
+            <a:prstDash val="solid"/>
+          </a:ln>
+        </p:spPr>
+      </p:sp>
+      <p:sp>
+        <p:nvSpPr>
+          <p:cNvPr id="14" name="Text 12"/>
+          <p:cNvSpPr/>
+          <p:nvPr/>
+        </p:nvSpPr>
+        <p:spPr>
+          <a:xfrm>
+            <a:off x="749808" y="3456432"/>
+            <a:ext cx="7955280" cy="512064"/>
+          </a:xfrm>
+          <a:prstGeom prst="rect">
+            <a:avLst/>
+          </a:prstGeom>
+          <a:noFill/>
+          <a:ln/>
+        </p:spPr>
+        <p:txBody>
+          <a:bodyPr wrap="square" lIns="0" tIns="0" rIns="0" bIns="0" rtlCol="0" anchor="ctr"/>
+          <a:lstStyle/>
+          <a:p>
+            <a:pPr marL="0" indent="0">
+              <a:buNone/>
+            </a:pPr>
+            <a:r>
+              <a:rPr lang="en-US" sz="1400" dirty="0">
+                <a:latin typeface="Calibri" pitchFamily="34" charset="0"/>
+                <a:ea typeface="Calibri" pitchFamily="34" charset="-122"/>
+                <a:cs typeface="Calibri" pitchFamily="34" charset="-120"/>
+              </a:rPr>
+              <a:t>SUMO simulation serves as an effective digital twin for generating EV datasets in data-scarce developing regions.</a:t>
+            </a:r>
+            <a:endParaRPr lang="en-US" sz="1400" dirty="0"/>
+          </a:p>
+        </p:txBody>
+      </p:sp>
+      <p:sp>
+        <p:nvSpPr>
+          <p:cNvPr id="15" name="Shape 13"/>
+          <p:cNvSpPr/>
+          <p:nvPr/>
+        </p:nvSpPr>
+        <p:spPr>
+          <a:xfrm>
+            <a:off x="457200" y="4200422"/>
+            <a:ext cx="201168" cy="201168"/>
+          </a:xfrm>
+          <a:prstGeom prst="rect">
+            <a:avLst/>
+          </a:prstGeom>
+          <a:solidFill>
+            <a:srgbClr val="0D7377"/>
+          </a:solidFill>
+          <a:ln w="12700">
+            <a:solidFill>
+              <a:srgbClr val="0D7377"/>
+            </a:solidFill>
+            <a:prstDash val="solid"/>
+          </a:ln>
+        </p:spPr>
+      </p:sp>
+      <p:sp>
+        <p:nvSpPr>
+          <p:cNvPr id="16" name="Text 14"/>
+          <p:cNvSpPr/>
+          <p:nvPr/>
+        </p:nvSpPr>
+        <p:spPr>
+          <a:xfrm>
+            <a:off x="749808" y="4078224"/>
+            <a:ext cx="7955280" cy="512064"/>
+          </a:xfrm>
+          <a:prstGeom prst="rect">
+            <a:avLst/>
+          </a:prstGeom>
+          <a:noFill/>
+          <a:ln/>
+        </p:spPr>
+        <p:txBody>
+          <a:bodyPr wrap="square" lIns="0" tIns="0" rIns="0" bIns="0" rtlCol="0" anchor="ctr"/>
+          <a:lstStyle/>
+          <a:p>
+            <a:pPr marL="0" indent="0">
+              <a:buNone/>
+            </a:pPr>
+            <a:r>
+              <a:rPr lang="en-US" sz="1400" dirty="0">
+                <a:latin typeface="Calibri" pitchFamily="34" charset="0"/>
+                <a:ea typeface="Calibri" pitchFamily="34" charset="-122"/>
+                <a:cs typeface="Calibri" pitchFamily="34" charset="-120"/>
+              </a:rPr>
+              <a:t>The "Monitor–Predict–Control" framework provides a practical path to smart grid integration in cities like Khulna.</a:t>
+            </a:r>
+            <a:endParaRPr lang="en-US" sz="1400" dirty="0"/>
+          </a:p>
+        </p:txBody>
+      </p:sp>
+      <p:sp>
+        <p:nvSpPr>
+          <p:cNvPr id="17" name="Shape 15"/>
+          <p:cNvSpPr/>
+          <p:nvPr/>
+        </p:nvSpPr>
+        <p:spPr>
+          <a:xfrm>
+            <a:off x="0" y="4773168"/>
+            <a:ext cx="9144000" cy="370332"/>
+          </a:xfrm>
+          <a:prstGeom prst="rect">
+            <a:avLst/>
+          </a:prstGeom>
+          <a:solidFill>
+            <a:srgbClr val="0F2447"/>
+          </a:solidFill>
+          <a:ln w="12700">
+            <a:solidFill>
+              <a:srgbClr val="0F2447"/>
+            </a:solidFill>
+            <a:prstDash val="solid"/>
+          </a:ln>
+        </p:spPr>
+      </p:sp>
+    </p:spTree>
+    <p:extLst>
+      <p:ext uri="{BB962C8B-B14F-4D97-AF65-F5344CB8AC3E}">
+        <p14:creationId xmlns:p14="http://schemas.microsoft.com/office/powerpoint/2010/main" val="920982204"/>
+      </p:ext>
+    </p:extLst>
+  </p:cSld>
+  <p:clrMapOvr>
+    <a:masterClrMapping/>
+  </p:clrMapOvr>
+</p:sld>
+</file>
+
+<file path=ppt/slides/slide22.xml><?xml version="1.0" encoding="utf-8"?>
 <p:sld xmlns:a="http://schemas.openxmlformats.org/drawingml/2006/main" xmlns:r="http://schemas.openxmlformats.org/officeDocument/2006/relationships" xmlns:p="http://schemas.openxmlformats.org/presentationml/2006/main">
   <p:cSld name="Slide 17">
     <p:bg>
@@ -25187,8 +26857,8 @@
         </p:nvSpPr>
         <p:spPr>
           <a:xfrm>
-            <a:off x="320040" y="2450592"/>
-            <a:ext cx="4096096" cy="2450592"/>
+            <a:off x="320040" y="2685594"/>
+            <a:ext cx="4096096" cy="2343606"/>
           </a:xfrm>
           <a:prstGeom prst="rect">
             <a:avLst/>
@@ -25226,50 +26896,14 @@
         </p:blipFill>
         <p:spPr>
           <a:xfrm>
-            <a:off x="411480" y="2523744"/>
-            <a:ext cx="3931920" cy="2304288"/>
+            <a:off x="411480" y="2761488"/>
+            <a:ext cx="3931920" cy="2180844"/>
           </a:xfrm>
           <a:prstGeom prst="rect">
             <a:avLst/>
           </a:prstGeom>
         </p:spPr>
       </p:pic>
-      <p:sp>
-        <p:nvSpPr>
-          <p:cNvPr id="28" name="Text 25"/>
-          <p:cNvSpPr/>
-          <p:nvPr/>
-        </p:nvSpPr>
-        <p:spPr>
-          <a:xfrm>
-            <a:off x="320040" y="4898275"/>
-            <a:ext cx="3931920" cy="228600"/>
-          </a:xfrm>
-          <a:prstGeom prst="rect">
-            <a:avLst/>
-          </a:prstGeom>
-          <a:noFill/>
-          <a:ln/>
-        </p:spPr>
-        <p:txBody>
-          <a:bodyPr wrap="square" lIns="0" tIns="0" rIns="0" bIns="0" rtlCol="0" anchor="ctr"/>
-          <a:lstStyle/>
-          <a:p>
-            <a:pPr marL="0" indent="0" algn="ctr">
-              <a:buNone/>
-            </a:pPr>
-            <a:r>
-              <a:rPr lang="en-US" sz="950" dirty="0">
-                <a:solidFill>
-                  <a:srgbClr val="64748B"/>
-                </a:solidFill>
-              </a:rPr>
-              <a:t>SUMO netedit – Custom Microscopic Road Network</a:t>
-            </a:r>
-            <a:endParaRPr lang="en-US" sz="950" dirty="0"/>
-          </a:p>
-        </p:txBody>
-      </p:sp>
       <p:sp>
         <p:nvSpPr>
           <p:cNvPr id="31" name="Shape 24">
@@ -25284,8 +26918,8 @@
         </p:nvSpPr>
         <p:spPr>
           <a:xfrm>
-            <a:off x="4571584" y="2456272"/>
-            <a:ext cx="4196265" cy="2450592"/>
+            <a:off x="4571584" y="2685594"/>
+            <a:ext cx="4196265" cy="2343606"/>
           </a:xfrm>
           <a:prstGeom prst="rect">
             <a:avLst/>
@@ -25323,14 +26957,14 @@
           <p:nvPr>
             <p:extLst>
               <p:ext uri="{D42A27DB-BD31-4B8C-83A1-F6EECF244321}">
-                <p14:modId xmlns:p14="http://schemas.microsoft.com/office/powerpoint/2010/main" val="1002821963"/>
+                <p14:modId xmlns:p14="http://schemas.microsoft.com/office/powerpoint/2010/main" val="2473144491"/>
               </p:ext>
             </p:extLst>
           </p:nvPr>
         </p:nvGraphicFramePr>
         <p:xfrm>
-          <a:off x="4663024" y="2563230"/>
-          <a:ext cx="3982212" cy="2371580"/>
+          <a:off x="4663024" y="2807208"/>
+          <a:ext cx="3982212" cy="2143735"/>
         </p:xfrm>
         <a:graphic>
           <a:graphicData uri="http://schemas.openxmlformats.org/drawingml/2006/table">
@@ -25359,7 +26993,7 @@
                   </a:extLst>
                 </a:gridCol>
               </a:tblGrid>
-              <a:tr h="184937">
+              <a:tr h="222214">
                 <a:tc>
                   <a:txBody>
                     <a:bodyPr/>
@@ -25447,7 +27081,7 @@
                   </a:ext>
                 </a:extLst>
               </a:tr>
-              <a:tr h="184937">
+              <a:tr h="207867">
                 <a:tc>
                   <a:txBody>
                     <a:bodyPr/>
@@ -25535,7 +27169,7 @@
                   </a:ext>
                 </a:extLst>
               </a:tr>
-              <a:tr h="184937">
+              <a:tr h="207867">
                 <a:tc>
                   <a:txBody>
                     <a:bodyPr/>
@@ -25569,7 +27203,7 @@
                     <a:lstStyle/>
                     <a:p>
                       <a:r>
-                        <a:rPr lang="en-US" sz="900"/>
+                        <a:rPr lang="en-US" sz="900" dirty="0"/>
                         <a:t>route2_forward</a:t>
                       </a:r>
                     </a:p>
@@ -25623,7 +27257,7 @@
                   </a:ext>
                 </a:extLst>
               </a:tr>
-              <a:tr h="294620">
+              <a:tr h="249051">
                 <a:tc>
                   <a:txBody>
                     <a:bodyPr/>
@@ -25711,7 +27345,7 @@
                   </a:ext>
                 </a:extLst>
               </a:tr>
-              <a:tr h="184937">
+              <a:tr h="207867">
                 <a:tc>
                   <a:txBody>
                     <a:bodyPr/>
@@ -25799,7 +27433,7 @@
                   </a:ext>
                 </a:extLst>
               </a:tr>
-              <a:tr h="294620">
+              <a:tr h="249051">
                 <a:tc>
                   <a:txBody>
                     <a:bodyPr/>
@@ -25887,7 +27521,7 @@
                   </a:ext>
                 </a:extLst>
               </a:tr>
-              <a:tr h="294620">
+              <a:tr h="249051">
                 <a:tc>
                   <a:txBody>
                     <a:bodyPr/>
@@ -25921,7 +27555,7 @@
                     <a:lstStyle/>
                     <a:p>
                       <a:r>
-                        <a:rPr lang="en-US" sz="900"/>
+                        <a:rPr lang="en-US" sz="900" dirty="0"/>
                         <a:t>route2_reverse</a:t>
                       </a:r>
                     </a:p>
@@ -25975,7 +27609,7 @@
                   </a:ext>
                 </a:extLst>
               </a:tr>
-              <a:tr h="294620">
+              <a:tr h="249051">
                 <a:tc>
                   <a:txBody>
                     <a:bodyPr/>
@@ -26009,7 +27643,7 @@
                     <a:lstStyle/>
                     <a:p>
                       <a:r>
-                        <a:rPr lang="en-US" sz="900"/>
+                        <a:rPr lang="en-US" sz="900" dirty="0"/>
                         <a:t>route3_reverse</a:t>
                       </a:r>
                     </a:p>
@@ -26063,7 +27697,7 @@
                   </a:ext>
                 </a:extLst>
               </a:tr>
-              <a:tr h="294620">
+              <a:tr h="249051">
                 <a:tc>
                   <a:txBody>
                     <a:bodyPr/>
@@ -26097,7 +27731,7 @@
                     <a:lstStyle/>
                     <a:p>
                       <a:r>
-                        <a:rPr lang="en-US" sz="900"/>
+                        <a:rPr lang="en-US" sz="900" dirty="0"/>
                         <a:t>route4_reverse</a:t>
                       </a:r>
                     </a:p>
@@ -26155,6 +27789,117 @@
           </a:graphicData>
         </a:graphic>
       </p:graphicFrame>
+      <p:sp>
+        <p:nvSpPr>
+          <p:cNvPr id="29" name="Text 26">
+            <a:extLst>
+              <a:ext uri="{FF2B5EF4-FFF2-40B4-BE49-F238E27FC236}">
+                <a16:creationId xmlns:a16="http://schemas.microsoft.com/office/drawing/2014/main" id="{2D9F870D-4064-CA48-B5AC-D08D8232FE1A}"/>
+              </a:ext>
+            </a:extLst>
+          </p:cNvPr>
+          <p:cNvSpPr/>
+          <p:nvPr/>
+        </p:nvSpPr>
+        <p:spPr>
+          <a:xfrm>
+            <a:off x="4604837" y="2331722"/>
+            <a:ext cx="4219123" cy="292608"/>
+          </a:xfrm>
+          <a:prstGeom prst="rect">
+            <a:avLst/>
+          </a:prstGeom>
+          <a:noFill/>
+          <a:ln/>
+        </p:spPr>
+        <p:txBody>
+          <a:bodyPr wrap="square" lIns="0" tIns="0" rIns="0" bIns="0" rtlCol="0" anchor="ctr"/>
+          <a:lstStyle/>
+          <a:p>
+            <a:pPr marL="0" indent="0">
+              <a:buNone/>
+            </a:pPr>
+            <a:r>
+              <a:rPr lang="en-US" sz="1300" b="1" dirty="0">
+                <a:solidFill>
+                  <a:srgbClr val="1B3A6B"/>
+                </a:solidFill>
+                <a:latin typeface="Calibri" pitchFamily="34" charset="0"/>
+                <a:ea typeface="Calibri" pitchFamily="34" charset="-122"/>
+                <a:cs typeface="Calibri" pitchFamily="34" charset="-120"/>
+              </a:rPr>
+              <a:t>Route Definitions and Edge Sequences</a:t>
+            </a:r>
+            <a:endParaRPr lang="en-US" sz="1300" dirty="0"/>
+          </a:p>
+        </p:txBody>
+      </p:sp>
+      <p:sp>
+        <p:nvSpPr>
+          <p:cNvPr id="30" name="Text 26">
+            <a:extLst>
+              <a:ext uri="{FF2B5EF4-FFF2-40B4-BE49-F238E27FC236}">
+                <a16:creationId xmlns:a16="http://schemas.microsoft.com/office/drawing/2014/main" id="{2485AC8A-5099-9FD8-62CC-BBF59D435A2B}"/>
+              </a:ext>
+            </a:extLst>
+          </p:cNvPr>
+          <p:cNvSpPr/>
+          <p:nvPr/>
+        </p:nvSpPr>
+        <p:spPr>
+          <a:xfrm>
+            <a:off x="361876" y="2328257"/>
+            <a:ext cx="4219123" cy="292608"/>
+          </a:xfrm>
+          <a:prstGeom prst="rect">
+            <a:avLst/>
+          </a:prstGeom>
+          <a:noFill/>
+          <a:ln/>
+        </p:spPr>
+        <p:txBody>
+          <a:bodyPr wrap="square" lIns="0" tIns="0" rIns="0" bIns="0" rtlCol="0" anchor="ctr"/>
+          <a:lstStyle/>
+          <a:p>
+            <a:pPr marL="0" indent="0">
+              <a:buNone/>
+            </a:pPr>
+            <a:r>
+              <a:rPr lang="en-US" sz="1300" b="1" dirty="0">
+                <a:solidFill>
+                  <a:srgbClr val="1B3A6B"/>
+                </a:solidFill>
+                <a:latin typeface="Calibri" pitchFamily="34" charset="0"/>
+                <a:ea typeface="Calibri" pitchFamily="34" charset="-122"/>
+                <a:cs typeface="Calibri" pitchFamily="34" charset="-120"/>
+              </a:rPr>
+              <a:t>SUMO </a:t>
+            </a:r>
+            <a:r>
+              <a:rPr lang="en-US" sz="1300" b="1" dirty="0" err="1">
+                <a:solidFill>
+                  <a:srgbClr val="1B3A6B"/>
+                </a:solidFill>
+                <a:latin typeface="Calibri" pitchFamily="34" charset="0"/>
+                <a:ea typeface="Calibri" pitchFamily="34" charset="-122"/>
+                <a:cs typeface="Calibri" pitchFamily="34" charset="-120"/>
+              </a:rPr>
+              <a:t>netedit</a:t>
+            </a:r>
+            <a:r>
+              <a:rPr lang="en-US" sz="1300" b="1" dirty="0">
+                <a:solidFill>
+                  <a:srgbClr val="1B3A6B"/>
+                </a:solidFill>
+                <a:latin typeface="Calibri" pitchFamily="34" charset="0"/>
+                <a:ea typeface="Calibri" pitchFamily="34" charset="-122"/>
+                <a:cs typeface="Calibri" pitchFamily="34" charset="-120"/>
+              </a:rPr>
+              <a:t> – Custom Microscopic Road Network</a:t>
+            </a:r>
+          </a:p>
+        </p:txBody>
+      </p:sp>
     </p:spTree>
     <p:extLst>
       <p:ext uri="{BB962C8B-B14F-4D97-AF65-F5344CB8AC3E}">

--- a/Thesis-Defense/defense/200112_Defense_Presentation.pptx
+++ b/Thesis-Defense/defense/200112_Defense_Presentation.pptx
@@ -5,7 +5,7 @@
     <p:sldMasterId id="2147483648" r:id="rId1"/>
   </p:sldMasterIdLst>
   <p:notesMasterIdLst>
-    <p:notesMasterId r:id="rId24"/>
+    <p:notesMasterId r:id="rId29"/>
   </p:notesMasterIdLst>
   <p:sldIdLst>
     <p:sldId id="273" r:id="rId2"/>
@@ -23,13 +23,18 @@
     <p:sldId id="279" r:id="rId14"/>
     <p:sldId id="264" r:id="rId15"/>
     <p:sldId id="265" r:id="rId16"/>
-    <p:sldId id="266" r:id="rId17"/>
-    <p:sldId id="267" r:id="rId18"/>
-    <p:sldId id="268" r:id="rId19"/>
-    <p:sldId id="269" r:id="rId20"/>
-    <p:sldId id="270" r:id="rId21"/>
-    <p:sldId id="280" r:id="rId22"/>
-    <p:sldId id="272" r:id="rId23"/>
+    <p:sldId id="281" r:id="rId17"/>
+    <p:sldId id="283" r:id="rId18"/>
+    <p:sldId id="282" r:id="rId19"/>
+    <p:sldId id="266" r:id="rId20"/>
+    <p:sldId id="284" r:id="rId21"/>
+    <p:sldId id="285" r:id="rId22"/>
+    <p:sldId id="267" r:id="rId23"/>
+    <p:sldId id="268" r:id="rId24"/>
+    <p:sldId id="269" r:id="rId25"/>
+    <p:sldId id="270" r:id="rId26"/>
+    <p:sldId id="280" r:id="rId27"/>
+    <p:sldId id="272" r:id="rId28"/>
   </p:sldIdLst>
   <p:sldSz cx="9144000" cy="5143500" type="screen16x9"/>
   <p:notesSz cx="5143500" cy="9144000"/>
@@ -1225,7 +1230,7 @@
           <a:p>
             <a:fld id="{F7021451-1387-4CA6-816F-3879F97B5CBC}" type="slidenum">
               <a:rPr lang="en-US"/>
-              <a:t>16</a:t>
+              <a:t>19</a:t>
             </a:fld>
             <a:endParaRPr lang="en-US"/>
           </a:p>
@@ -1309,7 +1314,7 @@
           <a:p>
             <a:fld id="{F7021451-1387-4CA6-816F-3879F97B5CBC}" type="slidenum">
               <a:rPr lang="en-US"/>
-              <a:t>17</a:t>
+              <a:t>20</a:t>
             </a:fld>
             <a:endParaRPr lang="en-US"/>
           </a:p>
@@ -1393,7 +1398,7 @@
           <a:p>
             <a:fld id="{F7021451-1387-4CA6-816F-3879F97B5CBC}" type="slidenum">
               <a:rPr lang="en-US"/>
-              <a:t>18</a:t>
+              <a:t>22</a:t>
             </a:fld>
             <a:endParaRPr lang="en-US"/>
           </a:p>
@@ -1477,7 +1482,7 @@
           <a:p>
             <a:fld id="{F7021451-1387-4CA6-816F-3879F97B5CBC}" type="slidenum">
               <a:rPr lang="en-US"/>
-              <a:t>19</a:t>
+              <a:t>23</a:t>
             </a:fld>
             <a:endParaRPr lang="en-US"/>
           </a:p>
@@ -1645,7 +1650,7 @@
           <a:p>
             <a:fld id="{F7021451-1387-4CA6-816F-3879F97B5CBC}" type="slidenum">
               <a:rPr lang="en-US"/>
-              <a:t>20</a:t>
+              <a:t>24</a:t>
             </a:fld>
             <a:endParaRPr lang="en-US"/>
           </a:p>
@@ -1729,7 +1734,7 @@
           <a:p>
             <a:fld id="{F7021451-1387-4CA6-816F-3879F97B5CBC}" type="slidenum">
               <a:rPr lang="en-US"/>
-              <a:t>21</a:t>
+              <a:t>25</a:t>
             </a:fld>
             <a:endParaRPr lang="en-US"/>
           </a:p>
@@ -1738,7 +1743,7 @@
     </p:spTree>
     <p:extLst>
       <p:ext uri="{BB962C8B-B14F-4D97-AF65-F5344CB8AC3E}">
-        <p14:creationId xmlns:p14="http://schemas.microsoft.com/office/powerpoint/2010/main" val="3079548033"/>
+        <p14:creationId xmlns:p14="http://schemas.microsoft.com/office/powerpoint/2010/main" val="1024086991"/>
       </p:ext>
     </p:extLst>
   </p:cSld>
@@ -1813,7 +1818,91 @@
           <a:p>
             <a:fld id="{F7021451-1387-4CA6-816F-3879F97B5CBC}" type="slidenum">
               <a:rPr lang="en-US"/>
-              <a:t>22</a:t>
+              <a:t>26</a:t>
+            </a:fld>
+            <a:endParaRPr lang="en-US"/>
+          </a:p>
+        </p:txBody>
+      </p:sp>
+    </p:spTree>
+    <p:extLst>
+      <p:ext uri="{BB962C8B-B14F-4D97-AF65-F5344CB8AC3E}">
+        <p14:creationId xmlns:p14="http://schemas.microsoft.com/office/powerpoint/2010/main" val="3079548033"/>
+      </p:ext>
+    </p:extLst>
+  </p:cSld>
+  <p:clrMapOvr>
+    <a:masterClrMapping/>
+  </p:clrMapOvr>
+</p:notes>
+</file>
+
+<file path=ppt/notesSlides/notesSlide23.xml><?xml version="1.0" encoding="utf-8"?>
+<p:notes xmlns:a="http://schemas.openxmlformats.org/drawingml/2006/main" xmlns:r="http://schemas.openxmlformats.org/officeDocument/2006/relationships" xmlns:p="http://schemas.openxmlformats.org/presentationml/2006/main">
+  <p:cSld>
+    <p:spTree>
+      <p:nvGrpSpPr>
+        <p:cNvPr id="1" name=""/>
+        <p:cNvGrpSpPr/>
+        <p:nvPr/>
+      </p:nvGrpSpPr>
+      <p:grpSpPr>
+        <a:xfrm>
+          <a:off x="0" y="0"/>
+          <a:ext cx="0" cy="0"/>
+          <a:chOff x="0" y="0"/>
+          <a:chExt cx="0" cy="0"/>
+        </a:xfrm>
+      </p:grpSpPr>
+      <p:sp>
+        <p:nvSpPr>
+          <p:cNvPr id="2" name="Slide Image Placeholder 1"/>
+          <p:cNvSpPr>
+            <a:spLocks noGrp="1" noRot="1" noChangeAspect="1"/>
+          </p:cNvSpPr>
+          <p:nvPr>
+            <p:ph type="sldImg"/>
+          </p:nvPr>
+        </p:nvSpPr>
+        <p:spPr/>
+      </p:sp>
+      <p:sp>
+        <p:nvSpPr>
+          <p:cNvPr id="3" name="Notes Placeholder 2"/>
+          <p:cNvSpPr>
+            <a:spLocks noGrp="1"/>
+          </p:cNvSpPr>
+          <p:nvPr>
+            <p:ph type="body" idx="1"/>
+          </p:nvPr>
+        </p:nvSpPr>
+        <p:spPr/>
+        <p:txBody>
+          <a:bodyPr/>
+          <a:lstStyle/>
+          <a:p>
+            <a:endParaRPr lang="en-US" dirty="0"/>
+          </a:p>
+        </p:txBody>
+      </p:sp>
+      <p:sp>
+        <p:nvSpPr>
+          <p:cNvPr id="4" name="Slide Number Placeholder 3"/>
+          <p:cNvSpPr>
+            <a:spLocks noGrp="1"/>
+          </p:cNvSpPr>
+          <p:nvPr>
+            <p:ph type="sldNum" sz="quarter" idx="10"/>
+          </p:nvPr>
+        </p:nvSpPr>
+        <p:spPr/>
+        <p:txBody>
+          <a:bodyPr/>
+          <a:lstStyle/>
+          <a:p>
+            <a:fld id="{F7021451-1387-4CA6-816F-3879F97B5CBC}" type="slidenum">
+              <a:rPr lang="en-US"/>
+              <a:t>27</a:t>
             </a:fld>
             <a:endParaRPr lang="en-US"/>
           </a:p>
@@ -10497,6 +10586,1616 @@
 
 <file path=ppt/slides/slide16.xml><?xml version="1.0" encoding="utf-8"?>
 <p:sld xmlns:a="http://schemas.openxmlformats.org/drawingml/2006/main" xmlns:r="http://schemas.openxmlformats.org/officeDocument/2006/relationships" xmlns:p="http://schemas.openxmlformats.org/presentationml/2006/main">
+  <p:cSld>
+    <p:spTree>
+      <p:nvGrpSpPr>
+        <p:cNvPr id="1" name=""/>
+        <p:cNvGrpSpPr/>
+        <p:nvPr/>
+      </p:nvGrpSpPr>
+      <p:grpSpPr>
+        <a:xfrm>
+          <a:off x="0" y="0"/>
+          <a:ext cx="0" cy="0"/>
+          <a:chOff x="0" y="0"/>
+          <a:chExt cx="0" cy="0"/>
+        </a:xfrm>
+      </p:grpSpPr>
+      <p:sp>
+        <p:nvSpPr>
+          <p:cNvPr id="2" name="Bar"/>
+          <p:cNvSpPr/>
+          <p:nvPr/>
+        </p:nvSpPr>
+        <p:spPr>
+          <a:xfrm>
+            <a:off x="0" y="0"/>
+            <a:ext cx="164592" cy="5143500"/>
+          </a:xfrm>
+          <a:prstGeom prst="rect">
+            <a:avLst/>
+          </a:prstGeom>
+          <a:solidFill>
+            <a:srgbClr val="1B3A6B"/>
+          </a:solidFill>
+          <a:ln w="12700">
+            <a:solidFill>
+              <a:srgbClr val="1B3A6B"/>
+            </a:solidFill>
+            <a:prstDash val="solid"/>
+          </a:ln>
+        </p:spPr>
+      </p:sp>
+      <p:sp>
+        <p:nvSpPr>
+          <p:cNvPr id="3" name="Title"/>
+          <p:cNvSpPr/>
+          <p:nvPr/>
+        </p:nvSpPr>
+        <p:spPr>
+          <a:xfrm>
+            <a:off x="320040" y="201168"/>
+            <a:ext cx="8503920" cy="493776"/>
+          </a:xfrm>
+          <a:prstGeom prst="rect">
+            <a:avLst/>
+          </a:prstGeom>
+          <a:noFill/>
+          <a:ln/>
+        </p:spPr>
+        <p:txBody>
+          <a:bodyPr wrap="square" lIns="45720" tIns="36576" rIns="45720" bIns="36576" rtlCol="0" anchor="ctr"/>
+          <a:lstStyle/>
+          <a:p>
+            <a:pPr marL="0" indent="0" algn="ctr">
+              <a:buNone/>
+            </a:pPr>
+            <a:r>
+              <a:rPr lang="en-US" sz="2600" b="1" dirty="0">
+                <a:solidFill>
+                  <a:srgbClr val="1B3A6B"/>
+                </a:solidFill>
+              </a:rPr>
+              <a:t>Actual vs. Predicted — Classical Models (5-Fold CV)</a:t>
+            </a:r>
+          </a:p>
+        </p:txBody>
+      </p:sp>
+      <p:sp>
+        <p:nvSpPr>
+          <p:cNvPr id="4" name="Div"/>
+          <p:cNvSpPr/>
+          <p:nvPr/>
+        </p:nvSpPr>
+        <p:spPr>
+          <a:xfrm>
+            <a:off x="320040" y="960120"/>
+            <a:ext cx="8503920" cy="36576"/>
+          </a:xfrm>
+          <a:prstGeom prst="rect">
+            <a:avLst/>
+          </a:prstGeom>
+          <a:solidFill>
+            <a:srgbClr val="0D7377"/>
+          </a:solidFill>
+          <a:ln w="12700">
+            <a:solidFill>
+              <a:srgbClr val="0D7377"/>
+            </a:solidFill>
+            <a:prstDash val="solid"/>
+          </a:ln>
+        </p:spPr>
+      </p:sp>
+      <p:sp>
+        <p:nvSpPr>
+          <p:cNvPr id="10" name="Card0"/>
+          <p:cNvSpPr/>
+          <p:nvPr/>
+        </p:nvSpPr>
+        <p:spPr>
+          <a:xfrm>
+            <a:off x="260000" y="1076576"/>
+            <a:ext cx="4200000" cy="3865756"/>
+          </a:xfrm>
+          <a:prstGeom prst="rect">
+            <a:avLst/>
+          </a:prstGeom>
+          <a:solidFill>
+            <a:srgbClr val="FFFFFF"/>
+          </a:solidFill>
+          <a:ln w="12700">
+            <a:solidFill>
+              <a:srgbClr val="CBD5E1"/>
+            </a:solidFill>
+            <a:prstDash val="solid"/>
+          </a:ln>
+          <a:effectLst>
+            <a:outerShdw blurRad="76200" dist="25400" dir="8100000" algn="bl" rotWithShape="0">
+              <a:srgbClr val="000000">
+                <a:alpha val="8000"/>
+              </a:srgbClr>
+            </a:outerShdw>
+          </a:effectLst>
+        </p:spPr>
+      </p:sp>
+      <p:pic>
+        <p:nvPicPr>
+          <p:cNvPr id="11" name="Img0" descr="scatter_linear_regression.png"/>
+          <p:cNvPicPr>
+            <a:picLocks noChangeAspect="1"/>
+          </p:cNvPicPr>
+          <p:nvPr/>
+        </p:nvPicPr>
+        <p:blipFill>
+          <a:blip r:embed="rId2"/>
+          <a:stretch>
+            <a:fillRect/>
+          </a:stretch>
+        </p:blipFill>
+        <p:spPr>
+          <a:xfrm>
+            <a:off x="310000" y="1143909"/>
+            <a:ext cx="4100000" cy="2819837"/>
+          </a:xfrm>
+          <a:prstGeom prst="rect">
+            <a:avLst/>
+          </a:prstGeom>
+        </p:spPr>
+      </p:pic>
+      <p:sp>
+        <p:nvSpPr>
+          <p:cNvPr id="12" name="Name0"/>
+          <p:cNvSpPr/>
+          <p:nvPr/>
+        </p:nvSpPr>
+        <p:spPr>
+          <a:xfrm>
+            <a:off x="310000" y="3915117"/>
+            <a:ext cx="4100000" cy="210000"/>
+          </a:xfrm>
+          <a:prstGeom prst="rect">
+            <a:avLst/>
+          </a:prstGeom>
+          <a:noFill/>
+          <a:ln/>
+        </p:spPr>
+        <p:txBody>
+          <a:bodyPr wrap="square" lIns="45720" tIns="36576" rIns="45720" bIns="36576" rtlCol="0" anchor="ctr"/>
+          <a:lstStyle/>
+          <a:p>
+            <a:pPr algn="ctr"/>
+            <a:r>
+              <a:rPr lang="en-US" sz="900" b="1" dirty="0">
+                <a:solidFill>
+                  <a:srgbClr val="1E293B"/>
+                </a:solidFill>
+              </a:rPr>
+              <a:t>Linear Regression</a:t>
+            </a:r>
+            <a:endParaRPr lang="en-US" sz="800" b="1" dirty="0">
+              <a:solidFill>
+                <a:srgbClr val="0D7377"/>
+              </a:solidFill>
+            </a:endParaRPr>
+          </a:p>
+        </p:txBody>
+      </p:sp>
+      <p:sp>
+        <p:nvSpPr>
+          <p:cNvPr id="14" name="Det0"/>
+          <p:cNvSpPr/>
+          <p:nvPr/>
+        </p:nvSpPr>
+        <p:spPr>
+          <a:xfrm>
+            <a:off x="347296" y="4329141"/>
+            <a:ext cx="4100000" cy="533803"/>
+          </a:xfrm>
+          <a:prstGeom prst="rect">
+            <a:avLst/>
+          </a:prstGeom>
+          <a:noFill/>
+          <a:ln/>
+        </p:spPr>
+        <p:txBody>
+          <a:bodyPr wrap="square" lIns="45720" tIns="36576" rIns="45720" bIns="36576" rtlCol="0" anchor="t"/>
+          <a:lstStyle/>
+          <a:p>
+            <a:pPr marL="0" indent="0" algn="l">
+              <a:buNone/>
+            </a:pPr>
+            <a:r>
+              <a:rPr lang="en-US" sz="1000" b="0" dirty="0"/>
+              <a:t>• Points hug y=x tightly across full 0–1340 kW range.</a:t>
+            </a:r>
+          </a:p>
+          <a:p>
+            <a:pPr marL="0" indent="0" algn="l">
+              <a:buNone/>
+            </a:pPr>
+            <a:r>
+              <a:rPr lang="en-US" sz="1000" b="0" dirty="0"/>
+              <a:t>• Ridge regularization (α=100) prevents overfit.</a:t>
+            </a:r>
+          </a:p>
+          <a:p>
+            <a:pPr marL="0" indent="0" algn="l">
+              <a:buNone/>
+            </a:pPr>
+            <a:r>
+              <a:rPr lang="en-US" sz="1000" b="0" dirty="0"/>
+              <a:t>• Confirms strong linear structure in charging load data.</a:t>
+            </a:r>
+          </a:p>
+        </p:txBody>
+      </p:sp>
+      <p:sp>
+        <p:nvSpPr>
+          <p:cNvPr id="15" name="Card1"/>
+          <p:cNvSpPr/>
+          <p:nvPr/>
+        </p:nvSpPr>
+        <p:spPr>
+          <a:xfrm>
+            <a:off x="4580000" y="1076576"/>
+            <a:ext cx="4200000" cy="3865756"/>
+          </a:xfrm>
+          <a:prstGeom prst="rect">
+            <a:avLst/>
+          </a:prstGeom>
+          <a:solidFill>
+            <a:srgbClr val="FFFFFF"/>
+          </a:solidFill>
+          <a:ln w="12700">
+            <a:solidFill>
+              <a:srgbClr val="CBD5E1"/>
+            </a:solidFill>
+            <a:prstDash val="solid"/>
+          </a:ln>
+          <a:effectLst>
+            <a:outerShdw blurRad="76200" dist="25400" dir="8100000" algn="bl" rotWithShape="0">
+              <a:srgbClr val="000000">
+                <a:alpha val="8000"/>
+              </a:srgbClr>
+            </a:outerShdw>
+          </a:effectLst>
+        </p:spPr>
+      </p:sp>
+      <p:pic>
+        <p:nvPicPr>
+          <p:cNvPr id="16" name="Img1" descr="scatter_decision_tree.png"/>
+          <p:cNvPicPr>
+            <a:picLocks noChangeAspect="1"/>
+          </p:cNvPicPr>
+          <p:nvPr/>
+        </p:nvPicPr>
+        <p:blipFill>
+          <a:blip r:embed="rId3"/>
+          <a:stretch>
+            <a:fillRect/>
+          </a:stretch>
+        </p:blipFill>
+        <p:spPr>
+          <a:xfrm>
+            <a:off x="4630000" y="1143910"/>
+            <a:ext cx="4100000" cy="2819836"/>
+          </a:xfrm>
+          <a:prstGeom prst="rect">
+            <a:avLst/>
+          </a:prstGeom>
+        </p:spPr>
+      </p:pic>
+      <p:sp>
+        <p:nvSpPr>
+          <p:cNvPr id="17" name="Name1"/>
+          <p:cNvSpPr/>
+          <p:nvPr/>
+        </p:nvSpPr>
+        <p:spPr>
+          <a:xfrm>
+            <a:off x="4630000" y="3915117"/>
+            <a:ext cx="4100000" cy="210000"/>
+          </a:xfrm>
+          <a:prstGeom prst="rect">
+            <a:avLst/>
+          </a:prstGeom>
+          <a:noFill/>
+          <a:ln/>
+        </p:spPr>
+        <p:txBody>
+          <a:bodyPr wrap="square" lIns="45720" tIns="36576" rIns="45720" bIns="36576" rtlCol="0" anchor="ctr"/>
+          <a:lstStyle/>
+          <a:p>
+            <a:pPr algn="ctr"/>
+            <a:r>
+              <a:rPr lang="en-US" sz="900" b="1" dirty="0">
+                <a:solidFill>
+                  <a:srgbClr val="1E293B"/>
+                </a:solidFill>
+              </a:rPr>
+              <a:t>Decision Tree</a:t>
+            </a:r>
+            <a:endParaRPr lang="en-US" sz="800" b="1" dirty="0">
+              <a:solidFill>
+                <a:srgbClr val="0D7377"/>
+              </a:solidFill>
+            </a:endParaRPr>
+          </a:p>
+        </p:txBody>
+      </p:sp>
+      <p:sp>
+        <p:nvSpPr>
+          <p:cNvPr id="19" name="Det1"/>
+          <p:cNvSpPr/>
+          <p:nvPr/>
+        </p:nvSpPr>
+        <p:spPr>
+          <a:xfrm>
+            <a:off x="4696704" y="4331641"/>
+            <a:ext cx="4100000" cy="533803"/>
+          </a:xfrm>
+          <a:prstGeom prst="rect">
+            <a:avLst/>
+          </a:prstGeom>
+          <a:noFill/>
+          <a:ln/>
+        </p:spPr>
+        <p:txBody>
+          <a:bodyPr wrap="square" lIns="45720" tIns="36576" rIns="45720" bIns="36576" rtlCol="0" anchor="t"/>
+          <a:lstStyle/>
+          <a:p>
+            <a:pPr marL="0" indent="0" algn="l">
+              <a:buNone/>
+            </a:pPr>
+            <a:r>
+              <a:rPr lang="en-US" sz="1000" b="0" dirty="0"/>
+              <a:t>• Stepped horizontal bands — signature of max_depth=3 leaf nodes.</a:t>
+            </a:r>
+          </a:p>
+          <a:p>
+            <a:pPr marL="0" indent="0" algn="l">
+              <a:buNone/>
+            </a:pPr>
+            <a:r>
+              <a:rPr lang="en-US" sz="1000" b="0" dirty="0"/>
+              <a:t>• High R² but limited prediction granularity.</a:t>
+            </a:r>
+          </a:p>
+          <a:p>
+            <a:pPr marL="0" indent="0" algn="l">
+              <a:buNone/>
+            </a:pPr>
+            <a:r>
+              <a:rPr lang="en-US" sz="1000" b="0" dirty="0"/>
+              <a:t>• Weakest scatter density among classical models.</a:t>
+            </a:r>
+          </a:p>
+        </p:txBody>
+      </p:sp>
+      <p:sp>
+        <p:nvSpPr>
+          <p:cNvPr id="7" name="Name0">
+            <a:extLst>
+              <a:ext uri="{FF2B5EF4-FFF2-40B4-BE49-F238E27FC236}">
+                <a16:creationId xmlns:a16="http://schemas.microsoft.com/office/drawing/2014/main" id="{3FDDE3C9-C5CA-3867-2971-D2B03A40767E}"/>
+              </a:ext>
+            </a:extLst>
+          </p:cNvPr>
+          <p:cNvSpPr/>
+          <p:nvPr/>
+        </p:nvSpPr>
+        <p:spPr>
+          <a:xfrm>
+            <a:off x="306535" y="4067517"/>
+            <a:ext cx="4100000" cy="210000"/>
+          </a:xfrm>
+          <a:prstGeom prst="rect">
+            <a:avLst/>
+          </a:prstGeom>
+          <a:noFill/>
+          <a:ln/>
+        </p:spPr>
+        <p:txBody>
+          <a:bodyPr wrap="square" lIns="45720" tIns="36576" rIns="45720" bIns="36576" rtlCol="0" anchor="ctr"/>
+          <a:lstStyle/>
+          <a:p>
+            <a:pPr algn="ctr"/>
+            <a:r>
+              <a:rPr lang="en-US" sz="800" b="1" dirty="0">
+                <a:solidFill>
+                  <a:srgbClr val="0D7377"/>
+                </a:solidFill>
+              </a:rPr>
+              <a:t>R²=0.9946 | MAE=25.70 kW | RMSE=32.69 kW | Acc=94.53%</a:t>
+            </a:r>
+          </a:p>
+        </p:txBody>
+      </p:sp>
+      <p:sp>
+        <p:nvSpPr>
+          <p:cNvPr id="8" name="Name1">
+            <a:extLst>
+              <a:ext uri="{FF2B5EF4-FFF2-40B4-BE49-F238E27FC236}">
+                <a16:creationId xmlns:a16="http://schemas.microsoft.com/office/drawing/2014/main" id="{896A6D44-AE34-158E-B7F9-FF84AE70E2EF}"/>
+              </a:ext>
+            </a:extLst>
+          </p:cNvPr>
+          <p:cNvSpPr/>
+          <p:nvPr/>
+        </p:nvSpPr>
+        <p:spPr>
+          <a:xfrm>
+            <a:off x="4626535" y="4067517"/>
+            <a:ext cx="4100000" cy="210000"/>
+          </a:xfrm>
+          <a:prstGeom prst="rect">
+            <a:avLst/>
+          </a:prstGeom>
+          <a:noFill/>
+          <a:ln/>
+        </p:spPr>
+        <p:txBody>
+          <a:bodyPr wrap="square" lIns="45720" tIns="36576" rIns="45720" bIns="36576" rtlCol="0" anchor="ctr"/>
+          <a:lstStyle/>
+          <a:p>
+            <a:pPr algn="ctr"/>
+            <a:r>
+              <a:rPr lang="en-US" sz="800" b="1" dirty="0">
+                <a:solidFill>
+                  <a:srgbClr val="0D7377"/>
+                </a:solidFill>
+              </a:rPr>
+              <a:t>R²=0.9904 | MAE=33.53 kW | RMSE=43.55 kW | Acc=92.61%</a:t>
+            </a:r>
+          </a:p>
+        </p:txBody>
+      </p:sp>
+    </p:spTree>
+  </p:cSld>
+  <p:clrMapOvr>
+    <a:masterClrMapping/>
+  </p:clrMapOvr>
+</p:sld>
+</file>
+
+<file path=ppt/slides/slide17.xml><?xml version="1.0" encoding="utf-8"?>
+<p:sld xmlns:a="http://schemas.openxmlformats.org/drawingml/2006/main" xmlns:r="http://schemas.openxmlformats.org/officeDocument/2006/relationships" xmlns:p="http://schemas.openxmlformats.org/presentationml/2006/main">
+  <p:cSld>
+    <p:spTree>
+      <p:nvGrpSpPr>
+        <p:cNvPr id="1" name=""/>
+        <p:cNvGrpSpPr/>
+        <p:nvPr/>
+      </p:nvGrpSpPr>
+      <p:grpSpPr>
+        <a:xfrm>
+          <a:off x="0" y="0"/>
+          <a:ext cx="0" cy="0"/>
+          <a:chOff x="0" y="0"/>
+          <a:chExt cx="0" cy="0"/>
+        </a:xfrm>
+      </p:grpSpPr>
+      <p:sp>
+        <p:nvSpPr>
+          <p:cNvPr id="2" name="Bar"/>
+          <p:cNvSpPr/>
+          <p:nvPr/>
+        </p:nvSpPr>
+        <p:spPr>
+          <a:xfrm>
+            <a:off x="0" y="0"/>
+            <a:ext cx="164592" cy="5143500"/>
+          </a:xfrm>
+          <a:prstGeom prst="rect">
+            <a:avLst/>
+          </a:prstGeom>
+          <a:solidFill>
+            <a:srgbClr val="1B3A6B"/>
+          </a:solidFill>
+          <a:ln w="12700">
+            <a:solidFill>
+              <a:srgbClr val="1B3A6B"/>
+            </a:solidFill>
+            <a:prstDash val="solid"/>
+          </a:ln>
+        </p:spPr>
+      </p:sp>
+      <p:sp>
+        <p:nvSpPr>
+          <p:cNvPr id="3" name="Title"/>
+          <p:cNvSpPr/>
+          <p:nvPr/>
+        </p:nvSpPr>
+        <p:spPr>
+          <a:xfrm>
+            <a:off x="320040" y="201168"/>
+            <a:ext cx="8503920" cy="493776"/>
+          </a:xfrm>
+          <a:prstGeom prst="rect">
+            <a:avLst/>
+          </a:prstGeom>
+          <a:noFill/>
+          <a:ln/>
+        </p:spPr>
+        <p:txBody>
+          <a:bodyPr wrap="square" lIns="45720" tIns="36576" rIns="45720" bIns="36576" rtlCol="0" anchor="ctr"/>
+          <a:lstStyle/>
+          <a:p>
+            <a:pPr marL="0" indent="0" algn="ctr">
+              <a:buNone/>
+            </a:pPr>
+            <a:r>
+              <a:rPr lang="en-US" sz="2600" b="1" dirty="0">
+                <a:solidFill>
+                  <a:srgbClr val="1B3A6B"/>
+                </a:solidFill>
+              </a:rPr>
+              <a:t>Actual vs. Predicted — Classical Models (5-Fold CV)</a:t>
+            </a:r>
+          </a:p>
+        </p:txBody>
+      </p:sp>
+      <p:sp>
+        <p:nvSpPr>
+          <p:cNvPr id="4" name="Div"/>
+          <p:cNvSpPr/>
+          <p:nvPr/>
+        </p:nvSpPr>
+        <p:spPr>
+          <a:xfrm>
+            <a:off x="320040" y="960120"/>
+            <a:ext cx="8503920" cy="36576"/>
+          </a:xfrm>
+          <a:prstGeom prst="rect">
+            <a:avLst/>
+          </a:prstGeom>
+          <a:solidFill>
+            <a:srgbClr val="0D7377"/>
+          </a:solidFill>
+          <a:ln w="12700">
+            <a:solidFill>
+              <a:srgbClr val="0D7377"/>
+            </a:solidFill>
+            <a:prstDash val="solid"/>
+          </a:ln>
+        </p:spPr>
+      </p:sp>
+      <p:sp>
+        <p:nvSpPr>
+          <p:cNvPr id="20" name="Card2"/>
+          <p:cNvSpPr/>
+          <p:nvPr/>
+        </p:nvSpPr>
+        <p:spPr>
+          <a:xfrm>
+            <a:off x="260000" y="1091045"/>
+            <a:ext cx="4200000" cy="3958937"/>
+          </a:xfrm>
+          <a:prstGeom prst="rect">
+            <a:avLst/>
+          </a:prstGeom>
+          <a:solidFill>
+            <a:srgbClr val="FFFFFF"/>
+          </a:solidFill>
+          <a:ln w="12700">
+            <a:solidFill>
+              <a:srgbClr val="CBD5E1"/>
+            </a:solidFill>
+            <a:prstDash val="solid"/>
+          </a:ln>
+          <a:effectLst>
+            <a:outerShdw blurRad="76200" dist="25400" dir="8100000" algn="bl" rotWithShape="0">
+              <a:srgbClr val="000000">
+                <a:alpha val="8000"/>
+              </a:srgbClr>
+            </a:outerShdw>
+          </a:effectLst>
+        </p:spPr>
+      </p:sp>
+      <p:pic>
+        <p:nvPicPr>
+          <p:cNvPr id="21" name="Img2" descr="scatter_random_forest.png"/>
+          <p:cNvPicPr>
+            <a:picLocks noChangeAspect="1"/>
+          </p:cNvPicPr>
+          <p:nvPr/>
+        </p:nvPicPr>
+        <p:blipFill>
+          <a:blip r:embed="rId2"/>
+          <a:stretch>
+            <a:fillRect/>
+          </a:stretch>
+        </p:blipFill>
+        <p:spPr>
+          <a:xfrm>
+            <a:off x="310000" y="1171750"/>
+            <a:ext cx="4100000" cy="2880705"/>
+          </a:xfrm>
+          <a:prstGeom prst="rect">
+            <a:avLst/>
+          </a:prstGeom>
+        </p:spPr>
+      </p:pic>
+      <p:sp>
+        <p:nvSpPr>
+          <p:cNvPr id="22" name="Name2"/>
+          <p:cNvSpPr/>
+          <p:nvPr/>
+        </p:nvSpPr>
+        <p:spPr>
+          <a:xfrm>
+            <a:off x="310000" y="4125078"/>
+            <a:ext cx="3971055" cy="173500"/>
+          </a:xfrm>
+          <a:prstGeom prst="rect">
+            <a:avLst/>
+          </a:prstGeom>
+          <a:noFill/>
+          <a:ln/>
+        </p:spPr>
+        <p:txBody>
+          <a:bodyPr wrap="square" lIns="45720" tIns="36576" rIns="45720" bIns="36576" rtlCol="0" anchor="ctr"/>
+          <a:lstStyle/>
+          <a:p>
+            <a:pPr algn="ctr"/>
+            <a:r>
+              <a:rPr lang="en-US" sz="900" b="1" dirty="0">
+                <a:solidFill>
+                  <a:srgbClr val="1E293B"/>
+                </a:solidFill>
+              </a:rPr>
+              <a:t>Random Forest</a:t>
+            </a:r>
+          </a:p>
+        </p:txBody>
+      </p:sp>
+      <p:sp>
+        <p:nvSpPr>
+          <p:cNvPr id="24" name="Det2"/>
+          <p:cNvSpPr/>
+          <p:nvPr/>
+        </p:nvSpPr>
+        <p:spPr>
+          <a:xfrm>
+            <a:off x="310000" y="4524751"/>
+            <a:ext cx="4100000" cy="450000"/>
+          </a:xfrm>
+          <a:prstGeom prst="rect">
+            <a:avLst/>
+          </a:prstGeom>
+          <a:noFill/>
+          <a:ln/>
+        </p:spPr>
+        <p:txBody>
+          <a:bodyPr wrap="square" lIns="45720" tIns="36576" rIns="45720" bIns="36576" rtlCol="0" anchor="t"/>
+          <a:lstStyle/>
+          <a:p>
+            <a:pPr marL="0" indent="0" algn="l">
+              <a:buNone/>
+            </a:pPr>
+            <a:r>
+              <a:rPr lang="en-US" sz="1000" b="0" dirty="0"/>
+              <a:t>• Ensemble averaging smooths Decision Tree stepped pattern.</a:t>
+            </a:r>
+          </a:p>
+          <a:p>
+            <a:pPr marL="0" indent="0" algn="l">
+              <a:buNone/>
+            </a:pPr>
+            <a:r>
+              <a:rPr lang="en-US" sz="1000" b="0" dirty="0"/>
+              <a:t>• Mild spread visible in the 800–1100 kW region.</a:t>
+            </a:r>
+          </a:p>
+          <a:p>
+            <a:pPr marL="0" indent="0" algn="l">
+              <a:buNone/>
+            </a:pPr>
+            <a:r>
+              <a:rPr lang="en-US" sz="1000" b="0" dirty="0"/>
+              <a:t>• Constrained depth &amp; features ensure honest generalization.</a:t>
+            </a:r>
+          </a:p>
+        </p:txBody>
+      </p:sp>
+      <p:sp>
+        <p:nvSpPr>
+          <p:cNvPr id="25" name="Card3"/>
+          <p:cNvSpPr/>
+          <p:nvPr/>
+        </p:nvSpPr>
+        <p:spPr>
+          <a:xfrm>
+            <a:off x="4580000" y="1091045"/>
+            <a:ext cx="4200000" cy="3958937"/>
+          </a:xfrm>
+          <a:prstGeom prst="rect">
+            <a:avLst/>
+          </a:prstGeom>
+          <a:solidFill>
+            <a:srgbClr val="FFFFFF"/>
+          </a:solidFill>
+          <a:ln w="12700">
+            <a:solidFill>
+              <a:srgbClr val="CBD5E1"/>
+            </a:solidFill>
+            <a:prstDash val="solid"/>
+          </a:ln>
+          <a:effectLst>
+            <a:outerShdw blurRad="76200" dist="25400" dir="8100000" algn="bl" rotWithShape="0">
+              <a:srgbClr val="000000">
+                <a:alpha val="8000"/>
+              </a:srgbClr>
+            </a:outerShdw>
+          </a:effectLst>
+        </p:spPr>
+      </p:sp>
+      <p:pic>
+        <p:nvPicPr>
+          <p:cNvPr id="26" name="Img3" descr="scatter_xgboost.png"/>
+          <p:cNvPicPr>
+            <a:picLocks noChangeAspect="1"/>
+          </p:cNvPicPr>
+          <p:nvPr/>
+        </p:nvPicPr>
+        <p:blipFill>
+          <a:blip r:embed="rId3"/>
+          <a:stretch>
+            <a:fillRect/>
+          </a:stretch>
+        </p:blipFill>
+        <p:spPr>
+          <a:xfrm>
+            <a:off x="4630000" y="1171750"/>
+            <a:ext cx="4100000" cy="2880705"/>
+          </a:xfrm>
+          <a:prstGeom prst="rect">
+            <a:avLst/>
+          </a:prstGeom>
+        </p:spPr>
+      </p:pic>
+      <p:sp>
+        <p:nvSpPr>
+          <p:cNvPr id="27" name="Name3"/>
+          <p:cNvSpPr/>
+          <p:nvPr/>
+        </p:nvSpPr>
+        <p:spPr>
+          <a:xfrm>
+            <a:off x="4630000" y="4083578"/>
+            <a:ext cx="4100000" cy="210000"/>
+          </a:xfrm>
+          <a:prstGeom prst="rect">
+            <a:avLst/>
+          </a:prstGeom>
+          <a:noFill/>
+          <a:ln/>
+        </p:spPr>
+        <p:txBody>
+          <a:bodyPr wrap="square" lIns="45720" tIns="36576" rIns="45720" bIns="36576" rtlCol="0" anchor="ctr"/>
+          <a:lstStyle/>
+          <a:p>
+            <a:pPr algn="ctr"/>
+            <a:r>
+              <a:rPr lang="en-US" sz="900" b="1" dirty="0" err="1">
+                <a:solidFill>
+                  <a:srgbClr val="1E293B"/>
+                </a:solidFill>
+              </a:rPr>
+              <a:t>XGBoost</a:t>
+            </a:r>
+            <a:endParaRPr lang="en-US" sz="800" b="1" dirty="0">
+              <a:solidFill>
+                <a:srgbClr val="0D7377"/>
+              </a:solidFill>
+            </a:endParaRPr>
+          </a:p>
+        </p:txBody>
+      </p:sp>
+      <p:sp>
+        <p:nvSpPr>
+          <p:cNvPr id="29" name="Det3"/>
+          <p:cNvSpPr/>
+          <p:nvPr/>
+        </p:nvSpPr>
+        <p:spPr>
+          <a:xfrm>
+            <a:off x="4705000" y="4520012"/>
+            <a:ext cx="4100000" cy="450000"/>
+          </a:xfrm>
+          <a:prstGeom prst="rect">
+            <a:avLst/>
+          </a:prstGeom>
+          <a:noFill/>
+          <a:ln/>
+        </p:spPr>
+        <p:txBody>
+          <a:bodyPr wrap="square" lIns="45720" tIns="36576" rIns="45720" bIns="36576" rtlCol="0" anchor="t"/>
+          <a:lstStyle/>
+          <a:p>
+            <a:pPr marL="0" indent="0" algn="l">
+              <a:buNone/>
+            </a:pPr>
+            <a:r>
+              <a:rPr lang="en-US" sz="1000" b="0" dirty="0"/>
+              <a:t>• Diagonal trend with slight spread in mid-load (400–800 kW).</a:t>
+            </a:r>
+          </a:p>
+          <a:p>
+            <a:pPr marL="0" indent="0" algn="l">
+              <a:buNone/>
+            </a:pPr>
+            <a:r>
+              <a:rPr lang="en-US" sz="1000" b="0" dirty="0"/>
+              <a:t>• Heavy regularization (subsample=0.55, λ=5) prevents overfit.</a:t>
+            </a:r>
+          </a:p>
+          <a:p>
+            <a:pPr marL="0" indent="0" algn="l">
+              <a:buNone/>
+            </a:pPr>
+            <a:r>
+              <a:rPr lang="en-US" sz="1000" b="0" dirty="0"/>
+              <a:t>• Lowest R² among classical models on this 600-sample dataset.</a:t>
+            </a:r>
+          </a:p>
+        </p:txBody>
+      </p:sp>
+      <p:sp>
+        <p:nvSpPr>
+          <p:cNvPr id="5" name="Name2">
+            <a:extLst>
+              <a:ext uri="{FF2B5EF4-FFF2-40B4-BE49-F238E27FC236}">
+                <a16:creationId xmlns:a16="http://schemas.microsoft.com/office/drawing/2014/main" id="{CA2E9970-B634-E298-CED3-F2A91A23498E}"/>
+              </a:ext>
+            </a:extLst>
+          </p:cNvPr>
+          <p:cNvSpPr/>
+          <p:nvPr/>
+        </p:nvSpPr>
+        <p:spPr>
+          <a:xfrm>
+            <a:off x="316926" y="4277478"/>
+            <a:ext cx="3971055" cy="173500"/>
+          </a:xfrm>
+          <a:prstGeom prst="rect">
+            <a:avLst/>
+          </a:prstGeom>
+          <a:noFill/>
+          <a:ln/>
+        </p:spPr>
+        <p:txBody>
+          <a:bodyPr wrap="square" lIns="45720" tIns="36576" rIns="45720" bIns="36576" rtlCol="0" anchor="ctr"/>
+          <a:lstStyle/>
+          <a:p>
+            <a:pPr algn="ctr"/>
+            <a:r>
+              <a:rPr lang="en-US" sz="800" b="1" dirty="0">
+                <a:solidFill>
+                  <a:srgbClr val="0D7377"/>
+                </a:solidFill>
+              </a:rPr>
+              <a:t>R²=0.9878 | MAE=39.71 kW | RMSE=48.96 kW | Acc=92.80%</a:t>
+            </a:r>
+          </a:p>
+        </p:txBody>
+      </p:sp>
+      <p:sp>
+        <p:nvSpPr>
+          <p:cNvPr id="6" name="Name3">
+            <a:extLst>
+              <a:ext uri="{FF2B5EF4-FFF2-40B4-BE49-F238E27FC236}">
+                <a16:creationId xmlns:a16="http://schemas.microsoft.com/office/drawing/2014/main" id="{63F5397F-419A-85CA-3F03-F5302BD85ECF}"/>
+              </a:ext>
+            </a:extLst>
+          </p:cNvPr>
+          <p:cNvSpPr/>
+          <p:nvPr/>
+        </p:nvSpPr>
+        <p:spPr>
+          <a:xfrm>
+            <a:off x="4636926" y="4235978"/>
+            <a:ext cx="4100000" cy="210000"/>
+          </a:xfrm>
+          <a:prstGeom prst="rect">
+            <a:avLst/>
+          </a:prstGeom>
+          <a:noFill/>
+          <a:ln/>
+        </p:spPr>
+        <p:txBody>
+          <a:bodyPr wrap="square" lIns="45720" tIns="36576" rIns="45720" bIns="36576" rtlCol="0" anchor="ctr"/>
+          <a:lstStyle/>
+          <a:p>
+            <a:pPr algn="ctr"/>
+            <a:r>
+              <a:rPr lang="en-US" sz="800" b="1" dirty="0">
+                <a:solidFill>
+                  <a:srgbClr val="0D7377"/>
+                </a:solidFill>
+              </a:rPr>
+              <a:t>R²=0.9854 | MAE=41.71 kW | RMSE=53.52 kW | Acc=93.46%</a:t>
+            </a:r>
+          </a:p>
+        </p:txBody>
+      </p:sp>
+    </p:spTree>
+    <p:extLst>
+      <p:ext uri="{BB962C8B-B14F-4D97-AF65-F5344CB8AC3E}">
+        <p14:creationId xmlns:p14="http://schemas.microsoft.com/office/powerpoint/2010/main" val="2182984092"/>
+      </p:ext>
+    </p:extLst>
+  </p:cSld>
+  <p:clrMapOvr>
+    <a:masterClrMapping/>
+  </p:clrMapOvr>
+</p:sld>
+</file>
+
+<file path=ppt/slides/slide18.xml><?xml version="1.0" encoding="utf-8"?>
+<p:sld xmlns:a="http://schemas.openxmlformats.org/drawingml/2006/main" xmlns:r="http://schemas.openxmlformats.org/officeDocument/2006/relationships" xmlns:p="http://schemas.openxmlformats.org/presentationml/2006/main">
+  <p:cSld>
+    <p:spTree>
+      <p:nvGrpSpPr>
+        <p:cNvPr id="1" name=""/>
+        <p:cNvGrpSpPr/>
+        <p:nvPr/>
+      </p:nvGrpSpPr>
+      <p:grpSpPr>
+        <a:xfrm>
+          <a:off x="0" y="0"/>
+          <a:ext cx="0" cy="0"/>
+          <a:chOff x="0" y="0"/>
+          <a:chExt cx="0" cy="0"/>
+        </a:xfrm>
+      </p:grpSpPr>
+      <p:sp>
+        <p:nvSpPr>
+          <p:cNvPr id="2" name="BarB"/>
+          <p:cNvSpPr/>
+          <p:nvPr/>
+        </p:nvSpPr>
+        <p:spPr>
+          <a:xfrm>
+            <a:off x="0" y="0"/>
+            <a:ext cx="164592" cy="5143500"/>
+          </a:xfrm>
+          <a:prstGeom prst="rect">
+            <a:avLst/>
+          </a:prstGeom>
+          <a:solidFill>
+            <a:srgbClr val="1B3A6B"/>
+          </a:solidFill>
+          <a:ln w="12700">
+            <a:solidFill>
+              <a:srgbClr val="1B3A6B"/>
+            </a:solidFill>
+            <a:prstDash val="solid"/>
+          </a:ln>
+        </p:spPr>
+      </p:sp>
+      <p:sp>
+        <p:nvSpPr>
+          <p:cNvPr id="3" name="TitB"/>
+          <p:cNvSpPr/>
+          <p:nvPr/>
+        </p:nvSpPr>
+        <p:spPr>
+          <a:xfrm>
+            <a:off x="320040" y="201168"/>
+            <a:ext cx="8503920" cy="493776"/>
+          </a:xfrm>
+          <a:prstGeom prst="rect">
+            <a:avLst/>
+          </a:prstGeom>
+          <a:noFill/>
+          <a:ln/>
+        </p:spPr>
+        <p:txBody>
+          <a:bodyPr wrap="square" lIns="45720" tIns="36576" rIns="45720" bIns="36576" rtlCol="0" anchor="ctr"/>
+          <a:lstStyle/>
+          <a:p>
+            <a:pPr marL="0" indent="0" algn="ctr">
+              <a:buNone/>
+            </a:pPr>
+            <a:r>
+              <a:rPr lang="en-US" sz="2600" b="1" dirty="0">
+                <a:solidFill>
+                  <a:srgbClr val="1B3A6B"/>
+                </a:solidFill>
+              </a:rPr>
+              <a:t>Actual vs. Predicted — Deep Learning Models (5-Fold CV)</a:t>
+            </a:r>
+          </a:p>
+        </p:txBody>
+      </p:sp>
+      <p:sp>
+        <p:nvSpPr>
+          <p:cNvPr id="4" name="DivB"/>
+          <p:cNvSpPr/>
+          <p:nvPr/>
+        </p:nvSpPr>
+        <p:spPr>
+          <a:xfrm>
+            <a:off x="320040" y="960120"/>
+            <a:ext cx="8503920" cy="36576"/>
+          </a:xfrm>
+          <a:prstGeom prst="rect">
+            <a:avLst/>
+          </a:prstGeom>
+          <a:solidFill>
+            <a:srgbClr val="0D7377"/>
+          </a:solidFill>
+          <a:ln w="12700">
+            <a:solidFill>
+              <a:srgbClr val="0D7377"/>
+            </a:solidFill>
+            <a:prstDash val="solid"/>
+          </a:ln>
+        </p:spPr>
+      </p:sp>
+      <p:sp>
+        <p:nvSpPr>
+          <p:cNvPr id="10" name="CardB0"/>
+          <p:cNvSpPr/>
+          <p:nvPr/>
+        </p:nvSpPr>
+        <p:spPr>
+          <a:xfrm>
+            <a:off x="220000" y="1010000"/>
+            <a:ext cx="2820000" cy="3950000"/>
+          </a:xfrm>
+          <a:prstGeom prst="rect">
+            <a:avLst/>
+          </a:prstGeom>
+          <a:solidFill>
+            <a:srgbClr val="FFFFFF"/>
+          </a:solidFill>
+          <a:ln w="12700">
+            <a:solidFill>
+              <a:srgbClr val="CBD5E1"/>
+            </a:solidFill>
+            <a:prstDash val="solid"/>
+          </a:ln>
+          <a:effectLst>
+            <a:outerShdw blurRad="76200" dist="25400" dir="8100000" algn="bl" rotWithShape="0">
+              <a:srgbClr val="000000">
+                <a:alpha val="8000"/>
+              </a:srgbClr>
+            </a:outerShdw>
+          </a:effectLst>
+        </p:spPr>
+      </p:sp>
+      <p:pic>
+        <p:nvPicPr>
+          <p:cNvPr id="11" name="ImgB0" descr="scatter_ann.png"/>
+          <p:cNvPicPr>
+            <a:picLocks noChangeAspect="1"/>
+          </p:cNvPicPr>
+          <p:nvPr/>
+        </p:nvPicPr>
+        <p:blipFill>
+          <a:blip r:embed="rId2"/>
+          <a:stretch>
+            <a:fillRect/>
+          </a:stretch>
+        </p:blipFill>
+        <p:spPr>
+          <a:xfrm>
+            <a:off x="270000" y="1040000"/>
+            <a:ext cx="2720000" cy="2550000"/>
+          </a:xfrm>
+          <a:prstGeom prst="rect">
+            <a:avLst/>
+          </a:prstGeom>
+        </p:spPr>
+      </p:pic>
+      <p:sp>
+        <p:nvSpPr>
+          <p:cNvPr id="12" name="NamB0"/>
+          <p:cNvSpPr/>
+          <p:nvPr/>
+        </p:nvSpPr>
+        <p:spPr>
+          <a:xfrm>
+            <a:off x="270000" y="3600000"/>
+            <a:ext cx="2720000" cy="230000"/>
+          </a:xfrm>
+          <a:prstGeom prst="rect">
+            <a:avLst/>
+          </a:prstGeom>
+          <a:noFill/>
+          <a:ln/>
+        </p:spPr>
+        <p:txBody>
+          <a:bodyPr wrap="square" lIns="45720" tIns="36576" rIns="45720" bIns="36576" rtlCol="0" anchor="ctr"/>
+          <a:lstStyle/>
+          <a:p>
+            <a:pPr marL="0" indent="0" algn="ctr">
+              <a:buNone/>
+            </a:pPr>
+            <a:r>
+              <a:rPr lang="en-US" sz="940" b="1" dirty="0">
+                <a:solidFill>
+                  <a:srgbClr val="6B21A8"/>
+                </a:solidFill>
+              </a:rPr>
+              <a:t>ANN  ★  Best Model</a:t>
+            </a:r>
+          </a:p>
+        </p:txBody>
+      </p:sp>
+      <p:sp>
+        <p:nvSpPr>
+          <p:cNvPr id="13" name="MetB0"/>
+          <p:cNvSpPr/>
+          <p:nvPr/>
+        </p:nvSpPr>
+        <p:spPr>
+          <a:xfrm>
+            <a:off x="270000" y="3871173"/>
+            <a:ext cx="2720000" cy="210000"/>
+          </a:xfrm>
+          <a:prstGeom prst="rect">
+            <a:avLst/>
+          </a:prstGeom>
+          <a:noFill/>
+          <a:ln/>
+        </p:spPr>
+        <p:txBody>
+          <a:bodyPr wrap="square" lIns="45720" tIns="36576" rIns="45720" bIns="36576" rtlCol="0" anchor="ctr"/>
+          <a:lstStyle/>
+          <a:p>
+            <a:pPr marL="0" indent="0" algn="ctr">
+              <a:buNone/>
+            </a:pPr>
+            <a:r>
+              <a:rPr lang="en-US" sz="700" b="1" dirty="0">
+                <a:solidFill>
+                  <a:srgbClr val="0D7377"/>
+                </a:solidFill>
+              </a:rPr>
+              <a:t>R²=0.9967 | MAE=19.20 kW | RMSE=25.45 kW | Acc=95.28% | F1=0.9234</a:t>
+            </a:r>
+          </a:p>
+        </p:txBody>
+      </p:sp>
+      <p:sp>
+        <p:nvSpPr>
+          <p:cNvPr id="14" name="DetB0"/>
+          <p:cNvSpPr/>
+          <p:nvPr/>
+        </p:nvSpPr>
+        <p:spPr>
+          <a:xfrm>
+            <a:off x="270000" y="4132737"/>
+            <a:ext cx="2720000" cy="800000"/>
+          </a:xfrm>
+          <a:prstGeom prst="rect">
+            <a:avLst/>
+          </a:prstGeom>
+          <a:noFill/>
+          <a:ln/>
+        </p:spPr>
+        <p:txBody>
+          <a:bodyPr wrap="square" lIns="45720" tIns="36576" rIns="45720" bIns="36576" rtlCol="0" anchor="t"/>
+          <a:lstStyle/>
+          <a:p>
+            <a:pPr marL="0" indent="0" algn="l">
+              <a:buNone/>
+            </a:pPr>
+            <a:r>
+              <a:rPr lang="en-US" sz="1000" b="0" dirty="0"/>
+              <a:t>• Tightest fit across all 7 models.</a:t>
+            </a:r>
+          </a:p>
+          <a:p>
+            <a:pPr marL="0" indent="0" algn="l">
+              <a:buNone/>
+            </a:pPr>
+            <a:r>
+              <a:rPr lang="en-US" sz="1000" b="0" dirty="0"/>
+              <a:t>• Points hug y=x from 0 to 1400 kW.</a:t>
+            </a:r>
+          </a:p>
+          <a:p>
+            <a:pPr marL="0" indent="0" algn="l">
+              <a:buNone/>
+            </a:pPr>
+            <a:r>
+              <a:rPr lang="en-US" sz="1000" b="0" dirty="0"/>
+              <a:t>• BatchNorm + Dropout(0.2) stabilize training.</a:t>
+            </a:r>
+          </a:p>
+          <a:p>
+            <a:pPr marL="0" indent="0" algn="l">
+              <a:buNone/>
+            </a:pPr>
+            <a:r>
+              <a:rPr lang="en-US" sz="1000" b="0" dirty="0"/>
+              <a:t>• Best in all regression &amp; classification metrics.</a:t>
+            </a:r>
+          </a:p>
+        </p:txBody>
+      </p:sp>
+      <p:sp>
+        <p:nvSpPr>
+          <p:cNvPr id="15" name="CardB1"/>
+          <p:cNvSpPr/>
+          <p:nvPr/>
+        </p:nvSpPr>
+        <p:spPr>
+          <a:xfrm>
+            <a:off x="3160000" y="1010000"/>
+            <a:ext cx="2820000" cy="3950000"/>
+          </a:xfrm>
+          <a:prstGeom prst="rect">
+            <a:avLst/>
+          </a:prstGeom>
+          <a:solidFill>
+            <a:srgbClr val="FFFFFF"/>
+          </a:solidFill>
+          <a:ln w="12700">
+            <a:solidFill>
+              <a:srgbClr val="CBD5E1"/>
+            </a:solidFill>
+            <a:prstDash val="solid"/>
+          </a:ln>
+          <a:effectLst>
+            <a:outerShdw blurRad="76200" dist="25400" dir="8100000" algn="bl" rotWithShape="0">
+              <a:srgbClr val="000000">
+                <a:alpha val="8000"/>
+              </a:srgbClr>
+            </a:outerShdw>
+          </a:effectLst>
+        </p:spPr>
+      </p:sp>
+      <p:pic>
+        <p:nvPicPr>
+          <p:cNvPr id="16" name="ImgB1" descr="scatter_lstm.png"/>
+          <p:cNvPicPr>
+            <a:picLocks noChangeAspect="1"/>
+          </p:cNvPicPr>
+          <p:nvPr/>
+        </p:nvPicPr>
+        <p:blipFill>
+          <a:blip r:embed="rId3"/>
+          <a:stretch>
+            <a:fillRect/>
+          </a:stretch>
+        </p:blipFill>
+        <p:spPr>
+          <a:xfrm>
+            <a:off x="3210000" y="1040000"/>
+            <a:ext cx="2720000" cy="2550000"/>
+          </a:xfrm>
+          <a:prstGeom prst="rect">
+            <a:avLst/>
+          </a:prstGeom>
+        </p:spPr>
+      </p:pic>
+      <p:sp>
+        <p:nvSpPr>
+          <p:cNvPr id="17" name="NamB1"/>
+          <p:cNvSpPr/>
+          <p:nvPr/>
+        </p:nvSpPr>
+        <p:spPr>
+          <a:xfrm>
+            <a:off x="3210000" y="3600000"/>
+            <a:ext cx="2720000" cy="230000"/>
+          </a:xfrm>
+          <a:prstGeom prst="rect">
+            <a:avLst/>
+          </a:prstGeom>
+          <a:noFill/>
+          <a:ln/>
+        </p:spPr>
+        <p:txBody>
+          <a:bodyPr wrap="square" lIns="45720" tIns="36576" rIns="45720" bIns="36576" rtlCol="0" anchor="ctr"/>
+          <a:lstStyle/>
+          <a:p>
+            <a:pPr marL="0" indent="0" algn="ctr">
+              <a:buNone/>
+            </a:pPr>
+            <a:r>
+              <a:rPr lang="en-US" sz="940" b="1" dirty="0">
+                <a:solidFill>
+                  <a:srgbClr val="1E293B"/>
+                </a:solidFill>
+              </a:rPr>
+              <a:t>LSTM</a:t>
+            </a:r>
+          </a:p>
+        </p:txBody>
+      </p:sp>
+      <p:sp>
+        <p:nvSpPr>
+          <p:cNvPr id="18" name="MetB1"/>
+          <p:cNvSpPr/>
+          <p:nvPr/>
+        </p:nvSpPr>
+        <p:spPr>
+          <a:xfrm>
+            <a:off x="3210000" y="3871173"/>
+            <a:ext cx="2720000" cy="210000"/>
+          </a:xfrm>
+          <a:prstGeom prst="rect">
+            <a:avLst/>
+          </a:prstGeom>
+          <a:noFill/>
+          <a:ln/>
+        </p:spPr>
+        <p:txBody>
+          <a:bodyPr wrap="square" lIns="45720" tIns="36576" rIns="45720" bIns="36576" rtlCol="0" anchor="ctr"/>
+          <a:lstStyle/>
+          <a:p>
+            <a:pPr marL="0" indent="0" algn="ctr">
+              <a:buNone/>
+            </a:pPr>
+            <a:r>
+              <a:rPr lang="en-US" sz="700" b="1" dirty="0">
+                <a:solidFill>
+                  <a:srgbClr val="0D7377"/>
+                </a:solidFill>
+              </a:rPr>
+              <a:t>R²=0.9365 | MAE=84.20 kW | RMSE=95.92 kW | Acc=91.29% | F1=0.5427</a:t>
+            </a:r>
+          </a:p>
+        </p:txBody>
+      </p:sp>
+      <p:sp>
+        <p:nvSpPr>
+          <p:cNvPr id="19" name="DetB1"/>
+          <p:cNvSpPr/>
+          <p:nvPr/>
+        </p:nvSpPr>
+        <p:spPr>
+          <a:xfrm>
+            <a:off x="3210000" y="4132737"/>
+            <a:ext cx="2720000" cy="800000"/>
+          </a:xfrm>
+          <a:prstGeom prst="rect">
+            <a:avLst/>
+          </a:prstGeom>
+          <a:noFill/>
+          <a:ln/>
+        </p:spPr>
+        <p:txBody>
+          <a:bodyPr wrap="square" lIns="45720" tIns="36576" rIns="45720" bIns="36576" rtlCol="0" anchor="t"/>
+          <a:lstStyle/>
+          <a:p>
+            <a:pPr marL="0" indent="0" algn="l">
+              <a:buNone/>
+            </a:pPr>
+            <a:r>
+              <a:rPr lang="en-US" sz="1000" b="0" dirty="0"/>
+              <a:t>• Diagonal trend with visible vertical spread.</a:t>
+            </a:r>
+          </a:p>
+          <a:p>
+            <a:pPr marL="0" indent="0" algn="l">
+              <a:buNone/>
+            </a:pPr>
+            <a:r>
+              <a:rPr lang="en-US" sz="1000" b="0" dirty="0"/>
+              <a:t>• Used per-vehicle sequences (W=5, MinMaxScaler).</a:t>
+            </a:r>
+          </a:p>
+          <a:p>
+            <a:pPr marL="0" indent="0" algn="l">
+              <a:buNone/>
+            </a:pPr>
+            <a:r>
+              <a:rPr lang="en-US" sz="1000" b="0" dirty="0"/>
+              <a:t>• Different input vs ANN drives higher error.</a:t>
+            </a:r>
+          </a:p>
+          <a:p>
+            <a:pPr marL="0" indent="0" algn="l">
+              <a:buNone/>
+            </a:pPr>
+            <a:r>
+              <a:rPr lang="en-US" sz="1000" b="0" dirty="0"/>
+              <a:t>• EarlyStopping (patience=5) applied in training.</a:t>
+            </a:r>
+          </a:p>
+        </p:txBody>
+      </p:sp>
+      <p:sp>
+        <p:nvSpPr>
+          <p:cNvPr id="20" name="CardB2"/>
+          <p:cNvSpPr/>
+          <p:nvPr/>
+        </p:nvSpPr>
+        <p:spPr>
+          <a:xfrm>
+            <a:off x="6100000" y="1010000"/>
+            <a:ext cx="2820000" cy="3950000"/>
+          </a:xfrm>
+          <a:prstGeom prst="rect">
+            <a:avLst/>
+          </a:prstGeom>
+          <a:solidFill>
+            <a:srgbClr val="FFFFFF"/>
+          </a:solidFill>
+          <a:ln w="12700">
+            <a:solidFill>
+              <a:srgbClr val="CBD5E1"/>
+            </a:solidFill>
+            <a:prstDash val="solid"/>
+          </a:ln>
+          <a:effectLst>
+            <a:outerShdw blurRad="76200" dist="25400" dir="8100000" algn="bl" rotWithShape="0">
+              <a:srgbClr val="000000">
+                <a:alpha val="8000"/>
+              </a:srgbClr>
+            </a:outerShdw>
+          </a:effectLst>
+        </p:spPr>
+      </p:sp>
+      <p:pic>
+        <p:nvPicPr>
+          <p:cNvPr id="21" name="ImgB2" descr="scatter_gru.png"/>
+          <p:cNvPicPr>
+            <a:picLocks noChangeAspect="1"/>
+          </p:cNvPicPr>
+          <p:nvPr/>
+        </p:nvPicPr>
+        <p:blipFill>
+          <a:blip r:embed="rId4"/>
+          <a:stretch>
+            <a:fillRect/>
+          </a:stretch>
+        </p:blipFill>
+        <p:spPr>
+          <a:xfrm>
+            <a:off x="6150000" y="1040000"/>
+            <a:ext cx="2720000" cy="2550000"/>
+          </a:xfrm>
+          <a:prstGeom prst="rect">
+            <a:avLst/>
+          </a:prstGeom>
+        </p:spPr>
+      </p:pic>
+      <p:sp>
+        <p:nvSpPr>
+          <p:cNvPr id="22" name="NamB2"/>
+          <p:cNvSpPr/>
+          <p:nvPr/>
+        </p:nvSpPr>
+        <p:spPr>
+          <a:xfrm>
+            <a:off x="6150000" y="3600000"/>
+            <a:ext cx="2720000" cy="230000"/>
+          </a:xfrm>
+          <a:prstGeom prst="rect">
+            <a:avLst/>
+          </a:prstGeom>
+          <a:noFill/>
+          <a:ln/>
+        </p:spPr>
+        <p:txBody>
+          <a:bodyPr wrap="square" lIns="45720" tIns="36576" rIns="45720" bIns="36576" rtlCol="0" anchor="ctr"/>
+          <a:lstStyle/>
+          <a:p>
+            <a:pPr marL="0" indent="0" algn="ctr">
+              <a:buNone/>
+            </a:pPr>
+            <a:r>
+              <a:rPr lang="en-US" sz="940" b="1" dirty="0">
+                <a:solidFill>
+                  <a:srgbClr val="1E293B"/>
+                </a:solidFill>
+              </a:rPr>
+              <a:t>GRU</a:t>
+            </a:r>
+          </a:p>
+        </p:txBody>
+      </p:sp>
+      <p:sp>
+        <p:nvSpPr>
+          <p:cNvPr id="23" name="MetB2"/>
+          <p:cNvSpPr/>
+          <p:nvPr/>
+        </p:nvSpPr>
+        <p:spPr>
+          <a:xfrm>
+            <a:off x="6150000" y="3871173"/>
+            <a:ext cx="2720000" cy="210000"/>
+          </a:xfrm>
+          <a:prstGeom prst="rect">
+            <a:avLst/>
+          </a:prstGeom>
+          <a:noFill/>
+          <a:ln/>
+        </p:spPr>
+        <p:txBody>
+          <a:bodyPr wrap="square" lIns="45720" tIns="36576" rIns="45720" bIns="36576" rtlCol="0" anchor="ctr"/>
+          <a:lstStyle/>
+          <a:p>
+            <a:pPr marL="0" indent="0" algn="ctr">
+              <a:buNone/>
+            </a:pPr>
+            <a:r>
+              <a:rPr lang="en-US" sz="700" b="1" dirty="0">
+                <a:solidFill>
+                  <a:srgbClr val="0D7377"/>
+                </a:solidFill>
+              </a:rPr>
+              <a:t>R²=0.9444 | MAE=81.45 kW | RMSE=89.50 kW | Acc=90.76% | F1=0.5723</a:t>
+            </a:r>
+          </a:p>
+        </p:txBody>
+      </p:sp>
+      <p:sp>
+        <p:nvSpPr>
+          <p:cNvPr id="24" name="DetB2"/>
+          <p:cNvSpPr/>
+          <p:nvPr/>
+        </p:nvSpPr>
+        <p:spPr>
+          <a:xfrm>
+            <a:off x="6150000" y="4132737"/>
+            <a:ext cx="2720000" cy="800000"/>
+          </a:xfrm>
+          <a:prstGeom prst="rect">
+            <a:avLst/>
+          </a:prstGeom>
+          <a:noFill/>
+          <a:ln/>
+        </p:spPr>
+        <p:txBody>
+          <a:bodyPr wrap="square" lIns="45720" tIns="36576" rIns="45720" bIns="36576" rtlCol="0" anchor="t"/>
+          <a:lstStyle/>
+          <a:p>
+            <a:pPr marL="0" indent="0" algn="l">
+              <a:buNone/>
+            </a:pPr>
+            <a:r>
+              <a:rPr lang="en-US" sz="1000" b="0" dirty="0"/>
+              <a:t>• Mirrors LSTM; slightly tighter in mid-range.</a:t>
+            </a:r>
+          </a:p>
+          <a:p>
+            <a:pPr marL="0" indent="0" algn="l">
+              <a:buNone/>
+            </a:pPr>
+            <a:r>
+              <a:rPr lang="en-US" sz="1000" b="0" dirty="0"/>
+              <a:t>• Gated architecture gives marginal gain over LSTM.</a:t>
+            </a:r>
+          </a:p>
+          <a:p>
+            <a:pPr marL="0" indent="0" algn="l">
+              <a:buNone/>
+            </a:pPr>
+            <a:r>
+              <a:rPr lang="en-US" sz="1000" b="0" dirty="0"/>
+              <a:t>• Same per-vehicle sequence input (W=5).</a:t>
+            </a:r>
+          </a:p>
+          <a:p>
+            <a:pPr marL="0" indent="0" algn="l">
+              <a:buNone/>
+            </a:pPr>
+            <a:r>
+              <a:rPr lang="en-US" sz="1000" b="0" dirty="0"/>
+              <a:t>• Best recurrent model among the two.</a:t>
+            </a:r>
+          </a:p>
+        </p:txBody>
+      </p:sp>
+    </p:spTree>
+  </p:cSld>
+  <p:clrMapOvr>
+    <a:masterClrMapping/>
+  </p:clrMapOvr>
+</p:sld>
+</file>
+
+<file path=ppt/slides/slide19.xml><?xml version="1.0" encoding="utf-8"?>
+<p:sld xmlns:a="http://schemas.openxmlformats.org/drawingml/2006/main" xmlns:r="http://schemas.openxmlformats.org/officeDocument/2006/relationships" xmlns:p="http://schemas.openxmlformats.org/presentationml/2006/main">
   <p:cSld name="Slide 11">
     <p:bg>
       <p:bgPr>
@@ -11506,7 +13205,2067 @@
 </p:sld>
 </file>
 
-<file path=ppt/slides/slide17.xml><?xml version="1.0" encoding="utf-8"?>
+<file path=ppt/slides/slide2.xml><?xml version="1.0" encoding="utf-8"?>
+<p:sld xmlns:a="http://schemas.openxmlformats.org/drawingml/2006/main" xmlns:r="http://schemas.openxmlformats.org/officeDocument/2006/relationships" xmlns:p="http://schemas.openxmlformats.org/presentationml/2006/main">
+  <p:cSld name="Slide 2">
+    <p:bg>
+      <p:bgPr>
+        <a:solidFill>
+          <a:srgbClr val="F7F9FC"/>
+        </a:solidFill>
+        <a:effectLst/>
+      </p:bgPr>
+    </p:bg>
+    <p:spTree>
+      <p:nvGrpSpPr>
+        <p:cNvPr id="1" name=""/>
+        <p:cNvGrpSpPr/>
+        <p:nvPr/>
+      </p:nvGrpSpPr>
+      <p:grpSpPr>
+        <a:xfrm>
+          <a:off x="0" y="0"/>
+          <a:ext cx="0" cy="0"/>
+          <a:chOff x="0" y="0"/>
+          <a:chExt cx="0" cy="0"/>
+        </a:xfrm>
+      </p:grpSpPr>
+      <p:sp>
+        <p:nvSpPr>
+          <p:cNvPr id="2" name="Shape 0"/>
+          <p:cNvSpPr/>
+          <p:nvPr/>
+        </p:nvSpPr>
+        <p:spPr>
+          <a:xfrm>
+            <a:off x="0" y="0"/>
+            <a:ext cx="164592" cy="5143500"/>
+          </a:xfrm>
+          <a:prstGeom prst="rect">
+            <a:avLst/>
+          </a:prstGeom>
+          <a:solidFill>
+            <a:srgbClr val="1B3A6B"/>
+          </a:solidFill>
+          <a:ln w="12700">
+            <a:solidFill>
+              <a:srgbClr val="1B3A6B"/>
+            </a:solidFill>
+            <a:prstDash val="solid"/>
+          </a:ln>
+        </p:spPr>
+      </p:sp>
+      <p:sp>
+        <p:nvSpPr>
+          <p:cNvPr id="3" name="Text 1"/>
+          <p:cNvSpPr/>
+          <p:nvPr/>
+        </p:nvSpPr>
+        <p:spPr>
+          <a:xfrm>
+            <a:off x="320040" y="201168"/>
+            <a:ext cx="8503920" cy="493776"/>
+          </a:xfrm>
+          <a:prstGeom prst="rect">
+            <a:avLst/>
+          </a:prstGeom>
+          <a:noFill/>
+          <a:ln/>
+        </p:spPr>
+        <p:txBody>
+          <a:bodyPr wrap="square" lIns="0" tIns="0" rIns="0" bIns="0" rtlCol="0" anchor="ctr"/>
+          <a:lstStyle/>
+          <a:p>
+            <a:pPr marL="0" indent="0">
+              <a:buNone/>
+            </a:pPr>
+            <a:r>
+              <a:rPr lang="en-US" sz="2600" b="1" dirty="0">
+                <a:solidFill>
+                  <a:srgbClr val="1B3A6B"/>
+                </a:solidFill>
+                <a:latin typeface="Calibri" pitchFamily="34" charset="0"/>
+                <a:ea typeface="Calibri" pitchFamily="34" charset="-122"/>
+                <a:cs typeface="Calibri" pitchFamily="34" charset="-120"/>
+              </a:rPr>
+              <a:t>Presentation Outline</a:t>
+            </a:r>
+            <a:endParaRPr lang="en-US" sz="2600" dirty="0"/>
+          </a:p>
+        </p:txBody>
+      </p:sp>
+      <p:sp>
+        <p:nvSpPr>
+          <p:cNvPr id="4" name="Shape 2"/>
+          <p:cNvSpPr/>
+          <p:nvPr/>
+        </p:nvSpPr>
+        <p:spPr>
+          <a:xfrm>
+            <a:off x="320040" y="960120"/>
+            <a:ext cx="8503920" cy="36576"/>
+          </a:xfrm>
+          <a:prstGeom prst="rect">
+            <a:avLst/>
+          </a:prstGeom>
+          <a:solidFill>
+            <a:srgbClr val="0D7377"/>
+          </a:solidFill>
+          <a:ln w="12700">
+            <a:solidFill>
+              <a:srgbClr val="0D7377"/>
+            </a:solidFill>
+            <a:prstDash val="solid"/>
+          </a:ln>
+        </p:spPr>
+      </p:sp>
+      <p:sp>
+        <p:nvSpPr>
+          <p:cNvPr id="5" name="Shape 3"/>
+          <p:cNvSpPr/>
+          <p:nvPr/>
+        </p:nvSpPr>
+        <p:spPr>
+          <a:xfrm>
+            <a:off x="320040" y="1115568"/>
+            <a:ext cx="4251960" cy="804672"/>
+          </a:xfrm>
+          <a:prstGeom prst="rect">
+            <a:avLst/>
+          </a:prstGeom>
+          <a:solidFill>
+            <a:srgbClr val="FFFFFF"/>
+          </a:solidFill>
+          <a:ln w="12700">
+            <a:solidFill>
+              <a:srgbClr val="CBD5E1"/>
+            </a:solidFill>
+            <a:prstDash val="solid"/>
+          </a:ln>
+          <a:effectLst>
+            <a:outerShdw blurRad="76200" dist="25400" dir="8100000" algn="bl" rotWithShape="0">
+              <a:srgbClr val="000000">
+                <a:alpha val="8000"/>
+              </a:srgbClr>
+            </a:outerShdw>
+          </a:effectLst>
+        </p:spPr>
+      </p:sp>
+      <p:sp>
+        <p:nvSpPr>
+          <p:cNvPr id="6" name="Shape 4"/>
+          <p:cNvSpPr/>
+          <p:nvPr/>
+        </p:nvSpPr>
+        <p:spPr>
+          <a:xfrm>
+            <a:off x="320040" y="1115568"/>
+            <a:ext cx="502920" cy="804672"/>
+          </a:xfrm>
+          <a:prstGeom prst="rect">
+            <a:avLst/>
+          </a:prstGeom>
+          <a:solidFill>
+            <a:srgbClr val="0D7377"/>
+          </a:solidFill>
+          <a:ln w="12700">
+            <a:solidFill>
+              <a:srgbClr val="0D7377"/>
+            </a:solidFill>
+            <a:prstDash val="solid"/>
+          </a:ln>
+        </p:spPr>
+      </p:sp>
+      <p:sp>
+        <p:nvSpPr>
+          <p:cNvPr id="7" name="Text 5"/>
+          <p:cNvSpPr/>
+          <p:nvPr/>
+        </p:nvSpPr>
+        <p:spPr>
+          <a:xfrm>
+            <a:off x="338328" y="1280160"/>
+            <a:ext cx="475488" cy="457200"/>
+          </a:xfrm>
+          <a:prstGeom prst="rect">
+            <a:avLst/>
+          </a:prstGeom>
+          <a:noFill/>
+          <a:ln/>
+        </p:spPr>
+        <p:txBody>
+          <a:bodyPr wrap="square" lIns="0" tIns="0" rIns="0" bIns="0" rtlCol="0" anchor="ctr"/>
+          <a:lstStyle/>
+          <a:p>
+            <a:pPr marL="0" indent="0" algn="ctr">
+              <a:buNone/>
+            </a:pPr>
+            <a:r>
+              <a:rPr lang="en-US" sz="1800" b="1" dirty="0">
+                <a:solidFill>
+                  <a:srgbClr val="FFFFFF"/>
+                </a:solidFill>
+                <a:latin typeface="Calibri" pitchFamily="34" charset="0"/>
+                <a:ea typeface="Calibri" pitchFamily="34" charset="-122"/>
+                <a:cs typeface="Calibri" pitchFamily="34" charset="-120"/>
+              </a:rPr>
+              <a:t>01</a:t>
+            </a:r>
+            <a:endParaRPr lang="en-US" sz="1800" dirty="0"/>
+          </a:p>
+        </p:txBody>
+      </p:sp>
+      <p:sp>
+        <p:nvSpPr>
+          <p:cNvPr id="8" name="Text 6"/>
+          <p:cNvSpPr/>
+          <p:nvPr/>
+        </p:nvSpPr>
+        <p:spPr>
+          <a:xfrm>
+            <a:off x="886968" y="1188720"/>
+            <a:ext cx="3593592" cy="320040"/>
+          </a:xfrm>
+          <a:prstGeom prst="rect">
+            <a:avLst/>
+          </a:prstGeom>
+          <a:noFill/>
+          <a:ln/>
+        </p:spPr>
+        <p:txBody>
+          <a:bodyPr wrap="square" lIns="0" tIns="0" rIns="0" bIns="0" rtlCol="0" anchor="ctr"/>
+          <a:lstStyle/>
+          <a:p>
+            <a:pPr marL="0" indent="0">
+              <a:buNone/>
+            </a:pPr>
+            <a:r>
+              <a:rPr lang="en-US" b="1" dirty="0">
+                <a:latin typeface="Calibri" pitchFamily="34" charset="0"/>
+                <a:ea typeface="Calibri" pitchFamily="34" charset="-122"/>
+                <a:cs typeface="Calibri" pitchFamily="34" charset="-120"/>
+              </a:rPr>
+              <a:t>Introduction &amp; Background</a:t>
+            </a:r>
+            <a:endParaRPr lang="en-US" dirty="0"/>
+          </a:p>
+        </p:txBody>
+      </p:sp>
+      <p:sp>
+        <p:nvSpPr>
+          <p:cNvPr id="9" name="Text 7"/>
+          <p:cNvSpPr/>
+          <p:nvPr/>
+        </p:nvSpPr>
+        <p:spPr>
+          <a:xfrm>
+            <a:off x="886968" y="1536192"/>
+            <a:ext cx="3593592" cy="310896"/>
+          </a:xfrm>
+          <a:prstGeom prst="rect">
+            <a:avLst/>
+          </a:prstGeom>
+          <a:noFill/>
+          <a:ln/>
+        </p:spPr>
+        <p:txBody>
+          <a:bodyPr wrap="square" lIns="0" tIns="0" rIns="0" bIns="0" rtlCol="0" anchor="ctr"/>
+          <a:lstStyle/>
+          <a:p>
+            <a:pPr marL="0" indent="0">
+              <a:buNone/>
+            </a:pPr>
+            <a:r>
+              <a:rPr lang="en-US" sz="1200" dirty="0">
+                <a:latin typeface="Calibri" pitchFamily="34" charset="0"/>
+                <a:ea typeface="Calibri" pitchFamily="34" charset="-122"/>
+                <a:cs typeface="Calibri" pitchFamily="34" charset="-120"/>
+              </a:rPr>
+              <a:t>Problem context, EV growth, Bangladesh perspective</a:t>
+            </a:r>
+            <a:endParaRPr lang="en-US" sz="1200" dirty="0"/>
+          </a:p>
+        </p:txBody>
+      </p:sp>
+      <p:sp>
+        <p:nvSpPr>
+          <p:cNvPr id="10" name="Shape 8"/>
+          <p:cNvSpPr/>
+          <p:nvPr/>
+        </p:nvSpPr>
+        <p:spPr>
+          <a:xfrm>
+            <a:off x="320040" y="2048256"/>
+            <a:ext cx="4251960" cy="804672"/>
+          </a:xfrm>
+          <a:prstGeom prst="rect">
+            <a:avLst/>
+          </a:prstGeom>
+          <a:solidFill>
+            <a:srgbClr val="FFFFFF"/>
+          </a:solidFill>
+          <a:ln w="12700">
+            <a:solidFill>
+              <a:srgbClr val="CBD5E1"/>
+            </a:solidFill>
+            <a:prstDash val="solid"/>
+          </a:ln>
+          <a:effectLst>
+            <a:outerShdw blurRad="76200" dist="25400" dir="8100000" algn="bl" rotWithShape="0">
+              <a:srgbClr val="000000">
+                <a:alpha val="8000"/>
+              </a:srgbClr>
+            </a:outerShdw>
+          </a:effectLst>
+        </p:spPr>
+      </p:sp>
+      <p:sp>
+        <p:nvSpPr>
+          <p:cNvPr id="11" name="Shape 9"/>
+          <p:cNvSpPr/>
+          <p:nvPr/>
+        </p:nvSpPr>
+        <p:spPr>
+          <a:xfrm>
+            <a:off x="320040" y="2048256"/>
+            <a:ext cx="502920" cy="804672"/>
+          </a:xfrm>
+          <a:prstGeom prst="rect">
+            <a:avLst/>
+          </a:prstGeom>
+          <a:solidFill>
+            <a:srgbClr val="0D7377"/>
+          </a:solidFill>
+          <a:ln w="12700">
+            <a:solidFill>
+              <a:srgbClr val="0D7377"/>
+            </a:solidFill>
+            <a:prstDash val="solid"/>
+          </a:ln>
+        </p:spPr>
+      </p:sp>
+      <p:sp>
+        <p:nvSpPr>
+          <p:cNvPr id="12" name="Text 10"/>
+          <p:cNvSpPr/>
+          <p:nvPr/>
+        </p:nvSpPr>
+        <p:spPr>
+          <a:xfrm>
+            <a:off x="338328" y="2212848"/>
+            <a:ext cx="475488" cy="457200"/>
+          </a:xfrm>
+          <a:prstGeom prst="rect">
+            <a:avLst/>
+          </a:prstGeom>
+          <a:noFill/>
+          <a:ln/>
+        </p:spPr>
+        <p:txBody>
+          <a:bodyPr wrap="square" lIns="0" tIns="0" rIns="0" bIns="0" rtlCol="0" anchor="ctr"/>
+          <a:lstStyle/>
+          <a:p>
+            <a:pPr marL="0" indent="0" algn="ctr">
+              <a:buNone/>
+            </a:pPr>
+            <a:r>
+              <a:rPr lang="en-US" sz="1800" b="1" dirty="0">
+                <a:solidFill>
+                  <a:srgbClr val="FFFFFF"/>
+                </a:solidFill>
+                <a:latin typeface="Calibri" pitchFamily="34" charset="0"/>
+                <a:ea typeface="Calibri" pitchFamily="34" charset="-122"/>
+                <a:cs typeface="Calibri" pitchFamily="34" charset="-120"/>
+              </a:rPr>
+              <a:t>02</a:t>
+            </a:r>
+            <a:endParaRPr lang="en-US" sz="1800" dirty="0"/>
+          </a:p>
+        </p:txBody>
+      </p:sp>
+      <p:sp>
+        <p:nvSpPr>
+          <p:cNvPr id="13" name="Text 11"/>
+          <p:cNvSpPr/>
+          <p:nvPr/>
+        </p:nvSpPr>
+        <p:spPr>
+          <a:xfrm>
+            <a:off x="886968" y="2121408"/>
+            <a:ext cx="3593592" cy="320040"/>
+          </a:xfrm>
+          <a:prstGeom prst="rect">
+            <a:avLst/>
+          </a:prstGeom>
+          <a:noFill/>
+          <a:ln/>
+        </p:spPr>
+        <p:txBody>
+          <a:bodyPr wrap="square" lIns="0" tIns="0" rIns="0" bIns="0" rtlCol="0" anchor="ctr"/>
+          <a:lstStyle/>
+          <a:p>
+            <a:pPr marL="0" indent="0">
+              <a:buNone/>
+            </a:pPr>
+            <a:r>
+              <a:rPr lang="en-US" b="1" dirty="0">
+                <a:latin typeface="Calibri" pitchFamily="34" charset="0"/>
+                <a:ea typeface="Calibri" pitchFamily="34" charset="-122"/>
+                <a:cs typeface="Calibri" pitchFamily="34" charset="-120"/>
+              </a:rPr>
+              <a:t>Problem Statement &amp; Objectives</a:t>
+            </a:r>
+            <a:endParaRPr lang="en-US" dirty="0"/>
+          </a:p>
+        </p:txBody>
+      </p:sp>
+      <p:sp>
+        <p:nvSpPr>
+          <p:cNvPr id="14" name="Text 12"/>
+          <p:cNvSpPr/>
+          <p:nvPr/>
+        </p:nvSpPr>
+        <p:spPr>
+          <a:xfrm>
+            <a:off x="886968" y="2468880"/>
+            <a:ext cx="3593592" cy="310896"/>
+          </a:xfrm>
+          <a:prstGeom prst="rect">
+            <a:avLst/>
+          </a:prstGeom>
+          <a:noFill/>
+          <a:ln/>
+        </p:spPr>
+        <p:txBody>
+          <a:bodyPr wrap="square" lIns="0" tIns="0" rIns="0" bIns="0" rtlCol="0" anchor="ctr"/>
+          <a:lstStyle/>
+          <a:p>
+            <a:pPr marL="0" indent="0">
+              <a:buNone/>
+            </a:pPr>
+            <a:r>
+              <a:rPr lang="en-US" sz="1200" dirty="0">
+                <a:latin typeface="Calibri" pitchFamily="34" charset="0"/>
+                <a:ea typeface="Calibri" pitchFamily="34" charset="-122"/>
+                <a:cs typeface="Calibri" pitchFamily="34" charset="-120"/>
+              </a:rPr>
+              <a:t>Research gap, goals, and research questions</a:t>
+            </a:r>
+            <a:endParaRPr lang="en-US" sz="1200" dirty="0"/>
+          </a:p>
+        </p:txBody>
+      </p:sp>
+      <p:sp>
+        <p:nvSpPr>
+          <p:cNvPr id="15" name="Shape 13"/>
+          <p:cNvSpPr/>
+          <p:nvPr/>
+        </p:nvSpPr>
+        <p:spPr>
+          <a:xfrm>
+            <a:off x="320040" y="2980944"/>
+            <a:ext cx="4251960" cy="804672"/>
+          </a:xfrm>
+          <a:prstGeom prst="rect">
+            <a:avLst/>
+          </a:prstGeom>
+          <a:solidFill>
+            <a:srgbClr val="FFFFFF"/>
+          </a:solidFill>
+          <a:ln w="12700">
+            <a:solidFill>
+              <a:srgbClr val="CBD5E1"/>
+            </a:solidFill>
+            <a:prstDash val="solid"/>
+          </a:ln>
+          <a:effectLst>
+            <a:outerShdw blurRad="76200" dist="25400" dir="8100000" algn="bl" rotWithShape="0">
+              <a:srgbClr val="000000">
+                <a:alpha val="8000"/>
+              </a:srgbClr>
+            </a:outerShdw>
+          </a:effectLst>
+        </p:spPr>
+      </p:sp>
+      <p:sp>
+        <p:nvSpPr>
+          <p:cNvPr id="16" name="Shape 14"/>
+          <p:cNvSpPr/>
+          <p:nvPr/>
+        </p:nvSpPr>
+        <p:spPr>
+          <a:xfrm>
+            <a:off x="320040" y="2980944"/>
+            <a:ext cx="502920" cy="804672"/>
+          </a:xfrm>
+          <a:prstGeom prst="rect">
+            <a:avLst/>
+          </a:prstGeom>
+          <a:solidFill>
+            <a:srgbClr val="0D7377"/>
+          </a:solidFill>
+          <a:ln w="12700">
+            <a:solidFill>
+              <a:srgbClr val="0D7377"/>
+            </a:solidFill>
+            <a:prstDash val="solid"/>
+          </a:ln>
+        </p:spPr>
+      </p:sp>
+      <p:sp>
+        <p:nvSpPr>
+          <p:cNvPr id="17" name="Text 15"/>
+          <p:cNvSpPr/>
+          <p:nvPr/>
+        </p:nvSpPr>
+        <p:spPr>
+          <a:xfrm>
+            <a:off x="338328" y="3145536"/>
+            <a:ext cx="475488" cy="457200"/>
+          </a:xfrm>
+          <a:prstGeom prst="rect">
+            <a:avLst/>
+          </a:prstGeom>
+          <a:noFill/>
+          <a:ln/>
+        </p:spPr>
+        <p:txBody>
+          <a:bodyPr wrap="square" lIns="0" tIns="0" rIns="0" bIns="0" rtlCol="0" anchor="ctr"/>
+          <a:lstStyle/>
+          <a:p>
+            <a:pPr marL="0" indent="0" algn="ctr">
+              <a:buNone/>
+            </a:pPr>
+            <a:r>
+              <a:rPr lang="en-US" sz="1800" b="1" dirty="0">
+                <a:solidFill>
+                  <a:srgbClr val="FFFFFF"/>
+                </a:solidFill>
+                <a:latin typeface="Calibri" pitchFamily="34" charset="0"/>
+                <a:ea typeface="Calibri" pitchFamily="34" charset="-122"/>
+                <a:cs typeface="Calibri" pitchFamily="34" charset="-120"/>
+              </a:rPr>
+              <a:t>03</a:t>
+            </a:r>
+            <a:endParaRPr lang="en-US" sz="1800" dirty="0"/>
+          </a:p>
+        </p:txBody>
+      </p:sp>
+      <p:sp>
+        <p:nvSpPr>
+          <p:cNvPr id="18" name="Text 16"/>
+          <p:cNvSpPr/>
+          <p:nvPr/>
+        </p:nvSpPr>
+        <p:spPr>
+          <a:xfrm>
+            <a:off x="886968" y="3054096"/>
+            <a:ext cx="3593592" cy="320040"/>
+          </a:xfrm>
+          <a:prstGeom prst="rect">
+            <a:avLst/>
+          </a:prstGeom>
+          <a:noFill/>
+          <a:ln/>
+        </p:spPr>
+        <p:txBody>
+          <a:bodyPr wrap="square" lIns="0" tIns="0" rIns="0" bIns="0" rtlCol="0" anchor="ctr"/>
+          <a:lstStyle/>
+          <a:p>
+            <a:pPr marL="0" indent="0">
+              <a:buNone/>
+            </a:pPr>
+            <a:r>
+              <a:rPr lang="en-US" b="1" dirty="0">
+                <a:latin typeface="Calibri" pitchFamily="34" charset="0"/>
+                <a:ea typeface="Calibri" pitchFamily="34" charset="-122"/>
+                <a:cs typeface="Calibri" pitchFamily="34" charset="-120"/>
+              </a:rPr>
+              <a:t>Literature Review</a:t>
+            </a:r>
+            <a:endParaRPr lang="en-US" dirty="0"/>
+          </a:p>
+        </p:txBody>
+      </p:sp>
+      <p:sp>
+        <p:nvSpPr>
+          <p:cNvPr id="19" name="Text 17"/>
+          <p:cNvSpPr/>
+          <p:nvPr/>
+        </p:nvSpPr>
+        <p:spPr>
+          <a:xfrm>
+            <a:off x="886968" y="3401568"/>
+            <a:ext cx="3593592" cy="310896"/>
+          </a:xfrm>
+          <a:prstGeom prst="rect">
+            <a:avLst/>
+          </a:prstGeom>
+          <a:noFill/>
+          <a:ln/>
+        </p:spPr>
+        <p:txBody>
+          <a:bodyPr wrap="square" lIns="0" tIns="0" rIns="0" bIns="0" rtlCol="0" anchor="ctr"/>
+          <a:lstStyle/>
+          <a:p>
+            <a:pPr marL="0" indent="0">
+              <a:buNone/>
+            </a:pPr>
+            <a:r>
+              <a:rPr lang="en-US" sz="1200" dirty="0">
+                <a:latin typeface="Calibri" pitchFamily="34" charset="0"/>
+                <a:ea typeface="Calibri" pitchFamily="34" charset="-122"/>
+                <a:cs typeface="Calibri" pitchFamily="34" charset="-120"/>
+              </a:rPr>
+              <a:t>Prior work in load modeling, ML forecasting, SUMO</a:t>
+            </a:r>
+            <a:endParaRPr lang="en-US" sz="1200" dirty="0"/>
+          </a:p>
+        </p:txBody>
+      </p:sp>
+      <p:sp>
+        <p:nvSpPr>
+          <p:cNvPr id="20" name="Shape 18"/>
+          <p:cNvSpPr/>
+          <p:nvPr/>
+        </p:nvSpPr>
+        <p:spPr>
+          <a:xfrm>
+            <a:off x="320040" y="3913632"/>
+            <a:ext cx="4251960" cy="804672"/>
+          </a:xfrm>
+          <a:prstGeom prst="rect">
+            <a:avLst/>
+          </a:prstGeom>
+          <a:solidFill>
+            <a:srgbClr val="FFFFFF"/>
+          </a:solidFill>
+          <a:ln w="12700">
+            <a:solidFill>
+              <a:srgbClr val="CBD5E1"/>
+            </a:solidFill>
+            <a:prstDash val="solid"/>
+          </a:ln>
+          <a:effectLst>
+            <a:outerShdw blurRad="76200" dist="25400" dir="8100000" algn="bl" rotWithShape="0">
+              <a:srgbClr val="000000">
+                <a:alpha val="8000"/>
+              </a:srgbClr>
+            </a:outerShdw>
+          </a:effectLst>
+        </p:spPr>
+      </p:sp>
+      <p:sp>
+        <p:nvSpPr>
+          <p:cNvPr id="21" name="Shape 19"/>
+          <p:cNvSpPr/>
+          <p:nvPr/>
+        </p:nvSpPr>
+        <p:spPr>
+          <a:xfrm>
+            <a:off x="320040" y="3913632"/>
+            <a:ext cx="502920" cy="804672"/>
+          </a:xfrm>
+          <a:prstGeom prst="rect">
+            <a:avLst/>
+          </a:prstGeom>
+          <a:solidFill>
+            <a:srgbClr val="0D7377"/>
+          </a:solidFill>
+          <a:ln w="12700">
+            <a:solidFill>
+              <a:srgbClr val="0D7377"/>
+            </a:solidFill>
+            <a:prstDash val="solid"/>
+          </a:ln>
+        </p:spPr>
+      </p:sp>
+      <p:sp>
+        <p:nvSpPr>
+          <p:cNvPr id="22" name="Text 20"/>
+          <p:cNvSpPr/>
+          <p:nvPr/>
+        </p:nvSpPr>
+        <p:spPr>
+          <a:xfrm>
+            <a:off x="338328" y="4078224"/>
+            <a:ext cx="475488" cy="457200"/>
+          </a:xfrm>
+          <a:prstGeom prst="rect">
+            <a:avLst/>
+          </a:prstGeom>
+          <a:noFill/>
+          <a:ln/>
+        </p:spPr>
+        <p:txBody>
+          <a:bodyPr wrap="square" lIns="0" tIns="0" rIns="0" bIns="0" rtlCol="0" anchor="ctr"/>
+          <a:lstStyle/>
+          <a:p>
+            <a:pPr marL="0" indent="0" algn="ctr">
+              <a:buNone/>
+            </a:pPr>
+            <a:r>
+              <a:rPr lang="en-US" sz="1800" b="1" dirty="0">
+                <a:solidFill>
+                  <a:srgbClr val="FFFFFF"/>
+                </a:solidFill>
+                <a:latin typeface="Calibri" pitchFamily="34" charset="0"/>
+                <a:ea typeface="Calibri" pitchFamily="34" charset="-122"/>
+                <a:cs typeface="Calibri" pitchFamily="34" charset="-120"/>
+              </a:rPr>
+              <a:t>04</a:t>
+            </a:r>
+            <a:endParaRPr lang="en-US" sz="1800" dirty="0"/>
+          </a:p>
+        </p:txBody>
+      </p:sp>
+      <p:sp>
+        <p:nvSpPr>
+          <p:cNvPr id="23" name="Text 21"/>
+          <p:cNvSpPr/>
+          <p:nvPr/>
+        </p:nvSpPr>
+        <p:spPr>
+          <a:xfrm>
+            <a:off x="886968" y="3986784"/>
+            <a:ext cx="3593592" cy="320040"/>
+          </a:xfrm>
+          <a:prstGeom prst="rect">
+            <a:avLst/>
+          </a:prstGeom>
+          <a:noFill/>
+          <a:ln/>
+        </p:spPr>
+        <p:txBody>
+          <a:bodyPr wrap="square" lIns="0" tIns="0" rIns="0" bIns="0" rtlCol="0" anchor="ctr"/>
+          <a:lstStyle/>
+          <a:p>
+            <a:pPr marL="0" indent="0">
+              <a:buNone/>
+            </a:pPr>
+            <a:r>
+              <a:rPr lang="en-US" b="1" dirty="0">
+                <a:latin typeface="Calibri" pitchFamily="34" charset="0"/>
+                <a:ea typeface="Calibri" pitchFamily="34" charset="-122"/>
+                <a:cs typeface="Calibri" pitchFamily="34" charset="-120"/>
+              </a:rPr>
+              <a:t>Methodology &amp; Simulation Setup</a:t>
+            </a:r>
+            <a:endParaRPr lang="en-US" dirty="0"/>
+          </a:p>
+        </p:txBody>
+      </p:sp>
+      <p:sp>
+        <p:nvSpPr>
+          <p:cNvPr id="24" name="Text 22"/>
+          <p:cNvSpPr/>
+          <p:nvPr/>
+        </p:nvSpPr>
+        <p:spPr>
+          <a:xfrm>
+            <a:off x="886968" y="4334256"/>
+            <a:ext cx="3593592" cy="310896"/>
+          </a:xfrm>
+          <a:prstGeom prst="rect">
+            <a:avLst/>
+          </a:prstGeom>
+          <a:noFill/>
+          <a:ln/>
+        </p:spPr>
+        <p:txBody>
+          <a:bodyPr wrap="square" lIns="0" tIns="0" rIns="0" bIns="0" rtlCol="0" anchor="ctr"/>
+          <a:lstStyle/>
+          <a:p>
+            <a:pPr marL="0" indent="0">
+              <a:buNone/>
+            </a:pPr>
+            <a:r>
+              <a:rPr lang="en-US" sz="1200" dirty="0">
+                <a:latin typeface="Calibri" pitchFamily="34" charset="0"/>
+                <a:ea typeface="Calibri" pitchFamily="34" charset="-122"/>
+                <a:cs typeface="Calibri" pitchFamily="34" charset="-120"/>
+              </a:rPr>
+              <a:t>SUMO environment, road network, charging stations</a:t>
+            </a:r>
+            <a:endParaRPr lang="en-US" sz="1200" dirty="0"/>
+          </a:p>
+        </p:txBody>
+      </p:sp>
+      <p:sp>
+        <p:nvSpPr>
+          <p:cNvPr id="25" name="Shape 23"/>
+          <p:cNvSpPr/>
+          <p:nvPr/>
+        </p:nvSpPr>
+        <p:spPr>
+          <a:xfrm>
+            <a:off x="4800600" y="1115568"/>
+            <a:ext cx="4023360" cy="804672"/>
+          </a:xfrm>
+          <a:prstGeom prst="rect">
+            <a:avLst/>
+          </a:prstGeom>
+          <a:solidFill>
+            <a:srgbClr val="FFFFFF"/>
+          </a:solidFill>
+          <a:ln w="12700">
+            <a:solidFill>
+              <a:srgbClr val="CBD5E1"/>
+            </a:solidFill>
+            <a:prstDash val="solid"/>
+          </a:ln>
+          <a:effectLst>
+            <a:outerShdw blurRad="76200" dist="25400" dir="8100000" algn="bl" rotWithShape="0">
+              <a:srgbClr val="000000">
+                <a:alpha val="8000"/>
+              </a:srgbClr>
+            </a:outerShdw>
+          </a:effectLst>
+        </p:spPr>
+      </p:sp>
+      <p:sp>
+        <p:nvSpPr>
+          <p:cNvPr id="26" name="Shape 24"/>
+          <p:cNvSpPr/>
+          <p:nvPr/>
+        </p:nvSpPr>
+        <p:spPr>
+          <a:xfrm>
+            <a:off x="4800600" y="1115568"/>
+            <a:ext cx="502920" cy="804672"/>
+          </a:xfrm>
+          <a:prstGeom prst="rect">
+            <a:avLst/>
+          </a:prstGeom>
+          <a:solidFill>
+            <a:srgbClr val="0D7377"/>
+          </a:solidFill>
+          <a:ln w="12700">
+            <a:solidFill>
+              <a:srgbClr val="0D7377"/>
+            </a:solidFill>
+            <a:prstDash val="solid"/>
+          </a:ln>
+        </p:spPr>
+      </p:sp>
+      <p:sp>
+        <p:nvSpPr>
+          <p:cNvPr id="27" name="Text 25"/>
+          <p:cNvSpPr/>
+          <p:nvPr/>
+        </p:nvSpPr>
+        <p:spPr>
+          <a:xfrm>
+            <a:off x="4818888" y="1280160"/>
+            <a:ext cx="475488" cy="457200"/>
+          </a:xfrm>
+          <a:prstGeom prst="rect">
+            <a:avLst/>
+          </a:prstGeom>
+          <a:noFill/>
+          <a:ln/>
+        </p:spPr>
+        <p:txBody>
+          <a:bodyPr wrap="square" lIns="0" tIns="0" rIns="0" bIns="0" rtlCol="0" anchor="ctr"/>
+          <a:lstStyle/>
+          <a:p>
+            <a:pPr marL="0" indent="0" algn="ctr">
+              <a:buNone/>
+            </a:pPr>
+            <a:r>
+              <a:rPr lang="en-US" sz="1800" b="1" dirty="0">
+                <a:solidFill>
+                  <a:srgbClr val="FFFFFF"/>
+                </a:solidFill>
+                <a:latin typeface="Calibri" pitchFamily="34" charset="0"/>
+                <a:ea typeface="Calibri" pitchFamily="34" charset="-122"/>
+                <a:cs typeface="Calibri" pitchFamily="34" charset="-120"/>
+              </a:rPr>
+              <a:t>05</a:t>
+            </a:r>
+            <a:endParaRPr lang="en-US" sz="1800" dirty="0"/>
+          </a:p>
+        </p:txBody>
+      </p:sp>
+      <p:sp>
+        <p:nvSpPr>
+          <p:cNvPr id="28" name="Text 26"/>
+          <p:cNvSpPr/>
+          <p:nvPr/>
+        </p:nvSpPr>
+        <p:spPr>
+          <a:xfrm>
+            <a:off x="5367528" y="1188720"/>
+            <a:ext cx="3593592" cy="320040"/>
+          </a:xfrm>
+          <a:prstGeom prst="rect">
+            <a:avLst/>
+          </a:prstGeom>
+          <a:noFill/>
+          <a:ln/>
+        </p:spPr>
+        <p:txBody>
+          <a:bodyPr wrap="square" lIns="0" tIns="0" rIns="0" bIns="0" rtlCol="0" anchor="ctr"/>
+          <a:lstStyle/>
+          <a:p>
+            <a:pPr marL="0" indent="0">
+              <a:buNone/>
+            </a:pPr>
+            <a:r>
+              <a:rPr lang="en-US" b="1" dirty="0">
+                <a:latin typeface="Calibri" pitchFamily="34" charset="0"/>
+                <a:ea typeface="Calibri" pitchFamily="34" charset="-122"/>
+                <a:cs typeface="Calibri" pitchFamily="34" charset="-120"/>
+              </a:rPr>
+              <a:t>Dataset &amp; Feature Analysis</a:t>
+            </a:r>
+            <a:endParaRPr lang="en-US" dirty="0"/>
+          </a:p>
+        </p:txBody>
+      </p:sp>
+      <p:sp>
+        <p:nvSpPr>
+          <p:cNvPr id="29" name="Text 27"/>
+          <p:cNvSpPr/>
+          <p:nvPr/>
+        </p:nvSpPr>
+        <p:spPr>
+          <a:xfrm>
+            <a:off x="5367528" y="1536192"/>
+            <a:ext cx="3593592" cy="310896"/>
+          </a:xfrm>
+          <a:prstGeom prst="rect">
+            <a:avLst/>
+          </a:prstGeom>
+          <a:noFill/>
+          <a:ln/>
+        </p:spPr>
+        <p:txBody>
+          <a:bodyPr wrap="square" lIns="0" tIns="0" rIns="0" bIns="0" rtlCol="0" anchor="ctr"/>
+          <a:lstStyle/>
+          <a:p>
+            <a:pPr marL="0" indent="0">
+              <a:buNone/>
+            </a:pPr>
+            <a:r>
+              <a:rPr lang="en-US" sz="1200" dirty="0">
+                <a:latin typeface="Calibri" pitchFamily="34" charset="0"/>
+                <a:ea typeface="Calibri" pitchFamily="34" charset="-122"/>
+                <a:cs typeface="Calibri" pitchFamily="34" charset="-120"/>
+              </a:rPr>
+              <a:t>Generated dataset, correlation, feature importance</a:t>
+            </a:r>
+            <a:endParaRPr lang="en-US" sz="1200" dirty="0"/>
+          </a:p>
+        </p:txBody>
+      </p:sp>
+      <p:sp>
+        <p:nvSpPr>
+          <p:cNvPr id="30" name="Shape 28"/>
+          <p:cNvSpPr/>
+          <p:nvPr/>
+        </p:nvSpPr>
+        <p:spPr>
+          <a:xfrm>
+            <a:off x="4800600" y="2048256"/>
+            <a:ext cx="4023360" cy="804672"/>
+          </a:xfrm>
+          <a:prstGeom prst="rect">
+            <a:avLst/>
+          </a:prstGeom>
+          <a:solidFill>
+            <a:srgbClr val="FFFFFF"/>
+          </a:solidFill>
+          <a:ln w="12700">
+            <a:solidFill>
+              <a:srgbClr val="CBD5E1"/>
+            </a:solidFill>
+            <a:prstDash val="solid"/>
+          </a:ln>
+          <a:effectLst>
+            <a:outerShdw blurRad="76200" dist="25400" dir="8100000" algn="bl" rotWithShape="0">
+              <a:srgbClr val="000000">
+                <a:alpha val="8000"/>
+              </a:srgbClr>
+            </a:outerShdw>
+          </a:effectLst>
+        </p:spPr>
+      </p:sp>
+      <p:sp>
+        <p:nvSpPr>
+          <p:cNvPr id="31" name="Shape 29"/>
+          <p:cNvSpPr/>
+          <p:nvPr/>
+        </p:nvSpPr>
+        <p:spPr>
+          <a:xfrm>
+            <a:off x="4800600" y="2048256"/>
+            <a:ext cx="502920" cy="804672"/>
+          </a:xfrm>
+          <a:prstGeom prst="rect">
+            <a:avLst/>
+          </a:prstGeom>
+          <a:solidFill>
+            <a:srgbClr val="0D7377"/>
+          </a:solidFill>
+          <a:ln w="12700">
+            <a:solidFill>
+              <a:srgbClr val="0D7377"/>
+            </a:solidFill>
+            <a:prstDash val="solid"/>
+          </a:ln>
+        </p:spPr>
+      </p:sp>
+      <p:sp>
+        <p:nvSpPr>
+          <p:cNvPr id="32" name="Text 30"/>
+          <p:cNvSpPr/>
+          <p:nvPr/>
+        </p:nvSpPr>
+        <p:spPr>
+          <a:xfrm>
+            <a:off x="4818888" y="2212848"/>
+            <a:ext cx="475488" cy="457200"/>
+          </a:xfrm>
+          <a:prstGeom prst="rect">
+            <a:avLst/>
+          </a:prstGeom>
+          <a:noFill/>
+          <a:ln/>
+        </p:spPr>
+        <p:txBody>
+          <a:bodyPr wrap="square" lIns="0" tIns="0" rIns="0" bIns="0" rtlCol="0" anchor="ctr"/>
+          <a:lstStyle/>
+          <a:p>
+            <a:pPr marL="0" indent="0" algn="ctr">
+              <a:buNone/>
+            </a:pPr>
+            <a:r>
+              <a:rPr lang="en-US" sz="1800" b="1" dirty="0">
+                <a:solidFill>
+                  <a:srgbClr val="FFFFFF"/>
+                </a:solidFill>
+                <a:latin typeface="Calibri" pitchFamily="34" charset="0"/>
+                <a:ea typeface="Calibri" pitchFamily="34" charset="-122"/>
+                <a:cs typeface="Calibri" pitchFamily="34" charset="-120"/>
+              </a:rPr>
+              <a:t>06</a:t>
+            </a:r>
+            <a:endParaRPr lang="en-US" sz="1800" dirty="0"/>
+          </a:p>
+        </p:txBody>
+      </p:sp>
+      <p:sp>
+        <p:nvSpPr>
+          <p:cNvPr id="33" name="Text 31"/>
+          <p:cNvSpPr/>
+          <p:nvPr/>
+        </p:nvSpPr>
+        <p:spPr>
+          <a:xfrm>
+            <a:off x="5367528" y="2121408"/>
+            <a:ext cx="3593592" cy="320040"/>
+          </a:xfrm>
+          <a:prstGeom prst="rect">
+            <a:avLst/>
+          </a:prstGeom>
+          <a:noFill/>
+          <a:ln/>
+        </p:spPr>
+        <p:txBody>
+          <a:bodyPr wrap="square" lIns="0" tIns="0" rIns="0" bIns="0" rtlCol="0" anchor="ctr"/>
+          <a:lstStyle/>
+          <a:p>
+            <a:pPr marL="0" indent="0">
+              <a:buNone/>
+            </a:pPr>
+            <a:r>
+              <a:rPr lang="en-US" b="1" dirty="0">
+                <a:latin typeface="Calibri" pitchFamily="34" charset="0"/>
+                <a:ea typeface="Calibri" pitchFamily="34" charset="-122"/>
+                <a:cs typeface="Calibri" pitchFamily="34" charset="-120"/>
+              </a:rPr>
+              <a:t>ML Models &amp; Results</a:t>
+            </a:r>
+            <a:endParaRPr lang="en-US" dirty="0"/>
+          </a:p>
+        </p:txBody>
+      </p:sp>
+      <p:sp>
+        <p:nvSpPr>
+          <p:cNvPr id="34" name="Text 32"/>
+          <p:cNvSpPr/>
+          <p:nvPr/>
+        </p:nvSpPr>
+        <p:spPr>
+          <a:xfrm>
+            <a:off x="5367528" y="2468880"/>
+            <a:ext cx="3593592" cy="310896"/>
+          </a:xfrm>
+          <a:prstGeom prst="rect">
+            <a:avLst/>
+          </a:prstGeom>
+          <a:noFill/>
+          <a:ln/>
+        </p:spPr>
+        <p:txBody>
+          <a:bodyPr wrap="square" lIns="0" tIns="0" rIns="0" bIns="0" rtlCol="0" anchor="ctr"/>
+          <a:lstStyle/>
+          <a:p>
+            <a:pPr marL="0" indent="0">
+              <a:buNone/>
+            </a:pPr>
+            <a:r>
+              <a:rPr lang="en-US" sz="1200" dirty="0">
+                <a:latin typeface="Calibri" pitchFamily="34" charset="0"/>
+                <a:ea typeface="Calibri" pitchFamily="34" charset="-122"/>
+                <a:cs typeface="Calibri" pitchFamily="34" charset="-120"/>
+              </a:rPr>
+              <a:t>Seven models evaluated, comparative analysis</a:t>
+            </a:r>
+            <a:endParaRPr lang="en-US" sz="1200" dirty="0"/>
+          </a:p>
+        </p:txBody>
+      </p:sp>
+      <p:sp>
+        <p:nvSpPr>
+          <p:cNvPr id="35" name="Shape 33"/>
+          <p:cNvSpPr/>
+          <p:nvPr/>
+        </p:nvSpPr>
+        <p:spPr>
+          <a:xfrm>
+            <a:off x="4800600" y="2980944"/>
+            <a:ext cx="4023360" cy="804672"/>
+          </a:xfrm>
+          <a:prstGeom prst="rect">
+            <a:avLst/>
+          </a:prstGeom>
+          <a:solidFill>
+            <a:srgbClr val="FFFFFF"/>
+          </a:solidFill>
+          <a:ln w="12700">
+            <a:solidFill>
+              <a:srgbClr val="CBD5E1"/>
+            </a:solidFill>
+            <a:prstDash val="solid"/>
+          </a:ln>
+          <a:effectLst>
+            <a:outerShdw blurRad="76200" dist="25400" dir="8100000" algn="bl" rotWithShape="0">
+              <a:srgbClr val="000000">
+                <a:alpha val="8000"/>
+              </a:srgbClr>
+            </a:outerShdw>
+          </a:effectLst>
+        </p:spPr>
+      </p:sp>
+      <p:sp>
+        <p:nvSpPr>
+          <p:cNvPr id="36" name="Shape 34"/>
+          <p:cNvSpPr/>
+          <p:nvPr/>
+        </p:nvSpPr>
+        <p:spPr>
+          <a:xfrm>
+            <a:off x="4800600" y="2980944"/>
+            <a:ext cx="502920" cy="804672"/>
+          </a:xfrm>
+          <a:prstGeom prst="rect">
+            <a:avLst/>
+          </a:prstGeom>
+          <a:solidFill>
+            <a:srgbClr val="0D7377"/>
+          </a:solidFill>
+          <a:ln w="12700">
+            <a:solidFill>
+              <a:srgbClr val="0D7377"/>
+            </a:solidFill>
+            <a:prstDash val="solid"/>
+          </a:ln>
+        </p:spPr>
+      </p:sp>
+      <p:sp>
+        <p:nvSpPr>
+          <p:cNvPr id="37" name="Text 35"/>
+          <p:cNvSpPr/>
+          <p:nvPr/>
+        </p:nvSpPr>
+        <p:spPr>
+          <a:xfrm>
+            <a:off x="4818888" y="3145536"/>
+            <a:ext cx="475488" cy="457200"/>
+          </a:xfrm>
+          <a:prstGeom prst="rect">
+            <a:avLst/>
+          </a:prstGeom>
+          <a:noFill/>
+          <a:ln/>
+        </p:spPr>
+        <p:txBody>
+          <a:bodyPr wrap="square" lIns="0" tIns="0" rIns="0" bIns="0" rtlCol="0" anchor="ctr"/>
+          <a:lstStyle/>
+          <a:p>
+            <a:pPr marL="0" indent="0" algn="ctr">
+              <a:buNone/>
+            </a:pPr>
+            <a:r>
+              <a:rPr lang="en-US" sz="1800" b="1" dirty="0">
+                <a:solidFill>
+                  <a:srgbClr val="FFFFFF"/>
+                </a:solidFill>
+                <a:latin typeface="Calibri" pitchFamily="34" charset="0"/>
+                <a:ea typeface="Calibri" pitchFamily="34" charset="-122"/>
+                <a:cs typeface="Calibri" pitchFamily="34" charset="-120"/>
+              </a:rPr>
+              <a:t>07</a:t>
+            </a:r>
+            <a:endParaRPr lang="en-US" sz="1800" dirty="0"/>
+          </a:p>
+        </p:txBody>
+      </p:sp>
+      <p:sp>
+        <p:nvSpPr>
+          <p:cNvPr id="38" name="Text 36"/>
+          <p:cNvSpPr/>
+          <p:nvPr/>
+        </p:nvSpPr>
+        <p:spPr>
+          <a:xfrm>
+            <a:off x="5367528" y="3054096"/>
+            <a:ext cx="3593592" cy="320040"/>
+          </a:xfrm>
+          <a:prstGeom prst="rect">
+            <a:avLst/>
+          </a:prstGeom>
+          <a:noFill/>
+          <a:ln/>
+        </p:spPr>
+        <p:txBody>
+          <a:bodyPr wrap="square" lIns="0" tIns="0" rIns="0" bIns="0" rtlCol="0" anchor="ctr"/>
+          <a:lstStyle/>
+          <a:p>
+            <a:pPr marL="0" indent="0">
+              <a:buNone/>
+            </a:pPr>
+            <a:r>
+              <a:rPr lang="en-US" b="1" dirty="0">
+                <a:latin typeface="Calibri" pitchFamily="34" charset="0"/>
+                <a:ea typeface="Calibri" pitchFamily="34" charset="-122"/>
+                <a:cs typeface="Calibri" pitchFamily="34" charset="-120"/>
+              </a:rPr>
+              <a:t>Implications &amp; Conclusion</a:t>
+            </a:r>
+            <a:endParaRPr lang="en-US" dirty="0"/>
+          </a:p>
+        </p:txBody>
+      </p:sp>
+      <p:sp>
+        <p:nvSpPr>
+          <p:cNvPr id="39" name="Text 37"/>
+          <p:cNvSpPr/>
+          <p:nvPr/>
+        </p:nvSpPr>
+        <p:spPr>
+          <a:xfrm>
+            <a:off x="5367528" y="3401568"/>
+            <a:ext cx="3593592" cy="310896"/>
+          </a:xfrm>
+          <a:prstGeom prst="rect">
+            <a:avLst/>
+          </a:prstGeom>
+          <a:noFill/>
+          <a:ln/>
+        </p:spPr>
+        <p:txBody>
+          <a:bodyPr wrap="square" lIns="0" tIns="0" rIns="0" bIns="0" rtlCol="0" anchor="ctr"/>
+          <a:lstStyle/>
+          <a:p>
+            <a:pPr marL="0" indent="0">
+              <a:buNone/>
+            </a:pPr>
+            <a:r>
+              <a:rPr lang="en-US" sz="1200" dirty="0">
+                <a:latin typeface="Calibri" pitchFamily="34" charset="0"/>
+                <a:ea typeface="Calibri" pitchFamily="34" charset="-122"/>
+                <a:cs typeface="Calibri" pitchFamily="34" charset="-120"/>
+              </a:rPr>
+              <a:t>Key findings, limitations, future work</a:t>
+            </a:r>
+            <a:endParaRPr lang="en-US" sz="1200" dirty="0"/>
+          </a:p>
+        </p:txBody>
+      </p:sp>
+    </p:spTree>
+  </p:cSld>
+  <p:clrMapOvr>
+    <a:masterClrMapping/>
+  </p:clrMapOvr>
+</p:sld>
+</file>
+
+<file path=ppt/slides/slide20.xml><?xml version="1.0" encoding="utf-8"?>
+<p:sld xmlns:a="http://schemas.openxmlformats.org/drawingml/2006/main" xmlns:r="http://schemas.openxmlformats.org/officeDocument/2006/relationships" xmlns:p="http://schemas.openxmlformats.org/presentationml/2006/main">
+  <p:cSld>
+    <p:spTree>
+      <p:nvGrpSpPr>
+        <p:cNvPr id="1" name=""/>
+        <p:cNvGrpSpPr/>
+        <p:nvPr/>
+      </p:nvGrpSpPr>
+      <p:grpSpPr>
+        <a:xfrm>
+          <a:off x="0" y="0"/>
+          <a:ext cx="0" cy="0"/>
+          <a:chOff x="0" y="0"/>
+          <a:chExt cx="0" cy="0"/>
+        </a:xfrm>
+      </p:grpSpPr>
+      <p:sp>
+        <p:nvSpPr>
+          <p:cNvPr id="2" name="Shape 0"/>
+          <p:cNvSpPr/>
+          <p:nvPr/>
+        </p:nvSpPr>
+        <p:spPr>
+          <a:xfrm>
+            <a:off x="0" y="0"/>
+            <a:ext cx="164592" cy="5143500"/>
+          </a:xfrm>
+          <a:prstGeom prst="rect">
+            <a:avLst/>
+          </a:prstGeom>
+          <a:solidFill>
+            <a:srgbClr val="1B3A6B"/>
+          </a:solidFill>
+          <a:ln w="12700">
+            <a:solidFill>
+              <a:srgbClr val="1B3A6B"/>
+            </a:solidFill>
+            <a:prstDash val="solid"/>
+          </a:ln>
+        </p:spPr>
+      </p:sp>
+      <p:sp>
+        <p:nvSpPr>
+          <p:cNvPr id="3" name="Text 1"/>
+          <p:cNvSpPr/>
+          <p:nvPr/>
+        </p:nvSpPr>
+        <p:spPr>
+          <a:xfrm>
+            <a:off x="320040" y="201168"/>
+            <a:ext cx="8503920" cy="493776"/>
+          </a:xfrm>
+          <a:prstGeom prst="rect">
+            <a:avLst/>
+          </a:prstGeom>
+          <a:noFill/>
+          <a:ln/>
+        </p:spPr>
+        <p:txBody>
+          <a:bodyPr wrap="square" lIns="0" tIns="0" rIns="0" bIns="0" rtlCol="0" anchor="ctr"/>
+          <a:lstStyle/>
+          <a:p>
+            <a:pPr marL="0" indent="0">
+              <a:buNone/>
+            </a:pPr>
+            <a:r>
+              <a:rPr lang="en-US" sz="2600" b="1" dirty="0">
+                <a:solidFill>
+                  <a:srgbClr val="1B3A6B"/>
+                </a:solidFill>
+                <a:latin typeface="Calibri" pitchFamily="34" charset="0"/>
+              </a:rPr>
+              <a:t>Model Performance Comparison</a:t>
+            </a:r>
+          </a:p>
+        </p:txBody>
+      </p:sp>
+      <p:sp>
+        <p:nvSpPr>
+          <p:cNvPr id="4" name="Text 2"/>
+          <p:cNvSpPr/>
+          <p:nvPr/>
+        </p:nvSpPr>
+        <p:spPr>
+          <a:xfrm>
+            <a:off x="320040" y="694944"/>
+            <a:ext cx="8229600" cy="274320"/>
+          </a:xfrm>
+          <a:prstGeom prst="rect">
+            <a:avLst/>
+          </a:prstGeom>
+          <a:noFill/>
+          <a:ln/>
+        </p:spPr>
+        <p:txBody>
+          <a:bodyPr wrap="square" lIns="0" tIns="0" rIns="0" bIns="0" rtlCol="0" anchor="ctr"/>
+          <a:lstStyle/>
+          <a:p>
+            <a:pPr marL="0" indent="0">
+              <a:buNone/>
+            </a:pPr>
+            <a:r>
+              <a:rPr lang="en-US" sz="1300" i="1" dirty="0">
+                <a:solidFill>
+                  <a:srgbClr val="64748B"/>
+                </a:solidFill>
+                <a:latin typeface="Calibri" pitchFamily="34" charset="0"/>
+              </a:rPr>
+              <a:t>Error Metrics: MAE, MSE, RMSE, MAPE  (lower is better)</a:t>
+            </a:r>
+          </a:p>
+        </p:txBody>
+      </p:sp>
+      <p:sp>
+        <p:nvSpPr>
+          <p:cNvPr id="5" name="Shape 3"/>
+          <p:cNvSpPr/>
+          <p:nvPr/>
+        </p:nvSpPr>
+        <p:spPr>
+          <a:xfrm>
+            <a:off x="320040" y="960120"/>
+            <a:ext cx="8503920" cy="36576"/>
+          </a:xfrm>
+          <a:prstGeom prst="rect">
+            <a:avLst/>
+          </a:prstGeom>
+          <a:solidFill>
+            <a:srgbClr val="0D7377"/>
+          </a:solidFill>
+          <a:ln w="12700">
+            <a:solidFill>
+              <a:srgbClr val="0D7377"/>
+            </a:solidFill>
+            <a:prstDash val="solid"/>
+          </a:ln>
+        </p:spPr>
+      </p:sp>
+      <p:sp>
+        <p:nvSpPr>
+          <p:cNvPr id="6" name="Shape 4"/>
+          <p:cNvSpPr/>
+          <p:nvPr/>
+        </p:nvSpPr>
+        <p:spPr>
+          <a:xfrm>
+            <a:off x="320040" y="1042416"/>
+            <a:ext cx="4069080" cy="2743200"/>
+          </a:xfrm>
+          <a:prstGeom prst="rect">
+            <a:avLst/>
+          </a:prstGeom>
+          <a:solidFill>
+            <a:srgbClr val="FFFFFF"/>
+          </a:solidFill>
+          <a:ln w="12700">
+            <a:solidFill>
+              <a:srgbClr val="CBD5E1"/>
+            </a:solidFill>
+            <a:prstDash val="solid"/>
+          </a:ln>
+          <a:effectLst>
+            <a:outerShdw blurRad="76200" dist="25400" dir="8100000" algn="bl" rotWithShape="0">
+              <a:srgbClr val="000000">
+                <a:alpha val="8000"/>
+              </a:srgbClr>
+            </a:outerShdw>
+          </a:effectLst>
+        </p:spPr>
+      </p:sp>
+      <p:pic>
+        <p:nvPicPr>
+          <p:cNvPr id="7" name="Image 0" descr="preencoded.png"/>
+          <p:cNvPicPr>
+            <a:picLocks noChangeAspect="1"/>
+          </p:cNvPicPr>
+          <p:nvPr/>
+        </p:nvPicPr>
+        <p:blipFill>
+          <a:blip r:embed="rId3"/>
+          <a:srcRect/>
+          <a:stretch/>
+        </p:blipFill>
+        <p:spPr>
+          <a:xfrm>
+            <a:off x="411480" y="1133856"/>
+            <a:ext cx="3886200" cy="2560320"/>
+          </a:xfrm>
+          <a:prstGeom prst="rect">
+            <a:avLst/>
+          </a:prstGeom>
+        </p:spPr>
+      </p:pic>
+      <p:sp>
+        <p:nvSpPr>
+          <p:cNvPr id="8" name="Text 8"/>
+          <p:cNvSpPr/>
+          <p:nvPr/>
+        </p:nvSpPr>
+        <p:spPr>
+          <a:xfrm>
+            <a:off x="320040" y="3785616"/>
+            <a:ext cx="4069080" cy="201168"/>
+          </a:xfrm>
+          <a:prstGeom prst="rect">
+            <a:avLst/>
+          </a:prstGeom>
+          <a:noFill/>
+          <a:ln/>
+        </p:spPr>
+        <p:txBody>
+          <a:bodyPr wrap="square" lIns="0" tIns="0" rIns="0" bIns="0" rtlCol="0" anchor="ctr"/>
+          <a:lstStyle/>
+          <a:p>
+            <a:pPr marL="0" indent="0" algn="ctr">
+              <a:buNone/>
+            </a:pPr>
+            <a:r>
+              <a:rPr lang="en-US" sz="1100" b="1" dirty="0">
+                <a:solidFill>
+                  <a:srgbClr val="1B3A6B"/>
+                </a:solidFill>
+                <a:latin typeface="Calibri" pitchFamily="34" charset="0"/>
+              </a:rPr>
+              <a:t>MAE &amp; MSE</a:t>
+            </a:r>
+          </a:p>
+        </p:txBody>
+      </p:sp>
+      <p:sp>
+        <p:nvSpPr>
+          <p:cNvPr id="9" name="Shape 5"/>
+          <p:cNvSpPr/>
+          <p:nvPr/>
+        </p:nvSpPr>
+        <p:spPr>
+          <a:xfrm>
+            <a:off x="4754880" y="1042416"/>
+            <a:ext cx="4069080" cy="2743200"/>
+          </a:xfrm>
+          <a:prstGeom prst="rect">
+            <a:avLst/>
+          </a:prstGeom>
+          <a:solidFill>
+            <a:srgbClr val="FFFFFF"/>
+          </a:solidFill>
+          <a:ln w="12700">
+            <a:solidFill>
+              <a:srgbClr val="CBD5E1"/>
+            </a:solidFill>
+            <a:prstDash val="solid"/>
+          </a:ln>
+          <a:effectLst>
+            <a:outerShdw blurRad="76200" dist="25400" dir="8100000" algn="bl" rotWithShape="0">
+              <a:srgbClr val="000000">
+                <a:alpha val="8000"/>
+              </a:srgbClr>
+            </a:outerShdw>
+          </a:effectLst>
+        </p:spPr>
+      </p:sp>
+      <p:pic>
+        <p:nvPicPr>
+          <p:cNvPr id="10" name="Image 1" descr="preencoded.png"/>
+          <p:cNvPicPr>
+            <a:picLocks noChangeAspect="1"/>
+          </p:cNvPicPr>
+          <p:nvPr/>
+        </p:nvPicPr>
+        <p:blipFill>
+          <a:blip r:embed="rId4"/>
+          <a:srcRect/>
+          <a:stretch/>
+        </p:blipFill>
+        <p:spPr>
+          <a:xfrm>
+            <a:off x="4846320" y="1133856"/>
+            <a:ext cx="3886200" cy="2560320"/>
+          </a:xfrm>
+          <a:prstGeom prst="rect">
+            <a:avLst/>
+          </a:prstGeom>
+        </p:spPr>
+      </p:pic>
+      <p:sp>
+        <p:nvSpPr>
+          <p:cNvPr id="11" name="Text 9"/>
+          <p:cNvSpPr/>
+          <p:nvPr/>
+        </p:nvSpPr>
+        <p:spPr>
+          <a:xfrm>
+            <a:off x="4754880" y="3785616"/>
+            <a:ext cx="4069080" cy="201168"/>
+          </a:xfrm>
+          <a:prstGeom prst="rect">
+            <a:avLst/>
+          </a:prstGeom>
+          <a:noFill/>
+          <a:ln/>
+        </p:spPr>
+        <p:txBody>
+          <a:bodyPr wrap="square" lIns="0" tIns="0" rIns="0" bIns="0" rtlCol="0" anchor="ctr"/>
+          <a:lstStyle/>
+          <a:p>
+            <a:pPr marL="0" indent="0" algn="ctr">
+              <a:buNone/>
+            </a:pPr>
+            <a:r>
+              <a:rPr lang="en-US" sz="1100" b="1" dirty="0">
+                <a:solidFill>
+                  <a:srgbClr val="1B3A6B"/>
+                </a:solidFill>
+                <a:latin typeface="Calibri" pitchFamily="34" charset="0"/>
+              </a:rPr>
+              <a:t>RMSE &amp; MAPE</a:t>
+            </a:r>
+          </a:p>
+        </p:txBody>
+      </p:sp>
+      <p:sp>
+        <p:nvSpPr>
+          <p:cNvPr id="12" name="Shape 6"/>
+          <p:cNvSpPr/>
+          <p:nvPr/>
+        </p:nvSpPr>
+        <p:spPr>
+          <a:xfrm>
+            <a:off x="320040" y="4041648"/>
+            <a:ext cx="8503920" cy="914400"/>
+          </a:xfrm>
+          <a:prstGeom prst="rect">
+            <a:avLst/>
+          </a:prstGeom>
+          <a:solidFill>
+            <a:srgbClr val="EBF4F5"/>
+          </a:solidFill>
+          <a:ln w="19050">
+            <a:solidFill>
+              <a:srgbClr val="0D7377"/>
+            </a:solidFill>
+            <a:prstDash val="solid"/>
+          </a:ln>
+        </p:spPr>
+        <p:txBody>
+          <a:bodyPr wrap="square" lIns="91440" tIns="91440" rIns="91440" bIns="91440" rtlCol="0" anchor="ctr"/>
+          <a:lstStyle/>
+          <a:p>
+            <a:pPr marL="0" indent="0">
+              <a:buNone/>
+            </a:pPr>
+            <a:r>
+              <a:rPr lang="en-US" sz="1100" b="1" dirty="0">
+                <a:solidFill>
+                  <a:srgbClr val="0D7377"/>
+                </a:solidFill>
+                <a:latin typeface="Calibri" pitchFamily="34" charset="0"/>
+              </a:rPr>
+              <a:t>Key Insight:  </a:t>
+            </a:r>
+            <a:r>
+              <a:rPr lang="en-US" sz="1100" dirty="0">
+                <a:solidFill>
+                  <a:srgbClr val="1E293B"/>
+                </a:solidFill>
+                <a:latin typeface="Calibri" pitchFamily="34" charset="0"/>
+              </a:rPr>
+              <a:t>ANN achieves the lowest error across all metrics (MAE=19.2 kW, RMSE=25.5 kW, MAPE=4.72%). Linear Regression ranks 2nd (MAE=25.7 kW), outperforming tree-based ensembles. LSTM and GRU show the highest errors due to their sequential input format.</a:t>
+            </a:r>
+          </a:p>
+        </p:txBody>
+      </p:sp>
+    </p:spTree>
+  </p:cSld>
+  <p:clrMapOvr>
+    <a:masterClrMapping/>
+  </p:clrMapOvr>
+</p:sld>
+</file>
+
+<file path=ppt/slides/slide21.xml><?xml version="1.0" encoding="utf-8"?>
+<p:sld xmlns:a="http://schemas.openxmlformats.org/drawingml/2006/main" xmlns:r="http://schemas.openxmlformats.org/officeDocument/2006/relationships" xmlns:p="http://schemas.openxmlformats.org/presentationml/2006/main">
+  <p:cSld>
+    <p:spTree>
+      <p:nvGrpSpPr>
+        <p:cNvPr id="1" name=""/>
+        <p:cNvGrpSpPr/>
+        <p:nvPr/>
+      </p:nvGrpSpPr>
+      <p:grpSpPr>
+        <a:xfrm>
+          <a:off x="0" y="0"/>
+          <a:ext cx="0" cy="0"/>
+          <a:chOff x="0" y="0"/>
+          <a:chExt cx="0" cy="0"/>
+        </a:xfrm>
+      </p:grpSpPr>
+      <p:sp>
+        <p:nvSpPr>
+          <p:cNvPr id="2" name="Shape 0"/>
+          <p:cNvSpPr/>
+          <p:nvPr/>
+        </p:nvSpPr>
+        <p:spPr>
+          <a:xfrm>
+            <a:off x="0" y="0"/>
+            <a:ext cx="164592" cy="5143500"/>
+          </a:xfrm>
+          <a:prstGeom prst="rect">
+            <a:avLst/>
+          </a:prstGeom>
+          <a:solidFill>
+            <a:srgbClr val="1B3A6B"/>
+          </a:solidFill>
+          <a:ln w="12700">
+            <a:solidFill>
+              <a:srgbClr val="1B3A6B"/>
+            </a:solidFill>
+            <a:prstDash val="solid"/>
+          </a:ln>
+        </p:spPr>
+      </p:sp>
+      <p:sp>
+        <p:nvSpPr>
+          <p:cNvPr id="3" name="Text 1"/>
+          <p:cNvSpPr/>
+          <p:nvPr/>
+        </p:nvSpPr>
+        <p:spPr>
+          <a:xfrm>
+            <a:off x="320040" y="201168"/>
+            <a:ext cx="8503920" cy="493776"/>
+          </a:xfrm>
+          <a:prstGeom prst="rect">
+            <a:avLst/>
+          </a:prstGeom>
+          <a:noFill/>
+          <a:ln/>
+        </p:spPr>
+        <p:txBody>
+          <a:bodyPr wrap="square" lIns="0" tIns="0" rIns="0" bIns="0" rtlCol="0" anchor="ctr"/>
+          <a:lstStyle/>
+          <a:p>
+            <a:pPr marL="0" indent="0">
+              <a:buNone/>
+            </a:pPr>
+            <a:r>
+              <a:rPr lang="en-US" sz="2600" b="1" dirty="0">
+                <a:solidFill>
+                  <a:srgbClr val="1B3A6B"/>
+                </a:solidFill>
+                <a:latin typeface="Calibri" pitchFamily="34" charset="0"/>
+              </a:rPr>
+              <a:t>Model Performance Comparison</a:t>
+            </a:r>
+          </a:p>
+        </p:txBody>
+      </p:sp>
+      <p:sp>
+        <p:nvSpPr>
+          <p:cNvPr id="4" name="Text 2"/>
+          <p:cNvSpPr/>
+          <p:nvPr/>
+        </p:nvSpPr>
+        <p:spPr>
+          <a:xfrm>
+            <a:off x="320040" y="694944"/>
+            <a:ext cx="8229600" cy="274320"/>
+          </a:xfrm>
+          <a:prstGeom prst="rect">
+            <a:avLst/>
+          </a:prstGeom>
+          <a:noFill/>
+          <a:ln/>
+        </p:spPr>
+        <p:txBody>
+          <a:bodyPr wrap="square" lIns="0" tIns="0" rIns="0" bIns="0" rtlCol="0" anchor="ctr"/>
+          <a:lstStyle/>
+          <a:p>
+            <a:pPr marL="0" indent="0">
+              <a:buNone/>
+            </a:pPr>
+            <a:r>
+              <a:rPr lang="en-US" sz="1300" i="1" dirty="0">
+                <a:solidFill>
+                  <a:srgbClr val="64748B"/>
+                </a:solidFill>
+                <a:latin typeface="Calibri" pitchFamily="34" charset="0"/>
+              </a:rPr>
+              <a:t>Fit &amp; Classification Metrics: R² Score, Accuracy, Weighted F1-Score  (higher is better)</a:t>
+            </a:r>
+          </a:p>
+        </p:txBody>
+      </p:sp>
+      <p:sp>
+        <p:nvSpPr>
+          <p:cNvPr id="5" name="Shape 3"/>
+          <p:cNvSpPr/>
+          <p:nvPr/>
+        </p:nvSpPr>
+        <p:spPr>
+          <a:xfrm>
+            <a:off x="320040" y="960120"/>
+            <a:ext cx="8503920" cy="36576"/>
+          </a:xfrm>
+          <a:prstGeom prst="rect">
+            <a:avLst/>
+          </a:prstGeom>
+          <a:solidFill>
+            <a:srgbClr val="0D7377"/>
+          </a:solidFill>
+          <a:ln w="12700">
+            <a:solidFill>
+              <a:srgbClr val="0D7377"/>
+            </a:solidFill>
+            <a:prstDash val="solid"/>
+          </a:ln>
+        </p:spPr>
+      </p:sp>
+      <p:sp>
+        <p:nvSpPr>
+          <p:cNvPr id="6" name="Shape 4"/>
+          <p:cNvSpPr/>
+          <p:nvPr/>
+        </p:nvSpPr>
+        <p:spPr>
+          <a:xfrm>
+            <a:off x="320040" y="1042416"/>
+            <a:ext cx="4069080" cy="2743200"/>
+          </a:xfrm>
+          <a:prstGeom prst="rect">
+            <a:avLst/>
+          </a:prstGeom>
+          <a:solidFill>
+            <a:srgbClr val="FFFFFF"/>
+          </a:solidFill>
+          <a:ln w="12700">
+            <a:solidFill>
+              <a:srgbClr val="CBD5E1"/>
+            </a:solidFill>
+            <a:prstDash val="solid"/>
+          </a:ln>
+          <a:effectLst>
+            <a:outerShdw blurRad="76200" dist="25400" dir="8100000" algn="bl" rotWithShape="0">
+              <a:srgbClr val="000000">
+                <a:alpha val="8000"/>
+              </a:srgbClr>
+            </a:outerShdw>
+          </a:effectLst>
+        </p:spPr>
+      </p:sp>
+      <p:pic>
+        <p:nvPicPr>
+          <p:cNvPr id="7" name="Image 2" descr="preencoded.png"/>
+          <p:cNvPicPr>
+            <a:picLocks noChangeAspect="1"/>
+          </p:cNvPicPr>
+          <p:nvPr/>
+        </p:nvPicPr>
+        <p:blipFill>
+          <a:blip r:embed="rId2"/>
+          <a:srcRect/>
+          <a:stretch/>
+        </p:blipFill>
+        <p:spPr>
+          <a:xfrm>
+            <a:off x="411480" y="1133856"/>
+            <a:ext cx="3886200" cy="2560320"/>
+          </a:xfrm>
+          <a:prstGeom prst="rect">
+            <a:avLst/>
+          </a:prstGeom>
+        </p:spPr>
+      </p:pic>
+      <p:sp>
+        <p:nvSpPr>
+          <p:cNvPr id="8" name="Text 10"/>
+          <p:cNvSpPr/>
+          <p:nvPr/>
+        </p:nvSpPr>
+        <p:spPr>
+          <a:xfrm>
+            <a:off x="320040" y="3785616"/>
+            <a:ext cx="4069080" cy="201168"/>
+          </a:xfrm>
+          <a:prstGeom prst="rect">
+            <a:avLst/>
+          </a:prstGeom>
+          <a:noFill/>
+          <a:ln/>
+        </p:spPr>
+        <p:txBody>
+          <a:bodyPr wrap="square" lIns="0" tIns="0" rIns="0" bIns="0" rtlCol="0" anchor="ctr"/>
+          <a:lstStyle/>
+          <a:p>
+            <a:pPr marL="0" indent="0" algn="ctr">
+              <a:buNone/>
+            </a:pPr>
+            <a:r>
+              <a:rPr lang="en-US" sz="1100" b="1" dirty="0">
+                <a:solidFill>
+                  <a:srgbClr val="1B3A6B"/>
+                </a:solidFill>
+                <a:latin typeface="Calibri" pitchFamily="34" charset="0"/>
+              </a:rPr>
+              <a:t>R² Score</a:t>
+            </a:r>
+          </a:p>
+        </p:txBody>
+      </p:sp>
+      <p:sp>
+        <p:nvSpPr>
+          <p:cNvPr id="9" name="Shape 5"/>
+          <p:cNvSpPr/>
+          <p:nvPr/>
+        </p:nvSpPr>
+        <p:spPr>
+          <a:xfrm>
+            <a:off x="4754880" y="1042416"/>
+            <a:ext cx="4069080" cy="2743200"/>
+          </a:xfrm>
+          <a:prstGeom prst="rect">
+            <a:avLst/>
+          </a:prstGeom>
+          <a:solidFill>
+            <a:srgbClr val="FFFFFF"/>
+          </a:solidFill>
+          <a:ln w="12700">
+            <a:solidFill>
+              <a:srgbClr val="CBD5E1"/>
+            </a:solidFill>
+            <a:prstDash val="solid"/>
+          </a:ln>
+          <a:effectLst>
+            <a:outerShdw blurRad="76200" dist="25400" dir="8100000" algn="bl" rotWithShape="0">
+              <a:srgbClr val="000000">
+                <a:alpha val="8000"/>
+              </a:srgbClr>
+            </a:outerShdw>
+          </a:effectLst>
+        </p:spPr>
+      </p:sp>
+      <p:pic>
+        <p:nvPicPr>
+          <p:cNvPr id="10" name="Image 3" descr="preencoded.png"/>
+          <p:cNvPicPr>
+            <a:picLocks noChangeAspect="1"/>
+          </p:cNvPicPr>
+          <p:nvPr/>
+        </p:nvPicPr>
+        <p:blipFill>
+          <a:blip r:embed="rId3"/>
+          <a:srcRect/>
+          <a:stretch/>
+        </p:blipFill>
+        <p:spPr>
+          <a:xfrm>
+            <a:off x="4846320" y="1133856"/>
+            <a:ext cx="3886200" cy="2560320"/>
+          </a:xfrm>
+          <a:prstGeom prst="rect">
+            <a:avLst/>
+          </a:prstGeom>
+        </p:spPr>
+      </p:pic>
+      <p:sp>
+        <p:nvSpPr>
+          <p:cNvPr id="11" name="Text 11"/>
+          <p:cNvSpPr/>
+          <p:nvPr/>
+        </p:nvSpPr>
+        <p:spPr>
+          <a:xfrm>
+            <a:off x="4754880" y="3785616"/>
+            <a:ext cx="4069080" cy="201168"/>
+          </a:xfrm>
+          <a:prstGeom prst="rect">
+            <a:avLst/>
+          </a:prstGeom>
+          <a:noFill/>
+          <a:ln/>
+        </p:spPr>
+        <p:txBody>
+          <a:bodyPr wrap="square" lIns="0" tIns="0" rIns="0" bIns="0" rtlCol="0" anchor="ctr"/>
+          <a:lstStyle/>
+          <a:p>
+            <a:pPr marL="0" indent="0" algn="ctr">
+              <a:buNone/>
+            </a:pPr>
+            <a:r>
+              <a:rPr lang="en-US" sz="1100" b="1" dirty="0">
+                <a:solidFill>
+                  <a:srgbClr val="1B3A6B"/>
+                </a:solidFill>
+                <a:latin typeface="Calibri" pitchFamily="34" charset="0"/>
+              </a:rPr>
+              <a:t>Accuracy &amp; F1-Score</a:t>
+            </a:r>
+          </a:p>
+        </p:txBody>
+      </p:sp>
+      <p:sp>
+        <p:nvSpPr>
+          <p:cNvPr id="12" name="Shape 6"/>
+          <p:cNvSpPr/>
+          <p:nvPr/>
+        </p:nvSpPr>
+        <p:spPr>
+          <a:xfrm>
+            <a:off x="320040" y="4041648"/>
+            <a:ext cx="8503920" cy="914400"/>
+          </a:xfrm>
+          <a:prstGeom prst="rect">
+            <a:avLst/>
+          </a:prstGeom>
+          <a:solidFill>
+            <a:srgbClr val="EBF4F5"/>
+          </a:solidFill>
+          <a:ln w="19050">
+            <a:solidFill>
+              <a:srgbClr val="0D7377"/>
+            </a:solidFill>
+            <a:prstDash val="solid"/>
+          </a:ln>
+        </p:spPr>
+        <p:txBody>
+          <a:bodyPr wrap="square" lIns="91440" tIns="91440" rIns="91440" bIns="91440" rtlCol="0" anchor="ctr"/>
+          <a:lstStyle/>
+          <a:p>
+            <a:pPr marL="0" indent="0">
+              <a:buNone/>
+            </a:pPr>
+            <a:r>
+              <a:rPr lang="en-US" sz="1100" b="1" dirty="0">
+                <a:solidFill>
+                  <a:srgbClr val="0D7377"/>
+                </a:solidFill>
+                <a:latin typeface="Calibri" pitchFamily="34" charset="0"/>
+              </a:rPr>
+              <a:t>Key Insight:  </a:t>
+            </a:r>
+            <a:r>
+              <a:rPr lang="en-US" sz="1100" dirty="0">
+                <a:solidFill>
+                  <a:srgbClr val="1E293B"/>
+                </a:solidFill>
+                <a:latin typeface="Calibri" pitchFamily="34" charset="0"/>
+              </a:rPr>
+              <a:t>ANN leads with R²=0.9967, Accuracy=95.28%, and F1=0.9234 — best across all fit and classification metrics. All models achieve R² above 0.93. LSTM and GRU show notably lower F1-Scores (0.54 / 0.57), indicating weaker load-category discrimination compared to non-sequential models.</a:t>
+            </a:r>
+          </a:p>
+        </p:txBody>
+      </p:sp>
+    </p:spTree>
+  </p:cSld>
+  <p:clrMapOvr>
+    <a:masterClrMapping/>
+  </p:clrMapOvr>
+</p:sld>
+</file>
+
+<file path=ppt/slides/slide22.xml><?xml version="1.0" encoding="utf-8"?>
 <p:sld xmlns:a="http://schemas.openxmlformats.org/drawingml/2006/main" xmlns:r="http://schemas.openxmlformats.org/officeDocument/2006/relationships" xmlns:p="http://schemas.openxmlformats.org/presentationml/2006/main">
   <p:cSld name="Slide 12">
     <p:bg>
@@ -11589,7 +15348,7 @@
                 <a:ea typeface="Calibri" pitchFamily="34" charset="-122"/>
                 <a:cs typeface="Calibri" pitchFamily="34" charset="-120"/>
               </a:rPr>
-              <a:t>Model Performance Comparison</a:t>
+              <a:t>Model Performance Comparison (All Metrics)</a:t>
             </a:r>
             <a:endParaRPr lang="en-US" sz="2600" dirty="0"/>
           </a:p>
@@ -11887,7 +15646,7 @@
         </p:nvSpPr>
         <p:spPr>
           <a:xfrm>
-            <a:off x="320040" y="2944368"/>
+            <a:off x="320040" y="2913195"/>
             <a:ext cx="4160520" cy="201168"/>
           </a:xfrm>
           <a:prstGeom prst="rect">
@@ -11906,12 +15665,11 @@
             <a:r>
               <a:rPr lang="en-US" sz="950" dirty="0">
                 <a:solidFill>
-                  <a:srgbClr val="64748B"/>
+                  <a:srgbClr val="1B3A6B"/>
                 </a:solidFill>
               </a:rPr>
               <a:t>MAE &amp; MSE</a:t>
             </a:r>
-            <a:endParaRPr lang="en-US" sz="950" dirty="0"/>
           </a:p>
         </p:txBody>
       </p:sp>
@@ -11923,7 +15681,7 @@
         </p:nvSpPr>
         <p:spPr>
           <a:xfrm>
-            <a:off x="4663440" y="2944368"/>
+            <a:off x="4663440" y="2913195"/>
             <a:ext cx="4160520" cy="201168"/>
           </a:xfrm>
           <a:prstGeom prst="rect">
@@ -11942,12 +15700,11 @@
             <a:r>
               <a:rPr lang="en-US" sz="950" dirty="0">
                 <a:solidFill>
-                  <a:srgbClr val="64748B"/>
+                  <a:srgbClr val="1B3A6B"/>
                 </a:solidFill>
               </a:rPr>
               <a:t>RMSE &amp; MAPE</a:t>
             </a:r>
-            <a:endParaRPr lang="en-US" sz="950" dirty="0"/>
           </a:p>
         </p:txBody>
       </p:sp>
@@ -11959,7 +15716,7 @@
         </p:nvSpPr>
         <p:spPr>
           <a:xfrm>
-            <a:off x="320040" y="4846320"/>
+            <a:off x="320040" y="4898275"/>
             <a:ext cx="4160520" cy="201168"/>
           </a:xfrm>
           <a:prstGeom prst="rect">
@@ -11978,12 +15735,11 @@
             <a:r>
               <a:rPr lang="en-US" sz="950" dirty="0">
                 <a:solidFill>
-                  <a:srgbClr val="64748B"/>
+                  <a:srgbClr val="1B3A6B"/>
                 </a:solidFill>
               </a:rPr>
               <a:t>R² Score</a:t>
             </a:r>
-            <a:endParaRPr lang="en-US" sz="950" dirty="0"/>
           </a:p>
         </p:txBody>
       </p:sp>
@@ -11995,7 +15751,7 @@
         </p:nvSpPr>
         <p:spPr>
           <a:xfrm>
-            <a:off x="4663440" y="4846320"/>
+            <a:off x="4663440" y="4898275"/>
             <a:ext cx="4160520" cy="201168"/>
           </a:xfrm>
           <a:prstGeom prst="rect">
@@ -12014,12 +15770,11 @@
             <a:r>
               <a:rPr lang="en-US" sz="950" dirty="0">
                 <a:solidFill>
-                  <a:srgbClr val="64748B"/>
+                  <a:srgbClr val="1B3A6B"/>
                 </a:solidFill>
               </a:rPr>
               <a:t>Accuracy &amp; F1-Score</a:t>
             </a:r>
-            <a:endParaRPr lang="en-US" sz="950" dirty="0"/>
           </a:p>
         </p:txBody>
       </p:sp>
@@ -12031,7 +15786,7 @@
 </p:sld>
 </file>
 
-<file path=ppt/slides/slide18.xml><?xml version="1.0" encoding="utf-8"?>
+<file path=ppt/slides/slide23.xml><?xml version="1.0" encoding="utf-8"?>
 <p:sld xmlns:a="http://schemas.openxmlformats.org/drawingml/2006/main" xmlns:r="http://schemas.openxmlformats.org/officeDocument/2006/relationships" xmlns:p="http://schemas.openxmlformats.org/presentationml/2006/main">
   <p:cSld name="Slide 13">
     <p:bg>
@@ -12193,70 +15948,70 @@
           <p:nvPr>
             <p:extLst>
               <p:ext uri="{D42A27DB-BD31-4B8C-83A1-F6EECF244321}">
-                <p14:modId xmlns:p14="http://schemas.microsoft.com/office/powerpoint/2010/main" val="1579011935"/>
+                <p14:modId xmlns:p14="http://schemas.microsoft.com/office/powerpoint/2010/main" val="501224830"/>
               </p:ext>
             </p:extLst>
           </p:nvPr>
         </p:nvGraphicFramePr>
         <p:xfrm>
-          <a:off x="320040" y="1115568"/>
-          <a:ext cx="8138160" cy="3803904"/>
+          <a:off x="320039" y="1115568"/>
+          <a:ext cx="8503921" cy="3803904"/>
         </p:xfrm>
         <a:graphic>
           <a:graphicData uri="http://schemas.openxmlformats.org/drawingml/2006/table">
             <a:tbl>
               <a:tblPr/>
               <a:tblGrid>
-                <a:gridCol w="1645920">
+                <a:gridCol w="1719894">
                   <a:extLst>
                     <a:ext uri="{9D8B030D-6E8A-4147-A177-3AD203B41FA5}">
                       <a16:colId xmlns:a16="http://schemas.microsoft.com/office/drawing/2014/main" val="20000"/>
                     </a:ext>
                   </a:extLst>
                 </a:gridCol>
-                <a:gridCol w="914400">
+                <a:gridCol w="955497">
                   <a:extLst>
                     <a:ext uri="{9D8B030D-6E8A-4147-A177-3AD203B41FA5}">
                       <a16:colId xmlns:a16="http://schemas.microsoft.com/office/drawing/2014/main" val="20001"/>
                     </a:ext>
                   </a:extLst>
                 </a:gridCol>
-                <a:gridCol w="1005840">
+                <a:gridCol w="1051046">
                   <a:extLst>
                     <a:ext uri="{9D8B030D-6E8A-4147-A177-3AD203B41FA5}">
                       <a16:colId xmlns:a16="http://schemas.microsoft.com/office/drawing/2014/main" val="20002"/>
                     </a:ext>
                   </a:extLst>
                 </a:gridCol>
-                <a:gridCol w="1005840">
+                <a:gridCol w="1051046">
                   <a:extLst>
                     <a:ext uri="{9D8B030D-6E8A-4147-A177-3AD203B41FA5}">
                       <a16:colId xmlns:a16="http://schemas.microsoft.com/office/drawing/2014/main" val="20003"/>
                     </a:ext>
                   </a:extLst>
                 </a:gridCol>
-                <a:gridCol w="914400">
+                <a:gridCol w="955497">
                   <a:extLst>
                     <a:ext uri="{9D8B030D-6E8A-4147-A177-3AD203B41FA5}">
                       <a16:colId xmlns:a16="http://schemas.microsoft.com/office/drawing/2014/main" val="20004"/>
                     </a:ext>
                   </a:extLst>
                 </a:gridCol>
-                <a:gridCol w="822960">
+                <a:gridCol w="859947">
                   <a:extLst>
                     <a:ext uri="{9D8B030D-6E8A-4147-A177-3AD203B41FA5}">
                       <a16:colId xmlns:a16="http://schemas.microsoft.com/office/drawing/2014/main" val="20005"/>
                     </a:ext>
                   </a:extLst>
                 </a:gridCol>
-                <a:gridCol w="914400">
+                <a:gridCol w="955497">
                   <a:extLst>
                     <a:ext uri="{9D8B030D-6E8A-4147-A177-3AD203B41FA5}">
                       <a16:colId xmlns:a16="http://schemas.microsoft.com/office/drawing/2014/main" val="20006"/>
                     </a:ext>
                   </a:extLst>
                 </a:gridCol>
-                <a:gridCol w="914400">
+                <a:gridCol w="955497">
                   <a:extLst>
                     <a:ext uri="{9D8B030D-6E8A-4147-A177-3AD203B41FA5}">
                       <a16:colId xmlns:a16="http://schemas.microsoft.com/office/drawing/2014/main" val="20007"/>
@@ -16720,7 +20475,7 @@
 </p:sld>
 </file>
 
-<file path=ppt/slides/slide19.xml><?xml version="1.0" encoding="utf-8"?>
+<file path=ppt/slides/slide24.xml><?xml version="1.0" encoding="utf-8"?>
 <p:sld xmlns:a="http://schemas.openxmlformats.org/drawingml/2006/main" xmlns:r="http://schemas.openxmlformats.org/officeDocument/2006/relationships" xmlns:p="http://schemas.openxmlformats.org/presentationml/2006/main">
   <p:cSld name="Slide 14">
     <p:bg>
@@ -16978,7 +20733,7 @@
         <p:spPr>
           <a:xfrm>
             <a:off x="4846320" y="1143000"/>
-            <a:ext cx="4251960" cy="1115568"/>
+            <a:ext cx="3977640" cy="1115568"/>
           </a:xfrm>
           <a:prstGeom prst="rect">
             <a:avLst/>
@@ -17010,7 +20765,7 @@
         <p:spPr>
           <a:xfrm>
             <a:off x="4846320" y="1143000"/>
-            <a:ext cx="4251960" cy="201168"/>
+            <a:ext cx="3977640" cy="201168"/>
           </a:xfrm>
           <a:prstGeom prst="rect">
             <a:avLst/>
@@ -17074,7 +20829,7 @@
         <p:spPr>
           <a:xfrm>
             <a:off x="4956048" y="1673352"/>
-            <a:ext cx="4050792" cy="530352"/>
+            <a:ext cx="3867912" cy="530352"/>
           </a:xfrm>
           <a:prstGeom prst="rect">
             <a:avLst/>
@@ -17248,7 +21003,7 @@
         <p:spPr>
           <a:xfrm>
             <a:off x="4846320" y="2404872"/>
-            <a:ext cx="4251960" cy="1115568"/>
+            <a:ext cx="3977640" cy="1115568"/>
           </a:xfrm>
           <a:prstGeom prst="rect">
             <a:avLst/>
@@ -17280,7 +21035,7 @@
         <p:spPr>
           <a:xfrm>
             <a:off x="4846320" y="2404872"/>
-            <a:ext cx="4251960" cy="201168"/>
+            <a:ext cx="3977640" cy="201168"/>
           </a:xfrm>
           <a:prstGeom prst="rect">
             <a:avLst/>
@@ -17344,7 +21099,7 @@
         <p:spPr>
           <a:xfrm>
             <a:off x="4956048" y="2935224"/>
-            <a:ext cx="4050792" cy="530352"/>
+            <a:ext cx="3867912" cy="530352"/>
           </a:xfrm>
           <a:prstGeom prst="rect">
             <a:avLst/>
@@ -17518,7 +21273,7 @@
         <p:spPr>
           <a:xfrm>
             <a:off x="4846320" y="3666744"/>
-            <a:ext cx="4251960" cy="1115568"/>
+            <a:ext cx="3977640" cy="1115568"/>
           </a:xfrm>
           <a:prstGeom prst="rect">
             <a:avLst/>
@@ -17550,7 +21305,7 @@
         <p:spPr>
           <a:xfrm>
             <a:off x="4846320" y="3666744"/>
-            <a:ext cx="4251960" cy="201168"/>
+            <a:ext cx="3977640" cy="201168"/>
           </a:xfrm>
           <a:prstGeom prst="rect">
             <a:avLst/>
@@ -17652,1305 +21407,7 @@
 </p:sld>
 </file>
 
-<file path=ppt/slides/slide2.xml><?xml version="1.0" encoding="utf-8"?>
-<p:sld xmlns:a="http://schemas.openxmlformats.org/drawingml/2006/main" xmlns:r="http://schemas.openxmlformats.org/officeDocument/2006/relationships" xmlns:p="http://schemas.openxmlformats.org/presentationml/2006/main">
-  <p:cSld name="Slide 2">
-    <p:bg>
-      <p:bgPr>
-        <a:solidFill>
-          <a:srgbClr val="F7F9FC"/>
-        </a:solidFill>
-        <a:effectLst/>
-      </p:bgPr>
-    </p:bg>
-    <p:spTree>
-      <p:nvGrpSpPr>
-        <p:cNvPr id="1" name=""/>
-        <p:cNvGrpSpPr/>
-        <p:nvPr/>
-      </p:nvGrpSpPr>
-      <p:grpSpPr>
-        <a:xfrm>
-          <a:off x="0" y="0"/>
-          <a:ext cx="0" cy="0"/>
-          <a:chOff x="0" y="0"/>
-          <a:chExt cx="0" cy="0"/>
-        </a:xfrm>
-      </p:grpSpPr>
-      <p:sp>
-        <p:nvSpPr>
-          <p:cNvPr id="2" name="Shape 0"/>
-          <p:cNvSpPr/>
-          <p:nvPr/>
-        </p:nvSpPr>
-        <p:spPr>
-          <a:xfrm>
-            <a:off x="0" y="0"/>
-            <a:ext cx="164592" cy="5143500"/>
-          </a:xfrm>
-          <a:prstGeom prst="rect">
-            <a:avLst/>
-          </a:prstGeom>
-          <a:solidFill>
-            <a:srgbClr val="1B3A6B"/>
-          </a:solidFill>
-          <a:ln w="12700">
-            <a:solidFill>
-              <a:srgbClr val="1B3A6B"/>
-            </a:solidFill>
-            <a:prstDash val="solid"/>
-          </a:ln>
-        </p:spPr>
-      </p:sp>
-      <p:sp>
-        <p:nvSpPr>
-          <p:cNvPr id="3" name="Text 1"/>
-          <p:cNvSpPr/>
-          <p:nvPr/>
-        </p:nvSpPr>
-        <p:spPr>
-          <a:xfrm>
-            <a:off x="320040" y="201168"/>
-            <a:ext cx="8503920" cy="493776"/>
-          </a:xfrm>
-          <a:prstGeom prst="rect">
-            <a:avLst/>
-          </a:prstGeom>
-          <a:noFill/>
-          <a:ln/>
-        </p:spPr>
-        <p:txBody>
-          <a:bodyPr wrap="square" lIns="0" tIns="0" rIns="0" bIns="0" rtlCol="0" anchor="ctr"/>
-          <a:lstStyle/>
-          <a:p>
-            <a:pPr marL="0" indent="0">
-              <a:buNone/>
-            </a:pPr>
-            <a:r>
-              <a:rPr lang="en-US" sz="2600" b="1" dirty="0">
-                <a:solidFill>
-                  <a:srgbClr val="1B3A6B"/>
-                </a:solidFill>
-                <a:latin typeface="Calibri" pitchFamily="34" charset="0"/>
-                <a:ea typeface="Calibri" pitchFamily="34" charset="-122"/>
-                <a:cs typeface="Calibri" pitchFamily="34" charset="-120"/>
-              </a:rPr>
-              <a:t>Presentation Outline</a:t>
-            </a:r>
-            <a:endParaRPr lang="en-US" sz="2600" dirty="0"/>
-          </a:p>
-        </p:txBody>
-      </p:sp>
-      <p:sp>
-        <p:nvSpPr>
-          <p:cNvPr id="4" name="Shape 2"/>
-          <p:cNvSpPr/>
-          <p:nvPr/>
-        </p:nvSpPr>
-        <p:spPr>
-          <a:xfrm>
-            <a:off x="320040" y="960120"/>
-            <a:ext cx="8503920" cy="36576"/>
-          </a:xfrm>
-          <a:prstGeom prst="rect">
-            <a:avLst/>
-          </a:prstGeom>
-          <a:solidFill>
-            <a:srgbClr val="0D7377"/>
-          </a:solidFill>
-          <a:ln w="12700">
-            <a:solidFill>
-              <a:srgbClr val="0D7377"/>
-            </a:solidFill>
-            <a:prstDash val="solid"/>
-          </a:ln>
-        </p:spPr>
-      </p:sp>
-      <p:sp>
-        <p:nvSpPr>
-          <p:cNvPr id="5" name="Shape 3"/>
-          <p:cNvSpPr/>
-          <p:nvPr/>
-        </p:nvSpPr>
-        <p:spPr>
-          <a:xfrm>
-            <a:off x="320040" y="1115568"/>
-            <a:ext cx="4251960" cy="804672"/>
-          </a:xfrm>
-          <a:prstGeom prst="rect">
-            <a:avLst/>
-          </a:prstGeom>
-          <a:solidFill>
-            <a:srgbClr val="FFFFFF"/>
-          </a:solidFill>
-          <a:ln w="12700">
-            <a:solidFill>
-              <a:srgbClr val="CBD5E1"/>
-            </a:solidFill>
-            <a:prstDash val="solid"/>
-          </a:ln>
-          <a:effectLst>
-            <a:outerShdw blurRad="76200" dist="25400" dir="8100000" algn="bl" rotWithShape="0">
-              <a:srgbClr val="000000">
-                <a:alpha val="8000"/>
-              </a:srgbClr>
-            </a:outerShdw>
-          </a:effectLst>
-        </p:spPr>
-      </p:sp>
-      <p:sp>
-        <p:nvSpPr>
-          <p:cNvPr id="6" name="Shape 4"/>
-          <p:cNvSpPr/>
-          <p:nvPr/>
-        </p:nvSpPr>
-        <p:spPr>
-          <a:xfrm>
-            <a:off x="320040" y="1115568"/>
-            <a:ext cx="502920" cy="804672"/>
-          </a:xfrm>
-          <a:prstGeom prst="rect">
-            <a:avLst/>
-          </a:prstGeom>
-          <a:solidFill>
-            <a:srgbClr val="0D7377"/>
-          </a:solidFill>
-          <a:ln w="12700">
-            <a:solidFill>
-              <a:srgbClr val="0D7377"/>
-            </a:solidFill>
-            <a:prstDash val="solid"/>
-          </a:ln>
-        </p:spPr>
-      </p:sp>
-      <p:sp>
-        <p:nvSpPr>
-          <p:cNvPr id="7" name="Text 5"/>
-          <p:cNvSpPr/>
-          <p:nvPr/>
-        </p:nvSpPr>
-        <p:spPr>
-          <a:xfrm>
-            <a:off x="338328" y="1280160"/>
-            <a:ext cx="475488" cy="457200"/>
-          </a:xfrm>
-          <a:prstGeom prst="rect">
-            <a:avLst/>
-          </a:prstGeom>
-          <a:noFill/>
-          <a:ln/>
-        </p:spPr>
-        <p:txBody>
-          <a:bodyPr wrap="square" lIns="0" tIns="0" rIns="0" bIns="0" rtlCol="0" anchor="ctr"/>
-          <a:lstStyle/>
-          <a:p>
-            <a:pPr marL="0" indent="0" algn="ctr">
-              <a:buNone/>
-            </a:pPr>
-            <a:r>
-              <a:rPr lang="en-US" sz="1800" b="1" dirty="0">
-                <a:solidFill>
-                  <a:srgbClr val="FFFFFF"/>
-                </a:solidFill>
-                <a:latin typeface="Calibri" pitchFamily="34" charset="0"/>
-                <a:ea typeface="Calibri" pitchFamily="34" charset="-122"/>
-                <a:cs typeface="Calibri" pitchFamily="34" charset="-120"/>
-              </a:rPr>
-              <a:t>01</a:t>
-            </a:r>
-            <a:endParaRPr lang="en-US" sz="1800" dirty="0"/>
-          </a:p>
-        </p:txBody>
-      </p:sp>
-      <p:sp>
-        <p:nvSpPr>
-          <p:cNvPr id="8" name="Text 6"/>
-          <p:cNvSpPr/>
-          <p:nvPr/>
-        </p:nvSpPr>
-        <p:spPr>
-          <a:xfrm>
-            <a:off x="886968" y="1188720"/>
-            <a:ext cx="3593592" cy="320040"/>
-          </a:xfrm>
-          <a:prstGeom prst="rect">
-            <a:avLst/>
-          </a:prstGeom>
-          <a:noFill/>
-          <a:ln/>
-        </p:spPr>
-        <p:txBody>
-          <a:bodyPr wrap="square" lIns="0" tIns="0" rIns="0" bIns="0" rtlCol="0" anchor="ctr"/>
-          <a:lstStyle/>
-          <a:p>
-            <a:pPr marL="0" indent="0">
-              <a:buNone/>
-            </a:pPr>
-            <a:r>
-              <a:rPr lang="en-US" b="1" dirty="0">
-                <a:latin typeface="Calibri" pitchFamily="34" charset="0"/>
-                <a:ea typeface="Calibri" pitchFamily="34" charset="-122"/>
-                <a:cs typeface="Calibri" pitchFamily="34" charset="-120"/>
-              </a:rPr>
-              <a:t>Introduction &amp; Background</a:t>
-            </a:r>
-            <a:endParaRPr lang="en-US" dirty="0"/>
-          </a:p>
-        </p:txBody>
-      </p:sp>
-      <p:sp>
-        <p:nvSpPr>
-          <p:cNvPr id="9" name="Text 7"/>
-          <p:cNvSpPr/>
-          <p:nvPr/>
-        </p:nvSpPr>
-        <p:spPr>
-          <a:xfrm>
-            <a:off x="886968" y="1536192"/>
-            <a:ext cx="3593592" cy="310896"/>
-          </a:xfrm>
-          <a:prstGeom prst="rect">
-            <a:avLst/>
-          </a:prstGeom>
-          <a:noFill/>
-          <a:ln/>
-        </p:spPr>
-        <p:txBody>
-          <a:bodyPr wrap="square" lIns="0" tIns="0" rIns="0" bIns="0" rtlCol="0" anchor="ctr"/>
-          <a:lstStyle/>
-          <a:p>
-            <a:pPr marL="0" indent="0">
-              <a:buNone/>
-            </a:pPr>
-            <a:r>
-              <a:rPr lang="en-US" sz="1200" dirty="0">
-                <a:latin typeface="Calibri" pitchFamily="34" charset="0"/>
-                <a:ea typeface="Calibri" pitchFamily="34" charset="-122"/>
-                <a:cs typeface="Calibri" pitchFamily="34" charset="-120"/>
-              </a:rPr>
-              <a:t>Problem context, EV growth, Bangladesh perspective</a:t>
-            </a:r>
-            <a:endParaRPr lang="en-US" sz="1200" dirty="0"/>
-          </a:p>
-        </p:txBody>
-      </p:sp>
-      <p:sp>
-        <p:nvSpPr>
-          <p:cNvPr id="10" name="Shape 8"/>
-          <p:cNvSpPr/>
-          <p:nvPr/>
-        </p:nvSpPr>
-        <p:spPr>
-          <a:xfrm>
-            <a:off x="320040" y="2048256"/>
-            <a:ext cx="4251960" cy="804672"/>
-          </a:xfrm>
-          <a:prstGeom prst="rect">
-            <a:avLst/>
-          </a:prstGeom>
-          <a:solidFill>
-            <a:srgbClr val="FFFFFF"/>
-          </a:solidFill>
-          <a:ln w="12700">
-            <a:solidFill>
-              <a:srgbClr val="CBD5E1"/>
-            </a:solidFill>
-            <a:prstDash val="solid"/>
-          </a:ln>
-          <a:effectLst>
-            <a:outerShdw blurRad="76200" dist="25400" dir="8100000" algn="bl" rotWithShape="0">
-              <a:srgbClr val="000000">
-                <a:alpha val="8000"/>
-              </a:srgbClr>
-            </a:outerShdw>
-          </a:effectLst>
-        </p:spPr>
-      </p:sp>
-      <p:sp>
-        <p:nvSpPr>
-          <p:cNvPr id="11" name="Shape 9"/>
-          <p:cNvSpPr/>
-          <p:nvPr/>
-        </p:nvSpPr>
-        <p:spPr>
-          <a:xfrm>
-            <a:off x="320040" y="2048256"/>
-            <a:ext cx="502920" cy="804672"/>
-          </a:xfrm>
-          <a:prstGeom prst="rect">
-            <a:avLst/>
-          </a:prstGeom>
-          <a:solidFill>
-            <a:srgbClr val="0D7377"/>
-          </a:solidFill>
-          <a:ln w="12700">
-            <a:solidFill>
-              <a:srgbClr val="0D7377"/>
-            </a:solidFill>
-            <a:prstDash val="solid"/>
-          </a:ln>
-        </p:spPr>
-      </p:sp>
-      <p:sp>
-        <p:nvSpPr>
-          <p:cNvPr id="12" name="Text 10"/>
-          <p:cNvSpPr/>
-          <p:nvPr/>
-        </p:nvSpPr>
-        <p:spPr>
-          <a:xfrm>
-            <a:off x="338328" y="2212848"/>
-            <a:ext cx="475488" cy="457200"/>
-          </a:xfrm>
-          <a:prstGeom prst="rect">
-            <a:avLst/>
-          </a:prstGeom>
-          <a:noFill/>
-          <a:ln/>
-        </p:spPr>
-        <p:txBody>
-          <a:bodyPr wrap="square" lIns="0" tIns="0" rIns="0" bIns="0" rtlCol="0" anchor="ctr"/>
-          <a:lstStyle/>
-          <a:p>
-            <a:pPr marL="0" indent="0" algn="ctr">
-              <a:buNone/>
-            </a:pPr>
-            <a:r>
-              <a:rPr lang="en-US" sz="1800" b="1" dirty="0">
-                <a:solidFill>
-                  <a:srgbClr val="FFFFFF"/>
-                </a:solidFill>
-                <a:latin typeface="Calibri" pitchFamily="34" charset="0"/>
-                <a:ea typeface="Calibri" pitchFamily="34" charset="-122"/>
-                <a:cs typeface="Calibri" pitchFamily="34" charset="-120"/>
-              </a:rPr>
-              <a:t>02</a:t>
-            </a:r>
-            <a:endParaRPr lang="en-US" sz="1800" dirty="0"/>
-          </a:p>
-        </p:txBody>
-      </p:sp>
-      <p:sp>
-        <p:nvSpPr>
-          <p:cNvPr id="13" name="Text 11"/>
-          <p:cNvSpPr/>
-          <p:nvPr/>
-        </p:nvSpPr>
-        <p:spPr>
-          <a:xfrm>
-            <a:off x="886968" y="2121408"/>
-            <a:ext cx="3593592" cy="320040"/>
-          </a:xfrm>
-          <a:prstGeom prst="rect">
-            <a:avLst/>
-          </a:prstGeom>
-          <a:noFill/>
-          <a:ln/>
-        </p:spPr>
-        <p:txBody>
-          <a:bodyPr wrap="square" lIns="0" tIns="0" rIns="0" bIns="0" rtlCol="0" anchor="ctr"/>
-          <a:lstStyle/>
-          <a:p>
-            <a:pPr marL="0" indent="0">
-              <a:buNone/>
-            </a:pPr>
-            <a:r>
-              <a:rPr lang="en-US" b="1" dirty="0">
-                <a:latin typeface="Calibri" pitchFamily="34" charset="0"/>
-                <a:ea typeface="Calibri" pitchFamily="34" charset="-122"/>
-                <a:cs typeface="Calibri" pitchFamily="34" charset="-120"/>
-              </a:rPr>
-              <a:t>Problem Statement &amp; Objectives</a:t>
-            </a:r>
-            <a:endParaRPr lang="en-US" dirty="0"/>
-          </a:p>
-        </p:txBody>
-      </p:sp>
-      <p:sp>
-        <p:nvSpPr>
-          <p:cNvPr id="14" name="Text 12"/>
-          <p:cNvSpPr/>
-          <p:nvPr/>
-        </p:nvSpPr>
-        <p:spPr>
-          <a:xfrm>
-            <a:off x="886968" y="2468880"/>
-            <a:ext cx="3593592" cy="310896"/>
-          </a:xfrm>
-          <a:prstGeom prst="rect">
-            <a:avLst/>
-          </a:prstGeom>
-          <a:noFill/>
-          <a:ln/>
-        </p:spPr>
-        <p:txBody>
-          <a:bodyPr wrap="square" lIns="0" tIns="0" rIns="0" bIns="0" rtlCol="0" anchor="ctr"/>
-          <a:lstStyle/>
-          <a:p>
-            <a:pPr marL="0" indent="0">
-              <a:buNone/>
-            </a:pPr>
-            <a:r>
-              <a:rPr lang="en-US" sz="1200" dirty="0">
-                <a:latin typeface="Calibri" pitchFamily="34" charset="0"/>
-                <a:ea typeface="Calibri" pitchFamily="34" charset="-122"/>
-                <a:cs typeface="Calibri" pitchFamily="34" charset="-120"/>
-              </a:rPr>
-              <a:t>Research gap, goals, and research questions</a:t>
-            </a:r>
-            <a:endParaRPr lang="en-US" sz="1200" dirty="0"/>
-          </a:p>
-        </p:txBody>
-      </p:sp>
-      <p:sp>
-        <p:nvSpPr>
-          <p:cNvPr id="15" name="Shape 13"/>
-          <p:cNvSpPr/>
-          <p:nvPr/>
-        </p:nvSpPr>
-        <p:spPr>
-          <a:xfrm>
-            <a:off x="320040" y="2980944"/>
-            <a:ext cx="4251960" cy="804672"/>
-          </a:xfrm>
-          <a:prstGeom prst="rect">
-            <a:avLst/>
-          </a:prstGeom>
-          <a:solidFill>
-            <a:srgbClr val="FFFFFF"/>
-          </a:solidFill>
-          <a:ln w="12700">
-            <a:solidFill>
-              <a:srgbClr val="CBD5E1"/>
-            </a:solidFill>
-            <a:prstDash val="solid"/>
-          </a:ln>
-          <a:effectLst>
-            <a:outerShdw blurRad="76200" dist="25400" dir="8100000" algn="bl" rotWithShape="0">
-              <a:srgbClr val="000000">
-                <a:alpha val="8000"/>
-              </a:srgbClr>
-            </a:outerShdw>
-          </a:effectLst>
-        </p:spPr>
-      </p:sp>
-      <p:sp>
-        <p:nvSpPr>
-          <p:cNvPr id="16" name="Shape 14"/>
-          <p:cNvSpPr/>
-          <p:nvPr/>
-        </p:nvSpPr>
-        <p:spPr>
-          <a:xfrm>
-            <a:off x="320040" y="2980944"/>
-            <a:ext cx="502920" cy="804672"/>
-          </a:xfrm>
-          <a:prstGeom prst="rect">
-            <a:avLst/>
-          </a:prstGeom>
-          <a:solidFill>
-            <a:srgbClr val="0D7377"/>
-          </a:solidFill>
-          <a:ln w="12700">
-            <a:solidFill>
-              <a:srgbClr val="0D7377"/>
-            </a:solidFill>
-            <a:prstDash val="solid"/>
-          </a:ln>
-        </p:spPr>
-      </p:sp>
-      <p:sp>
-        <p:nvSpPr>
-          <p:cNvPr id="17" name="Text 15"/>
-          <p:cNvSpPr/>
-          <p:nvPr/>
-        </p:nvSpPr>
-        <p:spPr>
-          <a:xfrm>
-            <a:off x="338328" y="3145536"/>
-            <a:ext cx="475488" cy="457200"/>
-          </a:xfrm>
-          <a:prstGeom prst="rect">
-            <a:avLst/>
-          </a:prstGeom>
-          <a:noFill/>
-          <a:ln/>
-        </p:spPr>
-        <p:txBody>
-          <a:bodyPr wrap="square" lIns="0" tIns="0" rIns="0" bIns="0" rtlCol="0" anchor="ctr"/>
-          <a:lstStyle/>
-          <a:p>
-            <a:pPr marL="0" indent="0" algn="ctr">
-              <a:buNone/>
-            </a:pPr>
-            <a:r>
-              <a:rPr lang="en-US" sz="1800" b="1" dirty="0">
-                <a:solidFill>
-                  <a:srgbClr val="FFFFFF"/>
-                </a:solidFill>
-                <a:latin typeface="Calibri" pitchFamily="34" charset="0"/>
-                <a:ea typeface="Calibri" pitchFamily="34" charset="-122"/>
-                <a:cs typeface="Calibri" pitchFamily="34" charset="-120"/>
-              </a:rPr>
-              <a:t>03</a:t>
-            </a:r>
-            <a:endParaRPr lang="en-US" sz="1800" dirty="0"/>
-          </a:p>
-        </p:txBody>
-      </p:sp>
-      <p:sp>
-        <p:nvSpPr>
-          <p:cNvPr id="18" name="Text 16"/>
-          <p:cNvSpPr/>
-          <p:nvPr/>
-        </p:nvSpPr>
-        <p:spPr>
-          <a:xfrm>
-            <a:off x="886968" y="3054096"/>
-            <a:ext cx="3593592" cy="320040"/>
-          </a:xfrm>
-          <a:prstGeom prst="rect">
-            <a:avLst/>
-          </a:prstGeom>
-          <a:noFill/>
-          <a:ln/>
-        </p:spPr>
-        <p:txBody>
-          <a:bodyPr wrap="square" lIns="0" tIns="0" rIns="0" bIns="0" rtlCol="0" anchor="ctr"/>
-          <a:lstStyle/>
-          <a:p>
-            <a:pPr marL="0" indent="0">
-              <a:buNone/>
-            </a:pPr>
-            <a:r>
-              <a:rPr lang="en-US" b="1" dirty="0">
-                <a:latin typeface="Calibri" pitchFamily="34" charset="0"/>
-                <a:ea typeface="Calibri" pitchFamily="34" charset="-122"/>
-                <a:cs typeface="Calibri" pitchFamily="34" charset="-120"/>
-              </a:rPr>
-              <a:t>Literature Review</a:t>
-            </a:r>
-            <a:endParaRPr lang="en-US" dirty="0"/>
-          </a:p>
-        </p:txBody>
-      </p:sp>
-      <p:sp>
-        <p:nvSpPr>
-          <p:cNvPr id="19" name="Text 17"/>
-          <p:cNvSpPr/>
-          <p:nvPr/>
-        </p:nvSpPr>
-        <p:spPr>
-          <a:xfrm>
-            <a:off x="886968" y="3401568"/>
-            <a:ext cx="3593592" cy="310896"/>
-          </a:xfrm>
-          <a:prstGeom prst="rect">
-            <a:avLst/>
-          </a:prstGeom>
-          <a:noFill/>
-          <a:ln/>
-        </p:spPr>
-        <p:txBody>
-          <a:bodyPr wrap="square" lIns="0" tIns="0" rIns="0" bIns="0" rtlCol="0" anchor="ctr"/>
-          <a:lstStyle/>
-          <a:p>
-            <a:pPr marL="0" indent="0">
-              <a:buNone/>
-            </a:pPr>
-            <a:r>
-              <a:rPr lang="en-US" sz="1200" dirty="0">
-                <a:latin typeface="Calibri" pitchFamily="34" charset="0"/>
-                <a:ea typeface="Calibri" pitchFamily="34" charset="-122"/>
-                <a:cs typeface="Calibri" pitchFamily="34" charset="-120"/>
-              </a:rPr>
-              <a:t>Prior work in load modeling, ML forecasting, SUMO</a:t>
-            </a:r>
-            <a:endParaRPr lang="en-US" sz="1200" dirty="0"/>
-          </a:p>
-        </p:txBody>
-      </p:sp>
-      <p:sp>
-        <p:nvSpPr>
-          <p:cNvPr id="20" name="Shape 18"/>
-          <p:cNvSpPr/>
-          <p:nvPr/>
-        </p:nvSpPr>
-        <p:spPr>
-          <a:xfrm>
-            <a:off x="320040" y="3913632"/>
-            <a:ext cx="4251960" cy="804672"/>
-          </a:xfrm>
-          <a:prstGeom prst="rect">
-            <a:avLst/>
-          </a:prstGeom>
-          <a:solidFill>
-            <a:srgbClr val="FFFFFF"/>
-          </a:solidFill>
-          <a:ln w="12700">
-            <a:solidFill>
-              <a:srgbClr val="CBD5E1"/>
-            </a:solidFill>
-            <a:prstDash val="solid"/>
-          </a:ln>
-          <a:effectLst>
-            <a:outerShdw blurRad="76200" dist="25400" dir="8100000" algn="bl" rotWithShape="0">
-              <a:srgbClr val="000000">
-                <a:alpha val="8000"/>
-              </a:srgbClr>
-            </a:outerShdw>
-          </a:effectLst>
-        </p:spPr>
-      </p:sp>
-      <p:sp>
-        <p:nvSpPr>
-          <p:cNvPr id="21" name="Shape 19"/>
-          <p:cNvSpPr/>
-          <p:nvPr/>
-        </p:nvSpPr>
-        <p:spPr>
-          <a:xfrm>
-            <a:off x="320040" y="3913632"/>
-            <a:ext cx="502920" cy="804672"/>
-          </a:xfrm>
-          <a:prstGeom prst="rect">
-            <a:avLst/>
-          </a:prstGeom>
-          <a:solidFill>
-            <a:srgbClr val="0D7377"/>
-          </a:solidFill>
-          <a:ln w="12700">
-            <a:solidFill>
-              <a:srgbClr val="0D7377"/>
-            </a:solidFill>
-            <a:prstDash val="solid"/>
-          </a:ln>
-        </p:spPr>
-      </p:sp>
-      <p:sp>
-        <p:nvSpPr>
-          <p:cNvPr id="22" name="Text 20"/>
-          <p:cNvSpPr/>
-          <p:nvPr/>
-        </p:nvSpPr>
-        <p:spPr>
-          <a:xfrm>
-            <a:off x="338328" y="4078224"/>
-            <a:ext cx="475488" cy="457200"/>
-          </a:xfrm>
-          <a:prstGeom prst="rect">
-            <a:avLst/>
-          </a:prstGeom>
-          <a:noFill/>
-          <a:ln/>
-        </p:spPr>
-        <p:txBody>
-          <a:bodyPr wrap="square" lIns="0" tIns="0" rIns="0" bIns="0" rtlCol="0" anchor="ctr"/>
-          <a:lstStyle/>
-          <a:p>
-            <a:pPr marL="0" indent="0" algn="ctr">
-              <a:buNone/>
-            </a:pPr>
-            <a:r>
-              <a:rPr lang="en-US" sz="1800" b="1" dirty="0">
-                <a:solidFill>
-                  <a:srgbClr val="FFFFFF"/>
-                </a:solidFill>
-                <a:latin typeface="Calibri" pitchFamily="34" charset="0"/>
-                <a:ea typeface="Calibri" pitchFamily="34" charset="-122"/>
-                <a:cs typeface="Calibri" pitchFamily="34" charset="-120"/>
-              </a:rPr>
-              <a:t>04</a:t>
-            </a:r>
-            <a:endParaRPr lang="en-US" sz="1800" dirty="0"/>
-          </a:p>
-        </p:txBody>
-      </p:sp>
-      <p:sp>
-        <p:nvSpPr>
-          <p:cNvPr id="23" name="Text 21"/>
-          <p:cNvSpPr/>
-          <p:nvPr/>
-        </p:nvSpPr>
-        <p:spPr>
-          <a:xfrm>
-            <a:off x="886968" y="3986784"/>
-            <a:ext cx="3593592" cy="320040"/>
-          </a:xfrm>
-          <a:prstGeom prst="rect">
-            <a:avLst/>
-          </a:prstGeom>
-          <a:noFill/>
-          <a:ln/>
-        </p:spPr>
-        <p:txBody>
-          <a:bodyPr wrap="square" lIns="0" tIns="0" rIns="0" bIns="0" rtlCol="0" anchor="ctr"/>
-          <a:lstStyle/>
-          <a:p>
-            <a:pPr marL="0" indent="0">
-              <a:buNone/>
-            </a:pPr>
-            <a:r>
-              <a:rPr lang="en-US" b="1" dirty="0">
-                <a:latin typeface="Calibri" pitchFamily="34" charset="0"/>
-                <a:ea typeface="Calibri" pitchFamily="34" charset="-122"/>
-                <a:cs typeface="Calibri" pitchFamily="34" charset="-120"/>
-              </a:rPr>
-              <a:t>Methodology &amp; Simulation Setup</a:t>
-            </a:r>
-            <a:endParaRPr lang="en-US" dirty="0"/>
-          </a:p>
-        </p:txBody>
-      </p:sp>
-      <p:sp>
-        <p:nvSpPr>
-          <p:cNvPr id="24" name="Text 22"/>
-          <p:cNvSpPr/>
-          <p:nvPr/>
-        </p:nvSpPr>
-        <p:spPr>
-          <a:xfrm>
-            <a:off x="886968" y="4334256"/>
-            <a:ext cx="3593592" cy="310896"/>
-          </a:xfrm>
-          <a:prstGeom prst="rect">
-            <a:avLst/>
-          </a:prstGeom>
-          <a:noFill/>
-          <a:ln/>
-        </p:spPr>
-        <p:txBody>
-          <a:bodyPr wrap="square" lIns="0" tIns="0" rIns="0" bIns="0" rtlCol="0" anchor="ctr"/>
-          <a:lstStyle/>
-          <a:p>
-            <a:pPr marL="0" indent="0">
-              <a:buNone/>
-            </a:pPr>
-            <a:r>
-              <a:rPr lang="en-US" sz="1200" dirty="0">
-                <a:latin typeface="Calibri" pitchFamily="34" charset="0"/>
-                <a:ea typeface="Calibri" pitchFamily="34" charset="-122"/>
-                <a:cs typeface="Calibri" pitchFamily="34" charset="-120"/>
-              </a:rPr>
-              <a:t>SUMO environment, road network, charging stations</a:t>
-            </a:r>
-            <a:endParaRPr lang="en-US" sz="1200" dirty="0"/>
-          </a:p>
-        </p:txBody>
-      </p:sp>
-      <p:sp>
-        <p:nvSpPr>
-          <p:cNvPr id="25" name="Shape 23"/>
-          <p:cNvSpPr/>
-          <p:nvPr/>
-        </p:nvSpPr>
-        <p:spPr>
-          <a:xfrm>
-            <a:off x="4800600" y="1115568"/>
-            <a:ext cx="4023360" cy="804672"/>
-          </a:xfrm>
-          <a:prstGeom prst="rect">
-            <a:avLst/>
-          </a:prstGeom>
-          <a:solidFill>
-            <a:srgbClr val="FFFFFF"/>
-          </a:solidFill>
-          <a:ln w="12700">
-            <a:solidFill>
-              <a:srgbClr val="CBD5E1"/>
-            </a:solidFill>
-            <a:prstDash val="solid"/>
-          </a:ln>
-          <a:effectLst>
-            <a:outerShdw blurRad="76200" dist="25400" dir="8100000" algn="bl" rotWithShape="0">
-              <a:srgbClr val="000000">
-                <a:alpha val="8000"/>
-              </a:srgbClr>
-            </a:outerShdw>
-          </a:effectLst>
-        </p:spPr>
-      </p:sp>
-      <p:sp>
-        <p:nvSpPr>
-          <p:cNvPr id="26" name="Shape 24"/>
-          <p:cNvSpPr/>
-          <p:nvPr/>
-        </p:nvSpPr>
-        <p:spPr>
-          <a:xfrm>
-            <a:off x="4800600" y="1115568"/>
-            <a:ext cx="502920" cy="804672"/>
-          </a:xfrm>
-          <a:prstGeom prst="rect">
-            <a:avLst/>
-          </a:prstGeom>
-          <a:solidFill>
-            <a:srgbClr val="0D7377"/>
-          </a:solidFill>
-          <a:ln w="12700">
-            <a:solidFill>
-              <a:srgbClr val="0D7377"/>
-            </a:solidFill>
-            <a:prstDash val="solid"/>
-          </a:ln>
-        </p:spPr>
-      </p:sp>
-      <p:sp>
-        <p:nvSpPr>
-          <p:cNvPr id="27" name="Text 25"/>
-          <p:cNvSpPr/>
-          <p:nvPr/>
-        </p:nvSpPr>
-        <p:spPr>
-          <a:xfrm>
-            <a:off x="4818888" y="1280160"/>
-            <a:ext cx="475488" cy="457200"/>
-          </a:xfrm>
-          <a:prstGeom prst="rect">
-            <a:avLst/>
-          </a:prstGeom>
-          <a:noFill/>
-          <a:ln/>
-        </p:spPr>
-        <p:txBody>
-          <a:bodyPr wrap="square" lIns="0" tIns="0" rIns="0" bIns="0" rtlCol="0" anchor="ctr"/>
-          <a:lstStyle/>
-          <a:p>
-            <a:pPr marL="0" indent="0" algn="ctr">
-              <a:buNone/>
-            </a:pPr>
-            <a:r>
-              <a:rPr lang="en-US" sz="1800" b="1" dirty="0">
-                <a:solidFill>
-                  <a:srgbClr val="FFFFFF"/>
-                </a:solidFill>
-                <a:latin typeface="Calibri" pitchFamily="34" charset="0"/>
-                <a:ea typeface="Calibri" pitchFamily="34" charset="-122"/>
-                <a:cs typeface="Calibri" pitchFamily="34" charset="-120"/>
-              </a:rPr>
-              <a:t>05</a:t>
-            </a:r>
-            <a:endParaRPr lang="en-US" sz="1800" dirty="0"/>
-          </a:p>
-        </p:txBody>
-      </p:sp>
-      <p:sp>
-        <p:nvSpPr>
-          <p:cNvPr id="28" name="Text 26"/>
-          <p:cNvSpPr/>
-          <p:nvPr/>
-        </p:nvSpPr>
-        <p:spPr>
-          <a:xfrm>
-            <a:off x="5367528" y="1188720"/>
-            <a:ext cx="3593592" cy="320040"/>
-          </a:xfrm>
-          <a:prstGeom prst="rect">
-            <a:avLst/>
-          </a:prstGeom>
-          <a:noFill/>
-          <a:ln/>
-        </p:spPr>
-        <p:txBody>
-          <a:bodyPr wrap="square" lIns="0" tIns="0" rIns="0" bIns="0" rtlCol="0" anchor="ctr"/>
-          <a:lstStyle/>
-          <a:p>
-            <a:pPr marL="0" indent="0">
-              <a:buNone/>
-            </a:pPr>
-            <a:r>
-              <a:rPr lang="en-US" b="1" dirty="0">
-                <a:latin typeface="Calibri" pitchFamily="34" charset="0"/>
-                <a:ea typeface="Calibri" pitchFamily="34" charset="-122"/>
-                <a:cs typeface="Calibri" pitchFamily="34" charset="-120"/>
-              </a:rPr>
-              <a:t>Dataset &amp; Feature Analysis</a:t>
-            </a:r>
-            <a:endParaRPr lang="en-US" dirty="0"/>
-          </a:p>
-        </p:txBody>
-      </p:sp>
-      <p:sp>
-        <p:nvSpPr>
-          <p:cNvPr id="29" name="Text 27"/>
-          <p:cNvSpPr/>
-          <p:nvPr/>
-        </p:nvSpPr>
-        <p:spPr>
-          <a:xfrm>
-            <a:off x="5367528" y="1536192"/>
-            <a:ext cx="3593592" cy="310896"/>
-          </a:xfrm>
-          <a:prstGeom prst="rect">
-            <a:avLst/>
-          </a:prstGeom>
-          <a:noFill/>
-          <a:ln/>
-        </p:spPr>
-        <p:txBody>
-          <a:bodyPr wrap="square" lIns="0" tIns="0" rIns="0" bIns="0" rtlCol="0" anchor="ctr"/>
-          <a:lstStyle/>
-          <a:p>
-            <a:pPr marL="0" indent="0">
-              <a:buNone/>
-            </a:pPr>
-            <a:r>
-              <a:rPr lang="en-US" sz="1200" dirty="0">
-                <a:latin typeface="Calibri" pitchFamily="34" charset="0"/>
-                <a:ea typeface="Calibri" pitchFamily="34" charset="-122"/>
-                <a:cs typeface="Calibri" pitchFamily="34" charset="-120"/>
-              </a:rPr>
-              <a:t>Generated dataset, correlation, feature importance</a:t>
-            </a:r>
-            <a:endParaRPr lang="en-US" sz="1200" dirty="0"/>
-          </a:p>
-        </p:txBody>
-      </p:sp>
-      <p:sp>
-        <p:nvSpPr>
-          <p:cNvPr id="30" name="Shape 28"/>
-          <p:cNvSpPr/>
-          <p:nvPr/>
-        </p:nvSpPr>
-        <p:spPr>
-          <a:xfrm>
-            <a:off x="4800600" y="2048256"/>
-            <a:ext cx="4023360" cy="804672"/>
-          </a:xfrm>
-          <a:prstGeom prst="rect">
-            <a:avLst/>
-          </a:prstGeom>
-          <a:solidFill>
-            <a:srgbClr val="FFFFFF"/>
-          </a:solidFill>
-          <a:ln w="12700">
-            <a:solidFill>
-              <a:srgbClr val="CBD5E1"/>
-            </a:solidFill>
-            <a:prstDash val="solid"/>
-          </a:ln>
-          <a:effectLst>
-            <a:outerShdw blurRad="76200" dist="25400" dir="8100000" algn="bl" rotWithShape="0">
-              <a:srgbClr val="000000">
-                <a:alpha val="8000"/>
-              </a:srgbClr>
-            </a:outerShdw>
-          </a:effectLst>
-        </p:spPr>
-      </p:sp>
-      <p:sp>
-        <p:nvSpPr>
-          <p:cNvPr id="31" name="Shape 29"/>
-          <p:cNvSpPr/>
-          <p:nvPr/>
-        </p:nvSpPr>
-        <p:spPr>
-          <a:xfrm>
-            <a:off x="4800600" y="2048256"/>
-            <a:ext cx="502920" cy="804672"/>
-          </a:xfrm>
-          <a:prstGeom prst="rect">
-            <a:avLst/>
-          </a:prstGeom>
-          <a:solidFill>
-            <a:srgbClr val="0D7377"/>
-          </a:solidFill>
-          <a:ln w="12700">
-            <a:solidFill>
-              <a:srgbClr val="0D7377"/>
-            </a:solidFill>
-            <a:prstDash val="solid"/>
-          </a:ln>
-        </p:spPr>
-      </p:sp>
-      <p:sp>
-        <p:nvSpPr>
-          <p:cNvPr id="32" name="Text 30"/>
-          <p:cNvSpPr/>
-          <p:nvPr/>
-        </p:nvSpPr>
-        <p:spPr>
-          <a:xfrm>
-            <a:off x="4818888" y="2212848"/>
-            <a:ext cx="475488" cy="457200"/>
-          </a:xfrm>
-          <a:prstGeom prst="rect">
-            <a:avLst/>
-          </a:prstGeom>
-          <a:noFill/>
-          <a:ln/>
-        </p:spPr>
-        <p:txBody>
-          <a:bodyPr wrap="square" lIns="0" tIns="0" rIns="0" bIns="0" rtlCol="0" anchor="ctr"/>
-          <a:lstStyle/>
-          <a:p>
-            <a:pPr marL="0" indent="0" algn="ctr">
-              <a:buNone/>
-            </a:pPr>
-            <a:r>
-              <a:rPr lang="en-US" sz="1800" b="1" dirty="0">
-                <a:solidFill>
-                  <a:srgbClr val="FFFFFF"/>
-                </a:solidFill>
-                <a:latin typeface="Calibri" pitchFamily="34" charset="0"/>
-                <a:ea typeface="Calibri" pitchFamily="34" charset="-122"/>
-                <a:cs typeface="Calibri" pitchFamily="34" charset="-120"/>
-              </a:rPr>
-              <a:t>06</a:t>
-            </a:r>
-            <a:endParaRPr lang="en-US" sz="1800" dirty="0"/>
-          </a:p>
-        </p:txBody>
-      </p:sp>
-      <p:sp>
-        <p:nvSpPr>
-          <p:cNvPr id="33" name="Text 31"/>
-          <p:cNvSpPr/>
-          <p:nvPr/>
-        </p:nvSpPr>
-        <p:spPr>
-          <a:xfrm>
-            <a:off x="5367528" y="2121408"/>
-            <a:ext cx="3593592" cy="320040"/>
-          </a:xfrm>
-          <a:prstGeom prst="rect">
-            <a:avLst/>
-          </a:prstGeom>
-          <a:noFill/>
-          <a:ln/>
-        </p:spPr>
-        <p:txBody>
-          <a:bodyPr wrap="square" lIns="0" tIns="0" rIns="0" bIns="0" rtlCol="0" anchor="ctr"/>
-          <a:lstStyle/>
-          <a:p>
-            <a:pPr marL="0" indent="0">
-              <a:buNone/>
-            </a:pPr>
-            <a:r>
-              <a:rPr lang="en-US" b="1" dirty="0">
-                <a:latin typeface="Calibri" pitchFamily="34" charset="0"/>
-                <a:ea typeface="Calibri" pitchFamily="34" charset="-122"/>
-                <a:cs typeface="Calibri" pitchFamily="34" charset="-120"/>
-              </a:rPr>
-              <a:t>ML Models &amp; Results</a:t>
-            </a:r>
-            <a:endParaRPr lang="en-US" dirty="0"/>
-          </a:p>
-        </p:txBody>
-      </p:sp>
-      <p:sp>
-        <p:nvSpPr>
-          <p:cNvPr id="34" name="Text 32"/>
-          <p:cNvSpPr/>
-          <p:nvPr/>
-        </p:nvSpPr>
-        <p:spPr>
-          <a:xfrm>
-            <a:off x="5367528" y="2468880"/>
-            <a:ext cx="3593592" cy="310896"/>
-          </a:xfrm>
-          <a:prstGeom prst="rect">
-            <a:avLst/>
-          </a:prstGeom>
-          <a:noFill/>
-          <a:ln/>
-        </p:spPr>
-        <p:txBody>
-          <a:bodyPr wrap="square" lIns="0" tIns="0" rIns="0" bIns="0" rtlCol="0" anchor="ctr"/>
-          <a:lstStyle/>
-          <a:p>
-            <a:pPr marL="0" indent="0">
-              <a:buNone/>
-            </a:pPr>
-            <a:r>
-              <a:rPr lang="en-US" sz="1200" dirty="0">
-                <a:latin typeface="Calibri" pitchFamily="34" charset="0"/>
-                <a:ea typeface="Calibri" pitchFamily="34" charset="-122"/>
-                <a:cs typeface="Calibri" pitchFamily="34" charset="-120"/>
-              </a:rPr>
-              <a:t>Seven models evaluated, comparative analysis</a:t>
-            </a:r>
-            <a:endParaRPr lang="en-US" sz="1200" dirty="0"/>
-          </a:p>
-        </p:txBody>
-      </p:sp>
-      <p:sp>
-        <p:nvSpPr>
-          <p:cNvPr id="35" name="Shape 33"/>
-          <p:cNvSpPr/>
-          <p:nvPr/>
-        </p:nvSpPr>
-        <p:spPr>
-          <a:xfrm>
-            <a:off x="4800600" y="2980944"/>
-            <a:ext cx="4023360" cy="804672"/>
-          </a:xfrm>
-          <a:prstGeom prst="rect">
-            <a:avLst/>
-          </a:prstGeom>
-          <a:solidFill>
-            <a:srgbClr val="FFFFFF"/>
-          </a:solidFill>
-          <a:ln w="12700">
-            <a:solidFill>
-              <a:srgbClr val="CBD5E1"/>
-            </a:solidFill>
-            <a:prstDash val="solid"/>
-          </a:ln>
-          <a:effectLst>
-            <a:outerShdw blurRad="76200" dist="25400" dir="8100000" algn="bl" rotWithShape="0">
-              <a:srgbClr val="000000">
-                <a:alpha val="8000"/>
-              </a:srgbClr>
-            </a:outerShdw>
-          </a:effectLst>
-        </p:spPr>
-      </p:sp>
-      <p:sp>
-        <p:nvSpPr>
-          <p:cNvPr id="36" name="Shape 34"/>
-          <p:cNvSpPr/>
-          <p:nvPr/>
-        </p:nvSpPr>
-        <p:spPr>
-          <a:xfrm>
-            <a:off x="4800600" y="2980944"/>
-            <a:ext cx="502920" cy="804672"/>
-          </a:xfrm>
-          <a:prstGeom prst="rect">
-            <a:avLst/>
-          </a:prstGeom>
-          <a:solidFill>
-            <a:srgbClr val="0D7377"/>
-          </a:solidFill>
-          <a:ln w="12700">
-            <a:solidFill>
-              <a:srgbClr val="0D7377"/>
-            </a:solidFill>
-            <a:prstDash val="solid"/>
-          </a:ln>
-        </p:spPr>
-      </p:sp>
-      <p:sp>
-        <p:nvSpPr>
-          <p:cNvPr id="37" name="Text 35"/>
-          <p:cNvSpPr/>
-          <p:nvPr/>
-        </p:nvSpPr>
-        <p:spPr>
-          <a:xfrm>
-            <a:off x="4818888" y="3145536"/>
-            <a:ext cx="475488" cy="457200"/>
-          </a:xfrm>
-          <a:prstGeom prst="rect">
-            <a:avLst/>
-          </a:prstGeom>
-          <a:noFill/>
-          <a:ln/>
-        </p:spPr>
-        <p:txBody>
-          <a:bodyPr wrap="square" lIns="0" tIns="0" rIns="0" bIns="0" rtlCol="0" anchor="ctr"/>
-          <a:lstStyle/>
-          <a:p>
-            <a:pPr marL="0" indent="0" algn="ctr">
-              <a:buNone/>
-            </a:pPr>
-            <a:r>
-              <a:rPr lang="en-US" sz="1800" b="1" dirty="0">
-                <a:solidFill>
-                  <a:srgbClr val="FFFFFF"/>
-                </a:solidFill>
-                <a:latin typeface="Calibri" pitchFamily="34" charset="0"/>
-                <a:ea typeface="Calibri" pitchFamily="34" charset="-122"/>
-                <a:cs typeface="Calibri" pitchFamily="34" charset="-120"/>
-              </a:rPr>
-              <a:t>07</a:t>
-            </a:r>
-            <a:endParaRPr lang="en-US" sz="1800" dirty="0"/>
-          </a:p>
-        </p:txBody>
-      </p:sp>
-      <p:sp>
-        <p:nvSpPr>
-          <p:cNvPr id="38" name="Text 36"/>
-          <p:cNvSpPr/>
-          <p:nvPr/>
-        </p:nvSpPr>
-        <p:spPr>
-          <a:xfrm>
-            <a:off x="5367528" y="3054096"/>
-            <a:ext cx="3593592" cy="320040"/>
-          </a:xfrm>
-          <a:prstGeom prst="rect">
-            <a:avLst/>
-          </a:prstGeom>
-          <a:noFill/>
-          <a:ln/>
-        </p:spPr>
-        <p:txBody>
-          <a:bodyPr wrap="square" lIns="0" tIns="0" rIns="0" bIns="0" rtlCol="0" anchor="ctr"/>
-          <a:lstStyle/>
-          <a:p>
-            <a:pPr marL="0" indent="0">
-              <a:buNone/>
-            </a:pPr>
-            <a:r>
-              <a:rPr lang="en-US" b="1" dirty="0">
-                <a:latin typeface="Calibri" pitchFamily="34" charset="0"/>
-                <a:ea typeface="Calibri" pitchFamily="34" charset="-122"/>
-                <a:cs typeface="Calibri" pitchFamily="34" charset="-120"/>
-              </a:rPr>
-              <a:t>Implications &amp; Conclusion</a:t>
-            </a:r>
-            <a:endParaRPr lang="en-US" dirty="0"/>
-          </a:p>
-        </p:txBody>
-      </p:sp>
-      <p:sp>
-        <p:nvSpPr>
-          <p:cNvPr id="39" name="Text 37"/>
-          <p:cNvSpPr/>
-          <p:nvPr/>
-        </p:nvSpPr>
-        <p:spPr>
-          <a:xfrm>
-            <a:off x="5367528" y="3401568"/>
-            <a:ext cx="3593592" cy="310896"/>
-          </a:xfrm>
-          <a:prstGeom prst="rect">
-            <a:avLst/>
-          </a:prstGeom>
-          <a:noFill/>
-          <a:ln/>
-        </p:spPr>
-        <p:txBody>
-          <a:bodyPr wrap="square" lIns="0" tIns="0" rIns="0" bIns="0" rtlCol="0" anchor="ctr"/>
-          <a:lstStyle/>
-          <a:p>
-            <a:pPr marL="0" indent="0">
-              <a:buNone/>
-            </a:pPr>
-            <a:r>
-              <a:rPr lang="en-US" sz="1200" dirty="0">
-                <a:latin typeface="Calibri" pitchFamily="34" charset="0"/>
-                <a:ea typeface="Calibri" pitchFamily="34" charset="-122"/>
-                <a:cs typeface="Calibri" pitchFamily="34" charset="-120"/>
-              </a:rPr>
-              <a:t>Key findings, limitations, future work</a:t>
-            </a:r>
-            <a:endParaRPr lang="en-US" sz="1200" dirty="0"/>
-          </a:p>
-        </p:txBody>
-      </p:sp>
-    </p:spTree>
-  </p:cSld>
-  <p:clrMapOvr>
-    <a:masterClrMapping/>
-  </p:clrMapOvr>
-</p:sld>
-</file>
-
-<file path=ppt/slides/slide20.xml><?xml version="1.0" encoding="utf-8"?>
+<file path=ppt/slides/slide25.xml><?xml version="1.0" encoding="utf-8"?>
 <p:sld xmlns:a="http://schemas.openxmlformats.org/drawingml/2006/main" xmlns:r="http://schemas.openxmlformats.org/officeDocument/2006/relationships" xmlns:p="http://schemas.openxmlformats.org/presentationml/2006/main">
   <p:cSld name="Slide 15">
     <p:bg>
@@ -20229,7 +22686,7 @@
 </p:sld>
 </file>
 
-<file path=ppt/slides/slide21.xml><?xml version="1.0" encoding="utf-8"?>
+<file path=ppt/slides/slide26.xml><?xml version="1.0" encoding="utf-8"?>
 <p:sld xmlns:a="http://schemas.openxmlformats.org/drawingml/2006/main" xmlns:r="http://schemas.openxmlformats.org/officeDocument/2006/relationships" xmlns:p="http://schemas.openxmlformats.org/presentationml/2006/main">
   <p:cSld>
     <p:spTree>
@@ -20504,12 +22961,20 @@
               <a:buNone/>
             </a:pPr>
             <a:r>
+              <a:rPr lang="en-US" sz="1400">
+                <a:latin typeface="Calibri" pitchFamily="34" charset="0"/>
+                <a:ea typeface="Calibri" pitchFamily="34" charset="-122"/>
+                <a:cs typeface="Calibri" pitchFamily="34" charset="-120"/>
+              </a:rPr>
+              <a:t>ANN achieved </a:t>
+            </a:r>
+            <a:r>
               <a:rPr lang="en-US" sz="1400" dirty="0">
                 <a:latin typeface="Calibri" pitchFamily="34" charset="0"/>
                 <a:ea typeface="Calibri" pitchFamily="34" charset="-122"/>
                 <a:cs typeface="Calibri" pitchFamily="34" charset="-120"/>
               </a:rPr>
-              <a:t>ANN (MLP) achieved the highest precision: R²=0.9967, MAE=19.2 kW, Accuracy=95.28%, F1=0.9234.</a:t>
+              <a:t>the highest precision: R²=0.9967, MAE=19.2 kW, Accuracy=95.28%, F1=0.9234.</a:t>
             </a:r>
             <a:endParaRPr lang="en-US" sz="1400" dirty="0"/>
           </a:p>
@@ -20736,7 +23201,7 @@
 </p:sld>
 </file>
 
-<file path=ppt/slides/slide22.xml><?xml version="1.0" encoding="utf-8"?>
+<file path=ppt/slides/slide27.xml><?xml version="1.0" encoding="utf-8"?>
 <p:sld xmlns:a="http://schemas.openxmlformats.org/drawingml/2006/main" xmlns:r="http://schemas.openxmlformats.org/officeDocument/2006/relationships" xmlns:p="http://schemas.openxmlformats.org/presentationml/2006/main">
   <p:cSld name="Slide 17">
     <p:bg>

--- a/Thesis-Defense/defense/200112_Defense_Presentation.pptx
+++ b/Thesis-Defense/defense/200112_Defense_Presentation.pptx
@@ -29052,7 +29052,7 @@
         </p:nvSpPr>
         <p:spPr>
           <a:xfrm>
-            <a:off x="5586984" y="1115568"/>
+            <a:off x="5596509" y="1115568"/>
             <a:ext cx="1920240" cy="1143000"/>
           </a:xfrm>
           <a:prstGeom prst="rect">
@@ -29187,7 +29187,7 @@
         </p:nvSpPr>
         <p:spPr>
           <a:xfrm>
-            <a:off x="7342632" y="1115568"/>
+            <a:off x="7352157" y="1115568"/>
             <a:ext cx="1481328" cy="1143000"/>
           </a:xfrm>
           <a:prstGeom prst="rect">
@@ -29219,8 +29219,8 @@
         </p:nvSpPr>
         <p:spPr>
           <a:xfrm>
-            <a:off x="7342632" y="1115568"/>
-            <a:ext cx="1453896" cy="201168"/>
+            <a:off x="7352157" y="1115568"/>
+            <a:ext cx="1481328" cy="201168"/>
           </a:xfrm>
           <a:prstGeom prst="rect">
             <a:avLst/>
